--- a/office-hub-concept.pptx
+++ b/office-hub-concept.pptx
@@ -15,9 +15,10 @@
     <p:sldId id="263" r:id="rId9"/>
     <p:sldId id="264" r:id="rId10"/>
     <p:sldId id="265" r:id="rId11"/>
+    <p:sldId id="266" r:id="rId12"/>
   </p:sldIdLst>
   <p:notesMasterIdLst>
-    <p:notesMasterId r:id="rId12"/>
+    <p:notesMasterId r:id="rId13"/>
   </p:notesMasterIdLst>
   <p:sldSz cx="12192000" cy="6858000"/>
   <p:notesSz cx="6858000" cy="12192000"/>
@@ -623,6 +624,94 @@
             <a:fld id="{F7021451-1387-4CA6-816F-3879F97B5CBC}" type="slidenum">
               <a:rPr lang="en-US"/>
               <a:t>10</a:t>
+            </a:fld>
+            <a:endParaRPr lang="en-US"/>
+          </a:p>
+        </p:txBody>
+      </p:sp>
+    </p:spTree>
+    <p:extLst>
+      <p:ext uri="{BB962C8B-B14F-4D97-AF65-F5344CB8AC3E}">
+        <p14:creationId xmlns:p14="http://schemas.microsoft.com/office/powerpoint/2010/main" val="1024086991"/>
+      </p:ext>
+    </p:extLst>
+  </p:cSld>
+  <p:clrMapOvr>
+    <a:masterClrMapping/>
+  </p:clrMapOvr>
+</p:notes>
+</file>
+
+<file path=ppt/notesSlides/notesSlide11.xml><?xml version="1.0" encoding="utf-8"?>
+<p:notes xmlns:a="http://schemas.openxmlformats.org/drawingml/2006/main" xmlns:r="http://schemas.openxmlformats.org/officeDocument/2006/relationships" xmlns:p="http://schemas.openxmlformats.org/presentationml/2006/main">
+  <p:cSld>
+    <p:spTree>
+      <p:nvGrpSpPr>
+        <p:cNvPr id="1" name=""/>
+        <p:cNvGrpSpPr/>
+        <p:nvPr/>
+      </p:nvGrpSpPr>
+      <p:grpSpPr>
+        <a:xfrm>
+          <a:off x="0" y="0"/>
+          <a:ext cx="0" cy="0"/>
+          <a:chOff x="0" y="0"/>
+          <a:chExt cx="0" cy="0"/>
+        </a:xfrm>
+      </p:grpSpPr>
+      <p:sp>
+        <p:nvSpPr>
+          <p:cNvPr id="2" name="Slide Image Placeholder 1"/>
+          <p:cNvSpPr>
+            <a:spLocks noGrp="1" noRot="1" noChangeAspect="1"/>
+          </p:cNvSpPr>
+          <p:nvPr>
+            <p:ph type="sldImg"/>
+          </p:nvPr>
+        </p:nvSpPr>
+        <p:spPr/>
+      </p:sp>
+      <p:sp>
+        <p:nvSpPr>
+          <p:cNvPr id="3" name="Notes Placeholder 2"/>
+          <p:cNvSpPr>
+            <a:spLocks noGrp="1"/>
+          </p:cNvSpPr>
+          <p:nvPr>
+            <p:ph type="body" idx="1"/>
+          </p:nvPr>
+        </p:nvSpPr>
+        <p:spPr/>
+        <p:txBody>
+          <a:bodyPr/>
+          <a:lstStyle/>
+          <a:p>
+            <a:r>
+              <a:rPr lang="en-US" dirty="0"/>
+              <a:t/>
+            </a:r>
+            <a:endParaRPr lang="en-US" dirty="0"/>
+          </a:p>
+        </p:txBody>
+      </p:sp>
+      <p:sp>
+        <p:nvSpPr>
+          <p:cNvPr id="4" name="Slide Number Placeholder 3"/>
+          <p:cNvSpPr>
+            <a:spLocks noGrp="1"/>
+          </p:cNvSpPr>
+          <p:nvPr>
+            <p:ph type="sldNum" sz="quarter" idx="10"/>
+          </p:nvPr>
+        </p:nvSpPr>
+        <p:spPr/>
+        <p:txBody>
+          <a:bodyPr/>
+          <a:lstStyle/>
+          <a:p>
+            <a:fld id="{F7021451-1387-4CA6-816F-3879F97B5CBC}" type="slidenum">
+              <a:rPr lang="en-US"/>
+              <a:t>11</a:t>
             </a:fld>
             <a:endParaRPr lang="en-US"/>
           </a:p>
@@ -4173,6 +4262,1110 @@
 </p:sld>
 </file>
 
+<file path=ppt/slides/slide11.xml><?xml version="1.0" encoding="utf-8"?>
+<p:sld xmlns:a="http://schemas.openxmlformats.org/drawingml/2006/main" xmlns:r="http://schemas.openxmlformats.org/officeDocument/2006/relationships" xmlns:p="http://schemas.openxmlformats.org/presentationml/2006/main">
+  <p:cSld name="Slide 11">
+    <p:bg>
+      <p:bgPr>
+        <a:solidFill>
+          <a:srgbClr val="12233A"/>
+        </a:solidFill>
+      </p:bgPr>
+    </p:bg>
+    <p:spTree>
+      <p:nvGrpSpPr>
+        <p:cNvPr id="1" name=""/>
+        <p:cNvGrpSpPr/>
+        <p:nvPr/>
+      </p:nvGrpSpPr>
+      <p:grpSpPr>
+        <a:xfrm>
+          <a:off x="0" y="0"/>
+          <a:ext cx="0" cy="0"/>
+          <a:chOff x="0" y="0"/>
+          <a:chExt cx="0" cy="0"/>
+        </a:xfrm>
+      </p:grpSpPr>
+      <p:sp>
+        <p:nvSpPr>
+          <p:cNvPr id="2" name="Text 0"/>
+          <p:cNvSpPr txBox="1"/>
+          <p:nvPr/>
+        </p:nvSpPr>
+        <p:spPr>
+          <a:xfrm>
+            <a:off x="822960" y="502920"/>
+            <a:ext cx="7315200" cy="274320"/>
+          </a:xfrm>
+          <a:prstGeom prst="rect">
+            <a:avLst/>
+          </a:prstGeom>
+          <a:noFill/>
+          <a:ln/>
+        </p:spPr>
+        <p:txBody>
+          <a:bodyPr wrap="square" lIns="0" tIns="0" rIns="0" bIns="0" rtlCol="0" anchor="ctr"/>
+          <a:lstStyle/>
+          <a:p>
+            <a:pPr indent="0" marL="0">
+              <a:buNone/>
+            </a:pPr>
+            <a:r>
+              <a:rPr lang="en-US" sz="1100" spc="200" kern="0" dirty="0">
+                <a:solidFill>
+                  <a:srgbClr val="7FA0BE"/>
+                </a:solidFill>
+                <a:latin typeface="Courier New" pitchFamily="34" charset="0"/>
+                <a:ea typeface="Courier New" pitchFamily="34" charset="-122"/>
+                <a:cs typeface="Courier New" pitchFamily="34" charset="-120"/>
+              </a:rPr>
+              <a:t>SAMPLE</a:t>
+            </a:r>
+            <a:endParaRPr lang="en-US" sz="1100" dirty="0"/>
+          </a:p>
+        </p:txBody>
+      </p:sp>
+      <p:sp>
+        <p:nvSpPr>
+          <p:cNvPr id="3" name="Text 1"/>
+          <p:cNvSpPr txBox="1"/>
+          <p:nvPr/>
+        </p:nvSpPr>
+        <p:spPr>
+          <a:xfrm>
+            <a:off x="777240" y="777240"/>
+            <a:ext cx="10515600" cy="640080"/>
+          </a:xfrm>
+          <a:prstGeom prst="rect">
+            <a:avLst/>
+          </a:prstGeom>
+          <a:noFill/>
+          <a:ln/>
+        </p:spPr>
+        <p:txBody>
+          <a:bodyPr wrap="square" lIns="0" tIns="0" rIns="0" bIns="0" rtlCol="0" anchor="ctr"/>
+          <a:lstStyle/>
+          <a:p>
+            <a:pPr indent="0" marL="0">
+              <a:buNone/>
+            </a:pPr>
+            <a:r>
+              <a:rPr lang="en-US" sz="3000" b="1" dirty="0">
+                <a:solidFill>
+                  <a:srgbClr val="F4F6F7"/>
+                </a:solidFill>
+                <a:latin typeface="Arial" pitchFamily="34" charset="0"/>
+                <a:ea typeface="Arial" pitchFamily="34" charset="-122"/>
+                <a:cs typeface="Arial" pitchFamily="34" charset="-120"/>
+              </a:rPr>
+              <a:t>Office Hub — Folder Structure</a:t>
+            </a:r>
+            <a:endParaRPr lang="en-US" sz="3000" dirty="0"/>
+          </a:p>
+        </p:txBody>
+      </p:sp>
+      <p:sp>
+        <p:nvSpPr>
+          <p:cNvPr id="4" name="Text 2"/>
+          <p:cNvSpPr txBox="1"/>
+          <p:nvPr/>
+        </p:nvSpPr>
+        <p:spPr>
+          <a:xfrm>
+            <a:off x="822960" y="1298448"/>
+            <a:ext cx="10058400" cy="365760"/>
+          </a:xfrm>
+          <a:prstGeom prst="rect">
+            <a:avLst/>
+          </a:prstGeom>
+          <a:noFill/>
+          <a:ln/>
+        </p:spPr>
+        <p:txBody>
+          <a:bodyPr wrap="square" lIns="0" tIns="0" rIns="0" bIns="0" rtlCol="0" anchor="ctr"/>
+          <a:lstStyle/>
+          <a:p>
+            <a:pPr indent="0" marL="0">
+              <a:buNone/>
+            </a:pPr>
+            <a:r>
+              <a:rPr lang="en-US" sz="1200" dirty="0">
+                <a:solidFill>
+                  <a:srgbClr val="C7D6E2"/>
+                </a:solidFill>
+                <a:latin typeface="Calibri" pitchFamily="34" charset="0"/>
+                <a:ea typeface="Calibri" pitchFamily="34" charset="-122"/>
+                <a:cs typeface="Calibri" pitchFamily="34" charset="-120"/>
+              </a:rPr>
+              <a:t>Drive folders that drive every auto-updating page — upload a file here, it shows up on the site. No page edit needed.</a:t>
+            </a:r>
+            <a:endParaRPr lang="en-US" sz="1200" dirty="0"/>
+          </a:p>
+        </p:txBody>
+      </p:sp>
+      <p:sp>
+        <p:nvSpPr>
+          <p:cNvPr id="5" name="Shape 3"/>
+          <p:cNvSpPr/>
+          <p:nvPr/>
+        </p:nvSpPr>
+        <p:spPr>
+          <a:xfrm>
+            <a:off x="777240" y="1874520"/>
+            <a:ext cx="5943600" cy="4617720"/>
+          </a:xfrm>
+          <a:prstGeom prst="roundRect">
+            <a:avLst>
+              <a:gd name="adj" fmla="val 1188"/>
+            </a:avLst>
+          </a:prstGeom>
+          <a:solidFill>
+            <a:srgbClr val="0F2A46"/>
+          </a:solidFill>
+          <a:ln w="12700">
+            <a:solidFill>
+              <a:srgbClr val="2C5478"/>
+            </a:solidFill>
+            <a:prstDash val="solid"/>
+          </a:ln>
+        </p:spPr>
+      </p:sp>
+      <p:sp>
+        <p:nvSpPr>
+          <p:cNvPr id="6" name="Text 4"/>
+          <p:cNvSpPr txBox="1"/>
+          <p:nvPr/>
+        </p:nvSpPr>
+        <p:spPr>
+          <a:xfrm>
+            <a:off x="1005840" y="2029968"/>
+            <a:ext cx="4572000" cy="219456"/>
+          </a:xfrm>
+          <a:prstGeom prst="rect">
+            <a:avLst/>
+          </a:prstGeom>
+          <a:noFill/>
+          <a:ln/>
+        </p:spPr>
+        <p:txBody>
+          <a:bodyPr wrap="square" lIns="0" tIns="0" rIns="0" bIns="0" rtlCol="0" anchor="ctr"/>
+          <a:lstStyle/>
+          <a:p>
+            <a:pPr indent="0" marL="0">
+              <a:buNone/>
+            </a:pPr>
+            <a:r>
+              <a:rPr lang="en-US" sz="900" spc="100" kern="0" dirty="0">
+                <a:solidFill>
+                  <a:srgbClr val="7FA0BE"/>
+                </a:solidFill>
+                <a:latin typeface="Courier New" pitchFamily="34" charset="0"/>
+                <a:ea typeface="Courier New" pitchFamily="34" charset="-122"/>
+                <a:cs typeface="Courier New" pitchFamily="34" charset="-120"/>
+              </a:rPr>
+              <a:t>EVERY TAB</a:t>
+            </a:r>
+            <a:endParaRPr lang="en-US" sz="900" dirty="0"/>
+          </a:p>
+        </p:txBody>
+      </p:sp>
+      <p:sp>
+        <p:nvSpPr>
+          <p:cNvPr id="7" name="Text 5"/>
+          <p:cNvSpPr txBox="1"/>
+          <p:nvPr/>
+        </p:nvSpPr>
+        <p:spPr>
+          <a:xfrm>
+            <a:off x="1005840" y="2304288"/>
+            <a:ext cx="5486400" cy="4023360"/>
+          </a:xfrm>
+          <a:prstGeom prst="rect">
+            <a:avLst/>
+          </a:prstGeom>
+          <a:noFill/>
+          <a:ln/>
+        </p:spPr>
+        <p:txBody>
+          <a:bodyPr wrap="square" lIns="0" tIns="0" rIns="0" bIns="0" rtlCol="0" anchor="t"/>
+          <a:lstStyle/>
+          <a:p>
+            <a:pPr indent="0" marL="0">
+              <a:lnSpc>
+                <a:spcPct val="112000"/>
+              </a:lnSpc>
+              <a:buNone/>
+            </a:pPr>
+            <a:r>
+              <a:rPr lang="en-US" sz="1100" dirty="0">
+                <a:solidFill>
+                  <a:srgbClr val="E9F1F6"/>
+                </a:solidFill>
+                <a:latin typeface="Courier New" pitchFamily="34" charset="0"/>
+                <a:ea typeface="Courier New" pitchFamily="34" charset="-122"/>
+                <a:cs typeface="Courier New" pitchFamily="34" charset="-120"/>
+              </a:rPr>
+              <a:t>Office Hub/</a:t>
+            </a:r>
+            <a:endParaRPr lang="en-US" sz="1100" dirty="0"/>
+          </a:p>
+          <a:p>
+            <a:pPr indent="0" marL="0">
+              <a:lnSpc>
+                <a:spcPct val="112000"/>
+              </a:lnSpc>
+              <a:buNone/>
+            </a:pPr>
+            <a:r>
+              <a:rPr lang="en-US" sz="1100" dirty="0">
+                <a:solidFill>
+                  <a:srgbClr val="E9F1F6"/>
+                </a:solidFill>
+                <a:latin typeface="Courier New" pitchFamily="34" charset="0"/>
+                <a:ea typeface="Courier New" pitchFamily="34" charset="-122"/>
+                <a:cs typeface="Courier New" pitchFamily="34" charset="-120"/>
+              </a:rPr>
+              <a:t>├── 01 Office Standards/</a:t>
+            </a:r>
+            <a:endParaRPr lang="en-US" sz="1100" dirty="0"/>
+          </a:p>
+          <a:p>
+            <a:pPr indent="0" marL="0">
+              <a:lnSpc>
+                <a:spcPct val="112000"/>
+              </a:lnSpc>
+              <a:buNone/>
+            </a:pPr>
+            <a:r>
+              <a:rPr lang="en-US" sz="1100" dirty="0">
+                <a:solidFill>
+                  <a:srgbClr val="E9F1F6"/>
+                </a:solidFill>
+                <a:latin typeface="Courier New" pitchFamily="34" charset="0"/>
+                <a:ea typeface="Courier New" pitchFamily="34" charset="-122"/>
+                <a:cs typeface="Courier New" pitchFamily="34" charset="-120"/>
+              </a:rPr>
+              <a:t>│   ├── Office Standards Manual/</a:t>
+            </a:r>
+            <a:endParaRPr lang="en-US" sz="1100" dirty="0"/>
+          </a:p>
+          <a:p>
+            <a:pPr indent="0" marL="0">
+              <a:lnSpc>
+                <a:spcPct val="112000"/>
+              </a:lnSpc>
+              <a:buNone/>
+            </a:pPr>
+            <a:r>
+              <a:rPr lang="en-US" sz="1100" dirty="0">
+                <a:solidFill>
+                  <a:srgbClr val="E9F1F6"/>
+                </a:solidFill>
+                <a:latin typeface="Courier New" pitchFamily="34" charset="0"/>
+                <a:ea typeface="Courier New" pitchFamily="34" charset="-122"/>
+                <a:cs typeface="Courier New" pitchFamily="34" charset="-120"/>
+              </a:rPr>
+              <a:t>│   ├── Drafting Standards/</a:t>
+            </a:r>
+            <a:endParaRPr lang="en-US" sz="1100" dirty="0"/>
+          </a:p>
+          <a:p>
+            <a:pPr indent="0" marL="0">
+              <a:lnSpc>
+                <a:spcPct val="112000"/>
+              </a:lnSpc>
+              <a:buNone/>
+            </a:pPr>
+            <a:r>
+              <a:rPr lang="en-US" sz="1100" dirty="0">
+                <a:solidFill>
+                  <a:srgbClr val="E9F1F6"/>
+                </a:solidFill>
+                <a:latin typeface="Courier New" pitchFamily="34" charset="0"/>
+                <a:ea typeface="Courier New" pitchFamily="34" charset="-122"/>
+                <a:cs typeface="Courier New" pitchFamily="34" charset="-120"/>
+              </a:rPr>
+              <a:t>│   └── File Naming &amp; Project Setup/</a:t>
+            </a:r>
+            <a:endParaRPr lang="en-US" sz="1100" dirty="0"/>
+          </a:p>
+          <a:p>
+            <a:pPr indent="0" marL="0">
+              <a:lnSpc>
+                <a:spcPct val="112000"/>
+              </a:lnSpc>
+              <a:buNone/>
+            </a:pPr>
+            <a:r>
+              <a:rPr lang="en-US" sz="1100" dirty="0">
+                <a:solidFill>
+                  <a:srgbClr val="E9F1F6"/>
+                </a:solidFill>
+                <a:latin typeface="Courier New" pitchFamily="34" charset="0"/>
+                <a:ea typeface="Courier New" pitchFamily="34" charset="-122"/>
+                <a:cs typeface="Courier New" pitchFamily="34" charset="-120"/>
+              </a:rPr>
+              <a:t>├── 02 Templates/</a:t>
+            </a:r>
+            <a:endParaRPr lang="en-US" sz="1100" dirty="0"/>
+          </a:p>
+          <a:p>
+            <a:pPr indent="0" marL="0">
+              <a:lnSpc>
+                <a:spcPct val="112000"/>
+              </a:lnSpc>
+              <a:buNone/>
+            </a:pPr>
+            <a:r>
+              <a:rPr lang="en-US" sz="1100" dirty="0">
+                <a:solidFill>
+                  <a:srgbClr val="E9F1F6"/>
+                </a:solidFill>
+                <a:latin typeface="Courier New" pitchFamily="34" charset="0"/>
+                <a:ea typeface="Courier New" pitchFamily="34" charset="-122"/>
+                <a:cs typeface="Courier New" pitchFamily="34" charset="-120"/>
+              </a:rPr>
+              <a:t>│   └── Drawing Title Blocks/</a:t>
+            </a:r>
+            <a:endParaRPr lang="en-US" sz="1100" dirty="0"/>
+          </a:p>
+          <a:p>
+            <a:pPr indent="0" marL="0">
+              <a:lnSpc>
+                <a:spcPct val="112000"/>
+              </a:lnSpc>
+              <a:buNone/>
+            </a:pPr>
+            <a:r>
+              <a:rPr lang="en-US" sz="1100" dirty="0">
+                <a:solidFill>
+                  <a:srgbClr val="E9F1F6"/>
+                </a:solidFill>
+                <a:latin typeface="Courier New" pitchFamily="34" charset="0"/>
+                <a:ea typeface="Courier New" pitchFamily="34" charset="-122"/>
+                <a:cs typeface="Courier New" pitchFamily="34" charset="-120"/>
+              </a:rPr>
+              <a:t>├── 03 Forms/</a:t>
+            </a:r>
+            <a:endParaRPr lang="en-US" sz="1100" dirty="0"/>
+          </a:p>
+          <a:p>
+            <a:pPr indent="0" marL="0">
+              <a:lnSpc>
+                <a:spcPct val="112000"/>
+              </a:lnSpc>
+              <a:buNone/>
+            </a:pPr>
+            <a:r>
+              <a:rPr lang="en-US" sz="1100" dirty="0">
+                <a:solidFill>
+                  <a:srgbClr val="E9F1F6"/>
+                </a:solidFill>
+                <a:latin typeface="Courier New" pitchFamily="34" charset="0"/>
+                <a:ea typeface="Courier New" pitchFamily="34" charset="-122"/>
+                <a:cs typeface="Courier New" pitchFamily="34" charset="-120"/>
+              </a:rPr>
+              <a:t>│   ├── HR Forms/</a:t>
+            </a:r>
+            <a:endParaRPr lang="en-US" sz="1100" dirty="0"/>
+          </a:p>
+          <a:p>
+            <a:pPr indent="0" marL="0">
+              <a:lnSpc>
+                <a:spcPct val="112000"/>
+              </a:lnSpc>
+              <a:buNone/>
+            </a:pPr>
+            <a:r>
+              <a:rPr lang="en-US" sz="1100" dirty="0">
+                <a:solidFill>
+                  <a:srgbClr val="E9F1F6"/>
+                </a:solidFill>
+                <a:latin typeface="Courier New" pitchFamily="34" charset="0"/>
+                <a:ea typeface="Courier New" pitchFamily="34" charset="-122"/>
+                <a:cs typeface="Courier New" pitchFamily="34" charset="-120"/>
+              </a:rPr>
+              <a:t>│   ├── Finance Forms/</a:t>
+            </a:r>
+            <a:endParaRPr lang="en-US" sz="1100" dirty="0"/>
+          </a:p>
+          <a:p>
+            <a:pPr indent="0" marL="0">
+              <a:lnSpc>
+                <a:spcPct val="112000"/>
+              </a:lnSpc>
+              <a:buNone/>
+            </a:pPr>
+            <a:r>
+              <a:rPr lang="en-US" sz="1100" dirty="0">
+                <a:solidFill>
+                  <a:srgbClr val="E9F1F6"/>
+                </a:solidFill>
+                <a:latin typeface="Courier New" pitchFamily="34" charset="0"/>
+                <a:ea typeface="Courier New" pitchFamily="34" charset="-122"/>
+                <a:cs typeface="Courier New" pitchFamily="34" charset="-120"/>
+              </a:rPr>
+              <a:t>│   └── Project Admin Forms/</a:t>
+            </a:r>
+            <a:endParaRPr lang="en-US" sz="1100" dirty="0"/>
+          </a:p>
+          <a:p>
+            <a:pPr indent="0" marL="0">
+              <a:lnSpc>
+                <a:spcPct val="112000"/>
+              </a:lnSpc>
+              <a:buNone/>
+            </a:pPr>
+            <a:r>
+              <a:rPr lang="en-US" sz="1100" dirty="0">
+                <a:solidFill>
+                  <a:srgbClr val="E9F1F6"/>
+                </a:solidFill>
+                <a:latin typeface="Courier New" pitchFamily="34" charset="0"/>
+                <a:ea typeface="Courier New" pitchFamily="34" charset="-122"/>
+                <a:cs typeface="Courier New" pitchFamily="34" charset="-120"/>
+              </a:rPr>
+              <a:t>├── 04 Office Policies/</a:t>
+            </a:r>
+            <a:endParaRPr lang="en-US" sz="1100" dirty="0"/>
+          </a:p>
+          <a:p>
+            <a:pPr indent="0" marL="0">
+              <a:lnSpc>
+                <a:spcPct val="112000"/>
+              </a:lnSpc>
+              <a:buNone/>
+            </a:pPr>
+            <a:r>
+              <a:rPr lang="en-US" sz="1100" dirty="0">
+                <a:solidFill>
+                  <a:srgbClr val="E9F1F6"/>
+                </a:solidFill>
+                <a:latin typeface="Courier New" pitchFamily="34" charset="0"/>
+                <a:ea typeface="Courier New" pitchFamily="34" charset="-122"/>
+                <a:cs typeface="Courier New" pitchFamily="34" charset="-120"/>
+              </a:rPr>
+              <a:t>│   ├── Employee Handbook/</a:t>
+            </a:r>
+            <a:endParaRPr lang="en-US" sz="1100" dirty="0"/>
+          </a:p>
+          <a:p>
+            <a:pPr indent="0" marL="0">
+              <a:lnSpc>
+                <a:spcPct val="112000"/>
+              </a:lnSpc>
+              <a:buNone/>
+            </a:pPr>
+            <a:r>
+              <a:rPr lang="en-US" sz="1100" dirty="0">
+                <a:solidFill>
+                  <a:srgbClr val="E9F1F6"/>
+                </a:solidFill>
+                <a:latin typeface="Courier New" pitchFamily="34" charset="0"/>
+                <a:ea typeface="Courier New" pitchFamily="34" charset="-122"/>
+                <a:cs typeface="Courier New" pitchFamily="34" charset="-120"/>
+              </a:rPr>
+              <a:t>│   ├── Health &amp; Safety/</a:t>
+            </a:r>
+            <a:endParaRPr lang="en-US" sz="1100" dirty="0"/>
+          </a:p>
+          <a:p>
+            <a:pPr indent="0" marL="0">
+              <a:lnSpc>
+                <a:spcPct val="112000"/>
+              </a:lnSpc>
+              <a:buNone/>
+            </a:pPr>
+            <a:r>
+              <a:rPr lang="en-US" sz="1100" dirty="0">
+                <a:solidFill>
+                  <a:srgbClr val="E9F1F6"/>
+                </a:solidFill>
+                <a:latin typeface="Courier New" pitchFamily="34" charset="0"/>
+                <a:ea typeface="Courier New" pitchFamily="34" charset="-122"/>
+                <a:cs typeface="Courier New" pitchFamily="34" charset="-120"/>
+              </a:rPr>
+              <a:t>│   ├── Remote Work &amp; IT Use/</a:t>
+            </a:r>
+            <a:endParaRPr lang="en-US" sz="1100" dirty="0"/>
+          </a:p>
+          <a:p>
+            <a:pPr indent="0" marL="0">
+              <a:lnSpc>
+                <a:spcPct val="112000"/>
+              </a:lnSpc>
+              <a:buNone/>
+            </a:pPr>
+            <a:r>
+              <a:rPr lang="en-US" sz="1100" dirty="0">
+                <a:solidFill>
+                  <a:srgbClr val="E9F1F6"/>
+                </a:solidFill>
+                <a:latin typeface="Courier New" pitchFamily="34" charset="0"/>
+                <a:ea typeface="Courier New" pitchFamily="34" charset="-122"/>
+                <a:cs typeface="Courier New" pitchFamily="34" charset="-120"/>
+              </a:rPr>
+              <a:t>│   └── Benefits &amp; HR Policies/</a:t>
+            </a:r>
+            <a:endParaRPr lang="en-US" sz="1100" dirty="0"/>
+          </a:p>
+          <a:p>
+            <a:pPr indent="0" marL="0">
+              <a:lnSpc>
+                <a:spcPct val="112000"/>
+              </a:lnSpc>
+              <a:buNone/>
+            </a:pPr>
+            <a:r>
+              <a:rPr lang="en-US" sz="1100" dirty="0">
+                <a:solidFill>
+                  <a:srgbClr val="E9F1F6"/>
+                </a:solidFill>
+                <a:latin typeface="Courier New" pitchFamily="34" charset="0"/>
+                <a:ea typeface="Courier New" pitchFamily="34" charset="-122"/>
+                <a:cs typeface="Courier New" pitchFamily="34" charset="-120"/>
+              </a:rPr>
+              <a:t>├── 05 SOPs/</a:t>
+            </a:r>
+            <a:endParaRPr lang="en-US" sz="1100" dirty="0"/>
+          </a:p>
+          <a:p>
+            <a:pPr indent="0" marL="0">
+              <a:lnSpc>
+                <a:spcPct val="112000"/>
+              </a:lnSpc>
+              <a:buNone/>
+            </a:pPr>
+            <a:r>
+              <a:rPr lang="en-US" sz="1100" dirty="0">
+                <a:solidFill>
+                  <a:srgbClr val="E9F1F6"/>
+                </a:solidFill>
+                <a:latin typeface="Courier New" pitchFamily="34" charset="0"/>
+                <a:ea typeface="Courier New" pitchFamily="34" charset="-122"/>
+                <a:cs typeface="Courier New" pitchFamily="34" charset="-120"/>
+              </a:rPr>
+              <a:t>│   ├── Project Kickoff/</a:t>
+            </a:r>
+            <a:endParaRPr lang="en-US" sz="1100" dirty="0"/>
+          </a:p>
+          <a:p>
+            <a:pPr indent="0" marL="0">
+              <a:lnSpc>
+                <a:spcPct val="112000"/>
+              </a:lnSpc>
+              <a:buNone/>
+            </a:pPr>
+            <a:r>
+              <a:rPr lang="en-US" sz="1100" dirty="0">
+                <a:solidFill>
+                  <a:srgbClr val="E9F1F6"/>
+                </a:solidFill>
+                <a:latin typeface="Courier New" pitchFamily="34" charset="0"/>
+                <a:ea typeface="Courier New" pitchFamily="34" charset="-122"/>
+                <a:cs typeface="Courier New" pitchFamily="34" charset="-120"/>
+              </a:rPr>
+              <a:t>│   ├── QA-QC Review/</a:t>
+            </a:r>
+            <a:endParaRPr lang="en-US" sz="1100" dirty="0"/>
+          </a:p>
+          <a:p>
+            <a:pPr indent="0" marL="0">
+              <a:lnSpc>
+                <a:spcPct val="112000"/>
+              </a:lnSpc>
+              <a:buNone/>
+            </a:pPr>
+            <a:r>
+              <a:rPr lang="en-US" sz="1100" dirty="0">
+                <a:solidFill>
+                  <a:srgbClr val="E9F1F6"/>
+                </a:solidFill>
+                <a:latin typeface="Courier New" pitchFamily="34" charset="0"/>
+                <a:ea typeface="Courier New" pitchFamily="34" charset="-122"/>
+                <a:cs typeface="Courier New" pitchFamily="34" charset="-120"/>
+              </a:rPr>
+              <a:t>│   ├── Submittal Review/</a:t>
+            </a:r>
+            <a:endParaRPr lang="en-US" sz="1100" dirty="0"/>
+          </a:p>
+          <a:p>
+            <a:pPr indent="0" marL="0">
+              <a:lnSpc>
+                <a:spcPct val="112000"/>
+              </a:lnSpc>
+              <a:buNone/>
+            </a:pPr>
+            <a:r>
+              <a:rPr lang="en-US" sz="1100" dirty="0">
+                <a:solidFill>
+                  <a:srgbClr val="E9F1F6"/>
+                </a:solidFill>
+                <a:latin typeface="Courier New" pitchFamily="34" charset="0"/>
+                <a:ea typeface="Courier New" pitchFamily="34" charset="-122"/>
+                <a:cs typeface="Courier New" pitchFamily="34" charset="-120"/>
+              </a:rPr>
+              <a:t>│   ├── Client Onboarding/</a:t>
+            </a:r>
+            <a:endParaRPr lang="en-US" sz="1100" dirty="0"/>
+          </a:p>
+          <a:p>
+            <a:pPr indent="0" marL="0">
+              <a:lnSpc>
+                <a:spcPct val="112000"/>
+              </a:lnSpc>
+              <a:buNone/>
+            </a:pPr>
+            <a:r>
+              <a:rPr lang="en-US" sz="1100" dirty="0">
+                <a:solidFill>
+                  <a:srgbClr val="E9F1F6"/>
+                </a:solidFill>
+                <a:latin typeface="Courier New" pitchFamily="34" charset="0"/>
+                <a:ea typeface="Courier New" pitchFamily="34" charset="-122"/>
+                <a:cs typeface="Courier New" pitchFamily="34" charset="-120"/>
+              </a:rPr>
+              <a:t>│   └── File Backup &amp; Archiving/</a:t>
+            </a:r>
+            <a:endParaRPr lang="en-US" sz="1100" dirty="0"/>
+          </a:p>
+          <a:p>
+            <a:pPr indent="0" marL="0">
+              <a:lnSpc>
+                <a:spcPct val="112000"/>
+              </a:lnSpc>
+              <a:buNone/>
+            </a:pPr>
+            <a:r>
+              <a:rPr lang="en-US" sz="1100" dirty="0">
+                <a:solidFill>
+                  <a:srgbClr val="E9F1F6"/>
+                </a:solidFill>
+                <a:latin typeface="Courier New" pitchFamily="34" charset="0"/>
+                <a:ea typeface="Courier New" pitchFamily="34" charset="-122"/>
+                <a:cs typeface="Courier New" pitchFamily="34" charset="-120"/>
+              </a:rPr>
+              <a:t>└── 06 Revit Standards/</a:t>
+            </a:r>
+            <a:endParaRPr lang="en-US" sz="1100" dirty="0"/>
+          </a:p>
+          <a:p>
+            <a:pPr indent="0" marL="0">
+              <a:lnSpc>
+                <a:spcPct val="112000"/>
+              </a:lnSpc>
+              <a:buNone/>
+            </a:pPr>
+            <a:r>
+              <a:rPr lang="en-US" sz="1100" dirty="0">
+                <a:solidFill>
+                  <a:srgbClr val="E9F1F6"/>
+                </a:solidFill>
+                <a:latin typeface="Courier New" pitchFamily="34" charset="0"/>
+                <a:ea typeface="Courier New" pitchFamily="34" charset="-122"/>
+                <a:cs typeface="Courier New" pitchFamily="34" charset="-120"/>
+              </a:rPr>
+              <a:t>    (no subfolders — flat)</a:t>
+            </a:r>
+            <a:endParaRPr lang="en-US" sz="1100" dirty="0"/>
+          </a:p>
+        </p:txBody>
+      </p:sp>
+      <p:sp>
+        <p:nvSpPr>
+          <p:cNvPr id="8" name="Shape 6"/>
+          <p:cNvSpPr/>
+          <p:nvPr/>
+        </p:nvSpPr>
+        <p:spPr>
+          <a:xfrm>
+            <a:off x="6903720" y="1874520"/>
+            <a:ext cx="4526280" cy="4617720"/>
+          </a:xfrm>
+          <a:prstGeom prst="roundRect">
+            <a:avLst>
+              <a:gd name="adj" fmla="val 1212"/>
+            </a:avLst>
+          </a:prstGeom>
+          <a:solidFill>
+            <a:srgbClr val="0F2A46"/>
+          </a:solidFill>
+          <a:ln w="12700">
+            <a:solidFill>
+              <a:srgbClr val="C1432A"/>
+            </a:solidFill>
+            <a:prstDash val="solid"/>
+          </a:ln>
+        </p:spPr>
+      </p:sp>
+      <p:sp>
+        <p:nvSpPr>
+          <p:cNvPr id="9" name="Text 7"/>
+          <p:cNvSpPr txBox="1"/>
+          <p:nvPr/>
+        </p:nvSpPr>
+        <p:spPr>
+          <a:xfrm>
+            <a:off x="7132320" y="2029968"/>
+            <a:ext cx="4114800" cy="219456"/>
+          </a:xfrm>
+          <a:prstGeom prst="rect">
+            <a:avLst/>
+          </a:prstGeom>
+          <a:noFill/>
+          <a:ln/>
+        </p:spPr>
+        <p:txBody>
+          <a:bodyPr wrap="square" lIns="0" tIns="0" rIns="0" bIns="0" rtlCol="0" anchor="ctr"/>
+          <a:lstStyle/>
+          <a:p>
+            <a:pPr indent="0" marL="0">
+              <a:buNone/>
+            </a:pPr>
+            <a:r>
+              <a:rPr lang="en-US" sz="900" spc="60" kern="0" dirty="0">
+                <a:solidFill>
+                  <a:srgbClr val="C1432A"/>
+                </a:solidFill>
+                <a:latin typeface="Courier New" pitchFamily="34" charset="0"/>
+                <a:ea typeface="Courier New" pitchFamily="34" charset="-122"/>
+                <a:cs typeface="Courier New" pitchFamily="34" charset="-120"/>
+              </a:rPr>
+              <a:t>LEARNING SESSIONS — GROUPED BY MONTH</a:t>
+            </a:r>
+            <a:endParaRPr lang="en-US" sz="900" dirty="0"/>
+          </a:p>
+        </p:txBody>
+      </p:sp>
+      <p:sp>
+        <p:nvSpPr>
+          <p:cNvPr id="10" name="Text 8"/>
+          <p:cNvSpPr txBox="1"/>
+          <p:nvPr/>
+        </p:nvSpPr>
+        <p:spPr>
+          <a:xfrm>
+            <a:off x="7132320" y="2304288"/>
+            <a:ext cx="4114800" cy="3108960"/>
+          </a:xfrm>
+          <a:prstGeom prst="rect">
+            <a:avLst/>
+          </a:prstGeom>
+          <a:noFill/>
+          <a:ln/>
+        </p:spPr>
+        <p:txBody>
+          <a:bodyPr wrap="square" lIns="0" tIns="0" rIns="0" bIns="0" rtlCol="0" anchor="t"/>
+          <a:lstStyle/>
+          <a:p>
+            <a:pPr indent="0" marL="0">
+              <a:lnSpc>
+                <a:spcPct val="112000"/>
+              </a:lnSpc>
+              <a:buNone/>
+            </a:pPr>
+            <a:r>
+              <a:rPr lang="en-US" sz="1100" dirty="0">
+                <a:solidFill>
+                  <a:srgbClr val="E9F1F6"/>
+                </a:solidFill>
+                <a:latin typeface="Courier New" pitchFamily="34" charset="0"/>
+                <a:ea typeface="Courier New" pitchFamily="34" charset="-122"/>
+                <a:cs typeface="Courier New" pitchFamily="34" charset="-120"/>
+              </a:rPr>
+              <a:t>08 Learning Sessions/</a:t>
+            </a:r>
+            <a:endParaRPr lang="en-US" sz="1100" dirty="0"/>
+          </a:p>
+          <a:p>
+            <a:pPr indent="0" marL="0">
+              <a:lnSpc>
+                <a:spcPct val="112000"/>
+              </a:lnSpc>
+              <a:buNone/>
+            </a:pPr>
+            <a:r>
+              <a:rPr lang="en-US" sz="1100" dirty="0">
+                <a:solidFill>
+                  <a:srgbClr val="E9F1F6"/>
+                </a:solidFill>
+                <a:latin typeface="Courier New" pitchFamily="34" charset="0"/>
+                <a:ea typeface="Courier New" pitchFamily="34" charset="-122"/>
+                <a:cs typeface="Courier New" pitchFamily="34" charset="-120"/>
+              </a:rPr>
+              <a:t>├── September 2026/</a:t>
+            </a:r>
+            <a:endParaRPr lang="en-US" sz="1100" dirty="0"/>
+          </a:p>
+          <a:p>
+            <a:pPr indent="0" marL="0">
+              <a:lnSpc>
+                <a:spcPct val="112000"/>
+              </a:lnSpc>
+              <a:buNone/>
+            </a:pPr>
+            <a:r>
+              <a:rPr lang="en-US" sz="1100" dirty="0">
+                <a:solidFill>
+                  <a:srgbClr val="E9F1F6"/>
+                </a:solidFill>
+                <a:latin typeface="Courier New" pitchFamily="34" charset="0"/>
+                <a:ea typeface="Courier New" pitchFamily="34" charset="-122"/>
+                <a:cs typeface="Courier New" pitchFamily="34" charset="-120"/>
+              </a:rPr>
+              <a:t>│   ├── 2026-09-04_Revit Keynoting Tips/</a:t>
+            </a:r>
+            <a:endParaRPr lang="en-US" sz="1100" dirty="0"/>
+          </a:p>
+          <a:p>
+            <a:pPr indent="0" marL="0">
+              <a:lnSpc>
+                <a:spcPct val="112000"/>
+              </a:lnSpc>
+              <a:buNone/>
+            </a:pPr>
+            <a:r>
+              <a:rPr lang="en-US" sz="1100" dirty="0">
+                <a:solidFill>
+                  <a:srgbClr val="E9F1F6"/>
+                </a:solidFill>
+                <a:latin typeface="Courier New" pitchFamily="34" charset="0"/>
+                <a:ea typeface="Courier New" pitchFamily="34" charset="-122"/>
+                <a:cs typeface="Courier New" pitchFamily="34" charset="-120"/>
+              </a:rPr>
+              <a:t>│   ├── 2026-09-11_Title of Learning Session/</a:t>
+            </a:r>
+            <a:endParaRPr lang="en-US" sz="1100" dirty="0"/>
+          </a:p>
+          <a:p>
+            <a:pPr indent="0" marL="0">
+              <a:lnSpc>
+                <a:spcPct val="112000"/>
+              </a:lnSpc>
+              <a:buNone/>
+            </a:pPr>
+            <a:r>
+              <a:rPr lang="en-US" sz="1100" dirty="0">
+                <a:solidFill>
+                  <a:srgbClr val="E9F1F6"/>
+                </a:solidFill>
+                <a:latin typeface="Courier New" pitchFamily="34" charset="0"/>
+                <a:ea typeface="Courier New" pitchFamily="34" charset="-122"/>
+                <a:cs typeface="Courier New" pitchFamily="34" charset="-120"/>
+              </a:rPr>
+              <a:t>│   └── 2026-09-18_Title of Learning Session/</a:t>
+            </a:r>
+            <a:endParaRPr lang="en-US" sz="1100" dirty="0"/>
+          </a:p>
+          <a:p>
+            <a:pPr indent="0" marL="0">
+              <a:lnSpc>
+                <a:spcPct val="112000"/>
+              </a:lnSpc>
+              <a:buNone/>
+            </a:pPr>
+            <a:r>
+              <a:rPr lang="en-US" sz="1100" dirty="0">
+                <a:solidFill>
+                  <a:srgbClr val="E9F1F6"/>
+                </a:solidFill>
+                <a:latin typeface="Courier New" pitchFamily="34" charset="0"/>
+                <a:ea typeface="Courier New" pitchFamily="34" charset="-122"/>
+                <a:cs typeface="Courier New" pitchFamily="34" charset="-120"/>
+              </a:rPr>
+              <a:t>├── October 2026/</a:t>
+            </a:r>
+            <a:endParaRPr lang="en-US" sz="1100" dirty="0"/>
+          </a:p>
+          <a:p>
+            <a:pPr indent="0" marL="0">
+              <a:lnSpc>
+                <a:spcPct val="112000"/>
+              </a:lnSpc>
+              <a:buNone/>
+            </a:pPr>
+            <a:r>
+              <a:rPr lang="en-US" sz="1100" dirty="0">
+                <a:solidFill>
+                  <a:srgbClr val="E9F1F6"/>
+                </a:solidFill>
+                <a:latin typeface="Courier New" pitchFamily="34" charset="0"/>
+                <a:ea typeface="Courier New" pitchFamily="34" charset="-122"/>
+                <a:cs typeface="Courier New" pitchFamily="34" charset="-120"/>
+              </a:rPr>
+              <a:t>│   ├── 2026-10-02_Title of Learning Session/</a:t>
+            </a:r>
+            <a:endParaRPr lang="en-US" sz="1100" dirty="0"/>
+          </a:p>
+          <a:p>
+            <a:pPr indent="0" marL="0">
+              <a:lnSpc>
+                <a:spcPct val="112000"/>
+              </a:lnSpc>
+              <a:buNone/>
+            </a:pPr>
+            <a:r>
+              <a:rPr lang="en-US" sz="1100" dirty="0">
+                <a:solidFill>
+                  <a:srgbClr val="E9F1F6"/>
+                </a:solidFill>
+                <a:latin typeface="Courier New" pitchFamily="34" charset="0"/>
+                <a:ea typeface="Courier New" pitchFamily="34" charset="-122"/>
+                <a:cs typeface="Courier New" pitchFamily="34" charset="-120"/>
+              </a:rPr>
+              <a:t>│   ├── 2026-10-09_Title of Learning Session/</a:t>
+            </a:r>
+            <a:endParaRPr lang="en-US" sz="1100" dirty="0"/>
+          </a:p>
+          <a:p>
+            <a:pPr indent="0" marL="0">
+              <a:lnSpc>
+                <a:spcPct val="112000"/>
+              </a:lnSpc>
+              <a:buNone/>
+            </a:pPr>
+            <a:r>
+              <a:rPr lang="en-US" sz="1100" dirty="0">
+                <a:solidFill>
+                  <a:srgbClr val="E9F1F6"/>
+                </a:solidFill>
+                <a:latin typeface="Courier New" pitchFamily="34" charset="0"/>
+                <a:ea typeface="Courier New" pitchFamily="34" charset="-122"/>
+                <a:cs typeface="Courier New" pitchFamily="34" charset="-120"/>
+              </a:rPr>
+              <a:t>│   ├── 2026-10-16_Title of Learning Session/</a:t>
+            </a:r>
+            <a:endParaRPr lang="en-US" sz="1100" dirty="0"/>
+          </a:p>
+          <a:p>
+            <a:pPr indent="0" marL="0">
+              <a:lnSpc>
+                <a:spcPct val="112000"/>
+              </a:lnSpc>
+              <a:buNone/>
+            </a:pPr>
+            <a:r>
+              <a:rPr lang="en-US" sz="1100" dirty="0">
+                <a:solidFill>
+                  <a:srgbClr val="E9F1F6"/>
+                </a:solidFill>
+                <a:latin typeface="Courier New" pitchFamily="34" charset="0"/>
+                <a:ea typeface="Courier New" pitchFamily="34" charset="-122"/>
+                <a:cs typeface="Courier New" pitchFamily="34" charset="-120"/>
+              </a:rPr>
+              <a:t>│   ├── 2026-10-23_Title of Learning Session/</a:t>
+            </a:r>
+            <a:endParaRPr lang="en-US" sz="1100" dirty="0"/>
+          </a:p>
+          <a:p>
+            <a:pPr indent="0" marL="0">
+              <a:lnSpc>
+                <a:spcPct val="112000"/>
+              </a:lnSpc>
+              <a:buNone/>
+            </a:pPr>
+            <a:r>
+              <a:rPr lang="en-US" sz="1100" dirty="0">
+                <a:solidFill>
+                  <a:srgbClr val="E9F1F6"/>
+                </a:solidFill>
+                <a:latin typeface="Courier New" pitchFamily="34" charset="0"/>
+                <a:ea typeface="Courier New" pitchFamily="34" charset="-122"/>
+                <a:cs typeface="Courier New" pitchFamily="34" charset="-120"/>
+              </a:rPr>
+              <a:t>│   └── 2026-10-30_Title of Learning Session/</a:t>
+            </a:r>
+            <a:endParaRPr lang="en-US" sz="1100" dirty="0"/>
+          </a:p>
+          <a:p>
+            <a:pPr indent="0" marL="0">
+              <a:lnSpc>
+                <a:spcPct val="112000"/>
+              </a:lnSpc>
+              <a:buNone/>
+            </a:pPr>
+            <a:r>
+              <a:rPr lang="en-US" sz="1100" dirty="0">
+                <a:solidFill>
+                  <a:srgbClr val="E9F1F6"/>
+                </a:solidFill>
+                <a:latin typeface="Courier New" pitchFamily="34" charset="0"/>
+                <a:ea typeface="Courier New" pitchFamily="34" charset="-122"/>
+                <a:cs typeface="Courier New" pitchFamily="34" charset="-120"/>
+              </a:rPr>
+              <a:t>└── November 2026/</a:t>
+            </a:r>
+            <a:endParaRPr lang="en-US" sz="1100" dirty="0"/>
+          </a:p>
+          <a:p>
+            <a:pPr indent="0" marL="0">
+              <a:lnSpc>
+                <a:spcPct val="112000"/>
+              </a:lnSpc>
+              <a:buNone/>
+            </a:pPr>
+            <a:r>
+              <a:rPr lang="en-US" sz="1100" dirty="0">
+                <a:solidFill>
+                  <a:srgbClr val="E9F1F6"/>
+                </a:solidFill>
+                <a:latin typeface="Courier New" pitchFamily="34" charset="0"/>
+                <a:ea typeface="Courier New" pitchFamily="34" charset="-122"/>
+                <a:cs typeface="Courier New" pitchFamily="34" charset="-120"/>
+              </a:rPr>
+              <a:t>    └── 2026-11-06_Title of Learning Session/</a:t>
+            </a:r>
+            <a:endParaRPr lang="en-US" sz="1100" dirty="0"/>
+          </a:p>
+        </p:txBody>
+      </p:sp>
+      <p:sp>
+        <p:nvSpPr>
+          <p:cNvPr id="11" name="Text 9"/>
+          <p:cNvSpPr txBox="1"/>
+          <p:nvPr/>
+        </p:nvSpPr>
+        <p:spPr>
+          <a:xfrm>
+            <a:off x="7132320" y="5806440"/>
+            <a:ext cx="4114800" cy="457200"/>
+          </a:xfrm>
+          <a:prstGeom prst="rect">
+            <a:avLst/>
+          </a:prstGeom>
+          <a:noFill/>
+          <a:ln/>
+        </p:spPr>
+        <p:txBody>
+          <a:bodyPr wrap="square" lIns="0" tIns="0" rIns="0" bIns="0" rtlCol="0" anchor="ctr"/>
+          <a:lstStyle/>
+          <a:p>
+            <a:pPr indent="0" marL="0">
+              <a:buNone/>
+            </a:pPr>
+            <a:r>
+              <a:rPr lang="en-US" sz="950" i="1" dirty="0">
+                <a:solidFill>
+                  <a:srgbClr val="A9C0D2"/>
+                </a:solidFill>
+                <a:latin typeface="Calibri" pitchFamily="34" charset="0"/>
+                <a:ea typeface="Calibri" pitchFamily="34" charset="-122"/>
+                <a:cs typeface="Calibri" pitchFamily="34" charset="-120"/>
+              </a:rPr>
+              <a:t>Naming convention: YYYY-MM-DD_Title of Learning Session</a:t>
+            </a:r>
+            <a:endParaRPr lang="en-US" sz="950" dirty="0"/>
+          </a:p>
+        </p:txBody>
+      </p:sp>
+    </p:spTree>
+  </p:cSld>
+  <p:clrMapOvr>
+    <a:masterClrMapping/>
+  </p:clrMapOvr>
+</p:sld>
+</file>
+
 <file path=ppt/slides/slide2.xml><?xml version="1.0" encoding="utf-8"?>
 <p:sld xmlns:a="http://schemas.openxmlformats.org/drawingml/2006/main" xmlns:r="http://schemas.openxmlformats.org/officeDocument/2006/relationships" xmlns:p="http://schemas.openxmlformats.org/presentationml/2006/main">
   <p:cSld name="Slide 2">

--- a/office-hub-concept.pptx
+++ b/office-hub-concept.pptx
@@ -1746,9 +1746,16 @@
   <p:cSld name="Slide 1">
     <p:bg>
       <p:bgPr>
-        <a:solidFill>
-          <a:srgbClr val="12233A"/>
-        </a:solidFill>
+        <a:blipFill dpi="0" rotWithShape="1">
+          <a:blip r:embed="rId1">
+            <a:lum/>
+          </a:blip>
+          <a:srcRect/>
+          <a:stretch>
+            <a:fillRect/>
+          </a:stretch>
+        </a:blipFill>
+        <a:effectLst/>
       </p:bgPr>
     </p:bg>
     <p:spTree>
@@ -1767,789 +1774,7 @@
       </p:grpSpPr>
       <p:sp>
         <p:nvSpPr>
-          <p:cNvPr id="2" name="Shape 0"/>
-          <p:cNvSpPr/>
-          <p:nvPr/>
-        </p:nvSpPr>
-        <p:spPr>
-          <a:xfrm>
-            <a:off x="548640" y="0"/>
-            <a:ext cx="0" cy="6858000"/>
-          </a:xfrm>
-          <a:prstGeom prst="line">
-            <a:avLst/>
-          </a:prstGeom>
-          <a:noFill/>
-          <a:ln w="6350">
-            <a:solidFill>
-              <a:srgbClr val="1D3A5C"/>
-            </a:solidFill>
-            <a:prstDash val="solid"/>
-          </a:ln>
-        </p:spPr>
-      </p:sp>
-      <p:sp>
-        <p:nvSpPr>
-          <p:cNvPr id="3" name="Shape 1"/>
-          <p:cNvSpPr/>
-          <p:nvPr/>
-        </p:nvSpPr>
-        <p:spPr>
-          <a:xfrm>
-            <a:off x="1097280" y="0"/>
-            <a:ext cx="0" cy="6858000"/>
-          </a:xfrm>
-          <a:prstGeom prst="line">
-            <a:avLst/>
-          </a:prstGeom>
-          <a:noFill/>
-          <a:ln w="6350">
-            <a:solidFill>
-              <a:srgbClr val="1D3A5C"/>
-            </a:solidFill>
-            <a:prstDash val="solid"/>
-          </a:ln>
-        </p:spPr>
-      </p:sp>
-      <p:sp>
-        <p:nvSpPr>
-          <p:cNvPr id="4" name="Shape 2"/>
-          <p:cNvSpPr/>
-          <p:nvPr/>
-        </p:nvSpPr>
-        <p:spPr>
-          <a:xfrm>
-            <a:off x="1645920" y="0"/>
-            <a:ext cx="0" cy="6858000"/>
-          </a:xfrm>
-          <a:prstGeom prst="line">
-            <a:avLst/>
-          </a:prstGeom>
-          <a:noFill/>
-          <a:ln w="6350">
-            <a:solidFill>
-              <a:srgbClr val="1D3A5C"/>
-            </a:solidFill>
-            <a:prstDash val="solid"/>
-          </a:ln>
-        </p:spPr>
-      </p:sp>
-      <p:sp>
-        <p:nvSpPr>
-          <p:cNvPr id="5" name="Shape 3"/>
-          <p:cNvSpPr/>
-          <p:nvPr/>
-        </p:nvSpPr>
-        <p:spPr>
-          <a:xfrm>
-            <a:off x="2194560" y="0"/>
-            <a:ext cx="0" cy="6858000"/>
-          </a:xfrm>
-          <a:prstGeom prst="line">
-            <a:avLst/>
-          </a:prstGeom>
-          <a:noFill/>
-          <a:ln w="6350">
-            <a:solidFill>
-              <a:srgbClr val="1D3A5C"/>
-            </a:solidFill>
-            <a:prstDash val="solid"/>
-          </a:ln>
-        </p:spPr>
-      </p:sp>
-      <p:sp>
-        <p:nvSpPr>
-          <p:cNvPr id="6" name="Shape 4"/>
-          <p:cNvSpPr/>
-          <p:nvPr/>
-        </p:nvSpPr>
-        <p:spPr>
-          <a:xfrm>
-            <a:off x="2743200" y="0"/>
-            <a:ext cx="0" cy="6858000"/>
-          </a:xfrm>
-          <a:prstGeom prst="line">
-            <a:avLst/>
-          </a:prstGeom>
-          <a:noFill/>
-          <a:ln w="6350">
-            <a:solidFill>
-              <a:srgbClr val="1D3A5C"/>
-            </a:solidFill>
-            <a:prstDash val="solid"/>
-          </a:ln>
-        </p:spPr>
-      </p:sp>
-      <p:sp>
-        <p:nvSpPr>
-          <p:cNvPr id="7" name="Shape 5"/>
-          <p:cNvSpPr/>
-          <p:nvPr/>
-        </p:nvSpPr>
-        <p:spPr>
-          <a:xfrm>
-            <a:off x="3291840" y="0"/>
-            <a:ext cx="0" cy="6858000"/>
-          </a:xfrm>
-          <a:prstGeom prst="line">
-            <a:avLst/>
-          </a:prstGeom>
-          <a:noFill/>
-          <a:ln w="6350">
-            <a:solidFill>
-              <a:srgbClr val="1D3A5C"/>
-            </a:solidFill>
-            <a:prstDash val="solid"/>
-          </a:ln>
-        </p:spPr>
-      </p:sp>
-      <p:sp>
-        <p:nvSpPr>
-          <p:cNvPr id="8" name="Shape 6"/>
-          <p:cNvSpPr/>
-          <p:nvPr/>
-        </p:nvSpPr>
-        <p:spPr>
-          <a:xfrm>
-            <a:off x="3840480" y="0"/>
-            <a:ext cx="0" cy="6858000"/>
-          </a:xfrm>
-          <a:prstGeom prst="line">
-            <a:avLst/>
-          </a:prstGeom>
-          <a:noFill/>
-          <a:ln w="6350">
-            <a:solidFill>
-              <a:srgbClr val="1D3A5C"/>
-            </a:solidFill>
-            <a:prstDash val="solid"/>
-          </a:ln>
-        </p:spPr>
-      </p:sp>
-      <p:sp>
-        <p:nvSpPr>
-          <p:cNvPr id="9" name="Shape 7"/>
-          <p:cNvSpPr/>
-          <p:nvPr/>
-        </p:nvSpPr>
-        <p:spPr>
-          <a:xfrm>
-            <a:off x="4389120" y="0"/>
-            <a:ext cx="0" cy="6858000"/>
-          </a:xfrm>
-          <a:prstGeom prst="line">
-            <a:avLst/>
-          </a:prstGeom>
-          <a:noFill/>
-          <a:ln w="6350">
-            <a:solidFill>
-              <a:srgbClr val="1D3A5C"/>
-            </a:solidFill>
-            <a:prstDash val="solid"/>
-          </a:ln>
-        </p:spPr>
-      </p:sp>
-      <p:sp>
-        <p:nvSpPr>
-          <p:cNvPr id="10" name="Shape 8"/>
-          <p:cNvSpPr/>
-          <p:nvPr/>
-        </p:nvSpPr>
-        <p:spPr>
-          <a:xfrm>
-            <a:off x="4937760" y="0"/>
-            <a:ext cx="0" cy="6858000"/>
-          </a:xfrm>
-          <a:prstGeom prst="line">
-            <a:avLst/>
-          </a:prstGeom>
-          <a:noFill/>
-          <a:ln w="6350">
-            <a:solidFill>
-              <a:srgbClr val="1D3A5C"/>
-            </a:solidFill>
-            <a:prstDash val="solid"/>
-          </a:ln>
-        </p:spPr>
-      </p:sp>
-      <p:sp>
-        <p:nvSpPr>
-          <p:cNvPr id="11" name="Shape 9"/>
-          <p:cNvSpPr/>
-          <p:nvPr/>
-        </p:nvSpPr>
-        <p:spPr>
-          <a:xfrm>
-            <a:off x="5486400" y="0"/>
-            <a:ext cx="0" cy="6858000"/>
-          </a:xfrm>
-          <a:prstGeom prst="line">
-            <a:avLst/>
-          </a:prstGeom>
-          <a:noFill/>
-          <a:ln w="6350">
-            <a:solidFill>
-              <a:srgbClr val="1D3A5C"/>
-            </a:solidFill>
-            <a:prstDash val="solid"/>
-          </a:ln>
-        </p:spPr>
-      </p:sp>
-      <p:sp>
-        <p:nvSpPr>
-          <p:cNvPr id="12" name="Shape 10"/>
-          <p:cNvSpPr/>
-          <p:nvPr/>
-        </p:nvSpPr>
-        <p:spPr>
-          <a:xfrm>
-            <a:off x="6035040" y="0"/>
-            <a:ext cx="0" cy="6858000"/>
-          </a:xfrm>
-          <a:prstGeom prst="line">
-            <a:avLst/>
-          </a:prstGeom>
-          <a:noFill/>
-          <a:ln w="6350">
-            <a:solidFill>
-              <a:srgbClr val="1D3A5C"/>
-            </a:solidFill>
-            <a:prstDash val="solid"/>
-          </a:ln>
-        </p:spPr>
-      </p:sp>
-      <p:sp>
-        <p:nvSpPr>
-          <p:cNvPr id="13" name="Shape 11"/>
-          <p:cNvSpPr/>
-          <p:nvPr/>
-        </p:nvSpPr>
-        <p:spPr>
-          <a:xfrm>
-            <a:off x="6583680" y="0"/>
-            <a:ext cx="0" cy="6858000"/>
-          </a:xfrm>
-          <a:prstGeom prst="line">
-            <a:avLst/>
-          </a:prstGeom>
-          <a:noFill/>
-          <a:ln w="6350">
-            <a:solidFill>
-              <a:srgbClr val="1D3A5C"/>
-            </a:solidFill>
-            <a:prstDash val="solid"/>
-          </a:ln>
-        </p:spPr>
-      </p:sp>
-      <p:sp>
-        <p:nvSpPr>
-          <p:cNvPr id="14" name="Shape 12"/>
-          <p:cNvSpPr/>
-          <p:nvPr/>
-        </p:nvSpPr>
-        <p:spPr>
-          <a:xfrm>
-            <a:off x="7132320" y="0"/>
-            <a:ext cx="0" cy="6858000"/>
-          </a:xfrm>
-          <a:prstGeom prst="line">
-            <a:avLst/>
-          </a:prstGeom>
-          <a:noFill/>
-          <a:ln w="6350">
-            <a:solidFill>
-              <a:srgbClr val="1D3A5C"/>
-            </a:solidFill>
-            <a:prstDash val="solid"/>
-          </a:ln>
-        </p:spPr>
-      </p:sp>
-      <p:sp>
-        <p:nvSpPr>
-          <p:cNvPr id="15" name="Shape 13"/>
-          <p:cNvSpPr/>
-          <p:nvPr/>
-        </p:nvSpPr>
-        <p:spPr>
-          <a:xfrm>
-            <a:off x="7680960" y="0"/>
-            <a:ext cx="0" cy="6858000"/>
-          </a:xfrm>
-          <a:prstGeom prst="line">
-            <a:avLst/>
-          </a:prstGeom>
-          <a:noFill/>
-          <a:ln w="6350">
-            <a:solidFill>
-              <a:srgbClr val="1D3A5C"/>
-            </a:solidFill>
-            <a:prstDash val="solid"/>
-          </a:ln>
-        </p:spPr>
-      </p:sp>
-      <p:sp>
-        <p:nvSpPr>
-          <p:cNvPr id="16" name="Shape 14"/>
-          <p:cNvSpPr/>
-          <p:nvPr/>
-        </p:nvSpPr>
-        <p:spPr>
-          <a:xfrm>
-            <a:off x="8229600" y="0"/>
-            <a:ext cx="0" cy="6858000"/>
-          </a:xfrm>
-          <a:prstGeom prst="line">
-            <a:avLst/>
-          </a:prstGeom>
-          <a:noFill/>
-          <a:ln w="6350">
-            <a:solidFill>
-              <a:srgbClr val="1D3A5C"/>
-            </a:solidFill>
-            <a:prstDash val="solid"/>
-          </a:ln>
-        </p:spPr>
-      </p:sp>
-      <p:sp>
-        <p:nvSpPr>
-          <p:cNvPr id="17" name="Shape 15"/>
-          <p:cNvSpPr/>
-          <p:nvPr/>
-        </p:nvSpPr>
-        <p:spPr>
-          <a:xfrm>
-            <a:off x="8778240" y="0"/>
-            <a:ext cx="0" cy="6858000"/>
-          </a:xfrm>
-          <a:prstGeom prst="line">
-            <a:avLst/>
-          </a:prstGeom>
-          <a:noFill/>
-          <a:ln w="6350">
-            <a:solidFill>
-              <a:srgbClr val="1D3A5C"/>
-            </a:solidFill>
-            <a:prstDash val="solid"/>
-          </a:ln>
-        </p:spPr>
-      </p:sp>
-      <p:sp>
-        <p:nvSpPr>
-          <p:cNvPr id="18" name="Shape 16"/>
-          <p:cNvSpPr/>
-          <p:nvPr/>
-        </p:nvSpPr>
-        <p:spPr>
-          <a:xfrm>
-            <a:off x="9326880" y="0"/>
-            <a:ext cx="0" cy="6858000"/>
-          </a:xfrm>
-          <a:prstGeom prst="line">
-            <a:avLst/>
-          </a:prstGeom>
-          <a:noFill/>
-          <a:ln w="6350">
-            <a:solidFill>
-              <a:srgbClr val="1D3A5C"/>
-            </a:solidFill>
-            <a:prstDash val="solid"/>
-          </a:ln>
-        </p:spPr>
-      </p:sp>
-      <p:sp>
-        <p:nvSpPr>
-          <p:cNvPr id="19" name="Shape 17"/>
-          <p:cNvSpPr/>
-          <p:nvPr/>
-        </p:nvSpPr>
-        <p:spPr>
-          <a:xfrm>
-            <a:off x="9875520" y="0"/>
-            <a:ext cx="0" cy="6858000"/>
-          </a:xfrm>
-          <a:prstGeom prst="line">
-            <a:avLst/>
-          </a:prstGeom>
-          <a:noFill/>
-          <a:ln w="6350">
-            <a:solidFill>
-              <a:srgbClr val="1D3A5C"/>
-            </a:solidFill>
-            <a:prstDash val="solid"/>
-          </a:ln>
-        </p:spPr>
-      </p:sp>
-      <p:sp>
-        <p:nvSpPr>
-          <p:cNvPr id="20" name="Shape 18"/>
-          <p:cNvSpPr/>
-          <p:nvPr/>
-        </p:nvSpPr>
-        <p:spPr>
-          <a:xfrm>
-            <a:off x="10424160" y="0"/>
-            <a:ext cx="0" cy="6858000"/>
-          </a:xfrm>
-          <a:prstGeom prst="line">
-            <a:avLst/>
-          </a:prstGeom>
-          <a:noFill/>
-          <a:ln w="6350">
-            <a:solidFill>
-              <a:srgbClr val="1D3A5C"/>
-            </a:solidFill>
-            <a:prstDash val="solid"/>
-          </a:ln>
-        </p:spPr>
-      </p:sp>
-      <p:sp>
-        <p:nvSpPr>
-          <p:cNvPr id="21" name="Shape 19"/>
-          <p:cNvSpPr/>
-          <p:nvPr/>
-        </p:nvSpPr>
-        <p:spPr>
-          <a:xfrm>
-            <a:off x="10972800" y="0"/>
-            <a:ext cx="0" cy="6858000"/>
-          </a:xfrm>
-          <a:prstGeom prst="line">
-            <a:avLst/>
-          </a:prstGeom>
-          <a:noFill/>
-          <a:ln w="6350">
-            <a:solidFill>
-              <a:srgbClr val="1D3A5C"/>
-            </a:solidFill>
-            <a:prstDash val="solid"/>
-          </a:ln>
-        </p:spPr>
-      </p:sp>
-      <p:sp>
-        <p:nvSpPr>
-          <p:cNvPr id="22" name="Shape 20"/>
-          <p:cNvSpPr/>
-          <p:nvPr/>
-        </p:nvSpPr>
-        <p:spPr>
-          <a:xfrm>
-            <a:off x="11521440" y="0"/>
-            <a:ext cx="0" cy="6858000"/>
-          </a:xfrm>
-          <a:prstGeom prst="line">
-            <a:avLst/>
-          </a:prstGeom>
-          <a:noFill/>
-          <a:ln w="6350">
-            <a:solidFill>
-              <a:srgbClr val="1D3A5C"/>
-            </a:solidFill>
-            <a:prstDash val="solid"/>
-          </a:ln>
-        </p:spPr>
-      </p:sp>
-      <p:sp>
-        <p:nvSpPr>
-          <p:cNvPr id="23" name="Shape 21"/>
-          <p:cNvSpPr/>
-          <p:nvPr/>
-        </p:nvSpPr>
-        <p:spPr>
-          <a:xfrm>
-            <a:off x="12070080" y="0"/>
-            <a:ext cx="0" cy="6858000"/>
-          </a:xfrm>
-          <a:prstGeom prst="line">
-            <a:avLst/>
-          </a:prstGeom>
-          <a:noFill/>
-          <a:ln w="6350">
-            <a:solidFill>
-              <a:srgbClr val="1D3A5C"/>
-            </a:solidFill>
-            <a:prstDash val="solid"/>
-          </a:ln>
-        </p:spPr>
-      </p:sp>
-      <p:sp>
-        <p:nvSpPr>
-          <p:cNvPr id="24" name="Shape 22"/>
-          <p:cNvSpPr/>
-          <p:nvPr/>
-        </p:nvSpPr>
-        <p:spPr>
-          <a:xfrm>
-            <a:off x="0" y="548640"/>
-            <a:ext cx="12191695" cy="0"/>
-          </a:xfrm>
-          <a:prstGeom prst="line">
-            <a:avLst/>
-          </a:prstGeom>
-          <a:noFill/>
-          <a:ln w="6350">
-            <a:solidFill>
-              <a:srgbClr val="1D3A5C"/>
-            </a:solidFill>
-            <a:prstDash val="solid"/>
-          </a:ln>
-        </p:spPr>
-      </p:sp>
-      <p:sp>
-        <p:nvSpPr>
-          <p:cNvPr id="25" name="Shape 23"/>
-          <p:cNvSpPr/>
-          <p:nvPr/>
-        </p:nvSpPr>
-        <p:spPr>
-          <a:xfrm>
-            <a:off x="0" y="1097280"/>
-            <a:ext cx="12191695" cy="0"/>
-          </a:xfrm>
-          <a:prstGeom prst="line">
-            <a:avLst/>
-          </a:prstGeom>
-          <a:noFill/>
-          <a:ln w="6350">
-            <a:solidFill>
-              <a:srgbClr val="1D3A5C"/>
-            </a:solidFill>
-            <a:prstDash val="solid"/>
-          </a:ln>
-        </p:spPr>
-      </p:sp>
-      <p:sp>
-        <p:nvSpPr>
-          <p:cNvPr id="26" name="Shape 24"/>
-          <p:cNvSpPr/>
-          <p:nvPr/>
-        </p:nvSpPr>
-        <p:spPr>
-          <a:xfrm>
-            <a:off x="0" y="1645920"/>
-            <a:ext cx="12191695" cy="0"/>
-          </a:xfrm>
-          <a:prstGeom prst="line">
-            <a:avLst/>
-          </a:prstGeom>
-          <a:noFill/>
-          <a:ln w="6350">
-            <a:solidFill>
-              <a:srgbClr val="1D3A5C"/>
-            </a:solidFill>
-            <a:prstDash val="solid"/>
-          </a:ln>
-        </p:spPr>
-      </p:sp>
-      <p:sp>
-        <p:nvSpPr>
-          <p:cNvPr id="27" name="Shape 25"/>
-          <p:cNvSpPr/>
-          <p:nvPr/>
-        </p:nvSpPr>
-        <p:spPr>
-          <a:xfrm>
-            <a:off x="0" y="2194560"/>
-            <a:ext cx="12191695" cy="0"/>
-          </a:xfrm>
-          <a:prstGeom prst="line">
-            <a:avLst/>
-          </a:prstGeom>
-          <a:noFill/>
-          <a:ln w="6350">
-            <a:solidFill>
-              <a:srgbClr val="1D3A5C"/>
-            </a:solidFill>
-            <a:prstDash val="solid"/>
-          </a:ln>
-        </p:spPr>
-      </p:sp>
-      <p:sp>
-        <p:nvSpPr>
-          <p:cNvPr id="28" name="Shape 26"/>
-          <p:cNvSpPr/>
-          <p:nvPr/>
-        </p:nvSpPr>
-        <p:spPr>
-          <a:xfrm>
-            <a:off x="0" y="2743200"/>
-            <a:ext cx="12191695" cy="0"/>
-          </a:xfrm>
-          <a:prstGeom prst="line">
-            <a:avLst/>
-          </a:prstGeom>
-          <a:noFill/>
-          <a:ln w="6350">
-            <a:solidFill>
-              <a:srgbClr val="1D3A5C"/>
-            </a:solidFill>
-            <a:prstDash val="solid"/>
-          </a:ln>
-        </p:spPr>
-      </p:sp>
-      <p:sp>
-        <p:nvSpPr>
-          <p:cNvPr id="29" name="Shape 27"/>
-          <p:cNvSpPr/>
-          <p:nvPr/>
-        </p:nvSpPr>
-        <p:spPr>
-          <a:xfrm>
-            <a:off x="0" y="3291840"/>
-            <a:ext cx="12191695" cy="0"/>
-          </a:xfrm>
-          <a:prstGeom prst="line">
-            <a:avLst/>
-          </a:prstGeom>
-          <a:noFill/>
-          <a:ln w="6350">
-            <a:solidFill>
-              <a:srgbClr val="1D3A5C"/>
-            </a:solidFill>
-            <a:prstDash val="solid"/>
-          </a:ln>
-        </p:spPr>
-      </p:sp>
-      <p:sp>
-        <p:nvSpPr>
-          <p:cNvPr id="30" name="Shape 28"/>
-          <p:cNvSpPr/>
-          <p:nvPr/>
-        </p:nvSpPr>
-        <p:spPr>
-          <a:xfrm>
-            <a:off x="0" y="3840480"/>
-            <a:ext cx="12191695" cy="0"/>
-          </a:xfrm>
-          <a:prstGeom prst="line">
-            <a:avLst/>
-          </a:prstGeom>
-          <a:noFill/>
-          <a:ln w="6350">
-            <a:solidFill>
-              <a:srgbClr val="1D3A5C"/>
-            </a:solidFill>
-            <a:prstDash val="solid"/>
-          </a:ln>
-        </p:spPr>
-      </p:sp>
-      <p:sp>
-        <p:nvSpPr>
-          <p:cNvPr id="31" name="Shape 29"/>
-          <p:cNvSpPr/>
-          <p:nvPr/>
-        </p:nvSpPr>
-        <p:spPr>
-          <a:xfrm>
-            <a:off x="0" y="4389120"/>
-            <a:ext cx="12191695" cy="0"/>
-          </a:xfrm>
-          <a:prstGeom prst="line">
-            <a:avLst/>
-          </a:prstGeom>
-          <a:noFill/>
-          <a:ln w="6350">
-            <a:solidFill>
-              <a:srgbClr val="1D3A5C"/>
-            </a:solidFill>
-            <a:prstDash val="solid"/>
-          </a:ln>
-        </p:spPr>
-      </p:sp>
-      <p:sp>
-        <p:nvSpPr>
-          <p:cNvPr id="32" name="Shape 30"/>
-          <p:cNvSpPr/>
-          <p:nvPr/>
-        </p:nvSpPr>
-        <p:spPr>
-          <a:xfrm>
-            <a:off x="0" y="4937760"/>
-            <a:ext cx="12191695" cy="0"/>
-          </a:xfrm>
-          <a:prstGeom prst="line">
-            <a:avLst/>
-          </a:prstGeom>
-          <a:noFill/>
-          <a:ln w="6350">
-            <a:solidFill>
-              <a:srgbClr val="1D3A5C"/>
-            </a:solidFill>
-            <a:prstDash val="solid"/>
-          </a:ln>
-        </p:spPr>
-      </p:sp>
-      <p:sp>
-        <p:nvSpPr>
-          <p:cNvPr id="33" name="Shape 31"/>
-          <p:cNvSpPr/>
-          <p:nvPr/>
-        </p:nvSpPr>
-        <p:spPr>
-          <a:xfrm>
-            <a:off x="0" y="5486400"/>
-            <a:ext cx="12191695" cy="0"/>
-          </a:xfrm>
-          <a:prstGeom prst="line">
-            <a:avLst/>
-          </a:prstGeom>
-          <a:noFill/>
-          <a:ln w="6350">
-            <a:solidFill>
-              <a:srgbClr val="1D3A5C"/>
-            </a:solidFill>
-            <a:prstDash val="solid"/>
-          </a:ln>
-        </p:spPr>
-      </p:sp>
-      <p:sp>
-        <p:nvSpPr>
-          <p:cNvPr id="34" name="Shape 32"/>
-          <p:cNvSpPr/>
-          <p:nvPr/>
-        </p:nvSpPr>
-        <p:spPr>
-          <a:xfrm>
-            <a:off x="0" y="6035040"/>
-            <a:ext cx="12191695" cy="0"/>
-          </a:xfrm>
-          <a:prstGeom prst="line">
-            <a:avLst/>
-          </a:prstGeom>
-          <a:noFill/>
-          <a:ln w="6350">
-            <a:solidFill>
-              <a:srgbClr val="1D3A5C"/>
-            </a:solidFill>
-            <a:prstDash val="solid"/>
-          </a:ln>
-        </p:spPr>
-      </p:sp>
-      <p:sp>
-        <p:nvSpPr>
-          <p:cNvPr id="35" name="Shape 33"/>
-          <p:cNvSpPr/>
-          <p:nvPr/>
-        </p:nvSpPr>
-        <p:spPr>
-          <a:xfrm>
-            <a:off x="0" y="6583680"/>
-            <a:ext cx="12191695" cy="0"/>
-          </a:xfrm>
-          <a:prstGeom prst="line">
-            <a:avLst/>
-          </a:prstGeom>
-          <a:noFill/>
-          <a:ln w="6350">
-            <a:solidFill>
-              <a:srgbClr val="1D3A5C"/>
-            </a:solidFill>
-            <a:prstDash val="solid"/>
-          </a:ln>
-        </p:spPr>
-      </p:sp>
-      <p:sp>
-        <p:nvSpPr>
-          <p:cNvPr id="36" name="Text 34"/>
+          <p:cNvPr id="2" name="Text 0"/>
           <p:cNvSpPr txBox="1"/>
           <p:nvPr/>
         </p:nvSpPr>
@@ -2588,7 +1813,7 @@
       </p:sp>
       <p:sp>
         <p:nvSpPr>
-          <p:cNvPr id="37" name="Text 35"/>
+          <p:cNvPr id="3" name="Text 1"/>
           <p:cNvSpPr txBox="1"/>
           <p:nvPr/>
         </p:nvSpPr>
@@ -2627,7 +1852,7 @@
       </p:sp>
       <p:sp>
         <p:nvSpPr>
-          <p:cNvPr id="38" name="Text 36"/>
+          <p:cNvPr id="4" name="Text 2"/>
           <p:cNvSpPr txBox="1"/>
           <p:nvPr/>
         </p:nvSpPr>
@@ -2689,7 +1914,7 @@
       </p:sp>
       <p:sp>
         <p:nvSpPr>
-          <p:cNvPr id="39" name="Shape 37"/>
+          <p:cNvPr id="5" name="Shape 3"/>
           <p:cNvSpPr/>
           <p:nvPr/>
         </p:nvSpPr>
@@ -2711,7 +1936,7 @@
       </p:sp>
       <p:sp>
         <p:nvSpPr>
-          <p:cNvPr id="40" name="Text 38"/>
+          <p:cNvPr id="6" name="Text 4"/>
           <p:cNvSpPr txBox="1"/>
           <p:nvPr/>
         </p:nvSpPr>
@@ -2750,7 +1975,7 @@
       </p:sp>
       <p:sp>
         <p:nvSpPr>
-          <p:cNvPr id="41" name="Text 39"/>
+          <p:cNvPr id="7" name="Text 5"/>
           <p:cNvSpPr txBox="1"/>
           <p:nvPr/>
         </p:nvSpPr>
@@ -2800,9 +2025,16 @@
   <p:cSld name="Slide 10">
     <p:bg>
       <p:bgPr>
-        <a:solidFill>
-          <a:srgbClr val="12233A"/>
-        </a:solidFill>
+        <a:blipFill dpi="0" rotWithShape="1">
+          <a:blip r:embed="rId1">
+            <a:lum/>
+          </a:blip>
+          <a:srcRect/>
+          <a:stretch>
+            <a:fillRect/>
+          </a:stretch>
+        </a:blipFill>
+        <a:effectLst/>
       </p:bgPr>
     </p:bg>
     <p:spTree>
@@ -4306,9 +3538,16 @@
   <p:cSld name="Slide 11">
     <p:bg>
       <p:bgPr>
-        <a:solidFill>
-          <a:srgbClr val="12233A"/>
-        </a:solidFill>
+        <a:blipFill dpi="0" rotWithShape="1">
+          <a:blip r:embed="rId1">
+            <a:lum/>
+          </a:blip>
+          <a:srcRect/>
+          <a:stretch>
+            <a:fillRect/>
+          </a:stretch>
+        </a:blipFill>
+        <a:effectLst/>
       </p:bgPr>
     </p:bg>
     <p:spTree>
@@ -5410,9 +4649,16 @@
   <p:cSld name="Slide 2">
     <p:bg>
       <p:bgPr>
-        <a:solidFill>
-          <a:srgbClr val="EEF1F3"/>
-        </a:solidFill>
+        <a:blipFill dpi="0" rotWithShape="1">
+          <a:blip r:embed="rId1">
+            <a:lum/>
+          </a:blip>
+          <a:srcRect/>
+          <a:stretch>
+            <a:fillRect/>
+          </a:stretch>
+        </a:blipFill>
+        <a:effectLst/>
       </p:bgPr>
     </p:bg>
     <p:spTree>
@@ -5448,7 +4694,7 @@
           </a:solidFill>
           <a:ln w="19050">
             <a:solidFill>
-              <a:srgbClr val="1C2530"/>
+              <a:srgbClr val="022049"/>
             </a:solidFill>
             <a:prstDash val="solid"/>
           </a:ln>
@@ -5550,7 +4796,7 @@
             <a:r>
               <a:rPr lang="en-US" sz="1300" b="1" dirty="0">
                 <a:solidFill>
-                  <a:srgbClr val="1C2530"/>
+                  <a:srgbClr val="022049"/>
                 </a:solidFill>
                 <a:latin typeface="Arial" pitchFamily="34" charset="0"/>
                 <a:ea typeface="Arial" pitchFamily="34" charset="-122"/>
@@ -5589,7 +4835,7 @@
             <a:r>
               <a:rPr lang="en-US" sz="850" spc="100" kern="0" dirty="0">
                 <a:solidFill>
-                  <a:srgbClr val="5B6672"/>
+                  <a:srgbClr val="4B4B4B"/>
                 </a:solidFill>
                 <a:latin typeface="Courier New" pitchFamily="34" charset="0"/>
                 <a:ea typeface="Courier New" pitchFamily="34" charset="-122"/>
@@ -5655,7 +4901,7 @@
             <a:r>
               <a:rPr lang="en-US" sz="950" dirty="0">
                 <a:solidFill>
-                  <a:srgbClr val="5B6672"/>
+                  <a:srgbClr val="4B4B4B"/>
                 </a:solidFill>
                 <a:latin typeface="Courier New" pitchFamily="34" charset="0"/>
                 <a:ea typeface="Courier New" pitchFamily="34" charset="-122"/>
@@ -5694,7 +4940,7 @@
             <a:r>
               <a:rPr lang="en-US" sz="750" spc="100" kern="0" dirty="0">
                 <a:solidFill>
-                  <a:srgbClr val="5B6672"/>
+                  <a:srgbClr val="4B4B4B"/>
                 </a:solidFill>
                 <a:latin typeface="Courier New" pitchFamily="34" charset="0"/>
                 <a:ea typeface="Courier New" pitchFamily="34" charset="-122"/>
@@ -5733,7 +4979,7 @@
             <a:r>
               <a:rPr lang="en-US" sz="1050" dirty="0">
                 <a:solidFill>
-                  <a:srgbClr val="1C2530"/>
+                  <a:srgbClr val="022049"/>
                 </a:solidFill>
                 <a:latin typeface="Courier New" pitchFamily="34" charset="0"/>
                 <a:ea typeface="Courier New" pitchFamily="34" charset="-122"/>
@@ -5836,7 +5082,7 @@
             <a:r>
               <a:rPr lang="en-US" sz="800" spc="100" kern="0" dirty="0">
                 <a:solidFill>
-                  <a:srgbClr val="5B6672"/>
+                  <a:srgbClr val="4B4B4B"/>
                 </a:solidFill>
                 <a:latin typeface="Courier New" pitchFamily="34" charset="0"/>
                 <a:ea typeface="Courier New" pitchFamily="34" charset="-122"/>
@@ -5883,7 +5129,7 @@
             <a:avLst/>
           </a:prstGeom>
           <a:solidFill>
-            <a:srgbClr val="C1432A"/>
+            <a:srgbClr val="022049"/>
           </a:solidFill>
           <a:ln/>
         </p:spPr>
@@ -5915,7 +5161,7 @@
             <a:r>
               <a:rPr lang="en-US" sz="1050" b="1" dirty="0">
                 <a:solidFill>
-                  <a:srgbClr val="C1432A"/>
+                  <a:srgbClr val="022049"/>
                 </a:solidFill>
                 <a:latin typeface="Calibri" pitchFamily="34" charset="0"/>
                 <a:ea typeface="Calibri" pitchFamily="34" charset="-122"/>
@@ -5954,7 +5200,7 @@
             <a:r>
               <a:rPr lang="en-US" sz="1050" dirty="0">
                 <a:solidFill>
-                  <a:srgbClr val="1C2530"/>
+                  <a:srgbClr val="022049"/>
                 </a:solidFill>
                 <a:latin typeface="Calibri" pitchFamily="34" charset="0"/>
                 <a:ea typeface="Calibri" pitchFamily="34" charset="-122"/>
@@ -5993,7 +5239,7 @@
             <a:r>
               <a:rPr lang="en-US" sz="1050" dirty="0">
                 <a:solidFill>
-                  <a:srgbClr val="1C2530"/>
+                  <a:srgbClr val="022049"/>
                 </a:solidFill>
                 <a:latin typeface="Calibri" pitchFamily="34" charset="0"/>
                 <a:ea typeface="Calibri" pitchFamily="34" charset="-122"/>
@@ -6032,7 +5278,7 @@
             <a:r>
               <a:rPr lang="en-US" sz="1050" dirty="0">
                 <a:solidFill>
-                  <a:srgbClr val="1C2530"/>
+                  <a:srgbClr val="022049"/>
                 </a:solidFill>
                 <a:latin typeface="Calibri" pitchFamily="34" charset="0"/>
                 <a:ea typeface="Calibri" pitchFamily="34" charset="-122"/>
@@ -6071,7 +5317,7 @@
             <a:r>
               <a:rPr lang="en-US" sz="1050" dirty="0">
                 <a:solidFill>
-                  <a:srgbClr val="1C2530"/>
+                  <a:srgbClr val="022049"/>
                 </a:solidFill>
                 <a:latin typeface="Calibri" pitchFamily="34" charset="0"/>
                 <a:ea typeface="Calibri" pitchFamily="34" charset="-122"/>
@@ -6110,7 +5356,7 @@
             <a:r>
               <a:rPr lang="en-US" sz="1050" dirty="0">
                 <a:solidFill>
-                  <a:srgbClr val="1C2530"/>
+                  <a:srgbClr val="022049"/>
                 </a:solidFill>
                 <a:latin typeface="Calibri" pitchFamily="34" charset="0"/>
                 <a:ea typeface="Calibri" pitchFamily="34" charset="-122"/>
@@ -6149,7 +5395,7 @@
             <a:r>
               <a:rPr lang="en-US" sz="1050" dirty="0">
                 <a:solidFill>
-                  <a:srgbClr val="1C2530"/>
+                  <a:srgbClr val="022049"/>
                 </a:solidFill>
                 <a:latin typeface="Calibri" pitchFamily="34" charset="0"/>
                 <a:ea typeface="Calibri" pitchFamily="34" charset="-122"/>
@@ -6188,7 +5434,7 @@
             <a:r>
               <a:rPr lang="en-US" sz="1050" dirty="0">
                 <a:solidFill>
-                  <a:srgbClr val="1C2530"/>
+                  <a:srgbClr val="022049"/>
                 </a:solidFill>
                 <a:latin typeface="Calibri" pitchFamily="34" charset="0"/>
                 <a:ea typeface="Calibri" pitchFamily="34" charset="-122"/>
@@ -6227,7 +5473,7 @@
             <a:r>
               <a:rPr lang="en-US" sz="1050" dirty="0">
                 <a:solidFill>
-                  <a:srgbClr val="1C2530"/>
+                  <a:srgbClr val="022049"/>
                 </a:solidFill>
                 <a:latin typeface="Calibri" pitchFamily="34" charset="0"/>
                 <a:ea typeface="Calibri" pitchFamily="34" charset="-122"/>
@@ -6266,7 +5512,7 @@
             <a:r>
               <a:rPr lang="en-US" sz="2600" b="1" spc="50" kern="0" dirty="0">
                 <a:solidFill>
-                  <a:srgbClr val="1C2530"/>
+                  <a:srgbClr val="022049"/>
                 </a:solidFill>
                 <a:latin typeface="Arial" pitchFamily="34" charset="0"/>
                 <a:ea typeface="Arial" pitchFamily="34" charset="-122"/>
@@ -6305,7 +5551,7 @@
             <a:r>
               <a:rPr lang="en-US" sz="1150" dirty="0">
                 <a:solidFill>
-                  <a:srgbClr val="5B6672"/>
+                  <a:srgbClr val="4B4B4B"/>
                 </a:solidFill>
                 <a:latin typeface="Calibri" pitchFamily="34" charset="0"/>
                 <a:ea typeface="Calibri" pitchFamily="34" charset="-122"/>
@@ -6334,7 +5580,7 @@
           <a:noFill/>
           <a:ln w="15875">
             <a:solidFill>
-              <a:srgbClr val="1C2530"/>
+              <a:srgbClr val="022049"/>
             </a:solidFill>
             <a:prstDash val="solid"/>
           </a:ln>
@@ -6349,15 +5595,15 @@
         <p:spPr>
           <a:xfrm>
             <a:off x="2286000" y="1956816"/>
-            <a:ext cx="1475689" cy="566928"/>
+            <a:ext cx="1475689" cy="987552"/>
           </a:xfrm>
           <a:prstGeom prst="roundRect">
             <a:avLst>
-              <a:gd name="adj" fmla="val 8065"/>
+              <a:gd name="adj" fmla="val 5556"/>
             </a:avLst>
           </a:prstGeom>
           <a:solidFill>
-            <a:srgbClr val="E3E8EA"/>
+            <a:srgbClr val="FBFCFC"/>
           </a:solidFill>
           <a:ln w="12700">
             <a:solidFill>
@@ -6365,27 +5611,58 @@
             </a:solidFill>
             <a:prstDash val="solid"/>
           </a:ln>
-        </p:spPr>
-      </p:sp>
-      <p:sp>
-        <p:nvSpPr>
-          <p:cNvPr id="30" name="Text 28"/>
-          <p:cNvSpPr txBox="1"/>
-          <p:nvPr/>
-        </p:nvSpPr>
-        <p:spPr>
-          <a:xfrm>
-            <a:off x="2286000" y="1956816"/>
-            <a:ext cx="1475689" cy="566928"/>
-          </a:xfrm>
-          <a:prstGeom prst="rect">
-            <a:avLst/>
-          </a:prstGeom>
-          <a:noFill/>
-          <a:ln/>
-        </p:spPr>
-        <p:txBody>
-          <a:bodyPr wrap="square" lIns="0" tIns="0" rIns="0" bIns="0" rtlCol="0" anchor="ctr"/>
+          <a:effectLst>
+            <a:outerShdw sx="100000" sy="100000" kx="0" ky="0" algn="bl" rotWithShape="0" blurRad="63500" dist="25400" dir="5400000">
+              <a:srgbClr val="022049">
+                <a:alpha val="14000"/>
+              </a:srgbClr>
+            </a:outerShdw>
+          </a:effectLst>
+        </p:spPr>
+      </p:sp>
+      <p:pic>
+        <p:nvPicPr>
+          <p:cNvPr id="30" name="Image 0" descr="/tmp/claude-0/-home-user-drawing-set/4abccc73-5df9-5ad5-9792-19a3f012db48/scratchpad/icons/standards.png">    </p:cNvPr>
+          <p:cNvPicPr>
+            <a:picLocks noChangeAspect="1"/>
+          </p:cNvPicPr>
+          <p:nvPr/>
+        </p:nvPicPr>
+        <p:blipFill>
+          <a:blip r:embed="rId2"/>
+          <a:stretch>
+            <a:fillRect/>
+          </a:stretch>
+        </p:blipFill>
+        <p:spPr>
+          <a:xfrm>
+            <a:off x="2850109" y="2084832"/>
+            <a:ext cx="347472" cy="347472"/>
+          </a:xfrm>
+          <a:prstGeom prst="rect">
+            <a:avLst/>
+          </a:prstGeom>
+        </p:spPr>
+      </p:pic>
+      <p:sp>
+        <p:nvSpPr>
+          <p:cNvPr id="31" name="Text 28"/>
+          <p:cNvSpPr txBox="1"/>
+          <p:nvPr/>
+        </p:nvSpPr>
+        <p:spPr>
+          <a:xfrm>
+            <a:off x="2286000" y="2487168"/>
+            <a:ext cx="1475689" cy="365760"/>
+          </a:xfrm>
+          <a:prstGeom prst="rect">
+            <a:avLst/>
+          </a:prstGeom>
+          <a:noFill/>
+          <a:ln/>
+        </p:spPr>
+        <p:txBody>
+          <a:bodyPr wrap="square" lIns="0" tIns="0" rIns="0" bIns="0" rtlCol="0" anchor="t"/>
           <a:lstStyle/>
           <a:p>
             <a:pPr algn="ctr" indent="0" marL="0">
@@ -6394,7 +5671,7 @@
             <a:r>
               <a:rPr lang="en-US" sz="950" b="1" dirty="0">
                 <a:solidFill>
-                  <a:srgbClr val="1C2530"/>
+                  <a:srgbClr val="022049"/>
                 </a:solidFill>
                 <a:latin typeface="Arial" pitchFamily="34" charset="0"/>
                 <a:ea typeface="Arial" pitchFamily="34" charset="-122"/>
@@ -6408,22 +5685,22 @@
       </p:sp>
       <p:sp>
         <p:nvSpPr>
-          <p:cNvPr id="31" name="Shape 29"/>
+          <p:cNvPr id="32" name="Shape 29"/>
           <p:cNvSpPr/>
           <p:nvPr/>
         </p:nvSpPr>
         <p:spPr>
           <a:xfrm>
             <a:off x="3907993" y="1956816"/>
-            <a:ext cx="1475689" cy="566928"/>
+            <a:ext cx="1475689" cy="987552"/>
           </a:xfrm>
           <a:prstGeom prst="roundRect">
             <a:avLst>
-              <a:gd name="adj" fmla="val 8065"/>
+              <a:gd name="adj" fmla="val 5556"/>
             </a:avLst>
           </a:prstGeom>
           <a:solidFill>
-            <a:srgbClr val="E3E8EA"/>
+            <a:srgbClr val="FBFCFC"/>
           </a:solidFill>
           <a:ln w="12700">
             <a:solidFill>
@@ -6431,27 +5708,58 @@
             </a:solidFill>
             <a:prstDash val="solid"/>
           </a:ln>
-        </p:spPr>
-      </p:sp>
-      <p:sp>
-        <p:nvSpPr>
-          <p:cNvPr id="32" name="Text 30"/>
-          <p:cNvSpPr txBox="1"/>
-          <p:nvPr/>
-        </p:nvSpPr>
-        <p:spPr>
-          <a:xfrm>
-            <a:off x="3907993" y="1956816"/>
-            <a:ext cx="1475689" cy="566928"/>
-          </a:xfrm>
-          <a:prstGeom prst="rect">
-            <a:avLst/>
-          </a:prstGeom>
-          <a:noFill/>
-          <a:ln/>
-        </p:spPr>
-        <p:txBody>
-          <a:bodyPr wrap="square" lIns="0" tIns="0" rIns="0" bIns="0" rtlCol="0" anchor="ctr"/>
+          <a:effectLst>
+            <a:outerShdw sx="100000" sy="100000" kx="0" ky="0" algn="bl" rotWithShape="0" blurRad="63500" dist="25400" dir="5400000">
+              <a:srgbClr val="022049">
+                <a:alpha val="14000"/>
+              </a:srgbClr>
+            </a:outerShdw>
+          </a:effectLst>
+        </p:spPr>
+      </p:sp>
+      <p:pic>
+        <p:nvPicPr>
+          <p:cNvPr id="33" name="Image 1" descr="/tmp/claude-0/-home-user-drawing-set/4abccc73-5df9-5ad5-9792-19a3f012db48/scratchpad/icons/templates.png">    </p:cNvPr>
+          <p:cNvPicPr>
+            <a:picLocks noChangeAspect="1"/>
+          </p:cNvPicPr>
+          <p:nvPr/>
+        </p:nvPicPr>
+        <p:blipFill>
+          <a:blip r:embed="rId3"/>
+          <a:stretch>
+            <a:fillRect/>
+          </a:stretch>
+        </p:blipFill>
+        <p:spPr>
+          <a:xfrm>
+            <a:off x="4472102" y="2084832"/>
+            <a:ext cx="347472" cy="347472"/>
+          </a:xfrm>
+          <a:prstGeom prst="rect">
+            <a:avLst/>
+          </a:prstGeom>
+        </p:spPr>
+      </p:pic>
+      <p:sp>
+        <p:nvSpPr>
+          <p:cNvPr id="34" name="Text 30"/>
+          <p:cNvSpPr txBox="1"/>
+          <p:nvPr/>
+        </p:nvSpPr>
+        <p:spPr>
+          <a:xfrm>
+            <a:off x="3907993" y="2487168"/>
+            <a:ext cx="1475689" cy="365760"/>
+          </a:xfrm>
+          <a:prstGeom prst="rect">
+            <a:avLst/>
+          </a:prstGeom>
+          <a:noFill/>
+          <a:ln/>
+        </p:spPr>
+        <p:txBody>
+          <a:bodyPr wrap="square" lIns="0" tIns="0" rIns="0" bIns="0" rtlCol="0" anchor="t"/>
           <a:lstStyle/>
           <a:p>
             <a:pPr algn="ctr" indent="0" marL="0">
@@ -6460,7 +5768,7 @@
             <a:r>
               <a:rPr lang="en-US" sz="950" b="1" dirty="0">
                 <a:solidFill>
-                  <a:srgbClr val="1C2530"/>
+                  <a:srgbClr val="022049"/>
                 </a:solidFill>
                 <a:latin typeface="Arial" pitchFamily="34" charset="0"/>
                 <a:ea typeface="Arial" pitchFamily="34" charset="-122"/>
@@ -6474,22 +5782,22 @@
       </p:sp>
       <p:sp>
         <p:nvSpPr>
-          <p:cNvPr id="33" name="Shape 31"/>
+          <p:cNvPr id="35" name="Shape 31"/>
           <p:cNvSpPr/>
           <p:nvPr/>
         </p:nvSpPr>
         <p:spPr>
           <a:xfrm>
             <a:off x="5529986" y="1956816"/>
-            <a:ext cx="1475689" cy="566928"/>
+            <a:ext cx="1475689" cy="987552"/>
           </a:xfrm>
           <a:prstGeom prst="roundRect">
             <a:avLst>
-              <a:gd name="adj" fmla="val 8065"/>
+              <a:gd name="adj" fmla="val 5556"/>
             </a:avLst>
           </a:prstGeom>
           <a:solidFill>
-            <a:srgbClr val="E3E8EA"/>
+            <a:srgbClr val="FBFCFC"/>
           </a:solidFill>
           <a:ln w="12700">
             <a:solidFill>
@@ -6497,27 +5805,58 @@
             </a:solidFill>
             <a:prstDash val="solid"/>
           </a:ln>
-        </p:spPr>
-      </p:sp>
-      <p:sp>
-        <p:nvSpPr>
-          <p:cNvPr id="34" name="Text 32"/>
-          <p:cNvSpPr txBox="1"/>
-          <p:nvPr/>
-        </p:nvSpPr>
-        <p:spPr>
-          <a:xfrm>
-            <a:off x="5529986" y="1956816"/>
-            <a:ext cx="1475689" cy="566928"/>
-          </a:xfrm>
-          <a:prstGeom prst="rect">
-            <a:avLst/>
-          </a:prstGeom>
-          <a:noFill/>
-          <a:ln/>
-        </p:spPr>
-        <p:txBody>
-          <a:bodyPr wrap="square" lIns="0" tIns="0" rIns="0" bIns="0" rtlCol="0" anchor="ctr"/>
+          <a:effectLst>
+            <a:outerShdw sx="100000" sy="100000" kx="0" ky="0" algn="bl" rotWithShape="0" blurRad="63500" dist="25400" dir="5400000">
+              <a:srgbClr val="022049">
+                <a:alpha val="14000"/>
+              </a:srgbClr>
+            </a:outerShdw>
+          </a:effectLst>
+        </p:spPr>
+      </p:sp>
+      <p:pic>
+        <p:nvPicPr>
+          <p:cNvPr id="36" name="Image 2" descr="/tmp/claude-0/-home-user-drawing-set/4abccc73-5df9-5ad5-9792-19a3f012db48/scratchpad/icons/forms.png">    </p:cNvPr>
+          <p:cNvPicPr>
+            <a:picLocks noChangeAspect="1"/>
+          </p:cNvPicPr>
+          <p:nvPr/>
+        </p:nvPicPr>
+        <p:blipFill>
+          <a:blip r:embed="rId4"/>
+          <a:stretch>
+            <a:fillRect/>
+          </a:stretch>
+        </p:blipFill>
+        <p:spPr>
+          <a:xfrm>
+            <a:off x="6094095" y="2084832"/>
+            <a:ext cx="347472" cy="347472"/>
+          </a:xfrm>
+          <a:prstGeom prst="rect">
+            <a:avLst/>
+          </a:prstGeom>
+        </p:spPr>
+      </p:pic>
+      <p:sp>
+        <p:nvSpPr>
+          <p:cNvPr id="37" name="Text 32"/>
+          <p:cNvSpPr txBox="1"/>
+          <p:nvPr/>
+        </p:nvSpPr>
+        <p:spPr>
+          <a:xfrm>
+            <a:off x="5529986" y="2487168"/>
+            <a:ext cx="1475689" cy="365760"/>
+          </a:xfrm>
+          <a:prstGeom prst="rect">
+            <a:avLst/>
+          </a:prstGeom>
+          <a:noFill/>
+          <a:ln/>
+        </p:spPr>
+        <p:txBody>
+          <a:bodyPr wrap="square" lIns="0" tIns="0" rIns="0" bIns="0" rtlCol="0" anchor="t"/>
           <a:lstStyle/>
           <a:p>
             <a:pPr algn="ctr" indent="0" marL="0">
@@ -6526,7 +5865,7 @@
             <a:r>
               <a:rPr lang="en-US" sz="950" b="1" dirty="0">
                 <a:solidFill>
-                  <a:srgbClr val="1C2530"/>
+                  <a:srgbClr val="022049"/>
                 </a:solidFill>
                 <a:latin typeface="Arial" pitchFamily="34" charset="0"/>
                 <a:ea typeface="Arial" pitchFamily="34" charset="-122"/>
@@ -6540,22 +5879,22 @@
       </p:sp>
       <p:sp>
         <p:nvSpPr>
-          <p:cNvPr id="35" name="Shape 33"/>
+          <p:cNvPr id="38" name="Shape 33"/>
           <p:cNvSpPr/>
           <p:nvPr/>
         </p:nvSpPr>
         <p:spPr>
           <a:xfrm>
             <a:off x="7151980" y="1956816"/>
-            <a:ext cx="1475689" cy="566928"/>
+            <a:ext cx="1475689" cy="987552"/>
           </a:xfrm>
           <a:prstGeom prst="roundRect">
             <a:avLst>
-              <a:gd name="adj" fmla="val 8065"/>
+              <a:gd name="adj" fmla="val 5556"/>
             </a:avLst>
           </a:prstGeom>
           <a:solidFill>
-            <a:srgbClr val="E3E8EA"/>
+            <a:srgbClr val="FBFCFC"/>
           </a:solidFill>
           <a:ln w="12700">
             <a:solidFill>
@@ -6563,27 +5902,58 @@
             </a:solidFill>
             <a:prstDash val="solid"/>
           </a:ln>
-        </p:spPr>
-      </p:sp>
-      <p:sp>
-        <p:nvSpPr>
-          <p:cNvPr id="36" name="Text 34"/>
-          <p:cNvSpPr txBox="1"/>
-          <p:nvPr/>
-        </p:nvSpPr>
-        <p:spPr>
-          <a:xfrm>
-            <a:off x="7151980" y="1956816"/>
-            <a:ext cx="1475689" cy="566928"/>
-          </a:xfrm>
-          <a:prstGeom prst="rect">
-            <a:avLst/>
-          </a:prstGeom>
-          <a:noFill/>
-          <a:ln/>
-        </p:spPr>
-        <p:txBody>
-          <a:bodyPr wrap="square" lIns="0" tIns="0" rIns="0" bIns="0" rtlCol="0" anchor="ctr"/>
+          <a:effectLst>
+            <a:outerShdw sx="100000" sy="100000" kx="0" ky="0" algn="bl" rotWithShape="0" blurRad="63500" dist="25400" dir="5400000">
+              <a:srgbClr val="022049">
+                <a:alpha val="14000"/>
+              </a:srgbClr>
+            </a:outerShdw>
+          </a:effectLst>
+        </p:spPr>
+      </p:sp>
+      <p:pic>
+        <p:nvPicPr>
+          <p:cNvPr id="39" name="Image 3" descr="/tmp/claude-0/-home-user-drawing-set/4abccc73-5df9-5ad5-9792-19a3f012db48/scratchpad/icons/policies.png">    </p:cNvPr>
+          <p:cNvPicPr>
+            <a:picLocks noChangeAspect="1"/>
+          </p:cNvPicPr>
+          <p:nvPr/>
+        </p:nvPicPr>
+        <p:blipFill>
+          <a:blip r:embed="rId5"/>
+          <a:stretch>
+            <a:fillRect/>
+          </a:stretch>
+        </p:blipFill>
+        <p:spPr>
+          <a:xfrm>
+            <a:off x="7716088" y="2084832"/>
+            <a:ext cx="347472" cy="347472"/>
+          </a:xfrm>
+          <a:prstGeom prst="rect">
+            <a:avLst/>
+          </a:prstGeom>
+        </p:spPr>
+      </p:pic>
+      <p:sp>
+        <p:nvSpPr>
+          <p:cNvPr id="40" name="Text 34"/>
+          <p:cNvSpPr txBox="1"/>
+          <p:nvPr/>
+        </p:nvSpPr>
+        <p:spPr>
+          <a:xfrm>
+            <a:off x="7151980" y="2487168"/>
+            <a:ext cx="1475689" cy="365760"/>
+          </a:xfrm>
+          <a:prstGeom prst="rect">
+            <a:avLst/>
+          </a:prstGeom>
+          <a:noFill/>
+          <a:ln/>
+        </p:spPr>
+        <p:txBody>
+          <a:bodyPr wrap="square" lIns="0" tIns="0" rIns="0" bIns="0" rtlCol="0" anchor="t"/>
           <a:lstStyle/>
           <a:p>
             <a:pPr algn="ctr" indent="0" marL="0">
@@ -6592,7 +5962,7 @@
             <a:r>
               <a:rPr lang="en-US" sz="950" b="1" dirty="0">
                 <a:solidFill>
-                  <a:srgbClr val="1C2530"/>
+                  <a:srgbClr val="022049"/>
                 </a:solidFill>
                 <a:latin typeface="Arial" pitchFamily="34" charset="0"/>
                 <a:ea typeface="Arial" pitchFamily="34" charset="-122"/>
@@ -6606,22 +5976,22 @@
       </p:sp>
       <p:sp>
         <p:nvSpPr>
-          <p:cNvPr id="37" name="Shape 35"/>
+          <p:cNvPr id="41" name="Shape 35"/>
           <p:cNvSpPr/>
           <p:nvPr/>
         </p:nvSpPr>
         <p:spPr>
           <a:xfrm>
             <a:off x="8773973" y="1956816"/>
-            <a:ext cx="1475689" cy="566928"/>
+            <a:ext cx="1475689" cy="987552"/>
           </a:xfrm>
           <a:prstGeom prst="roundRect">
             <a:avLst>
-              <a:gd name="adj" fmla="val 8065"/>
+              <a:gd name="adj" fmla="val 5556"/>
             </a:avLst>
           </a:prstGeom>
           <a:solidFill>
-            <a:srgbClr val="E3E8EA"/>
+            <a:srgbClr val="FBFCFC"/>
           </a:solidFill>
           <a:ln w="12700">
             <a:solidFill>
@@ -6629,27 +5999,58 @@
             </a:solidFill>
             <a:prstDash val="solid"/>
           </a:ln>
-        </p:spPr>
-      </p:sp>
-      <p:sp>
-        <p:nvSpPr>
-          <p:cNvPr id="38" name="Text 36"/>
-          <p:cNvSpPr txBox="1"/>
-          <p:nvPr/>
-        </p:nvSpPr>
-        <p:spPr>
-          <a:xfrm>
-            <a:off x="8773973" y="1956816"/>
-            <a:ext cx="1475689" cy="566928"/>
-          </a:xfrm>
-          <a:prstGeom prst="rect">
-            <a:avLst/>
-          </a:prstGeom>
-          <a:noFill/>
-          <a:ln/>
-        </p:spPr>
-        <p:txBody>
-          <a:bodyPr wrap="square" lIns="0" tIns="0" rIns="0" bIns="0" rtlCol="0" anchor="ctr"/>
+          <a:effectLst>
+            <a:outerShdw sx="100000" sy="100000" kx="0" ky="0" algn="bl" rotWithShape="0" blurRad="63500" dist="25400" dir="5400000">
+              <a:srgbClr val="022049">
+                <a:alpha val="14000"/>
+              </a:srgbClr>
+            </a:outerShdw>
+          </a:effectLst>
+        </p:spPr>
+      </p:sp>
+      <p:pic>
+        <p:nvPicPr>
+          <p:cNvPr id="42" name="Image 4" descr="/tmp/claude-0/-home-user-drawing-set/4abccc73-5df9-5ad5-9792-19a3f012db48/scratchpad/icons/sops.png">    </p:cNvPr>
+          <p:cNvPicPr>
+            <a:picLocks noChangeAspect="1"/>
+          </p:cNvPicPr>
+          <p:nvPr/>
+        </p:nvPicPr>
+        <p:blipFill>
+          <a:blip r:embed="rId6"/>
+          <a:stretch>
+            <a:fillRect/>
+          </a:stretch>
+        </p:blipFill>
+        <p:spPr>
+          <a:xfrm>
+            <a:off x="9338081" y="2084832"/>
+            <a:ext cx="347472" cy="347472"/>
+          </a:xfrm>
+          <a:prstGeom prst="rect">
+            <a:avLst/>
+          </a:prstGeom>
+        </p:spPr>
+      </p:pic>
+      <p:sp>
+        <p:nvSpPr>
+          <p:cNvPr id="43" name="Text 36"/>
+          <p:cNvSpPr txBox="1"/>
+          <p:nvPr/>
+        </p:nvSpPr>
+        <p:spPr>
+          <a:xfrm>
+            <a:off x="8773973" y="2487168"/>
+            <a:ext cx="1475689" cy="365760"/>
+          </a:xfrm>
+          <a:prstGeom prst="rect">
+            <a:avLst/>
+          </a:prstGeom>
+          <a:noFill/>
+          <a:ln/>
+        </p:spPr>
+        <p:txBody>
+          <a:bodyPr wrap="square" lIns="0" tIns="0" rIns="0" bIns="0" rtlCol="0" anchor="t"/>
           <a:lstStyle/>
           <a:p>
             <a:pPr algn="ctr" indent="0" marL="0">
@@ -6658,7 +6059,7 @@
             <a:r>
               <a:rPr lang="en-US" sz="950" b="1" dirty="0">
                 <a:solidFill>
-                  <a:srgbClr val="1C2530"/>
+                  <a:srgbClr val="022049"/>
                 </a:solidFill>
                 <a:latin typeface="Arial" pitchFamily="34" charset="0"/>
                 <a:ea typeface="Arial" pitchFamily="34" charset="-122"/>
@@ -6672,22 +6073,22 @@
       </p:sp>
       <p:sp>
         <p:nvSpPr>
-          <p:cNvPr id="39" name="Shape 37"/>
+          <p:cNvPr id="44" name="Shape 37"/>
           <p:cNvSpPr/>
           <p:nvPr/>
         </p:nvSpPr>
         <p:spPr>
           <a:xfrm>
             <a:off x="10395966" y="1956816"/>
-            <a:ext cx="1475689" cy="566928"/>
+            <a:ext cx="1475689" cy="987552"/>
           </a:xfrm>
           <a:prstGeom prst="roundRect">
             <a:avLst>
-              <a:gd name="adj" fmla="val 8065"/>
+              <a:gd name="adj" fmla="val 5556"/>
             </a:avLst>
           </a:prstGeom>
           <a:solidFill>
-            <a:srgbClr val="E3E8EA"/>
+            <a:srgbClr val="FBFCFC"/>
           </a:solidFill>
           <a:ln w="12700">
             <a:solidFill>
@@ -6695,27 +6096,58 @@
             </a:solidFill>
             <a:prstDash val="solid"/>
           </a:ln>
-        </p:spPr>
-      </p:sp>
-      <p:sp>
-        <p:nvSpPr>
-          <p:cNvPr id="40" name="Text 38"/>
-          <p:cNvSpPr txBox="1"/>
-          <p:nvPr/>
-        </p:nvSpPr>
-        <p:spPr>
-          <a:xfrm>
-            <a:off x="10395966" y="1956816"/>
-            <a:ext cx="1475689" cy="566928"/>
-          </a:xfrm>
-          <a:prstGeom prst="rect">
-            <a:avLst/>
-          </a:prstGeom>
-          <a:noFill/>
-          <a:ln/>
-        </p:spPr>
-        <p:txBody>
-          <a:bodyPr wrap="square" lIns="0" tIns="0" rIns="0" bIns="0" rtlCol="0" anchor="ctr"/>
+          <a:effectLst>
+            <a:outerShdw sx="100000" sy="100000" kx="0" ky="0" algn="bl" rotWithShape="0" blurRad="63500" dist="25400" dir="5400000">
+              <a:srgbClr val="022049">
+                <a:alpha val="14000"/>
+              </a:srgbClr>
+            </a:outerShdw>
+          </a:effectLst>
+        </p:spPr>
+      </p:sp>
+      <p:pic>
+        <p:nvPicPr>
+          <p:cNvPr id="45" name="Image 5" descr="/tmp/claude-0/-home-user-drawing-set/4abccc73-5df9-5ad5-9792-19a3f012db48/scratchpad/icons/revit.png">    </p:cNvPr>
+          <p:cNvPicPr>
+            <a:picLocks noChangeAspect="1"/>
+          </p:cNvPicPr>
+          <p:nvPr/>
+        </p:nvPicPr>
+        <p:blipFill>
+          <a:blip r:embed="rId7"/>
+          <a:stretch>
+            <a:fillRect/>
+          </a:stretch>
+        </p:blipFill>
+        <p:spPr>
+          <a:xfrm>
+            <a:off x="10960075" y="2084832"/>
+            <a:ext cx="347472" cy="347472"/>
+          </a:xfrm>
+          <a:prstGeom prst="rect">
+            <a:avLst/>
+          </a:prstGeom>
+        </p:spPr>
+      </p:pic>
+      <p:sp>
+        <p:nvSpPr>
+          <p:cNvPr id="46" name="Text 38"/>
+          <p:cNvSpPr txBox="1"/>
+          <p:nvPr/>
+        </p:nvSpPr>
+        <p:spPr>
+          <a:xfrm>
+            <a:off x="10395966" y="2487168"/>
+            <a:ext cx="1475689" cy="365760"/>
+          </a:xfrm>
+          <a:prstGeom prst="rect">
+            <a:avLst/>
+          </a:prstGeom>
+          <a:noFill/>
+          <a:ln/>
+        </p:spPr>
+        <p:txBody>
+          <a:bodyPr wrap="square" lIns="0" tIns="0" rIns="0" bIns="0" rtlCol="0" anchor="t"/>
           <a:lstStyle/>
           <a:p>
             <a:pPr algn="ctr" indent="0" marL="0">
@@ -6724,7 +6156,7 @@
             <a:r>
               <a:rPr lang="en-US" sz="950" b="1" dirty="0">
                 <a:solidFill>
-                  <a:srgbClr val="1C2530"/>
+                  <a:srgbClr val="022049"/>
                 </a:solidFill>
                 <a:latin typeface="Arial" pitchFamily="34" charset="0"/>
                 <a:ea typeface="Arial" pitchFamily="34" charset="-122"/>
@@ -6738,13 +6170,13 @@
       </p:sp>
       <p:sp>
         <p:nvSpPr>
-          <p:cNvPr id="41" name="Text 39"/>
-          <p:cNvSpPr txBox="1"/>
-          <p:nvPr/>
-        </p:nvSpPr>
-        <p:spPr>
-          <a:xfrm>
-            <a:off x="2286000" y="2743200"/>
+          <p:cNvPr id="47" name="Text 39"/>
+          <p:cNvSpPr txBox="1"/>
+          <p:nvPr/>
+        </p:nvSpPr>
+        <p:spPr>
+          <a:xfrm>
+            <a:off x="2286000" y="3163824"/>
             <a:ext cx="3657600" cy="219456"/>
           </a:xfrm>
           <a:prstGeom prst="rect">
@@ -6763,7 +6195,7 @@
             <a:r>
               <a:rPr lang="en-US" sz="900" spc="100" kern="0" dirty="0">
                 <a:solidFill>
-                  <a:srgbClr val="5B6672"/>
+                  <a:srgbClr val="4B4B4B"/>
                 </a:solidFill>
                 <a:latin typeface="Courier New" pitchFamily="34" charset="0"/>
                 <a:ea typeface="Courier New" pitchFamily="34" charset="-122"/>
@@ -6777,13 +6209,13 @@
       </p:sp>
       <p:sp>
         <p:nvSpPr>
-          <p:cNvPr id="42" name="Shape 40"/>
+          <p:cNvPr id="48" name="Shape 40"/>
           <p:cNvSpPr/>
           <p:nvPr/>
         </p:nvSpPr>
         <p:spPr>
           <a:xfrm>
-            <a:off x="2286000" y="3017520"/>
+            <a:off x="2286000" y="3438144"/>
             <a:ext cx="3048914" cy="1737360"/>
           </a:xfrm>
           <a:prstGeom prst="roundRect">
@@ -6811,13 +6243,13 @@
       </p:sp>
       <p:sp>
         <p:nvSpPr>
-          <p:cNvPr id="43" name="Text 41"/>
-          <p:cNvSpPr txBox="1"/>
-          <p:nvPr/>
-        </p:nvSpPr>
-        <p:spPr>
-          <a:xfrm>
-            <a:off x="2414016" y="3108960"/>
+          <p:cNvPr id="49" name="Text 41"/>
+          <p:cNvSpPr txBox="1"/>
+          <p:nvPr/>
+        </p:nvSpPr>
+        <p:spPr>
+          <a:xfrm>
+            <a:off x="2414016" y="3529584"/>
             <a:ext cx="1676903" cy="182880"/>
           </a:xfrm>
           <a:prstGeom prst="rect">
@@ -6836,7 +6268,7 @@
             <a:r>
               <a:rPr lang="en-US" sz="800" dirty="0">
                 <a:solidFill>
-                  <a:srgbClr val="5B6672"/>
+                  <a:srgbClr val="4B4B4B"/>
                 </a:solidFill>
                 <a:latin typeface="Courier New" pitchFamily="34" charset="0"/>
                 <a:ea typeface="Courier New" pitchFamily="34" charset="-122"/>
@@ -6850,13 +6282,13 @@
       </p:sp>
       <p:sp>
         <p:nvSpPr>
-          <p:cNvPr id="44" name="Shape 42"/>
+          <p:cNvPr id="50" name="Shape 42"/>
           <p:cNvSpPr/>
           <p:nvPr/>
         </p:nvSpPr>
         <p:spPr>
           <a:xfrm>
-            <a:off x="4621682" y="3099816"/>
+            <a:off x="4621682" y="3520440"/>
             <a:ext cx="621792" cy="173736"/>
           </a:xfrm>
           <a:prstGeom prst="roundRect">
@@ -6877,13 +6309,13 @@
       </p:sp>
       <p:sp>
         <p:nvSpPr>
-          <p:cNvPr id="45" name="Text 43"/>
-          <p:cNvSpPr txBox="1"/>
-          <p:nvPr/>
-        </p:nvSpPr>
-        <p:spPr>
-          <a:xfrm>
-            <a:off x="4621682" y="3099816"/>
+          <p:cNvPr id="51" name="Text 43"/>
+          <p:cNvSpPr txBox="1"/>
+          <p:nvPr/>
+        </p:nvSpPr>
+        <p:spPr>
+          <a:xfrm>
+            <a:off x="4621682" y="3520440"/>
             <a:ext cx="621792" cy="173736"/>
           </a:xfrm>
           <a:prstGeom prst="rect">
@@ -6916,13 +6348,13 @@
       </p:sp>
       <p:sp>
         <p:nvSpPr>
-          <p:cNvPr id="46" name="Text 44"/>
-          <p:cNvSpPr txBox="1"/>
-          <p:nvPr/>
-        </p:nvSpPr>
-        <p:spPr>
-          <a:xfrm>
-            <a:off x="2414016" y="3310128"/>
+          <p:cNvPr id="52" name="Text 44"/>
+          <p:cNvSpPr txBox="1"/>
+          <p:nvPr/>
+        </p:nvSpPr>
+        <p:spPr>
+          <a:xfrm>
+            <a:off x="2414016" y="3730752"/>
             <a:ext cx="2792882" cy="512064"/>
           </a:xfrm>
           <a:prstGeom prst="rect">
@@ -6944,7 +6376,7 @@
             <a:r>
               <a:rPr lang="en-US" sz="1150" b="1" dirty="0">
                 <a:solidFill>
-                  <a:srgbClr val="1C2530"/>
+                  <a:srgbClr val="022049"/>
                 </a:solidFill>
                 <a:latin typeface="Arial" pitchFamily="34" charset="0"/>
                 <a:ea typeface="Arial" pitchFamily="34" charset="-122"/>
@@ -6958,13 +6390,13 @@
       </p:sp>
       <p:sp>
         <p:nvSpPr>
-          <p:cNvPr id="47" name="Text 45"/>
-          <p:cNvSpPr txBox="1"/>
-          <p:nvPr/>
-        </p:nvSpPr>
-        <p:spPr>
-          <a:xfrm>
-            <a:off x="2414016" y="3858768"/>
+          <p:cNvPr id="53" name="Text 45"/>
+          <p:cNvSpPr txBox="1"/>
+          <p:nvPr/>
+        </p:nvSpPr>
+        <p:spPr>
+          <a:xfrm>
+            <a:off x="2414016" y="4279392"/>
             <a:ext cx="2792882" cy="530352"/>
           </a:xfrm>
           <a:prstGeom prst="rect">
@@ -6986,7 +6418,7 @@
             <a:r>
               <a:rPr lang="en-US" sz="850" dirty="0">
                 <a:solidFill>
-                  <a:srgbClr val="5B6672"/>
+                  <a:srgbClr val="4B4B4B"/>
                 </a:solidFill>
                 <a:latin typeface="Calibri" pitchFamily="34" charset="0"/>
                 <a:ea typeface="Calibri" pitchFamily="34" charset="-122"/>
@@ -7000,13 +6432,13 @@
       </p:sp>
       <p:sp>
         <p:nvSpPr>
-          <p:cNvPr id="48" name="Shape 46"/>
+          <p:cNvPr id="54" name="Shape 46"/>
           <p:cNvSpPr/>
           <p:nvPr/>
         </p:nvSpPr>
         <p:spPr>
           <a:xfrm>
-            <a:off x="2414016" y="4462272"/>
+            <a:off x="2414016" y="4882896"/>
             <a:ext cx="2792882" cy="0"/>
           </a:xfrm>
           <a:prstGeom prst="line">
@@ -7023,13 +6455,13 @@
       </p:sp>
       <p:sp>
         <p:nvSpPr>
-          <p:cNvPr id="49" name="Text 47"/>
-          <p:cNvSpPr txBox="1"/>
-          <p:nvPr/>
-        </p:nvSpPr>
-        <p:spPr>
-          <a:xfrm>
-            <a:off x="2414016" y="4507992"/>
+          <p:cNvPr id="55" name="Text 47"/>
+          <p:cNvSpPr txBox="1"/>
+          <p:nvPr/>
+        </p:nvSpPr>
+        <p:spPr>
+          <a:xfrm>
+            <a:off x="2414016" y="4928616"/>
             <a:ext cx="1829349" cy="182880"/>
           </a:xfrm>
           <a:prstGeom prst="rect">
@@ -7048,7 +6480,7 @@
             <a:r>
               <a:rPr lang="en-US" sz="750" dirty="0">
                 <a:solidFill>
-                  <a:srgbClr val="5B6672"/>
+                  <a:srgbClr val="4B4B4B"/>
                 </a:solidFill>
                 <a:latin typeface="Courier New" pitchFamily="34" charset="0"/>
                 <a:ea typeface="Courier New" pitchFamily="34" charset="-122"/>
@@ -7062,13 +6494,13 @@
       </p:sp>
       <p:sp>
         <p:nvSpPr>
-          <p:cNvPr id="50" name="Text 48"/>
-          <p:cNvSpPr txBox="1"/>
-          <p:nvPr/>
-        </p:nvSpPr>
-        <p:spPr>
-          <a:xfrm>
-            <a:off x="4557674" y="4507992"/>
+          <p:cNvPr id="56" name="Text 48"/>
+          <p:cNvSpPr txBox="1"/>
+          <p:nvPr/>
+        </p:nvSpPr>
+        <p:spPr>
+          <a:xfrm>
+            <a:off x="4557674" y="4928616"/>
             <a:ext cx="658368" cy="182880"/>
           </a:xfrm>
           <a:prstGeom prst="rect">
@@ -7087,7 +6519,7 @@
             <a:r>
               <a:rPr lang="en-US" sz="750" dirty="0">
                 <a:solidFill>
-                  <a:srgbClr val="C1432A"/>
+                  <a:srgbClr val="022049"/>
                 </a:solidFill>
                 <a:latin typeface="Courier New" pitchFamily="34" charset="0"/>
                 <a:ea typeface="Courier New" pitchFamily="34" charset="-122"/>
@@ -7101,13 +6533,13 @@
       </p:sp>
       <p:sp>
         <p:nvSpPr>
-          <p:cNvPr id="51" name="Shape 49"/>
+          <p:cNvPr id="57" name="Shape 49"/>
           <p:cNvSpPr/>
           <p:nvPr/>
         </p:nvSpPr>
         <p:spPr>
           <a:xfrm>
-            <a:off x="5554370" y="3017520"/>
+            <a:off x="5554370" y="3438144"/>
             <a:ext cx="3048914" cy="1737360"/>
           </a:xfrm>
           <a:prstGeom prst="roundRect">
@@ -7135,13 +6567,13 @@
       </p:sp>
       <p:sp>
         <p:nvSpPr>
-          <p:cNvPr id="52" name="Text 50"/>
-          <p:cNvSpPr txBox="1"/>
-          <p:nvPr/>
-        </p:nvSpPr>
-        <p:spPr>
-          <a:xfrm>
-            <a:off x="5682386" y="3108960"/>
+          <p:cNvPr id="58" name="Text 50"/>
+          <p:cNvSpPr txBox="1"/>
+          <p:nvPr/>
+        </p:nvSpPr>
+        <p:spPr>
+          <a:xfrm>
+            <a:off x="5682386" y="3529584"/>
             <a:ext cx="1676903" cy="182880"/>
           </a:xfrm>
           <a:prstGeom prst="rect">
@@ -7160,7 +6592,7 @@
             <a:r>
               <a:rPr lang="en-US" sz="800" dirty="0">
                 <a:solidFill>
-                  <a:srgbClr val="5B6672"/>
+                  <a:srgbClr val="4B4B4B"/>
                 </a:solidFill>
                 <a:latin typeface="Courier New" pitchFamily="34" charset="0"/>
                 <a:ea typeface="Courier New" pitchFamily="34" charset="-122"/>
@@ -7174,13 +6606,13 @@
       </p:sp>
       <p:sp>
         <p:nvSpPr>
-          <p:cNvPr id="53" name="Shape 51"/>
+          <p:cNvPr id="59" name="Shape 51"/>
           <p:cNvSpPr/>
           <p:nvPr/>
         </p:nvSpPr>
         <p:spPr>
           <a:xfrm>
-            <a:off x="7890053" y="3099816"/>
+            <a:off x="7890053" y="3520440"/>
             <a:ext cx="621792" cy="173736"/>
           </a:xfrm>
           <a:prstGeom prst="roundRect">
@@ -7201,13 +6633,13 @@
       </p:sp>
       <p:sp>
         <p:nvSpPr>
-          <p:cNvPr id="54" name="Text 52"/>
-          <p:cNvSpPr txBox="1"/>
-          <p:nvPr/>
-        </p:nvSpPr>
-        <p:spPr>
-          <a:xfrm>
-            <a:off x="7890053" y="3099816"/>
+          <p:cNvPr id="60" name="Text 52"/>
+          <p:cNvSpPr txBox="1"/>
+          <p:nvPr/>
+        </p:nvSpPr>
+        <p:spPr>
+          <a:xfrm>
+            <a:off x="7890053" y="3520440"/>
             <a:ext cx="621792" cy="173736"/>
           </a:xfrm>
           <a:prstGeom prst="rect">
@@ -7240,13 +6672,13 @@
       </p:sp>
       <p:sp>
         <p:nvSpPr>
-          <p:cNvPr id="55" name="Text 53"/>
-          <p:cNvSpPr txBox="1"/>
-          <p:nvPr/>
-        </p:nvSpPr>
-        <p:spPr>
-          <a:xfrm>
-            <a:off x="5682386" y="3310128"/>
+          <p:cNvPr id="61" name="Text 53"/>
+          <p:cNvSpPr txBox="1"/>
+          <p:nvPr/>
+        </p:nvSpPr>
+        <p:spPr>
+          <a:xfrm>
+            <a:off x="5682386" y="3730752"/>
             <a:ext cx="2792882" cy="512064"/>
           </a:xfrm>
           <a:prstGeom prst="rect">
@@ -7268,7 +6700,7 @@
             <a:r>
               <a:rPr lang="en-US" sz="1150" b="1" dirty="0">
                 <a:solidFill>
-                  <a:srgbClr val="1C2530"/>
+                  <a:srgbClr val="022049"/>
                 </a:solidFill>
                 <a:latin typeface="Arial" pitchFamily="34" charset="0"/>
                 <a:ea typeface="Arial" pitchFamily="34" charset="-122"/>
@@ -7282,13 +6714,13 @@
       </p:sp>
       <p:sp>
         <p:nvSpPr>
-          <p:cNvPr id="56" name="Text 54"/>
-          <p:cNvSpPr txBox="1"/>
-          <p:nvPr/>
-        </p:nvSpPr>
-        <p:spPr>
-          <a:xfrm>
-            <a:off x="5682386" y="3858768"/>
+          <p:cNvPr id="62" name="Text 54"/>
+          <p:cNvSpPr txBox="1"/>
+          <p:nvPr/>
+        </p:nvSpPr>
+        <p:spPr>
+          <a:xfrm>
+            <a:off x="5682386" y="4279392"/>
             <a:ext cx="2792882" cy="530352"/>
           </a:xfrm>
           <a:prstGeom prst="rect">
@@ -7310,7 +6742,7 @@
             <a:r>
               <a:rPr lang="en-US" sz="850" dirty="0">
                 <a:solidFill>
-                  <a:srgbClr val="5B6672"/>
+                  <a:srgbClr val="4B4B4B"/>
                 </a:solidFill>
                 <a:latin typeface="Calibri" pitchFamily="34" charset="0"/>
                 <a:ea typeface="Calibri" pitchFamily="34" charset="-122"/>
@@ -7324,13 +6756,13 @@
       </p:sp>
       <p:sp>
         <p:nvSpPr>
-          <p:cNvPr id="57" name="Shape 55"/>
+          <p:cNvPr id="63" name="Shape 55"/>
           <p:cNvSpPr/>
           <p:nvPr/>
         </p:nvSpPr>
         <p:spPr>
           <a:xfrm>
-            <a:off x="5682386" y="4462272"/>
+            <a:off x="5682386" y="4882896"/>
             <a:ext cx="2792882" cy="0"/>
           </a:xfrm>
           <a:prstGeom prst="line">
@@ -7347,13 +6779,13 @@
       </p:sp>
       <p:sp>
         <p:nvSpPr>
-          <p:cNvPr id="58" name="Text 56"/>
-          <p:cNvSpPr txBox="1"/>
-          <p:nvPr/>
-        </p:nvSpPr>
-        <p:spPr>
-          <a:xfrm>
-            <a:off x="5682386" y="4507992"/>
+          <p:cNvPr id="64" name="Text 56"/>
+          <p:cNvSpPr txBox="1"/>
+          <p:nvPr/>
+        </p:nvSpPr>
+        <p:spPr>
+          <a:xfrm>
+            <a:off x="5682386" y="4928616"/>
             <a:ext cx="1829349" cy="182880"/>
           </a:xfrm>
           <a:prstGeom prst="rect">
@@ -7372,7 +6804,7 @@
             <a:r>
               <a:rPr lang="en-US" sz="750" dirty="0">
                 <a:solidFill>
-                  <a:srgbClr val="5B6672"/>
+                  <a:srgbClr val="4B4B4B"/>
                 </a:solidFill>
                 <a:latin typeface="Courier New" pitchFamily="34" charset="0"/>
                 <a:ea typeface="Courier New" pitchFamily="34" charset="-122"/>
@@ -7386,13 +6818,13 @@
       </p:sp>
       <p:sp>
         <p:nvSpPr>
-          <p:cNvPr id="59" name="Text 57"/>
-          <p:cNvSpPr txBox="1"/>
-          <p:nvPr/>
-        </p:nvSpPr>
-        <p:spPr>
-          <a:xfrm>
-            <a:off x="7826045" y="4507992"/>
+          <p:cNvPr id="65" name="Text 57"/>
+          <p:cNvSpPr txBox="1"/>
+          <p:nvPr/>
+        </p:nvSpPr>
+        <p:spPr>
+          <a:xfrm>
+            <a:off x="7826045" y="4928616"/>
             <a:ext cx="658368" cy="182880"/>
           </a:xfrm>
           <a:prstGeom prst="rect">
@@ -7411,7 +6843,7 @@
             <a:r>
               <a:rPr lang="en-US" sz="750" dirty="0">
                 <a:solidFill>
-                  <a:srgbClr val="C1432A"/>
+                  <a:srgbClr val="022049"/>
                 </a:solidFill>
                 <a:latin typeface="Courier New" pitchFamily="34" charset="0"/>
                 <a:ea typeface="Courier New" pitchFamily="34" charset="-122"/>
@@ -7425,13 +6857,13 @@
       </p:sp>
       <p:sp>
         <p:nvSpPr>
-          <p:cNvPr id="60" name="Shape 58"/>
+          <p:cNvPr id="66" name="Shape 58"/>
           <p:cNvSpPr/>
           <p:nvPr/>
         </p:nvSpPr>
         <p:spPr>
           <a:xfrm>
-            <a:off x="8822741" y="3017520"/>
+            <a:off x="8822741" y="3438144"/>
             <a:ext cx="3048914" cy="1737360"/>
           </a:xfrm>
           <a:prstGeom prst="roundRect">
@@ -7459,13 +6891,13 @@
       </p:sp>
       <p:sp>
         <p:nvSpPr>
-          <p:cNvPr id="61" name="Text 59"/>
-          <p:cNvSpPr txBox="1"/>
-          <p:nvPr/>
-        </p:nvSpPr>
-        <p:spPr>
-          <a:xfrm>
-            <a:off x="8950757" y="3108960"/>
+          <p:cNvPr id="67" name="Text 59"/>
+          <p:cNvSpPr txBox="1"/>
+          <p:nvPr/>
+        </p:nvSpPr>
+        <p:spPr>
+          <a:xfrm>
+            <a:off x="8950757" y="3529584"/>
             <a:ext cx="1676903" cy="182880"/>
           </a:xfrm>
           <a:prstGeom prst="rect">
@@ -7484,7 +6916,7 @@
             <a:r>
               <a:rPr lang="en-US" sz="800" dirty="0">
                 <a:solidFill>
-                  <a:srgbClr val="5B6672"/>
+                  <a:srgbClr val="4B4B4B"/>
                 </a:solidFill>
                 <a:latin typeface="Courier New" pitchFamily="34" charset="0"/>
                 <a:ea typeface="Courier New" pitchFamily="34" charset="-122"/>
@@ -7498,13 +6930,13 @@
       </p:sp>
       <p:sp>
         <p:nvSpPr>
-          <p:cNvPr id="62" name="Text 60"/>
-          <p:cNvSpPr txBox="1"/>
-          <p:nvPr/>
-        </p:nvSpPr>
-        <p:spPr>
-          <a:xfrm>
-            <a:off x="8950757" y="3310128"/>
+          <p:cNvPr id="68" name="Text 60"/>
+          <p:cNvSpPr txBox="1"/>
+          <p:nvPr/>
+        </p:nvSpPr>
+        <p:spPr>
+          <a:xfrm>
+            <a:off x="8950757" y="3730752"/>
             <a:ext cx="2792882" cy="512064"/>
           </a:xfrm>
           <a:prstGeom prst="rect">
@@ -7526,7 +6958,7 @@
             <a:r>
               <a:rPr lang="en-US" sz="1150" b="1" dirty="0">
                 <a:solidFill>
-                  <a:srgbClr val="1C2530"/>
+                  <a:srgbClr val="022049"/>
                 </a:solidFill>
                 <a:latin typeface="Arial" pitchFamily="34" charset="0"/>
                 <a:ea typeface="Arial" pitchFamily="34" charset="-122"/>
@@ -7540,13 +6972,13 @@
       </p:sp>
       <p:sp>
         <p:nvSpPr>
-          <p:cNvPr id="63" name="Text 61"/>
-          <p:cNvSpPr txBox="1"/>
-          <p:nvPr/>
-        </p:nvSpPr>
-        <p:spPr>
-          <a:xfrm>
-            <a:off x="8950757" y="3858768"/>
+          <p:cNvPr id="69" name="Text 61"/>
+          <p:cNvSpPr txBox="1"/>
+          <p:nvPr/>
+        </p:nvSpPr>
+        <p:spPr>
+          <a:xfrm>
+            <a:off x="8950757" y="4279392"/>
             <a:ext cx="2792882" cy="530352"/>
           </a:xfrm>
           <a:prstGeom prst="rect">
@@ -7568,7 +7000,7 @@
             <a:r>
               <a:rPr lang="en-US" sz="850" dirty="0">
                 <a:solidFill>
-                  <a:srgbClr val="5B6672"/>
+                  <a:srgbClr val="4B4B4B"/>
                 </a:solidFill>
                 <a:latin typeface="Calibri" pitchFamily="34" charset="0"/>
                 <a:ea typeface="Calibri" pitchFamily="34" charset="-122"/>
@@ -7582,13 +7014,13 @@
       </p:sp>
       <p:sp>
         <p:nvSpPr>
-          <p:cNvPr id="64" name="Shape 62"/>
+          <p:cNvPr id="70" name="Shape 62"/>
           <p:cNvSpPr/>
           <p:nvPr/>
         </p:nvSpPr>
         <p:spPr>
           <a:xfrm>
-            <a:off x="8950757" y="4462272"/>
+            <a:off x="8950757" y="4882896"/>
             <a:ext cx="2792882" cy="0"/>
           </a:xfrm>
           <a:prstGeom prst="line">
@@ -7605,13 +7037,13 @@
       </p:sp>
       <p:sp>
         <p:nvSpPr>
-          <p:cNvPr id="65" name="Text 63"/>
-          <p:cNvSpPr txBox="1"/>
-          <p:nvPr/>
-        </p:nvSpPr>
-        <p:spPr>
-          <a:xfrm>
-            <a:off x="8950757" y="4507992"/>
+          <p:cNvPr id="71" name="Text 63"/>
+          <p:cNvSpPr txBox="1"/>
+          <p:nvPr/>
+        </p:nvSpPr>
+        <p:spPr>
+          <a:xfrm>
+            <a:off x="8950757" y="4928616"/>
             <a:ext cx="1829349" cy="182880"/>
           </a:xfrm>
           <a:prstGeom prst="rect">
@@ -7630,7 +7062,7 @@
             <a:r>
               <a:rPr lang="en-US" sz="750" dirty="0">
                 <a:solidFill>
-                  <a:srgbClr val="5B6672"/>
+                  <a:srgbClr val="4B4B4B"/>
                 </a:solidFill>
                 <a:latin typeface="Courier New" pitchFamily="34" charset="0"/>
                 <a:ea typeface="Courier New" pitchFamily="34" charset="-122"/>
@@ -7644,13 +7076,13 @@
       </p:sp>
       <p:sp>
         <p:nvSpPr>
-          <p:cNvPr id="66" name="Text 64"/>
-          <p:cNvSpPr txBox="1"/>
-          <p:nvPr/>
-        </p:nvSpPr>
-        <p:spPr>
-          <a:xfrm>
-            <a:off x="11094415" y="4507992"/>
+          <p:cNvPr id="72" name="Text 64"/>
+          <p:cNvSpPr txBox="1"/>
+          <p:nvPr/>
+        </p:nvSpPr>
+        <p:spPr>
+          <a:xfrm>
+            <a:off x="11094415" y="4928616"/>
             <a:ext cx="658368" cy="182880"/>
           </a:xfrm>
           <a:prstGeom prst="rect">
@@ -7669,7 +7101,7 @@
             <a:r>
               <a:rPr lang="en-US" sz="750" dirty="0">
                 <a:solidFill>
-                  <a:srgbClr val="C1432A"/>
+                  <a:srgbClr val="022049"/>
                 </a:solidFill>
                 <a:latin typeface="Courier New" pitchFamily="34" charset="0"/>
                 <a:ea typeface="Courier New" pitchFamily="34" charset="-122"/>
@@ -7683,13 +7115,13 @@
       </p:sp>
       <p:sp>
         <p:nvSpPr>
-          <p:cNvPr id="67" name="Text 65"/>
-          <p:cNvSpPr txBox="1"/>
-          <p:nvPr/>
-        </p:nvSpPr>
-        <p:spPr>
-          <a:xfrm>
-            <a:off x="2286000" y="4956048"/>
+          <p:cNvPr id="73" name="Text 65"/>
+          <p:cNvSpPr txBox="1"/>
+          <p:nvPr/>
+        </p:nvSpPr>
+        <p:spPr>
+          <a:xfrm>
+            <a:off x="2286000" y="5376672"/>
             <a:ext cx="4572000" cy="219456"/>
           </a:xfrm>
           <a:prstGeom prst="rect">
@@ -7708,7 +7140,7 @@
             <a:r>
               <a:rPr lang="en-US" sz="900" spc="100" kern="0" dirty="0">
                 <a:solidFill>
-                  <a:srgbClr val="5B6672"/>
+                  <a:srgbClr val="4B4B4B"/>
                 </a:solidFill>
                 <a:latin typeface="Courier New" pitchFamily="34" charset="0"/>
                 <a:ea typeface="Courier New" pitchFamily="34" charset="-122"/>
@@ -7722,13 +7154,13 @@
       </p:sp>
       <p:sp>
         <p:nvSpPr>
-          <p:cNvPr id="68" name="Shape 66"/>
+          <p:cNvPr id="74" name="Shape 66"/>
           <p:cNvSpPr/>
           <p:nvPr/>
         </p:nvSpPr>
         <p:spPr>
           <a:xfrm>
-            <a:off x="2286000" y="5212080"/>
+            <a:off x="2286000" y="5632704"/>
             <a:ext cx="9585655" cy="658368"/>
           </a:xfrm>
           <a:prstGeom prst="roundRect">
@@ -7749,13 +7181,13 @@
       </p:sp>
       <p:sp>
         <p:nvSpPr>
-          <p:cNvPr id="69" name="Shape 67"/>
+          <p:cNvPr id="75" name="Shape 67"/>
           <p:cNvSpPr/>
           <p:nvPr/>
         </p:nvSpPr>
         <p:spPr>
           <a:xfrm>
-            <a:off x="2286000" y="5212080"/>
+            <a:off x="2286000" y="5632704"/>
             <a:ext cx="45720" cy="658368"/>
           </a:xfrm>
           <a:prstGeom prst="rect">
@@ -7769,13 +7201,13 @@
       </p:sp>
       <p:sp>
         <p:nvSpPr>
-          <p:cNvPr id="70" name="Text 68"/>
-          <p:cNvSpPr txBox="1"/>
-          <p:nvPr/>
-        </p:nvSpPr>
-        <p:spPr>
-          <a:xfrm>
-            <a:off x="2514600" y="5285232"/>
+          <p:cNvPr id="76" name="Text 68"/>
+          <p:cNvSpPr txBox="1"/>
+          <p:nvPr/>
+        </p:nvSpPr>
+        <p:spPr>
+          <a:xfrm>
+            <a:off x="2514600" y="5705856"/>
             <a:ext cx="5486400" cy="237744"/>
           </a:xfrm>
           <a:prstGeom prst="rect">
@@ -7794,7 +7226,7 @@
             <a:r>
               <a:rPr lang="en-US" sz="1100" b="1" dirty="0">
                 <a:solidFill>
-                  <a:srgbClr val="1C2530"/>
+                  <a:srgbClr val="022049"/>
                 </a:solidFill>
                 <a:latin typeface="Calibri" pitchFamily="34" charset="0"/>
                 <a:ea typeface="Calibri" pitchFamily="34" charset="-122"/>
@@ -7808,13 +7240,13 @@
       </p:sp>
       <p:sp>
         <p:nvSpPr>
-          <p:cNvPr id="71" name="Text 69"/>
-          <p:cNvSpPr txBox="1"/>
-          <p:nvPr/>
-        </p:nvSpPr>
-        <p:spPr>
-          <a:xfrm>
-            <a:off x="2514600" y="5541264"/>
+          <p:cNvPr id="77" name="Text 69"/>
+          <p:cNvSpPr txBox="1"/>
+          <p:nvPr/>
+        </p:nvSpPr>
+        <p:spPr>
+          <a:xfrm>
+            <a:off x="2514600" y="5961888"/>
             <a:ext cx="7315200" cy="310896"/>
           </a:xfrm>
           <a:prstGeom prst="rect">
@@ -7833,7 +7265,7 @@
             <a:r>
               <a:rPr lang="en-US" sz="950" dirty="0">
                 <a:solidFill>
-                  <a:srgbClr val="5B6672"/>
+                  <a:srgbClr val="4B4B4B"/>
                 </a:solidFill>
                 <a:latin typeface="Calibri" pitchFamily="34" charset="0"/>
                 <a:ea typeface="Calibri" pitchFamily="34" charset="-122"/>
@@ -7847,13 +7279,13 @@
       </p:sp>
       <p:sp>
         <p:nvSpPr>
-          <p:cNvPr id="72" name="Text 70"/>
-          <p:cNvSpPr txBox="1"/>
-          <p:nvPr/>
-        </p:nvSpPr>
-        <p:spPr>
-          <a:xfrm>
-            <a:off x="10728655" y="5285232"/>
+          <p:cNvPr id="78" name="Text 70"/>
+          <p:cNvSpPr txBox="1"/>
+          <p:nvPr/>
+        </p:nvSpPr>
+        <p:spPr>
+          <a:xfrm>
+            <a:off x="10728655" y="5705856"/>
             <a:ext cx="1005840" cy="219456"/>
           </a:xfrm>
           <a:prstGeom prst="rect">
@@ -7872,7 +7304,7 @@
             <a:r>
               <a:rPr lang="en-US" sz="850" dirty="0">
                 <a:solidFill>
-                  <a:srgbClr val="5B6672"/>
+                  <a:srgbClr val="4B4B4B"/>
                 </a:solidFill>
                 <a:latin typeface="Courier New" pitchFamily="34" charset="0"/>
                 <a:ea typeface="Courier New" pitchFamily="34" charset="-122"/>
@@ -7897,9 +7329,16 @@
   <p:cSld name="Slide 3">
     <p:bg>
       <p:bgPr>
-        <a:solidFill>
-          <a:srgbClr val="EEF1F3"/>
-        </a:solidFill>
+        <a:blipFill dpi="0" rotWithShape="1">
+          <a:blip r:embed="rId1">
+            <a:lum/>
+          </a:blip>
+          <a:srcRect/>
+          <a:stretch>
+            <a:fillRect/>
+          </a:stretch>
+        </a:blipFill>
+        <a:effectLst/>
       </p:bgPr>
     </p:bg>
     <p:spTree>
@@ -7935,7 +7374,7 @@
           </a:solidFill>
           <a:ln w="19050">
             <a:solidFill>
-              <a:srgbClr val="1C2530"/>
+              <a:srgbClr val="022049"/>
             </a:solidFill>
             <a:prstDash val="solid"/>
           </a:ln>
@@ -8037,7 +7476,7 @@
             <a:r>
               <a:rPr lang="en-US" sz="1300" b="1" dirty="0">
                 <a:solidFill>
-                  <a:srgbClr val="1C2530"/>
+                  <a:srgbClr val="022049"/>
                 </a:solidFill>
                 <a:latin typeface="Arial" pitchFamily="34" charset="0"/>
                 <a:ea typeface="Arial" pitchFamily="34" charset="-122"/>
@@ -8076,7 +7515,7 @@
             <a:r>
               <a:rPr lang="en-US" sz="850" spc="100" kern="0" dirty="0">
                 <a:solidFill>
-                  <a:srgbClr val="5B6672"/>
+                  <a:srgbClr val="4B4B4B"/>
                 </a:solidFill>
                 <a:latin typeface="Courier New" pitchFamily="34" charset="0"/>
                 <a:ea typeface="Courier New" pitchFamily="34" charset="-122"/>
@@ -8142,7 +7581,7 @@
             <a:r>
               <a:rPr lang="en-US" sz="950" dirty="0">
                 <a:solidFill>
-                  <a:srgbClr val="5B6672"/>
+                  <a:srgbClr val="4B4B4B"/>
                 </a:solidFill>
                 <a:latin typeface="Courier New" pitchFamily="34" charset="0"/>
                 <a:ea typeface="Courier New" pitchFamily="34" charset="-122"/>
@@ -8181,7 +7620,7 @@
             <a:r>
               <a:rPr lang="en-US" sz="750" spc="100" kern="0" dirty="0">
                 <a:solidFill>
-                  <a:srgbClr val="5B6672"/>
+                  <a:srgbClr val="4B4B4B"/>
                 </a:solidFill>
                 <a:latin typeface="Courier New" pitchFamily="34" charset="0"/>
                 <a:ea typeface="Courier New" pitchFamily="34" charset="-122"/>
@@ -8220,7 +7659,7 @@
             <a:r>
               <a:rPr lang="en-US" sz="1050" dirty="0">
                 <a:solidFill>
-                  <a:srgbClr val="1C2530"/>
+                  <a:srgbClr val="022049"/>
                 </a:solidFill>
                 <a:latin typeface="Courier New" pitchFamily="34" charset="0"/>
                 <a:ea typeface="Courier New" pitchFamily="34" charset="-122"/>
@@ -8323,7 +7762,7 @@
             <a:r>
               <a:rPr lang="en-US" sz="800" spc="100" kern="0" dirty="0">
                 <a:solidFill>
-                  <a:srgbClr val="5B6672"/>
+                  <a:srgbClr val="4B4B4B"/>
                 </a:solidFill>
                 <a:latin typeface="Courier New" pitchFamily="34" charset="0"/>
                 <a:ea typeface="Courier New" pitchFamily="34" charset="-122"/>
@@ -8362,7 +7801,7 @@
             <a:r>
               <a:rPr lang="en-US" sz="1050" dirty="0">
                 <a:solidFill>
-                  <a:srgbClr val="1C2530"/>
+                  <a:srgbClr val="022049"/>
                 </a:solidFill>
                 <a:latin typeface="Calibri" pitchFamily="34" charset="0"/>
                 <a:ea typeface="Calibri" pitchFamily="34" charset="-122"/>
@@ -8409,7 +7848,7 @@
             <a:avLst/>
           </a:prstGeom>
           <a:solidFill>
-            <a:srgbClr val="C1432A"/>
+            <a:srgbClr val="022049"/>
           </a:solidFill>
           <a:ln/>
         </p:spPr>
@@ -8441,7 +7880,7 @@
             <a:r>
               <a:rPr lang="en-US" sz="1050" b="1" dirty="0">
                 <a:solidFill>
-                  <a:srgbClr val="C1432A"/>
+                  <a:srgbClr val="022049"/>
                 </a:solidFill>
                 <a:latin typeface="Calibri" pitchFamily="34" charset="0"/>
                 <a:ea typeface="Calibri" pitchFamily="34" charset="-122"/>
@@ -8480,7 +7919,7 @@
             <a:r>
               <a:rPr lang="en-US" sz="1050" dirty="0">
                 <a:solidFill>
-                  <a:srgbClr val="1C2530"/>
+                  <a:srgbClr val="022049"/>
                 </a:solidFill>
                 <a:latin typeface="Calibri" pitchFamily="34" charset="0"/>
                 <a:ea typeface="Calibri" pitchFamily="34" charset="-122"/>
@@ -8519,7 +7958,7 @@
             <a:r>
               <a:rPr lang="en-US" sz="1050" dirty="0">
                 <a:solidFill>
-                  <a:srgbClr val="1C2530"/>
+                  <a:srgbClr val="022049"/>
                 </a:solidFill>
                 <a:latin typeface="Calibri" pitchFamily="34" charset="0"/>
                 <a:ea typeface="Calibri" pitchFamily="34" charset="-122"/>
@@ -8558,7 +7997,7 @@
             <a:r>
               <a:rPr lang="en-US" sz="1050" dirty="0">
                 <a:solidFill>
-                  <a:srgbClr val="1C2530"/>
+                  <a:srgbClr val="022049"/>
                 </a:solidFill>
                 <a:latin typeface="Calibri" pitchFamily="34" charset="0"/>
                 <a:ea typeface="Calibri" pitchFamily="34" charset="-122"/>
@@ -8597,7 +8036,7 @@
             <a:r>
               <a:rPr lang="en-US" sz="1050" dirty="0">
                 <a:solidFill>
-                  <a:srgbClr val="1C2530"/>
+                  <a:srgbClr val="022049"/>
                 </a:solidFill>
                 <a:latin typeface="Calibri" pitchFamily="34" charset="0"/>
                 <a:ea typeface="Calibri" pitchFamily="34" charset="-122"/>
@@ -8636,7 +8075,7 @@
             <a:r>
               <a:rPr lang="en-US" sz="1050" dirty="0">
                 <a:solidFill>
-                  <a:srgbClr val="1C2530"/>
+                  <a:srgbClr val="022049"/>
                 </a:solidFill>
                 <a:latin typeface="Calibri" pitchFamily="34" charset="0"/>
                 <a:ea typeface="Calibri" pitchFamily="34" charset="-122"/>
@@ -8675,7 +8114,7 @@
             <a:r>
               <a:rPr lang="en-US" sz="1050" dirty="0">
                 <a:solidFill>
-                  <a:srgbClr val="1C2530"/>
+                  <a:srgbClr val="022049"/>
                 </a:solidFill>
                 <a:latin typeface="Calibri" pitchFamily="34" charset="0"/>
                 <a:ea typeface="Calibri" pitchFamily="34" charset="-122"/>
@@ -8714,7 +8153,7 @@
             <a:r>
               <a:rPr lang="en-US" sz="1050" dirty="0">
                 <a:solidFill>
-                  <a:srgbClr val="1C2530"/>
+                  <a:srgbClr val="022049"/>
                 </a:solidFill>
                 <a:latin typeface="Calibri" pitchFamily="34" charset="0"/>
                 <a:ea typeface="Calibri" pitchFamily="34" charset="-122"/>
@@ -8753,7 +8192,7 @@
             <a:r>
               <a:rPr lang="en-US" sz="2600" b="1" spc="50" kern="0" dirty="0">
                 <a:solidFill>
-                  <a:srgbClr val="1C2530"/>
+                  <a:srgbClr val="022049"/>
                 </a:solidFill>
                 <a:latin typeface="Arial" pitchFamily="34" charset="0"/>
                 <a:ea typeface="Arial" pitchFamily="34" charset="-122"/>
@@ -8792,7 +8231,7 @@
             <a:r>
               <a:rPr lang="en-US" sz="1150" dirty="0">
                 <a:solidFill>
-                  <a:srgbClr val="5B6672"/>
+                  <a:srgbClr val="4B4B4B"/>
                 </a:solidFill>
                 <a:latin typeface="Calibri" pitchFamily="34" charset="0"/>
                 <a:ea typeface="Calibri" pitchFamily="34" charset="-122"/>
@@ -8821,7 +8260,7 @@
           <a:noFill/>
           <a:ln w="15875">
             <a:solidFill>
-              <a:srgbClr val="1C2530"/>
+              <a:srgbClr val="022049"/>
             </a:solidFill>
             <a:prstDash val="solid"/>
           </a:ln>
@@ -8901,7 +8340,7 @@
             <a:r>
               <a:rPr lang="en-US" sz="1250" b="1" dirty="0">
                 <a:solidFill>
-                  <a:srgbClr val="1C2530"/>
+                  <a:srgbClr val="022049"/>
                 </a:solidFill>
                 <a:latin typeface="Calibri" pitchFamily="34" charset="0"/>
                 <a:ea typeface="Calibri" pitchFamily="34" charset="-122"/>
@@ -8940,7 +8379,7 @@
             <a:r>
               <a:rPr lang="en-US" sz="950" dirty="0">
                 <a:solidFill>
-                  <a:srgbClr val="5B6672"/>
+                  <a:srgbClr val="4B4B4B"/>
                 </a:solidFill>
                 <a:latin typeface="Calibri" pitchFamily="34" charset="0"/>
                 <a:ea typeface="Calibri" pitchFamily="34" charset="-122"/>
@@ -8979,7 +8418,7 @@
             <a:r>
               <a:rPr lang="en-US" sz="850" dirty="0">
                 <a:solidFill>
-                  <a:srgbClr val="5B6672"/>
+                  <a:srgbClr val="4B4B4B"/>
                 </a:solidFill>
                 <a:latin typeface="Courier New" pitchFamily="34" charset="0"/>
                 <a:ea typeface="Courier New" pitchFamily="34" charset="-122"/>
@@ -9065,7 +8504,7 @@
             <a:r>
               <a:rPr lang="en-US" sz="1250" b="1" dirty="0">
                 <a:solidFill>
-                  <a:srgbClr val="1C2530"/>
+                  <a:srgbClr val="022049"/>
                 </a:solidFill>
                 <a:latin typeface="Calibri" pitchFamily="34" charset="0"/>
                 <a:ea typeface="Calibri" pitchFamily="34" charset="-122"/>
@@ -9104,7 +8543,7 @@
             <a:r>
               <a:rPr lang="en-US" sz="950" dirty="0">
                 <a:solidFill>
-                  <a:srgbClr val="5B6672"/>
+                  <a:srgbClr val="4B4B4B"/>
                 </a:solidFill>
                 <a:latin typeface="Calibri" pitchFamily="34" charset="0"/>
                 <a:ea typeface="Calibri" pitchFamily="34" charset="-122"/>
@@ -9143,7 +8582,7 @@
             <a:r>
               <a:rPr lang="en-US" sz="850" dirty="0">
                 <a:solidFill>
-                  <a:srgbClr val="5B6672"/>
+                  <a:srgbClr val="4B4B4B"/>
                 </a:solidFill>
                 <a:latin typeface="Courier New" pitchFamily="34" charset="0"/>
                 <a:ea typeface="Courier New" pitchFamily="34" charset="-122"/>
@@ -9229,7 +8668,7 @@
             <a:r>
               <a:rPr lang="en-US" sz="1250" b="1" dirty="0">
                 <a:solidFill>
-                  <a:srgbClr val="1C2530"/>
+                  <a:srgbClr val="022049"/>
                 </a:solidFill>
                 <a:latin typeface="Calibri" pitchFamily="34" charset="0"/>
                 <a:ea typeface="Calibri" pitchFamily="34" charset="-122"/>
@@ -9268,7 +8707,7 @@
             <a:r>
               <a:rPr lang="en-US" sz="950" dirty="0">
                 <a:solidFill>
-                  <a:srgbClr val="5B6672"/>
+                  <a:srgbClr val="4B4B4B"/>
                 </a:solidFill>
                 <a:latin typeface="Calibri" pitchFamily="34" charset="0"/>
                 <a:ea typeface="Calibri" pitchFamily="34" charset="-122"/>
@@ -9307,7 +8746,7 @@
             <a:r>
               <a:rPr lang="en-US" sz="850" dirty="0">
                 <a:solidFill>
-                  <a:srgbClr val="5B6672"/>
+                  <a:srgbClr val="4B4B4B"/>
                 </a:solidFill>
                 <a:latin typeface="Courier New" pitchFamily="34" charset="0"/>
                 <a:ea typeface="Courier New" pitchFamily="34" charset="-122"/>
@@ -9393,7 +8832,7 @@
             <a:r>
               <a:rPr lang="en-US" sz="1250" b="1" dirty="0">
                 <a:solidFill>
-                  <a:srgbClr val="1C2530"/>
+                  <a:srgbClr val="022049"/>
                 </a:solidFill>
                 <a:latin typeface="Calibri" pitchFamily="34" charset="0"/>
                 <a:ea typeface="Calibri" pitchFamily="34" charset="-122"/>
@@ -9432,7 +8871,7 @@
             <a:r>
               <a:rPr lang="en-US" sz="950" dirty="0">
                 <a:solidFill>
-                  <a:srgbClr val="5B6672"/>
+                  <a:srgbClr val="4B4B4B"/>
                 </a:solidFill>
                 <a:latin typeface="Calibri" pitchFamily="34" charset="0"/>
                 <a:ea typeface="Calibri" pitchFamily="34" charset="-122"/>
@@ -9471,7 +8910,7 @@
             <a:r>
               <a:rPr lang="en-US" sz="850" dirty="0">
                 <a:solidFill>
-                  <a:srgbClr val="5B6672"/>
+                  <a:srgbClr val="4B4B4B"/>
                 </a:solidFill>
                 <a:latin typeface="Courier New" pitchFamily="34" charset="0"/>
                 <a:ea typeface="Courier New" pitchFamily="34" charset="-122"/>
@@ -9496,9 +8935,16 @@
   <p:cSld name="Slide 4">
     <p:bg>
       <p:bgPr>
-        <a:solidFill>
-          <a:srgbClr val="EEF1F3"/>
-        </a:solidFill>
+        <a:blipFill dpi="0" rotWithShape="1">
+          <a:blip r:embed="rId1">
+            <a:lum/>
+          </a:blip>
+          <a:srcRect/>
+          <a:stretch>
+            <a:fillRect/>
+          </a:stretch>
+        </a:blipFill>
+        <a:effectLst/>
       </p:bgPr>
     </p:bg>
     <p:spTree>
@@ -9534,7 +8980,7 @@
           </a:solidFill>
           <a:ln w="19050">
             <a:solidFill>
-              <a:srgbClr val="1C2530"/>
+              <a:srgbClr val="022049"/>
             </a:solidFill>
             <a:prstDash val="solid"/>
           </a:ln>
@@ -9636,7 +9082,7 @@
             <a:r>
               <a:rPr lang="en-US" sz="1300" b="1" dirty="0">
                 <a:solidFill>
-                  <a:srgbClr val="1C2530"/>
+                  <a:srgbClr val="022049"/>
                 </a:solidFill>
                 <a:latin typeface="Arial" pitchFamily="34" charset="0"/>
                 <a:ea typeface="Arial" pitchFamily="34" charset="-122"/>
@@ -9675,7 +9121,7 @@
             <a:r>
               <a:rPr lang="en-US" sz="850" spc="100" kern="0" dirty="0">
                 <a:solidFill>
-                  <a:srgbClr val="5B6672"/>
+                  <a:srgbClr val="4B4B4B"/>
                 </a:solidFill>
                 <a:latin typeface="Courier New" pitchFamily="34" charset="0"/>
                 <a:ea typeface="Courier New" pitchFamily="34" charset="-122"/>
@@ -9741,7 +9187,7 @@
             <a:r>
               <a:rPr lang="en-US" sz="950" dirty="0">
                 <a:solidFill>
-                  <a:srgbClr val="5B6672"/>
+                  <a:srgbClr val="4B4B4B"/>
                 </a:solidFill>
                 <a:latin typeface="Courier New" pitchFamily="34" charset="0"/>
                 <a:ea typeface="Courier New" pitchFamily="34" charset="-122"/>
@@ -9780,7 +9226,7 @@
             <a:r>
               <a:rPr lang="en-US" sz="750" spc="100" kern="0" dirty="0">
                 <a:solidFill>
-                  <a:srgbClr val="5B6672"/>
+                  <a:srgbClr val="4B4B4B"/>
                 </a:solidFill>
                 <a:latin typeface="Courier New" pitchFamily="34" charset="0"/>
                 <a:ea typeface="Courier New" pitchFamily="34" charset="-122"/>
@@ -9819,7 +9265,7 @@
             <a:r>
               <a:rPr lang="en-US" sz="1050" dirty="0">
                 <a:solidFill>
-                  <a:srgbClr val="1C2530"/>
+                  <a:srgbClr val="022049"/>
                 </a:solidFill>
                 <a:latin typeface="Courier New" pitchFamily="34" charset="0"/>
                 <a:ea typeface="Courier New" pitchFamily="34" charset="-122"/>
@@ -9922,7 +9368,7 @@
             <a:r>
               <a:rPr lang="en-US" sz="800" spc="100" kern="0" dirty="0">
                 <a:solidFill>
-                  <a:srgbClr val="5B6672"/>
+                  <a:srgbClr val="4B4B4B"/>
                 </a:solidFill>
                 <a:latin typeface="Courier New" pitchFamily="34" charset="0"/>
                 <a:ea typeface="Courier New" pitchFamily="34" charset="-122"/>
@@ -9961,7 +9407,7 @@
             <a:r>
               <a:rPr lang="en-US" sz="1050" dirty="0">
                 <a:solidFill>
-                  <a:srgbClr val="1C2530"/>
+                  <a:srgbClr val="022049"/>
                 </a:solidFill>
                 <a:latin typeface="Calibri" pitchFamily="34" charset="0"/>
                 <a:ea typeface="Calibri" pitchFamily="34" charset="-122"/>
@@ -10000,7 +9446,7 @@
             <a:r>
               <a:rPr lang="en-US" sz="1050" dirty="0">
                 <a:solidFill>
-                  <a:srgbClr val="1C2530"/>
+                  <a:srgbClr val="022049"/>
                 </a:solidFill>
                 <a:latin typeface="Calibri" pitchFamily="34" charset="0"/>
                 <a:ea typeface="Calibri" pitchFamily="34" charset="-122"/>
@@ -10047,7 +9493,7 @@
             <a:avLst/>
           </a:prstGeom>
           <a:solidFill>
-            <a:srgbClr val="C1432A"/>
+            <a:srgbClr val="022049"/>
           </a:solidFill>
           <a:ln/>
         </p:spPr>
@@ -10079,7 +9525,7 @@
             <a:r>
               <a:rPr lang="en-US" sz="1050" b="1" dirty="0">
                 <a:solidFill>
-                  <a:srgbClr val="C1432A"/>
+                  <a:srgbClr val="022049"/>
                 </a:solidFill>
                 <a:latin typeface="Calibri" pitchFamily="34" charset="0"/>
                 <a:ea typeface="Calibri" pitchFamily="34" charset="-122"/>
@@ -10118,7 +9564,7 @@
             <a:r>
               <a:rPr lang="en-US" sz="1050" dirty="0">
                 <a:solidFill>
-                  <a:srgbClr val="1C2530"/>
+                  <a:srgbClr val="022049"/>
                 </a:solidFill>
                 <a:latin typeface="Calibri" pitchFamily="34" charset="0"/>
                 <a:ea typeface="Calibri" pitchFamily="34" charset="-122"/>
@@ -10157,7 +9603,7 @@
             <a:r>
               <a:rPr lang="en-US" sz="1050" dirty="0">
                 <a:solidFill>
-                  <a:srgbClr val="1C2530"/>
+                  <a:srgbClr val="022049"/>
                 </a:solidFill>
                 <a:latin typeface="Calibri" pitchFamily="34" charset="0"/>
                 <a:ea typeface="Calibri" pitchFamily="34" charset="-122"/>
@@ -10196,7 +9642,7 @@
             <a:r>
               <a:rPr lang="en-US" sz="1050" dirty="0">
                 <a:solidFill>
-                  <a:srgbClr val="1C2530"/>
+                  <a:srgbClr val="022049"/>
                 </a:solidFill>
                 <a:latin typeface="Calibri" pitchFamily="34" charset="0"/>
                 <a:ea typeface="Calibri" pitchFamily="34" charset="-122"/>
@@ -10235,7 +9681,7 @@
             <a:r>
               <a:rPr lang="en-US" sz="1050" dirty="0">
                 <a:solidFill>
-                  <a:srgbClr val="1C2530"/>
+                  <a:srgbClr val="022049"/>
                 </a:solidFill>
                 <a:latin typeface="Calibri" pitchFamily="34" charset="0"/>
                 <a:ea typeface="Calibri" pitchFamily="34" charset="-122"/>
@@ -10274,7 +9720,7 @@
             <a:r>
               <a:rPr lang="en-US" sz="1050" dirty="0">
                 <a:solidFill>
-                  <a:srgbClr val="1C2530"/>
+                  <a:srgbClr val="022049"/>
                 </a:solidFill>
                 <a:latin typeface="Calibri" pitchFamily="34" charset="0"/>
                 <a:ea typeface="Calibri" pitchFamily="34" charset="-122"/>
@@ -10313,7 +9759,7 @@
             <a:r>
               <a:rPr lang="en-US" sz="1050" dirty="0">
                 <a:solidFill>
-                  <a:srgbClr val="1C2530"/>
+                  <a:srgbClr val="022049"/>
                 </a:solidFill>
                 <a:latin typeface="Calibri" pitchFamily="34" charset="0"/>
                 <a:ea typeface="Calibri" pitchFamily="34" charset="-122"/>
@@ -10352,7 +9798,7 @@
             <a:r>
               <a:rPr lang="en-US" sz="2600" b="1" spc="50" kern="0" dirty="0">
                 <a:solidFill>
-                  <a:srgbClr val="1C2530"/>
+                  <a:srgbClr val="022049"/>
                 </a:solidFill>
                 <a:latin typeface="Arial" pitchFamily="34" charset="0"/>
                 <a:ea typeface="Arial" pitchFamily="34" charset="-122"/>
@@ -10391,7 +9837,7 @@
             <a:r>
               <a:rPr lang="en-US" sz="1150" dirty="0">
                 <a:solidFill>
-                  <a:srgbClr val="5B6672"/>
+                  <a:srgbClr val="4B4B4B"/>
                 </a:solidFill>
                 <a:latin typeface="Calibri" pitchFamily="34" charset="0"/>
                 <a:ea typeface="Calibri" pitchFamily="34" charset="-122"/>
@@ -10420,7 +9866,7 @@
           <a:noFill/>
           <a:ln w="15875">
             <a:solidFill>
-              <a:srgbClr val="1C2530"/>
+              <a:srgbClr val="022049"/>
             </a:solidFill>
             <a:prstDash val="solid"/>
           </a:ln>
@@ -10487,7 +9933,7 @@
             <a:r>
               <a:rPr lang="en-US" sz="800" dirty="0">
                 <a:solidFill>
-                  <a:srgbClr val="5B6672"/>
+                  <a:srgbClr val="4B4B4B"/>
                 </a:solidFill>
                 <a:latin typeface="Courier New" pitchFamily="34" charset="0"/>
                 <a:ea typeface="Courier New" pitchFamily="34" charset="-122"/>
@@ -10595,7 +10041,7 @@
             <a:r>
               <a:rPr lang="en-US" sz="1150" b="1" dirty="0">
                 <a:solidFill>
-                  <a:srgbClr val="1C2530"/>
+                  <a:srgbClr val="022049"/>
                 </a:solidFill>
                 <a:latin typeface="Arial" pitchFamily="34" charset="0"/>
                 <a:ea typeface="Arial" pitchFamily="34" charset="-122"/>
@@ -10637,7 +10083,7 @@
             <a:r>
               <a:rPr lang="en-US" sz="850" dirty="0">
                 <a:solidFill>
-                  <a:srgbClr val="5B6672"/>
+                  <a:srgbClr val="4B4B4B"/>
                 </a:solidFill>
                 <a:latin typeface="Calibri" pitchFamily="34" charset="0"/>
                 <a:ea typeface="Calibri" pitchFamily="34" charset="-122"/>
@@ -10699,7 +10145,7 @@
             <a:r>
               <a:rPr lang="en-US" sz="750" dirty="0">
                 <a:solidFill>
-                  <a:srgbClr val="5B6672"/>
+                  <a:srgbClr val="4B4B4B"/>
                 </a:solidFill>
                 <a:latin typeface="Courier New" pitchFamily="34" charset="0"/>
                 <a:ea typeface="Courier New" pitchFamily="34" charset="-122"/>
@@ -10738,7 +10184,7 @@
             <a:r>
               <a:rPr lang="en-US" sz="750" dirty="0">
                 <a:solidFill>
-                  <a:srgbClr val="C1432A"/>
+                  <a:srgbClr val="022049"/>
                 </a:solidFill>
                 <a:latin typeface="Courier New" pitchFamily="34" charset="0"/>
                 <a:ea typeface="Courier New" pitchFamily="34" charset="-122"/>
@@ -10811,7 +10257,7 @@
             <a:r>
               <a:rPr lang="en-US" sz="800" dirty="0">
                 <a:solidFill>
-                  <a:srgbClr val="5B6672"/>
+                  <a:srgbClr val="4B4B4B"/>
                 </a:solidFill>
                 <a:latin typeface="Courier New" pitchFamily="34" charset="0"/>
                 <a:ea typeface="Courier New" pitchFamily="34" charset="-122"/>
@@ -10919,7 +10365,7 @@
             <a:r>
               <a:rPr lang="en-US" sz="1150" b="1" dirty="0">
                 <a:solidFill>
-                  <a:srgbClr val="1C2530"/>
+                  <a:srgbClr val="022049"/>
                 </a:solidFill>
                 <a:latin typeface="Arial" pitchFamily="34" charset="0"/>
                 <a:ea typeface="Arial" pitchFamily="34" charset="-122"/>
@@ -10961,7 +10407,7 @@
             <a:r>
               <a:rPr lang="en-US" sz="850" dirty="0">
                 <a:solidFill>
-                  <a:srgbClr val="5B6672"/>
+                  <a:srgbClr val="4B4B4B"/>
                 </a:solidFill>
                 <a:latin typeface="Calibri" pitchFamily="34" charset="0"/>
                 <a:ea typeface="Calibri" pitchFamily="34" charset="-122"/>
@@ -11023,7 +10469,7 @@
             <a:r>
               <a:rPr lang="en-US" sz="750" dirty="0">
                 <a:solidFill>
-                  <a:srgbClr val="5B6672"/>
+                  <a:srgbClr val="4B4B4B"/>
                 </a:solidFill>
                 <a:latin typeface="Courier New" pitchFamily="34" charset="0"/>
                 <a:ea typeface="Courier New" pitchFamily="34" charset="-122"/>
@@ -11062,7 +10508,7 @@
             <a:r>
               <a:rPr lang="en-US" sz="750" dirty="0">
                 <a:solidFill>
-                  <a:srgbClr val="C1432A"/>
+                  <a:srgbClr val="022049"/>
                 </a:solidFill>
                 <a:latin typeface="Courier New" pitchFamily="34" charset="0"/>
                 <a:ea typeface="Courier New" pitchFamily="34" charset="-122"/>
@@ -11135,7 +10581,7 @@
             <a:r>
               <a:rPr lang="en-US" sz="800" dirty="0">
                 <a:solidFill>
-                  <a:srgbClr val="5B6672"/>
+                  <a:srgbClr val="4B4B4B"/>
                 </a:solidFill>
                 <a:latin typeface="Courier New" pitchFamily="34" charset="0"/>
                 <a:ea typeface="Courier New" pitchFamily="34" charset="-122"/>
@@ -11243,7 +10689,7 @@
             <a:r>
               <a:rPr lang="en-US" sz="1150" b="1" dirty="0">
                 <a:solidFill>
-                  <a:srgbClr val="1C2530"/>
+                  <a:srgbClr val="022049"/>
                 </a:solidFill>
                 <a:latin typeface="Arial" pitchFamily="34" charset="0"/>
                 <a:ea typeface="Arial" pitchFamily="34" charset="-122"/>
@@ -11285,7 +10731,7 @@
             <a:r>
               <a:rPr lang="en-US" sz="850" dirty="0">
                 <a:solidFill>
-                  <a:srgbClr val="5B6672"/>
+                  <a:srgbClr val="4B4B4B"/>
                 </a:solidFill>
                 <a:latin typeface="Calibri" pitchFamily="34" charset="0"/>
                 <a:ea typeface="Calibri" pitchFamily="34" charset="-122"/>
@@ -11347,7 +10793,7 @@
             <a:r>
               <a:rPr lang="en-US" sz="750" dirty="0">
                 <a:solidFill>
-                  <a:srgbClr val="5B6672"/>
+                  <a:srgbClr val="4B4B4B"/>
                 </a:solidFill>
                 <a:latin typeface="Courier New" pitchFamily="34" charset="0"/>
                 <a:ea typeface="Courier New" pitchFamily="34" charset="-122"/>
@@ -11386,7 +10832,7 @@
             <a:r>
               <a:rPr lang="en-US" sz="750" dirty="0">
                 <a:solidFill>
-                  <a:srgbClr val="C1432A"/>
+                  <a:srgbClr val="022049"/>
                 </a:solidFill>
                 <a:latin typeface="Courier New" pitchFamily="34" charset="0"/>
                 <a:ea typeface="Courier New" pitchFamily="34" charset="-122"/>
@@ -11459,7 +10905,7 @@
             <a:r>
               <a:rPr lang="en-US" sz="800" dirty="0">
                 <a:solidFill>
-                  <a:srgbClr val="5B6672"/>
+                  <a:srgbClr val="4B4B4B"/>
                 </a:solidFill>
                 <a:latin typeface="Courier New" pitchFamily="34" charset="0"/>
                 <a:ea typeface="Courier New" pitchFamily="34" charset="-122"/>
@@ -11501,7 +10947,7 @@
             <a:r>
               <a:rPr lang="en-US" sz="1150" b="1" dirty="0">
                 <a:solidFill>
-                  <a:srgbClr val="1C2530"/>
+                  <a:srgbClr val="022049"/>
                 </a:solidFill>
                 <a:latin typeface="Arial" pitchFamily="34" charset="0"/>
                 <a:ea typeface="Arial" pitchFamily="34" charset="-122"/>
@@ -11543,7 +10989,7 @@
             <a:r>
               <a:rPr lang="en-US" sz="850" dirty="0">
                 <a:solidFill>
-                  <a:srgbClr val="5B6672"/>
+                  <a:srgbClr val="4B4B4B"/>
                 </a:solidFill>
                 <a:latin typeface="Calibri" pitchFamily="34" charset="0"/>
                 <a:ea typeface="Calibri" pitchFamily="34" charset="-122"/>
@@ -11605,7 +11051,7 @@
             <a:r>
               <a:rPr lang="en-US" sz="750" dirty="0">
                 <a:solidFill>
-                  <a:srgbClr val="5B6672"/>
+                  <a:srgbClr val="4B4B4B"/>
                 </a:solidFill>
                 <a:latin typeface="Courier New" pitchFamily="34" charset="0"/>
                 <a:ea typeface="Courier New" pitchFamily="34" charset="-122"/>
@@ -11644,7 +11090,7 @@
             <a:r>
               <a:rPr lang="en-US" sz="750" dirty="0">
                 <a:solidFill>
-                  <a:srgbClr val="C1432A"/>
+                  <a:srgbClr val="022049"/>
                 </a:solidFill>
                 <a:latin typeface="Courier New" pitchFamily="34" charset="0"/>
                 <a:ea typeface="Courier New" pitchFamily="34" charset="-122"/>
@@ -11717,7 +11163,7 @@
             <a:r>
               <a:rPr lang="en-US" sz="800" dirty="0">
                 <a:solidFill>
-                  <a:srgbClr val="5B6672"/>
+                  <a:srgbClr val="4B4B4B"/>
                 </a:solidFill>
                 <a:latin typeface="Courier New" pitchFamily="34" charset="0"/>
                 <a:ea typeface="Courier New" pitchFamily="34" charset="-122"/>
@@ -11825,7 +11271,7 @@
             <a:r>
               <a:rPr lang="en-US" sz="1150" b="1" dirty="0">
                 <a:solidFill>
-                  <a:srgbClr val="1C2530"/>
+                  <a:srgbClr val="022049"/>
                 </a:solidFill>
                 <a:latin typeface="Arial" pitchFamily="34" charset="0"/>
                 <a:ea typeface="Arial" pitchFamily="34" charset="-122"/>
@@ -11867,7 +11313,7 @@
             <a:r>
               <a:rPr lang="en-US" sz="850" dirty="0">
                 <a:solidFill>
-                  <a:srgbClr val="5B6672"/>
+                  <a:srgbClr val="4B4B4B"/>
                 </a:solidFill>
                 <a:latin typeface="Calibri" pitchFamily="34" charset="0"/>
                 <a:ea typeface="Calibri" pitchFamily="34" charset="-122"/>
@@ -11929,7 +11375,7 @@
             <a:r>
               <a:rPr lang="en-US" sz="750" dirty="0">
                 <a:solidFill>
-                  <a:srgbClr val="5B6672"/>
+                  <a:srgbClr val="4B4B4B"/>
                 </a:solidFill>
                 <a:latin typeface="Courier New" pitchFamily="34" charset="0"/>
                 <a:ea typeface="Courier New" pitchFamily="34" charset="-122"/>
@@ -11968,7 +11414,7 @@
             <a:r>
               <a:rPr lang="en-US" sz="750" dirty="0">
                 <a:solidFill>
-                  <a:srgbClr val="C1432A"/>
+                  <a:srgbClr val="022049"/>
                 </a:solidFill>
                 <a:latin typeface="Courier New" pitchFamily="34" charset="0"/>
                 <a:ea typeface="Courier New" pitchFamily="34" charset="-122"/>
@@ -12041,7 +11487,7 @@
             <a:r>
               <a:rPr lang="en-US" sz="800" dirty="0">
                 <a:solidFill>
-                  <a:srgbClr val="5B6672"/>
+                  <a:srgbClr val="4B4B4B"/>
                 </a:solidFill>
                 <a:latin typeface="Courier New" pitchFamily="34" charset="0"/>
                 <a:ea typeface="Courier New" pitchFamily="34" charset="-122"/>
@@ -12083,7 +11529,7 @@
             <a:r>
               <a:rPr lang="en-US" sz="1150" b="1" dirty="0">
                 <a:solidFill>
-                  <a:srgbClr val="1C2530"/>
+                  <a:srgbClr val="022049"/>
                 </a:solidFill>
                 <a:latin typeface="Arial" pitchFamily="34" charset="0"/>
                 <a:ea typeface="Arial" pitchFamily="34" charset="-122"/>
@@ -12125,7 +11571,7 @@
             <a:r>
               <a:rPr lang="en-US" sz="850" dirty="0">
                 <a:solidFill>
-                  <a:srgbClr val="5B6672"/>
+                  <a:srgbClr val="4B4B4B"/>
                 </a:solidFill>
                 <a:latin typeface="Calibri" pitchFamily="34" charset="0"/>
                 <a:ea typeface="Calibri" pitchFamily="34" charset="-122"/>
@@ -12187,7 +11633,7 @@
             <a:r>
               <a:rPr lang="en-US" sz="750" dirty="0">
                 <a:solidFill>
-                  <a:srgbClr val="5B6672"/>
+                  <a:srgbClr val="4B4B4B"/>
                 </a:solidFill>
                 <a:latin typeface="Courier New" pitchFamily="34" charset="0"/>
                 <a:ea typeface="Courier New" pitchFamily="34" charset="-122"/>
@@ -12226,7 +11672,7 @@
             <a:r>
               <a:rPr lang="en-US" sz="750" dirty="0">
                 <a:solidFill>
-                  <a:srgbClr val="C1432A"/>
+                  <a:srgbClr val="022049"/>
                 </a:solidFill>
                 <a:latin typeface="Courier New" pitchFamily="34" charset="0"/>
                 <a:ea typeface="Courier New" pitchFamily="34" charset="-122"/>
@@ -12251,9 +11697,16 @@
   <p:cSld name="Slide 5">
     <p:bg>
       <p:bgPr>
-        <a:solidFill>
-          <a:srgbClr val="EEF1F3"/>
-        </a:solidFill>
+        <a:blipFill dpi="0" rotWithShape="1">
+          <a:blip r:embed="rId1">
+            <a:lum/>
+          </a:blip>
+          <a:srcRect/>
+          <a:stretch>
+            <a:fillRect/>
+          </a:stretch>
+        </a:blipFill>
+        <a:effectLst/>
       </p:bgPr>
     </p:bg>
     <p:spTree>
@@ -12289,7 +11742,7 @@
           </a:solidFill>
           <a:ln w="19050">
             <a:solidFill>
-              <a:srgbClr val="1C2530"/>
+              <a:srgbClr val="022049"/>
             </a:solidFill>
             <a:prstDash val="solid"/>
           </a:ln>
@@ -12391,7 +11844,7 @@
             <a:r>
               <a:rPr lang="en-US" sz="1300" b="1" dirty="0">
                 <a:solidFill>
-                  <a:srgbClr val="1C2530"/>
+                  <a:srgbClr val="022049"/>
                 </a:solidFill>
                 <a:latin typeface="Arial" pitchFamily="34" charset="0"/>
                 <a:ea typeface="Arial" pitchFamily="34" charset="-122"/>
@@ -12430,7 +11883,7 @@
             <a:r>
               <a:rPr lang="en-US" sz="850" spc="100" kern="0" dirty="0">
                 <a:solidFill>
-                  <a:srgbClr val="5B6672"/>
+                  <a:srgbClr val="4B4B4B"/>
                 </a:solidFill>
                 <a:latin typeface="Courier New" pitchFamily="34" charset="0"/>
                 <a:ea typeface="Courier New" pitchFamily="34" charset="-122"/>
@@ -12496,7 +11949,7 @@
             <a:r>
               <a:rPr lang="en-US" sz="950" dirty="0">
                 <a:solidFill>
-                  <a:srgbClr val="5B6672"/>
+                  <a:srgbClr val="4B4B4B"/>
                 </a:solidFill>
                 <a:latin typeface="Courier New" pitchFamily="34" charset="0"/>
                 <a:ea typeface="Courier New" pitchFamily="34" charset="-122"/>
@@ -12535,7 +11988,7 @@
             <a:r>
               <a:rPr lang="en-US" sz="750" spc="100" kern="0" dirty="0">
                 <a:solidFill>
-                  <a:srgbClr val="5B6672"/>
+                  <a:srgbClr val="4B4B4B"/>
                 </a:solidFill>
                 <a:latin typeface="Courier New" pitchFamily="34" charset="0"/>
                 <a:ea typeface="Courier New" pitchFamily="34" charset="-122"/>
@@ -12574,7 +12027,7 @@
             <a:r>
               <a:rPr lang="en-US" sz="1050" dirty="0">
                 <a:solidFill>
-                  <a:srgbClr val="1C2530"/>
+                  <a:srgbClr val="022049"/>
                 </a:solidFill>
                 <a:latin typeface="Courier New" pitchFamily="34" charset="0"/>
                 <a:ea typeface="Courier New" pitchFamily="34" charset="-122"/>
@@ -12677,7 +12130,7 @@
             <a:r>
               <a:rPr lang="en-US" sz="800" spc="100" kern="0" dirty="0">
                 <a:solidFill>
-                  <a:srgbClr val="5B6672"/>
+                  <a:srgbClr val="4B4B4B"/>
                 </a:solidFill>
                 <a:latin typeface="Courier New" pitchFamily="34" charset="0"/>
                 <a:ea typeface="Courier New" pitchFamily="34" charset="-122"/>
@@ -12716,7 +12169,7 @@
             <a:r>
               <a:rPr lang="en-US" sz="1050" dirty="0">
                 <a:solidFill>
-                  <a:srgbClr val="1C2530"/>
+                  <a:srgbClr val="022049"/>
                 </a:solidFill>
                 <a:latin typeface="Calibri" pitchFamily="34" charset="0"/>
                 <a:ea typeface="Calibri" pitchFamily="34" charset="-122"/>
@@ -12755,7 +12208,7 @@
             <a:r>
               <a:rPr lang="en-US" sz="1050" dirty="0">
                 <a:solidFill>
-                  <a:srgbClr val="1C2530"/>
+                  <a:srgbClr val="022049"/>
                 </a:solidFill>
                 <a:latin typeface="Calibri" pitchFamily="34" charset="0"/>
                 <a:ea typeface="Calibri" pitchFamily="34" charset="-122"/>
@@ -12794,7 +12247,7 @@
             <a:r>
               <a:rPr lang="en-US" sz="1050" dirty="0">
                 <a:solidFill>
-                  <a:srgbClr val="1C2530"/>
+                  <a:srgbClr val="022049"/>
                 </a:solidFill>
                 <a:latin typeface="Calibri" pitchFamily="34" charset="0"/>
                 <a:ea typeface="Calibri" pitchFamily="34" charset="-122"/>
@@ -12841,7 +12294,7 @@
             <a:avLst/>
           </a:prstGeom>
           <a:solidFill>
-            <a:srgbClr val="C1432A"/>
+            <a:srgbClr val="022049"/>
           </a:solidFill>
           <a:ln/>
         </p:spPr>
@@ -12873,7 +12326,7 @@
             <a:r>
               <a:rPr lang="en-US" sz="1050" b="1" dirty="0">
                 <a:solidFill>
-                  <a:srgbClr val="C1432A"/>
+                  <a:srgbClr val="022049"/>
                 </a:solidFill>
                 <a:latin typeface="Calibri" pitchFamily="34" charset="0"/>
                 <a:ea typeface="Calibri" pitchFamily="34" charset="-122"/>
@@ -12912,7 +12365,7 @@
             <a:r>
               <a:rPr lang="en-US" sz="1050" dirty="0">
                 <a:solidFill>
-                  <a:srgbClr val="1C2530"/>
+                  <a:srgbClr val="022049"/>
                 </a:solidFill>
                 <a:latin typeface="Calibri" pitchFamily="34" charset="0"/>
                 <a:ea typeface="Calibri" pitchFamily="34" charset="-122"/>
@@ -12951,7 +12404,7 @@
             <a:r>
               <a:rPr lang="en-US" sz="1050" dirty="0">
                 <a:solidFill>
-                  <a:srgbClr val="1C2530"/>
+                  <a:srgbClr val="022049"/>
                 </a:solidFill>
                 <a:latin typeface="Calibri" pitchFamily="34" charset="0"/>
                 <a:ea typeface="Calibri" pitchFamily="34" charset="-122"/>
@@ -12990,7 +12443,7 @@
             <a:r>
               <a:rPr lang="en-US" sz="1050" dirty="0">
                 <a:solidFill>
-                  <a:srgbClr val="1C2530"/>
+                  <a:srgbClr val="022049"/>
                 </a:solidFill>
                 <a:latin typeface="Calibri" pitchFamily="34" charset="0"/>
                 <a:ea typeface="Calibri" pitchFamily="34" charset="-122"/>
@@ -13029,7 +12482,7 @@
             <a:r>
               <a:rPr lang="en-US" sz="1050" dirty="0">
                 <a:solidFill>
-                  <a:srgbClr val="1C2530"/>
+                  <a:srgbClr val="022049"/>
                 </a:solidFill>
                 <a:latin typeface="Calibri" pitchFamily="34" charset="0"/>
                 <a:ea typeface="Calibri" pitchFamily="34" charset="-122"/>
@@ -13068,7 +12521,7 @@
             <a:r>
               <a:rPr lang="en-US" sz="1050" dirty="0">
                 <a:solidFill>
-                  <a:srgbClr val="1C2530"/>
+                  <a:srgbClr val="022049"/>
                 </a:solidFill>
                 <a:latin typeface="Calibri" pitchFamily="34" charset="0"/>
                 <a:ea typeface="Calibri" pitchFamily="34" charset="-122"/>
@@ -13107,7 +12560,7 @@
             <a:r>
               <a:rPr lang="en-US" sz="2600" b="1" spc="50" kern="0" dirty="0">
                 <a:solidFill>
-                  <a:srgbClr val="1C2530"/>
+                  <a:srgbClr val="022049"/>
                 </a:solidFill>
                 <a:latin typeface="Arial" pitchFamily="34" charset="0"/>
                 <a:ea typeface="Arial" pitchFamily="34" charset="-122"/>
@@ -13146,7 +12599,7 @@
             <a:r>
               <a:rPr lang="en-US" sz="1150" dirty="0">
                 <a:solidFill>
-                  <a:srgbClr val="5B6672"/>
+                  <a:srgbClr val="4B4B4B"/>
                 </a:solidFill>
                 <a:latin typeface="Calibri" pitchFamily="34" charset="0"/>
                 <a:ea typeface="Calibri" pitchFamily="34" charset="-122"/>
@@ -13175,7 +12628,7 @@
           <a:noFill/>
           <a:ln w="15875">
             <a:solidFill>
-              <a:srgbClr val="1C2530"/>
+              <a:srgbClr val="022049"/>
             </a:solidFill>
             <a:prstDash val="solid"/>
           </a:ln>
@@ -13242,7 +12695,7 @@
             <a:r>
               <a:rPr lang="en-US" sz="800" dirty="0">
                 <a:solidFill>
-                  <a:srgbClr val="5B6672"/>
+                  <a:srgbClr val="4B4B4B"/>
                 </a:solidFill>
                 <a:latin typeface="Courier New" pitchFamily="34" charset="0"/>
                 <a:ea typeface="Courier New" pitchFamily="34" charset="-122"/>
@@ -13350,7 +12803,7 @@
             <a:r>
               <a:rPr lang="en-US" sz="1150" b="1" dirty="0">
                 <a:solidFill>
-                  <a:srgbClr val="1C2530"/>
+                  <a:srgbClr val="022049"/>
                 </a:solidFill>
                 <a:latin typeface="Arial" pitchFamily="34" charset="0"/>
                 <a:ea typeface="Arial" pitchFamily="34" charset="-122"/>
@@ -13392,7 +12845,7 @@
             <a:r>
               <a:rPr lang="en-US" sz="850" dirty="0">
                 <a:solidFill>
-                  <a:srgbClr val="5B6672"/>
+                  <a:srgbClr val="4B4B4B"/>
                 </a:solidFill>
                 <a:latin typeface="Calibri" pitchFamily="34" charset="0"/>
                 <a:ea typeface="Calibri" pitchFamily="34" charset="-122"/>
@@ -13454,7 +12907,7 @@
             <a:r>
               <a:rPr lang="en-US" sz="750" dirty="0">
                 <a:solidFill>
-                  <a:srgbClr val="5B6672"/>
+                  <a:srgbClr val="4B4B4B"/>
                 </a:solidFill>
                 <a:latin typeface="Courier New" pitchFamily="34" charset="0"/>
                 <a:ea typeface="Courier New" pitchFamily="34" charset="-122"/>
@@ -13493,7 +12946,7 @@
             <a:r>
               <a:rPr lang="en-US" sz="750" dirty="0">
                 <a:solidFill>
-                  <a:srgbClr val="C1432A"/>
+                  <a:srgbClr val="022049"/>
                 </a:solidFill>
                 <a:latin typeface="Courier New" pitchFamily="34" charset="0"/>
                 <a:ea typeface="Courier New" pitchFamily="34" charset="-122"/>
@@ -13566,7 +13019,7 @@
             <a:r>
               <a:rPr lang="en-US" sz="800" dirty="0">
                 <a:solidFill>
-                  <a:srgbClr val="5B6672"/>
+                  <a:srgbClr val="4B4B4B"/>
                 </a:solidFill>
                 <a:latin typeface="Courier New" pitchFamily="34" charset="0"/>
                 <a:ea typeface="Courier New" pitchFamily="34" charset="-122"/>
@@ -13608,7 +13061,7 @@
             <a:r>
               <a:rPr lang="en-US" sz="1150" b="1" dirty="0">
                 <a:solidFill>
-                  <a:srgbClr val="1C2530"/>
+                  <a:srgbClr val="022049"/>
                 </a:solidFill>
                 <a:latin typeface="Arial" pitchFamily="34" charset="0"/>
                 <a:ea typeface="Arial" pitchFamily="34" charset="-122"/>
@@ -13650,7 +13103,7 @@
             <a:r>
               <a:rPr lang="en-US" sz="850" dirty="0">
                 <a:solidFill>
-                  <a:srgbClr val="5B6672"/>
+                  <a:srgbClr val="4B4B4B"/>
                 </a:solidFill>
                 <a:latin typeface="Calibri" pitchFamily="34" charset="0"/>
                 <a:ea typeface="Calibri" pitchFamily="34" charset="-122"/>
@@ -13712,7 +13165,7 @@
             <a:r>
               <a:rPr lang="en-US" sz="750" dirty="0">
                 <a:solidFill>
-                  <a:srgbClr val="5B6672"/>
+                  <a:srgbClr val="4B4B4B"/>
                 </a:solidFill>
                 <a:latin typeface="Courier New" pitchFamily="34" charset="0"/>
                 <a:ea typeface="Courier New" pitchFamily="34" charset="-122"/>
@@ -13751,7 +13204,7 @@
             <a:r>
               <a:rPr lang="en-US" sz="750" dirty="0">
                 <a:solidFill>
-                  <a:srgbClr val="C1432A"/>
+                  <a:srgbClr val="022049"/>
                 </a:solidFill>
                 <a:latin typeface="Courier New" pitchFamily="34" charset="0"/>
                 <a:ea typeface="Courier New" pitchFamily="34" charset="-122"/>
@@ -13824,7 +13277,7 @@
             <a:r>
               <a:rPr lang="en-US" sz="800" dirty="0">
                 <a:solidFill>
-                  <a:srgbClr val="5B6672"/>
+                  <a:srgbClr val="4B4B4B"/>
                 </a:solidFill>
                 <a:latin typeface="Courier New" pitchFamily="34" charset="0"/>
                 <a:ea typeface="Courier New" pitchFamily="34" charset="-122"/>
@@ -13866,7 +13319,7 @@
             <a:r>
               <a:rPr lang="en-US" sz="1150" b="1" dirty="0">
                 <a:solidFill>
-                  <a:srgbClr val="1C2530"/>
+                  <a:srgbClr val="022049"/>
                 </a:solidFill>
                 <a:latin typeface="Arial" pitchFamily="34" charset="0"/>
                 <a:ea typeface="Arial" pitchFamily="34" charset="-122"/>
@@ -13908,7 +13361,7 @@
             <a:r>
               <a:rPr lang="en-US" sz="850" dirty="0">
                 <a:solidFill>
-                  <a:srgbClr val="5B6672"/>
+                  <a:srgbClr val="4B4B4B"/>
                 </a:solidFill>
                 <a:latin typeface="Calibri" pitchFamily="34" charset="0"/>
                 <a:ea typeface="Calibri" pitchFamily="34" charset="-122"/>
@@ -13970,7 +13423,7 @@
             <a:r>
               <a:rPr lang="en-US" sz="750" dirty="0">
                 <a:solidFill>
-                  <a:srgbClr val="5B6672"/>
+                  <a:srgbClr val="4B4B4B"/>
                 </a:solidFill>
                 <a:latin typeface="Courier New" pitchFamily="34" charset="0"/>
                 <a:ea typeface="Courier New" pitchFamily="34" charset="-122"/>
@@ -14009,7 +13462,7 @@
             <a:r>
               <a:rPr lang="en-US" sz="750" dirty="0">
                 <a:solidFill>
-                  <a:srgbClr val="C1432A"/>
+                  <a:srgbClr val="022049"/>
                 </a:solidFill>
                 <a:latin typeface="Courier New" pitchFamily="34" charset="0"/>
                 <a:ea typeface="Courier New" pitchFamily="34" charset="-122"/>
@@ -14082,7 +13535,7 @@
             <a:r>
               <a:rPr lang="en-US" sz="800" dirty="0">
                 <a:solidFill>
-                  <a:srgbClr val="5B6672"/>
+                  <a:srgbClr val="4B4B4B"/>
                 </a:solidFill>
                 <a:latin typeface="Courier New" pitchFamily="34" charset="0"/>
                 <a:ea typeface="Courier New" pitchFamily="34" charset="-122"/>
@@ -14124,7 +13577,7 @@
             <a:r>
               <a:rPr lang="en-US" sz="1150" b="1" dirty="0">
                 <a:solidFill>
-                  <a:srgbClr val="1C2530"/>
+                  <a:srgbClr val="022049"/>
                 </a:solidFill>
                 <a:latin typeface="Arial" pitchFamily="34" charset="0"/>
                 <a:ea typeface="Arial" pitchFamily="34" charset="-122"/>
@@ -14166,7 +13619,7 @@
             <a:r>
               <a:rPr lang="en-US" sz="850" dirty="0">
                 <a:solidFill>
-                  <a:srgbClr val="5B6672"/>
+                  <a:srgbClr val="4B4B4B"/>
                 </a:solidFill>
                 <a:latin typeface="Calibri" pitchFamily="34" charset="0"/>
                 <a:ea typeface="Calibri" pitchFamily="34" charset="-122"/>
@@ -14228,7 +13681,7 @@
             <a:r>
               <a:rPr lang="en-US" sz="750" dirty="0">
                 <a:solidFill>
-                  <a:srgbClr val="5B6672"/>
+                  <a:srgbClr val="4B4B4B"/>
                 </a:solidFill>
                 <a:latin typeface="Courier New" pitchFamily="34" charset="0"/>
                 <a:ea typeface="Courier New" pitchFamily="34" charset="-122"/>
@@ -14267,7 +13720,7 @@
             <a:r>
               <a:rPr lang="en-US" sz="750" dirty="0">
                 <a:solidFill>
-                  <a:srgbClr val="C1432A"/>
+                  <a:srgbClr val="022049"/>
                 </a:solidFill>
                 <a:latin typeface="Courier New" pitchFamily="34" charset="0"/>
                 <a:ea typeface="Courier New" pitchFamily="34" charset="-122"/>
@@ -14340,7 +13793,7 @@
             <a:r>
               <a:rPr lang="en-US" sz="800" dirty="0">
                 <a:solidFill>
-                  <a:srgbClr val="5B6672"/>
+                  <a:srgbClr val="4B4B4B"/>
                 </a:solidFill>
                 <a:latin typeface="Courier New" pitchFamily="34" charset="0"/>
                 <a:ea typeface="Courier New" pitchFamily="34" charset="-122"/>
@@ -14448,7 +13901,7 @@
             <a:r>
               <a:rPr lang="en-US" sz="1150" b="1" dirty="0">
                 <a:solidFill>
-                  <a:srgbClr val="1C2530"/>
+                  <a:srgbClr val="022049"/>
                 </a:solidFill>
                 <a:latin typeface="Arial" pitchFamily="34" charset="0"/>
                 <a:ea typeface="Arial" pitchFamily="34" charset="-122"/>
@@ -14490,7 +13943,7 @@
             <a:r>
               <a:rPr lang="en-US" sz="850" dirty="0">
                 <a:solidFill>
-                  <a:srgbClr val="5B6672"/>
+                  <a:srgbClr val="4B4B4B"/>
                 </a:solidFill>
                 <a:latin typeface="Calibri" pitchFamily="34" charset="0"/>
                 <a:ea typeface="Calibri" pitchFamily="34" charset="-122"/>
@@ -14552,7 +14005,7 @@
             <a:r>
               <a:rPr lang="en-US" sz="750" dirty="0">
                 <a:solidFill>
-                  <a:srgbClr val="5B6672"/>
+                  <a:srgbClr val="4B4B4B"/>
                 </a:solidFill>
                 <a:latin typeface="Courier New" pitchFamily="34" charset="0"/>
                 <a:ea typeface="Courier New" pitchFamily="34" charset="-122"/>
@@ -14591,7 +14044,7 @@
             <a:r>
               <a:rPr lang="en-US" sz="750" dirty="0">
                 <a:solidFill>
-                  <a:srgbClr val="C1432A"/>
+                  <a:srgbClr val="022049"/>
                 </a:solidFill>
                 <a:latin typeface="Courier New" pitchFamily="34" charset="0"/>
                 <a:ea typeface="Courier New" pitchFamily="34" charset="-122"/>
@@ -14664,7 +14117,7 @@
             <a:r>
               <a:rPr lang="en-US" sz="800" dirty="0">
                 <a:solidFill>
-                  <a:srgbClr val="5B6672"/>
+                  <a:srgbClr val="4B4B4B"/>
                 </a:solidFill>
                 <a:latin typeface="Courier New" pitchFamily="34" charset="0"/>
                 <a:ea typeface="Courier New" pitchFamily="34" charset="-122"/>
@@ -14706,7 +14159,7 @@
             <a:r>
               <a:rPr lang="en-US" sz="1150" b="1" dirty="0">
                 <a:solidFill>
-                  <a:srgbClr val="1C2530"/>
+                  <a:srgbClr val="022049"/>
                 </a:solidFill>
                 <a:latin typeface="Arial" pitchFamily="34" charset="0"/>
                 <a:ea typeface="Arial" pitchFamily="34" charset="-122"/>
@@ -14748,7 +14201,7 @@
             <a:r>
               <a:rPr lang="en-US" sz="850" dirty="0">
                 <a:solidFill>
-                  <a:srgbClr val="5B6672"/>
+                  <a:srgbClr val="4B4B4B"/>
                 </a:solidFill>
                 <a:latin typeface="Calibri" pitchFamily="34" charset="0"/>
                 <a:ea typeface="Calibri" pitchFamily="34" charset="-122"/>
@@ -14810,7 +14263,7 @@
             <a:r>
               <a:rPr lang="en-US" sz="750" dirty="0">
                 <a:solidFill>
-                  <a:srgbClr val="5B6672"/>
+                  <a:srgbClr val="4B4B4B"/>
                 </a:solidFill>
                 <a:latin typeface="Courier New" pitchFamily="34" charset="0"/>
                 <a:ea typeface="Courier New" pitchFamily="34" charset="-122"/>
@@ -14849,7 +14302,7 @@
             <a:r>
               <a:rPr lang="en-US" sz="750" dirty="0">
                 <a:solidFill>
-                  <a:srgbClr val="C1432A"/>
+                  <a:srgbClr val="022049"/>
                 </a:solidFill>
                 <a:latin typeface="Courier New" pitchFamily="34" charset="0"/>
                 <a:ea typeface="Courier New" pitchFamily="34" charset="-122"/>
@@ -14874,9 +14327,16 @@
   <p:cSld name="Slide 6">
     <p:bg>
       <p:bgPr>
-        <a:solidFill>
-          <a:srgbClr val="EEF1F3"/>
-        </a:solidFill>
+        <a:blipFill dpi="0" rotWithShape="1">
+          <a:blip r:embed="rId1">
+            <a:lum/>
+          </a:blip>
+          <a:srcRect/>
+          <a:stretch>
+            <a:fillRect/>
+          </a:stretch>
+        </a:blipFill>
+        <a:effectLst/>
       </p:bgPr>
     </p:bg>
     <p:spTree>
@@ -14912,7 +14372,7 @@
           </a:solidFill>
           <a:ln w="19050">
             <a:solidFill>
-              <a:srgbClr val="1C2530"/>
+              <a:srgbClr val="022049"/>
             </a:solidFill>
             <a:prstDash val="solid"/>
           </a:ln>
@@ -15014,7 +14474,7 @@
             <a:r>
               <a:rPr lang="en-US" sz="1300" b="1" dirty="0">
                 <a:solidFill>
-                  <a:srgbClr val="1C2530"/>
+                  <a:srgbClr val="022049"/>
                 </a:solidFill>
                 <a:latin typeface="Arial" pitchFamily="34" charset="0"/>
                 <a:ea typeface="Arial" pitchFamily="34" charset="-122"/>
@@ -15053,7 +14513,7 @@
             <a:r>
               <a:rPr lang="en-US" sz="850" spc="100" kern="0" dirty="0">
                 <a:solidFill>
-                  <a:srgbClr val="5B6672"/>
+                  <a:srgbClr val="4B4B4B"/>
                 </a:solidFill>
                 <a:latin typeface="Courier New" pitchFamily="34" charset="0"/>
                 <a:ea typeface="Courier New" pitchFamily="34" charset="-122"/>
@@ -15119,7 +14579,7 @@
             <a:r>
               <a:rPr lang="en-US" sz="950" dirty="0">
                 <a:solidFill>
-                  <a:srgbClr val="5B6672"/>
+                  <a:srgbClr val="4B4B4B"/>
                 </a:solidFill>
                 <a:latin typeface="Courier New" pitchFamily="34" charset="0"/>
                 <a:ea typeface="Courier New" pitchFamily="34" charset="-122"/>
@@ -15158,7 +14618,7 @@
             <a:r>
               <a:rPr lang="en-US" sz="750" spc="100" kern="0" dirty="0">
                 <a:solidFill>
-                  <a:srgbClr val="5B6672"/>
+                  <a:srgbClr val="4B4B4B"/>
                 </a:solidFill>
                 <a:latin typeface="Courier New" pitchFamily="34" charset="0"/>
                 <a:ea typeface="Courier New" pitchFamily="34" charset="-122"/>
@@ -15197,7 +14657,7 @@
             <a:r>
               <a:rPr lang="en-US" sz="1050" dirty="0">
                 <a:solidFill>
-                  <a:srgbClr val="1C2530"/>
+                  <a:srgbClr val="022049"/>
                 </a:solidFill>
                 <a:latin typeface="Courier New" pitchFamily="34" charset="0"/>
                 <a:ea typeface="Courier New" pitchFamily="34" charset="-122"/>
@@ -15300,7 +14760,7 @@
             <a:r>
               <a:rPr lang="en-US" sz="800" spc="100" kern="0" dirty="0">
                 <a:solidFill>
-                  <a:srgbClr val="5B6672"/>
+                  <a:srgbClr val="4B4B4B"/>
                 </a:solidFill>
                 <a:latin typeface="Courier New" pitchFamily="34" charset="0"/>
                 <a:ea typeface="Courier New" pitchFamily="34" charset="-122"/>
@@ -15339,7 +14799,7 @@
             <a:r>
               <a:rPr lang="en-US" sz="1050" dirty="0">
                 <a:solidFill>
-                  <a:srgbClr val="1C2530"/>
+                  <a:srgbClr val="022049"/>
                 </a:solidFill>
                 <a:latin typeface="Calibri" pitchFamily="34" charset="0"/>
                 <a:ea typeface="Calibri" pitchFamily="34" charset="-122"/>
@@ -15378,7 +14838,7 @@
             <a:r>
               <a:rPr lang="en-US" sz="1050" dirty="0">
                 <a:solidFill>
-                  <a:srgbClr val="1C2530"/>
+                  <a:srgbClr val="022049"/>
                 </a:solidFill>
                 <a:latin typeface="Calibri" pitchFamily="34" charset="0"/>
                 <a:ea typeface="Calibri" pitchFamily="34" charset="-122"/>
@@ -15417,7 +14877,7 @@
             <a:r>
               <a:rPr lang="en-US" sz="1050" dirty="0">
                 <a:solidFill>
-                  <a:srgbClr val="1C2530"/>
+                  <a:srgbClr val="022049"/>
                 </a:solidFill>
                 <a:latin typeface="Calibri" pitchFamily="34" charset="0"/>
                 <a:ea typeface="Calibri" pitchFamily="34" charset="-122"/>
@@ -15456,7 +14916,7 @@
             <a:r>
               <a:rPr lang="en-US" sz="1050" dirty="0">
                 <a:solidFill>
-                  <a:srgbClr val="1C2530"/>
+                  <a:srgbClr val="022049"/>
                 </a:solidFill>
                 <a:latin typeface="Calibri" pitchFamily="34" charset="0"/>
                 <a:ea typeface="Calibri" pitchFamily="34" charset="-122"/>
@@ -15503,7 +14963,7 @@
             <a:avLst/>
           </a:prstGeom>
           <a:solidFill>
-            <a:srgbClr val="C1432A"/>
+            <a:srgbClr val="022049"/>
           </a:solidFill>
           <a:ln/>
         </p:spPr>
@@ -15535,7 +14995,7 @@
             <a:r>
               <a:rPr lang="en-US" sz="1050" b="1" dirty="0">
                 <a:solidFill>
-                  <a:srgbClr val="C1432A"/>
+                  <a:srgbClr val="022049"/>
                 </a:solidFill>
                 <a:latin typeface="Calibri" pitchFamily="34" charset="0"/>
                 <a:ea typeface="Calibri" pitchFamily="34" charset="-122"/>
@@ -15574,7 +15034,7 @@
             <a:r>
               <a:rPr lang="en-US" sz="1050" dirty="0">
                 <a:solidFill>
-                  <a:srgbClr val="1C2530"/>
+                  <a:srgbClr val="022049"/>
                 </a:solidFill>
                 <a:latin typeface="Calibri" pitchFamily="34" charset="0"/>
                 <a:ea typeface="Calibri" pitchFamily="34" charset="-122"/>
@@ -15613,7 +15073,7 @@
             <a:r>
               <a:rPr lang="en-US" sz="1050" dirty="0">
                 <a:solidFill>
-                  <a:srgbClr val="1C2530"/>
+                  <a:srgbClr val="022049"/>
                 </a:solidFill>
                 <a:latin typeface="Calibri" pitchFamily="34" charset="0"/>
                 <a:ea typeface="Calibri" pitchFamily="34" charset="-122"/>
@@ -15652,7 +15112,7 @@
             <a:r>
               <a:rPr lang="en-US" sz="1050" dirty="0">
                 <a:solidFill>
-                  <a:srgbClr val="1C2530"/>
+                  <a:srgbClr val="022049"/>
                 </a:solidFill>
                 <a:latin typeface="Calibri" pitchFamily="34" charset="0"/>
                 <a:ea typeface="Calibri" pitchFamily="34" charset="-122"/>
@@ -15691,7 +15151,7 @@
             <a:r>
               <a:rPr lang="en-US" sz="1050" dirty="0">
                 <a:solidFill>
-                  <a:srgbClr val="1C2530"/>
+                  <a:srgbClr val="022049"/>
                 </a:solidFill>
                 <a:latin typeface="Calibri" pitchFamily="34" charset="0"/>
                 <a:ea typeface="Calibri" pitchFamily="34" charset="-122"/>
@@ -15730,7 +15190,7 @@
             <a:r>
               <a:rPr lang="en-US" sz="2600" b="1" spc="50" kern="0" dirty="0">
                 <a:solidFill>
-                  <a:srgbClr val="1C2530"/>
+                  <a:srgbClr val="022049"/>
                 </a:solidFill>
                 <a:latin typeface="Arial" pitchFamily="34" charset="0"/>
                 <a:ea typeface="Arial" pitchFamily="34" charset="-122"/>
@@ -15769,7 +15229,7 @@
             <a:r>
               <a:rPr lang="en-US" sz="1150" dirty="0">
                 <a:solidFill>
-                  <a:srgbClr val="5B6672"/>
+                  <a:srgbClr val="4B4B4B"/>
                 </a:solidFill>
                 <a:latin typeface="Calibri" pitchFamily="34" charset="0"/>
                 <a:ea typeface="Calibri" pitchFamily="34" charset="-122"/>
@@ -15798,7 +15258,7 @@
           <a:noFill/>
           <a:ln w="15875">
             <a:solidFill>
-              <a:srgbClr val="1C2530"/>
+              <a:srgbClr val="022049"/>
             </a:solidFill>
             <a:prstDash val="solid"/>
           </a:ln>
@@ -15865,7 +15325,7 @@
             <a:r>
               <a:rPr lang="en-US" sz="800" dirty="0">
                 <a:solidFill>
-                  <a:srgbClr val="5B6672"/>
+                  <a:srgbClr val="4B4B4B"/>
                 </a:solidFill>
                 <a:latin typeface="Courier New" pitchFamily="34" charset="0"/>
                 <a:ea typeface="Courier New" pitchFamily="34" charset="-122"/>
@@ -15973,7 +15433,7 @@
             <a:r>
               <a:rPr lang="en-US" sz="1150" b="1" dirty="0">
                 <a:solidFill>
-                  <a:srgbClr val="1C2530"/>
+                  <a:srgbClr val="022049"/>
                 </a:solidFill>
                 <a:latin typeface="Arial" pitchFamily="34" charset="0"/>
                 <a:ea typeface="Arial" pitchFamily="34" charset="-122"/>
@@ -16015,7 +15475,7 @@
             <a:r>
               <a:rPr lang="en-US" sz="850" dirty="0">
                 <a:solidFill>
-                  <a:srgbClr val="5B6672"/>
+                  <a:srgbClr val="4B4B4B"/>
                 </a:solidFill>
                 <a:latin typeface="Calibri" pitchFamily="34" charset="0"/>
                 <a:ea typeface="Calibri" pitchFamily="34" charset="-122"/>
@@ -16077,7 +15537,7 @@
             <a:r>
               <a:rPr lang="en-US" sz="750" dirty="0">
                 <a:solidFill>
-                  <a:srgbClr val="5B6672"/>
+                  <a:srgbClr val="4B4B4B"/>
                 </a:solidFill>
                 <a:latin typeface="Courier New" pitchFamily="34" charset="0"/>
                 <a:ea typeface="Courier New" pitchFamily="34" charset="-122"/>
@@ -16116,7 +15576,7 @@
             <a:r>
               <a:rPr lang="en-US" sz="750" dirty="0">
                 <a:solidFill>
-                  <a:srgbClr val="C1432A"/>
+                  <a:srgbClr val="022049"/>
                 </a:solidFill>
                 <a:latin typeface="Courier New" pitchFamily="34" charset="0"/>
                 <a:ea typeface="Courier New" pitchFamily="34" charset="-122"/>
@@ -16189,7 +15649,7 @@
             <a:r>
               <a:rPr lang="en-US" sz="800" dirty="0">
                 <a:solidFill>
-                  <a:srgbClr val="5B6672"/>
+                  <a:srgbClr val="4B4B4B"/>
                 </a:solidFill>
                 <a:latin typeface="Courier New" pitchFamily="34" charset="0"/>
                 <a:ea typeface="Courier New" pitchFamily="34" charset="-122"/>
@@ -16231,7 +15691,7 @@
             <a:r>
               <a:rPr lang="en-US" sz="1150" b="1" dirty="0">
                 <a:solidFill>
-                  <a:srgbClr val="1C2530"/>
+                  <a:srgbClr val="022049"/>
                 </a:solidFill>
                 <a:latin typeface="Arial" pitchFamily="34" charset="0"/>
                 <a:ea typeface="Arial" pitchFamily="34" charset="-122"/>
@@ -16273,7 +15733,7 @@
             <a:r>
               <a:rPr lang="en-US" sz="850" dirty="0">
                 <a:solidFill>
-                  <a:srgbClr val="5B6672"/>
+                  <a:srgbClr val="4B4B4B"/>
                 </a:solidFill>
                 <a:latin typeface="Calibri" pitchFamily="34" charset="0"/>
                 <a:ea typeface="Calibri" pitchFamily="34" charset="-122"/>
@@ -16335,7 +15795,7 @@
             <a:r>
               <a:rPr lang="en-US" sz="750" dirty="0">
                 <a:solidFill>
-                  <a:srgbClr val="5B6672"/>
+                  <a:srgbClr val="4B4B4B"/>
                 </a:solidFill>
                 <a:latin typeface="Courier New" pitchFamily="34" charset="0"/>
                 <a:ea typeface="Courier New" pitchFamily="34" charset="-122"/>
@@ -16374,7 +15834,7 @@
             <a:r>
               <a:rPr lang="en-US" sz="750" dirty="0">
                 <a:solidFill>
-                  <a:srgbClr val="C1432A"/>
+                  <a:srgbClr val="022049"/>
                 </a:solidFill>
                 <a:latin typeface="Courier New" pitchFamily="34" charset="0"/>
                 <a:ea typeface="Courier New" pitchFamily="34" charset="-122"/>
@@ -16447,7 +15907,7 @@
             <a:r>
               <a:rPr lang="en-US" sz="800" dirty="0">
                 <a:solidFill>
-                  <a:srgbClr val="5B6672"/>
+                  <a:srgbClr val="4B4B4B"/>
                 </a:solidFill>
                 <a:latin typeface="Courier New" pitchFamily="34" charset="0"/>
                 <a:ea typeface="Courier New" pitchFamily="34" charset="-122"/>
@@ -16489,7 +15949,7 @@
             <a:r>
               <a:rPr lang="en-US" sz="1150" b="1" dirty="0">
                 <a:solidFill>
-                  <a:srgbClr val="1C2530"/>
+                  <a:srgbClr val="022049"/>
                 </a:solidFill>
                 <a:latin typeface="Arial" pitchFamily="34" charset="0"/>
                 <a:ea typeface="Arial" pitchFamily="34" charset="-122"/>
@@ -16531,7 +15991,7 @@
             <a:r>
               <a:rPr lang="en-US" sz="850" dirty="0">
                 <a:solidFill>
-                  <a:srgbClr val="5B6672"/>
+                  <a:srgbClr val="4B4B4B"/>
                 </a:solidFill>
                 <a:latin typeface="Calibri" pitchFamily="34" charset="0"/>
                 <a:ea typeface="Calibri" pitchFamily="34" charset="-122"/>
@@ -16593,7 +16053,7 @@
             <a:r>
               <a:rPr lang="en-US" sz="750" dirty="0">
                 <a:solidFill>
-                  <a:srgbClr val="5B6672"/>
+                  <a:srgbClr val="4B4B4B"/>
                 </a:solidFill>
                 <a:latin typeface="Courier New" pitchFamily="34" charset="0"/>
                 <a:ea typeface="Courier New" pitchFamily="34" charset="-122"/>
@@ -16632,7 +16092,7 @@
             <a:r>
               <a:rPr lang="en-US" sz="750" dirty="0">
                 <a:solidFill>
-                  <a:srgbClr val="C1432A"/>
+                  <a:srgbClr val="022049"/>
                 </a:solidFill>
                 <a:latin typeface="Courier New" pitchFamily="34" charset="0"/>
                 <a:ea typeface="Courier New" pitchFamily="34" charset="-122"/>
@@ -16705,7 +16165,7 @@
             <a:r>
               <a:rPr lang="en-US" sz="800" dirty="0">
                 <a:solidFill>
-                  <a:srgbClr val="5B6672"/>
+                  <a:srgbClr val="4B4B4B"/>
                 </a:solidFill>
                 <a:latin typeface="Courier New" pitchFamily="34" charset="0"/>
                 <a:ea typeface="Courier New" pitchFamily="34" charset="-122"/>
@@ -16747,7 +16207,7 @@
             <a:r>
               <a:rPr lang="en-US" sz="1150" b="1" dirty="0">
                 <a:solidFill>
-                  <a:srgbClr val="1C2530"/>
+                  <a:srgbClr val="022049"/>
                 </a:solidFill>
                 <a:latin typeface="Arial" pitchFamily="34" charset="0"/>
                 <a:ea typeface="Arial" pitchFamily="34" charset="-122"/>
@@ -16789,7 +16249,7 @@
             <a:r>
               <a:rPr lang="en-US" sz="850" dirty="0">
                 <a:solidFill>
-                  <a:srgbClr val="5B6672"/>
+                  <a:srgbClr val="4B4B4B"/>
                 </a:solidFill>
                 <a:latin typeface="Calibri" pitchFamily="34" charset="0"/>
                 <a:ea typeface="Calibri" pitchFamily="34" charset="-122"/>
@@ -16851,7 +16311,7 @@
             <a:r>
               <a:rPr lang="en-US" sz="750" dirty="0">
                 <a:solidFill>
-                  <a:srgbClr val="5B6672"/>
+                  <a:srgbClr val="4B4B4B"/>
                 </a:solidFill>
                 <a:latin typeface="Courier New" pitchFamily="34" charset="0"/>
                 <a:ea typeface="Courier New" pitchFamily="34" charset="-122"/>
@@ -16890,7 +16350,7 @@
             <a:r>
               <a:rPr lang="en-US" sz="750" dirty="0">
                 <a:solidFill>
-                  <a:srgbClr val="C1432A"/>
+                  <a:srgbClr val="022049"/>
                 </a:solidFill>
                 <a:latin typeface="Courier New" pitchFamily="34" charset="0"/>
                 <a:ea typeface="Courier New" pitchFamily="34" charset="-122"/>
@@ -16963,7 +16423,7 @@
             <a:r>
               <a:rPr lang="en-US" sz="800" dirty="0">
                 <a:solidFill>
-                  <a:srgbClr val="5B6672"/>
+                  <a:srgbClr val="4B4B4B"/>
                 </a:solidFill>
                 <a:latin typeface="Courier New" pitchFamily="34" charset="0"/>
                 <a:ea typeface="Courier New" pitchFamily="34" charset="-122"/>
@@ -17071,7 +16531,7 @@
             <a:r>
               <a:rPr lang="en-US" sz="1150" b="1" dirty="0">
                 <a:solidFill>
-                  <a:srgbClr val="1C2530"/>
+                  <a:srgbClr val="022049"/>
                 </a:solidFill>
                 <a:latin typeface="Arial" pitchFamily="34" charset="0"/>
                 <a:ea typeface="Arial" pitchFamily="34" charset="-122"/>
@@ -17113,7 +16573,7 @@
             <a:r>
               <a:rPr lang="en-US" sz="850" dirty="0">
                 <a:solidFill>
-                  <a:srgbClr val="5B6672"/>
+                  <a:srgbClr val="4B4B4B"/>
                 </a:solidFill>
                 <a:latin typeface="Calibri" pitchFamily="34" charset="0"/>
                 <a:ea typeface="Calibri" pitchFamily="34" charset="-122"/>
@@ -17175,7 +16635,7 @@
             <a:r>
               <a:rPr lang="en-US" sz="750" dirty="0">
                 <a:solidFill>
-                  <a:srgbClr val="5B6672"/>
+                  <a:srgbClr val="4B4B4B"/>
                 </a:solidFill>
                 <a:latin typeface="Courier New" pitchFamily="34" charset="0"/>
                 <a:ea typeface="Courier New" pitchFamily="34" charset="-122"/>
@@ -17214,7 +16674,7 @@
             <a:r>
               <a:rPr lang="en-US" sz="750" dirty="0">
                 <a:solidFill>
-                  <a:srgbClr val="C1432A"/>
+                  <a:srgbClr val="022049"/>
                 </a:solidFill>
                 <a:latin typeface="Courier New" pitchFamily="34" charset="0"/>
                 <a:ea typeface="Courier New" pitchFamily="34" charset="-122"/>
@@ -17287,7 +16747,7 @@
             <a:r>
               <a:rPr lang="en-US" sz="800" dirty="0">
                 <a:solidFill>
-                  <a:srgbClr val="5B6672"/>
+                  <a:srgbClr val="4B4B4B"/>
                 </a:solidFill>
                 <a:latin typeface="Courier New" pitchFamily="34" charset="0"/>
                 <a:ea typeface="Courier New" pitchFamily="34" charset="-122"/>
@@ -17329,7 +16789,7 @@
             <a:r>
               <a:rPr lang="en-US" sz="1150" b="1" dirty="0">
                 <a:solidFill>
-                  <a:srgbClr val="1C2530"/>
+                  <a:srgbClr val="022049"/>
                 </a:solidFill>
                 <a:latin typeface="Arial" pitchFamily="34" charset="0"/>
                 <a:ea typeface="Arial" pitchFamily="34" charset="-122"/>
@@ -17371,7 +16831,7 @@
             <a:r>
               <a:rPr lang="en-US" sz="850" dirty="0">
                 <a:solidFill>
-                  <a:srgbClr val="5B6672"/>
+                  <a:srgbClr val="4B4B4B"/>
                 </a:solidFill>
                 <a:latin typeface="Calibri" pitchFamily="34" charset="0"/>
                 <a:ea typeface="Calibri" pitchFamily="34" charset="-122"/>
@@ -17433,7 +16893,7 @@
             <a:r>
               <a:rPr lang="en-US" sz="750" dirty="0">
                 <a:solidFill>
-                  <a:srgbClr val="5B6672"/>
+                  <a:srgbClr val="4B4B4B"/>
                 </a:solidFill>
                 <a:latin typeface="Courier New" pitchFamily="34" charset="0"/>
                 <a:ea typeface="Courier New" pitchFamily="34" charset="-122"/>
@@ -17472,7 +16932,7 @@
             <a:r>
               <a:rPr lang="en-US" sz="750" dirty="0">
                 <a:solidFill>
-                  <a:srgbClr val="C1432A"/>
+                  <a:srgbClr val="022049"/>
                 </a:solidFill>
                 <a:latin typeface="Courier New" pitchFamily="34" charset="0"/>
                 <a:ea typeface="Courier New" pitchFamily="34" charset="-122"/>
@@ -17497,9 +16957,16 @@
   <p:cSld name="Slide 7">
     <p:bg>
       <p:bgPr>
-        <a:solidFill>
-          <a:srgbClr val="EEF1F3"/>
-        </a:solidFill>
+        <a:blipFill dpi="0" rotWithShape="1">
+          <a:blip r:embed="rId1">
+            <a:lum/>
+          </a:blip>
+          <a:srcRect/>
+          <a:stretch>
+            <a:fillRect/>
+          </a:stretch>
+        </a:blipFill>
+        <a:effectLst/>
       </p:bgPr>
     </p:bg>
     <p:spTree>
@@ -17535,7 +17002,7 @@
           </a:solidFill>
           <a:ln w="19050">
             <a:solidFill>
-              <a:srgbClr val="1C2530"/>
+              <a:srgbClr val="022049"/>
             </a:solidFill>
             <a:prstDash val="solid"/>
           </a:ln>
@@ -17637,7 +17104,7 @@
             <a:r>
               <a:rPr lang="en-US" sz="1300" b="1" dirty="0">
                 <a:solidFill>
-                  <a:srgbClr val="1C2530"/>
+                  <a:srgbClr val="022049"/>
                 </a:solidFill>
                 <a:latin typeface="Arial" pitchFamily="34" charset="0"/>
                 <a:ea typeface="Arial" pitchFamily="34" charset="-122"/>
@@ -17676,7 +17143,7 @@
             <a:r>
               <a:rPr lang="en-US" sz="850" spc="100" kern="0" dirty="0">
                 <a:solidFill>
-                  <a:srgbClr val="5B6672"/>
+                  <a:srgbClr val="4B4B4B"/>
                 </a:solidFill>
                 <a:latin typeface="Courier New" pitchFamily="34" charset="0"/>
                 <a:ea typeface="Courier New" pitchFamily="34" charset="-122"/>
@@ -17742,7 +17209,7 @@
             <a:r>
               <a:rPr lang="en-US" sz="950" dirty="0">
                 <a:solidFill>
-                  <a:srgbClr val="5B6672"/>
+                  <a:srgbClr val="4B4B4B"/>
                 </a:solidFill>
                 <a:latin typeface="Courier New" pitchFamily="34" charset="0"/>
                 <a:ea typeface="Courier New" pitchFamily="34" charset="-122"/>
@@ -17781,7 +17248,7 @@
             <a:r>
               <a:rPr lang="en-US" sz="750" spc="100" kern="0" dirty="0">
                 <a:solidFill>
-                  <a:srgbClr val="5B6672"/>
+                  <a:srgbClr val="4B4B4B"/>
                 </a:solidFill>
                 <a:latin typeface="Courier New" pitchFamily="34" charset="0"/>
                 <a:ea typeface="Courier New" pitchFamily="34" charset="-122"/>
@@ -17820,7 +17287,7 @@
             <a:r>
               <a:rPr lang="en-US" sz="1050" dirty="0">
                 <a:solidFill>
-                  <a:srgbClr val="1C2530"/>
+                  <a:srgbClr val="022049"/>
                 </a:solidFill>
                 <a:latin typeface="Courier New" pitchFamily="34" charset="0"/>
                 <a:ea typeface="Courier New" pitchFamily="34" charset="-122"/>
@@ -17923,7 +17390,7 @@
             <a:r>
               <a:rPr lang="en-US" sz="800" spc="100" kern="0" dirty="0">
                 <a:solidFill>
-                  <a:srgbClr val="5B6672"/>
+                  <a:srgbClr val="4B4B4B"/>
                 </a:solidFill>
                 <a:latin typeface="Courier New" pitchFamily="34" charset="0"/>
                 <a:ea typeface="Courier New" pitchFamily="34" charset="-122"/>
@@ -17962,7 +17429,7 @@
             <a:r>
               <a:rPr lang="en-US" sz="1050" dirty="0">
                 <a:solidFill>
-                  <a:srgbClr val="1C2530"/>
+                  <a:srgbClr val="022049"/>
                 </a:solidFill>
                 <a:latin typeface="Calibri" pitchFamily="34" charset="0"/>
                 <a:ea typeface="Calibri" pitchFamily="34" charset="-122"/>
@@ -18001,7 +17468,7 @@
             <a:r>
               <a:rPr lang="en-US" sz="1050" dirty="0">
                 <a:solidFill>
-                  <a:srgbClr val="1C2530"/>
+                  <a:srgbClr val="022049"/>
                 </a:solidFill>
                 <a:latin typeface="Calibri" pitchFamily="34" charset="0"/>
                 <a:ea typeface="Calibri" pitchFamily="34" charset="-122"/>
@@ -18040,7 +17507,7 @@
             <a:r>
               <a:rPr lang="en-US" sz="1050" dirty="0">
                 <a:solidFill>
-                  <a:srgbClr val="1C2530"/>
+                  <a:srgbClr val="022049"/>
                 </a:solidFill>
                 <a:latin typeface="Calibri" pitchFamily="34" charset="0"/>
                 <a:ea typeface="Calibri" pitchFamily="34" charset="-122"/>
@@ -18079,7 +17546,7 @@
             <a:r>
               <a:rPr lang="en-US" sz="1050" dirty="0">
                 <a:solidFill>
-                  <a:srgbClr val="1C2530"/>
+                  <a:srgbClr val="022049"/>
                 </a:solidFill>
                 <a:latin typeface="Calibri" pitchFamily="34" charset="0"/>
                 <a:ea typeface="Calibri" pitchFamily="34" charset="-122"/>
@@ -18118,7 +17585,7 @@
             <a:r>
               <a:rPr lang="en-US" sz="1050" dirty="0">
                 <a:solidFill>
-                  <a:srgbClr val="1C2530"/>
+                  <a:srgbClr val="022049"/>
                 </a:solidFill>
                 <a:latin typeface="Calibri" pitchFamily="34" charset="0"/>
                 <a:ea typeface="Calibri" pitchFamily="34" charset="-122"/>
@@ -18165,7 +17632,7 @@
             <a:avLst/>
           </a:prstGeom>
           <a:solidFill>
-            <a:srgbClr val="C1432A"/>
+            <a:srgbClr val="022049"/>
           </a:solidFill>
           <a:ln/>
         </p:spPr>
@@ -18197,7 +17664,7 @@
             <a:r>
               <a:rPr lang="en-US" sz="1050" b="1" dirty="0">
                 <a:solidFill>
-                  <a:srgbClr val="C1432A"/>
+                  <a:srgbClr val="022049"/>
                 </a:solidFill>
                 <a:latin typeface="Calibri" pitchFamily="34" charset="0"/>
                 <a:ea typeface="Calibri" pitchFamily="34" charset="-122"/>
@@ -18236,7 +17703,7 @@
             <a:r>
               <a:rPr lang="en-US" sz="1050" dirty="0">
                 <a:solidFill>
-                  <a:srgbClr val="1C2530"/>
+                  <a:srgbClr val="022049"/>
                 </a:solidFill>
                 <a:latin typeface="Calibri" pitchFamily="34" charset="0"/>
                 <a:ea typeface="Calibri" pitchFamily="34" charset="-122"/>
@@ -18275,7 +17742,7 @@
             <a:r>
               <a:rPr lang="en-US" sz="1050" dirty="0">
                 <a:solidFill>
-                  <a:srgbClr val="1C2530"/>
+                  <a:srgbClr val="022049"/>
                 </a:solidFill>
                 <a:latin typeface="Calibri" pitchFamily="34" charset="0"/>
                 <a:ea typeface="Calibri" pitchFamily="34" charset="-122"/>
@@ -18314,7 +17781,7 @@
             <a:r>
               <a:rPr lang="en-US" sz="1050" dirty="0">
                 <a:solidFill>
-                  <a:srgbClr val="1C2530"/>
+                  <a:srgbClr val="022049"/>
                 </a:solidFill>
                 <a:latin typeface="Calibri" pitchFamily="34" charset="0"/>
                 <a:ea typeface="Calibri" pitchFamily="34" charset="-122"/>
@@ -18353,7 +17820,7 @@
             <a:r>
               <a:rPr lang="en-US" sz="2600" b="1" spc="50" kern="0" dirty="0">
                 <a:solidFill>
-                  <a:srgbClr val="1C2530"/>
+                  <a:srgbClr val="022049"/>
                 </a:solidFill>
                 <a:latin typeface="Arial" pitchFamily="34" charset="0"/>
                 <a:ea typeface="Arial" pitchFamily="34" charset="-122"/>
@@ -18392,7 +17859,7 @@
             <a:r>
               <a:rPr lang="en-US" sz="1150" dirty="0">
                 <a:solidFill>
-                  <a:srgbClr val="5B6672"/>
+                  <a:srgbClr val="4B4B4B"/>
                 </a:solidFill>
                 <a:latin typeface="Calibri" pitchFamily="34" charset="0"/>
                 <a:ea typeface="Calibri" pitchFamily="34" charset="-122"/>
@@ -18421,7 +17888,7 @@
           <a:noFill/>
           <a:ln w="15875">
             <a:solidFill>
-              <a:srgbClr val="1C2530"/>
+              <a:srgbClr val="022049"/>
             </a:solidFill>
             <a:prstDash val="solid"/>
           </a:ln>
@@ -18488,7 +17955,7 @@
             <a:r>
               <a:rPr lang="en-US" sz="800" dirty="0">
                 <a:solidFill>
-                  <a:srgbClr val="5B6672"/>
+                  <a:srgbClr val="4B4B4B"/>
                 </a:solidFill>
                 <a:latin typeface="Courier New" pitchFamily="34" charset="0"/>
                 <a:ea typeface="Courier New" pitchFamily="34" charset="-122"/>
@@ -18596,7 +18063,7 @@
             <a:r>
               <a:rPr lang="en-US" sz="1150" b="1" dirty="0">
                 <a:solidFill>
-                  <a:srgbClr val="1C2530"/>
+                  <a:srgbClr val="022049"/>
                 </a:solidFill>
                 <a:latin typeface="Arial" pitchFamily="34" charset="0"/>
                 <a:ea typeface="Arial" pitchFamily="34" charset="-122"/>
@@ -18638,7 +18105,7 @@
             <a:r>
               <a:rPr lang="en-US" sz="850" dirty="0">
                 <a:solidFill>
-                  <a:srgbClr val="5B6672"/>
+                  <a:srgbClr val="4B4B4B"/>
                 </a:solidFill>
                 <a:latin typeface="Calibri" pitchFamily="34" charset="0"/>
                 <a:ea typeface="Calibri" pitchFamily="34" charset="-122"/>
@@ -18700,7 +18167,7 @@
             <a:r>
               <a:rPr lang="en-US" sz="750" dirty="0">
                 <a:solidFill>
-                  <a:srgbClr val="5B6672"/>
+                  <a:srgbClr val="4B4B4B"/>
                 </a:solidFill>
                 <a:latin typeface="Courier New" pitchFamily="34" charset="0"/>
                 <a:ea typeface="Courier New" pitchFamily="34" charset="-122"/>
@@ -18739,7 +18206,7 @@
             <a:r>
               <a:rPr lang="en-US" sz="750" dirty="0">
                 <a:solidFill>
-                  <a:srgbClr val="C1432A"/>
+                  <a:srgbClr val="022049"/>
                 </a:solidFill>
                 <a:latin typeface="Courier New" pitchFamily="34" charset="0"/>
                 <a:ea typeface="Courier New" pitchFamily="34" charset="-122"/>
@@ -18812,7 +18279,7 @@
             <a:r>
               <a:rPr lang="en-US" sz="800" dirty="0">
                 <a:solidFill>
-                  <a:srgbClr val="5B6672"/>
+                  <a:srgbClr val="4B4B4B"/>
                 </a:solidFill>
                 <a:latin typeface="Courier New" pitchFamily="34" charset="0"/>
                 <a:ea typeface="Courier New" pitchFamily="34" charset="-122"/>
@@ -18920,7 +18387,7 @@
             <a:r>
               <a:rPr lang="en-US" sz="1150" b="1" dirty="0">
                 <a:solidFill>
-                  <a:srgbClr val="1C2530"/>
+                  <a:srgbClr val="022049"/>
                 </a:solidFill>
                 <a:latin typeface="Arial" pitchFamily="34" charset="0"/>
                 <a:ea typeface="Arial" pitchFamily="34" charset="-122"/>
@@ -18962,7 +18429,7 @@
             <a:r>
               <a:rPr lang="en-US" sz="850" dirty="0">
                 <a:solidFill>
-                  <a:srgbClr val="5B6672"/>
+                  <a:srgbClr val="4B4B4B"/>
                 </a:solidFill>
                 <a:latin typeface="Calibri" pitchFamily="34" charset="0"/>
                 <a:ea typeface="Calibri" pitchFamily="34" charset="-122"/>
@@ -19024,7 +18491,7 @@
             <a:r>
               <a:rPr lang="en-US" sz="750" dirty="0">
                 <a:solidFill>
-                  <a:srgbClr val="5B6672"/>
+                  <a:srgbClr val="4B4B4B"/>
                 </a:solidFill>
                 <a:latin typeface="Courier New" pitchFamily="34" charset="0"/>
                 <a:ea typeface="Courier New" pitchFamily="34" charset="-122"/>
@@ -19063,7 +18530,7 @@
             <a:r>
               <a:rPr lang="en-US" sz="750" dirty="0">
                 <a:solidFill>
-                  <a:srgbClr val="C1432A"/>
+                  <a:srgbClr val="022049"/>
                 </a:solidFill>
                 <a:latin typeface="Courier New" pitchFamily="34" charset="0"/>
                 <a:ea typeface="Courier New" pitchFamily="34" charset="-122"/>
@@ -19136,7 +18603,7 @@
             <a:r>
               <a:rPr lang="en-US" sz="800" dirty="0">
                 <a:solidFill>
-                  <a:srgbClr val="5B6672"/>
+                  <a:srgbClr val="4B4B4B"/>
                 </a:solidFill>
                 <a:latin typeface="Courier New" pitchFamily="34" charset="0"/>
                 <a:ea typeface="Courier New" pitchFamily="34" charset="-122"/>
@@ -19178,7 +18645,7 @@
             <a:r>
               <a:rPr lang="en-US" sz="1150" b="1" dirty="0">
                 <a:solidFill>
-                  <a:srgbClr val="1C2530"/>
+                  <a:srgbClr val="022049"/>
                 </a:solidFill>
                 <a:latin typeface="Arial" pitchFamily="34" charset="0"/>
                 <a:ea typeface="Arial" pitchFamily="34" charset="-122"/>
@@ -19220,7 +18687,7 @@
             <a:r>
               <a:rPr lang="en-US" sz="850" dirty="0">
                 <a:solidFill>
-                  <a:srgbClr val="5B6672"/>
+                  <a:srgbClr val="4B4B4B"/>
                 </a:solidFill>
                 <a:latin typeface="Calibri" pitchFamily="34" charset="0"/>
                 <a:ea typeface="Calibri" pitchFamily="34" charset="-122"/>
@@ -19282,7 +18749,7 @@
             <a:r>
               <a:rPr lang="en-US" sz="750" dirty="0">
                 <a:solidFill>
-                  <a:srgbClr val="5B6672"/>
+                  <a:srgbClr val="4B4B4B"/>
                 </a:solidFill>
                 <a:latin typeface="Courier New" pitchFamily="34" charset="0"/>
                 <a:ea typeface="Courier New" pitchFamily="34" charset="-122"/>
@@ -19321,7 +18788,7 @@
             <a:r>
               <a:rPr lang="en-US" sz="750" dirty="0">
                 <a:solidFill>
-                  <a:srgbClr val="C1432A"/>
+                  <a:srgbClr val="022049"/>
                 </a:solidFill>
                 <a:latin typeface="Courier New" pitchFamily="34" charset="0"/>
                 <a:ea typeface="Courier New" pitchFamily="34" charset="-122"/>
@@ -19394,7 +18861,7 @@
             <a:r>
               <a:rPr lang="en-US" sz="800" dirty="0">
                 <a:solidFill>
-                  <a:srgbClr val="5B6672"/>
+                  <a:srgbClr val="4B4B4B"/>
                 </a:solidFill>
                 <a:latin typeface="Courier New" pitchFamily="34" charset="0"/>
                 <a:ea typeface="Courier New" pitchFamily="34" charset="-122"/>
@@ -19436,7 +18903,7 @@
             <a:r>
               <a:rPr lang="en-US" sz="1150" b="1" dirty="0">
                 <a:solidFill>
-                  <a:srgbClr val="1C2530"/>
+                  <a:srgbClr val="022049"/>
                 </a:solidFill>
                 <a:latin typeface="Arial" pitchFamily="34" charset="0"/>
                 <a:ea typeface="Arial" pitchFamily="34" charset="-122"/>
@@ -19478,7 +18945,7 @@
             <a:r>
               <a:rPr lang="en-US" sz="850" dirty="0">
                 <a:solidFill>
-                  <a:srgbClr val="5B6672"/>
+                  <a:srgbClr val="4B4B4B"/>
                 </a:solidFill>
                 <a:latin typeface="Calibri" pitchFamily="34" charset="0"/>
                 <a:ea typeface="Calibri" pitchFamily="34" charset="-122"/>
@@ -19540,7 +19007,7 @@
             <a:r>
               <a:rPr lang="en-US" sz="750" dirty="0">
                 <a:solidFill>
-                  <a:srgbClr val="5B6672"/>
+                  <a:srgbClr val="4B4B4B"/>
                 </a:solidFill>
                 <a:latin typeface="Courier New" pitchFamily="34" charset="0"/>
                 <a:ea typeface="Courier New" pitchFamily="34" charset="-122"/>
@@ -19579,7 +19046,7 @@
             <a:r>
               <a:rPr lang="en-US" sz="750" dirty="0">
                 <a:solidFill>
-                  <a:srgbClr val="C1432A"/>
+                  <a:srgbClr val="022049"/>
                 </a:solidFill>
                 <a:latin typeface="Courier New" pitchFamily="34" charset="0"/>
                 <a:ea typeface="Courier New" pitchFamily="34" charset="-122"/>
@@ -19652,7 +19119,7 @@
             <a:r>
               <a:rPr lang="en-US" sz="800" dirty="0">
                 <a:solidFill>
-                  <a:srgbClr val="5B6672"/>
+                  <a:srgbClr val="4B4B4B"/>
                 </a:solidFill>
                 <a:latin typeface="Courier New" pitchFamily="34" charset="0"/>
                 <a:ea typeface="Courier New" pitchFamily="34" charset="-122"/>
@@ -19760,7 +19227,7 @@
             <a:r>
               <a:rPr lang="en-US" sz="1150" b="1" dirty="0">
                 <a:solidFill>
-                  <a:srgbClr val="1C2530"/>
+                  <a:srgbClr val="022049"/>
                 </a:solidFill>
                 <a:latin typeface="Arial" pitchFamily="34" charset="0"/>
                 <a:ea typeface="Arial" pitchFamily="34" charset="-122"/>
@@ -19802,7 +19269,7 @@
             <a:r>
               <a:rPr lang="en-US" sz="850" dirty="0">
                 <a:solidFill>
-                  <a:srgbClr val="5B6672"/>
+                  <a:srgbClr val="4B4B4B"/>
                 </a:solidFill>
                 <a:latin typeface="Calibri" pitchFamily="34" charset="0"/>
                 <a:ea typeface="Calibri" pitchFamily="34" charset="-122"/>
@@ -19864,7 +19331,7 @@
             <a:r>
               <a:rPr lang="en-US" sz="750" dirty="0">
                 <a:solidFill>
-                  <a:srgbClr val="5B6672"/>
+                  <a:srgbClr val="4B4B4B"/>
                 </a:solidFill>
                 <a:latin typeface="Courier New" pitchFamily="34" charset="0"/>
                 <a:ea typeface="Courier New" pitchFamily="34" charset="-122"/>
@@ -19903,7 +19370,7 @@
             <a:r>
               <a:rPr lang="en-US" sz="750" dirty="0">
                 <a:solidFill>
-                  <a:srgbClr val="C1432A"/>
+                  <a:srgbClr val="022049"/>
                 </a:solidFill>
                 <a:latin typeface="Courier New" pitchFamily="34" charset="0"/>
                 <a:ea typeface="Courier New" pitchFamily="34" charset="-122"/>
@@ -19928,9 +19395,16 @@
   <p:cSld name="Slide 8">
     <p:bg>
       <p:bgPr>
-        <a:solidFill>
-          <a:srgbClr val="EEF1F3"/>
-        </a:solidFill>
+        <a:blipFill dpi="0" rotWithShape="1">
+          <a:blip r:embed="rId1">
+            <a:lum/>
+          </a:blip>
+          <a:srcRect/>
+          <a:stretch>
+            <a:fillRect/>
+          </a:stretch>
+        </a:blipFill>
+        <a:effectLst/>
       </p:bgPr>
     </p:bg>
     <p:spTree>
@@ -19966,7 +19440,7 @@
           </a:solidFill>
           <a:ln w="19050">
             <a:solidFill>
-              <a:srgbClr val="1C2530"/>
+              <a:srgbClr val="022049"/>
             </a:solidFill>
             <a:prstDash val="solid"/>
           </a:ln>
@@ -20068,7 +19542,7 @@
             <a:r>
               <a:rPr lang="en-US" sz="1300" b="1" dirty="0">
                 <a:solidFill>
-                  <a:srgbClr val="1C2530"/>
+                  <a:srgbClr val="022049"/>
                 </a:solidFill>
                 <a:latin typeface="Arial" pitchFamily="34" charset="0"/>
                 <a:ea typeface="Arial" pitchFamily="34" charset="-122"/>
@@ -20107,7 +19581,7 @@
             <a:r>
               <a:rPr lang="en-US" sz="850" spc="100" kern="0" dirty="0">
                 <a:solidFill>
-                  <a:srgbClr val="5B6672"/>
+                  <a:srgbClr val="4B4B4B"/>
                 </a:solidFill>
                 <a:latin typeface="Courier New" pitchFamily="34" charset="0"/>
                 <a:ea typeface="Courier New" pitchFamily="34" charset="-122"/>
@@ -20173,7 +19647,7 @@
             <a:r>
               <a:rPr lang="en-US" sz="950" dirty="0">
                 <a:solidFill>
-                  <a:srgbClr val="5B6672"/>
+                  <a:srgbClr val="4B4B4B"/>
                 </a:solidFill>
                 <a:latin typeface="Courier New" pitchFamily="34" charset="0"/>
                 <a:ea typeface="Courier New" pitchFamily="34" charset="-122"/>
@@ -20212,7 +19686,7 @@
             <a:r>
               <a:rPr lang="en-US" sz="750" spc="100" kern="0" dirty="0">
                 <a:solidFill>
-                  <a:srgbClr val="5B6672"/>
+                  <a:srgbClr val="4B4B4B"/>
                 </a:solidFill>
                 <a:latin typeface="Courier New" pitchFamily="34" charset="0"/>
                 <a:ea typeface="Courier New" pitchFamily="34" charset="-122"/>
@@ -20251,7 +19725,7 @@
             <a:r>
               <a:rPr lang="en-US" sz="1050" dirty="0">
                 <a:solidFill>
-                  <a:srgbClr val="1C2530"/>
+                  <a:srgbClr val="022049"/>
                 </a:solidFill>
                 <a:latin typeface="Courier New" pitchFamily="34" charset="0"/>
                 <a:ea typeface="Courier New" pitchFamily="34" charset="-122"/>
@@ -20354,7 +19828,7 @@
             <a:r>
               <a:rPr lang="en-US" sz="800" spc="100" kern="0" dirty="0">
                 <a:solidFill>
-                  <a:srgbClr val="5B6672"/>
+                  <a:srgbClr val="4B4B4B"/>
                 </a:solidFill>
                 <a:latin typeface="Courier New" pitchFamily="34" charset="0"/>
                 <a:ea typeface="Courier New" pitchFamily="34" charset="-122"/>
@@ -20393,7 +19867,7 @@
             <a:r>
               <a:rPr lang="en-US" sz="1050" dirty="0">
                 <a:solidFill>
-                  <a:srgbClr val="1C2530"/>
+                  <a:srgbClr val="022049"/>
                 </a:solidFill>
                 <a:latin typeface="Calibri" pitchFamily="34" charset="0"/>
                 <a:ea typeface="Calibri" pitchFamily="34" charset="-122"/>
@@ -20432,7 +19906,7 @@
             <a:r>
               <a:rPr lang="en-US" sz="1050" dirty="0">
                 <a:solidFill>
-                  <a:srgbClr val="1C2530"/>
+                  <a:srgbClr val="022049"/>
                 </a:solidFill>
                 <a:latin typeface="Calibri" pitchFamily="34" charset="0"/>
                 <a:ea typeface="Calibri" pitchFamily="34" charset="-122"/>
@@ -20471,7 +19945,7 @@
             <a:r>
               <a:rPr lang="en-US" sz="1050" dirty="0">
                 <a:solidFill>
-                  <a:srgbClr val="1C2530"/>
+                  <a:srgbClr val="022049"/>
                 </a:solidFill>
                 <a:latin typeface="Calibri" pitchFamily="34" charset="0"/>
                 <a:ea typeface="Calibri" pitchFamily="34" charset="-122"/>
@@ -20510,7 +19984,7 @@
             <a:r>
               <a:rPr lang="en-US" sz="1050" dirty="0">
                 <a:solidFill>
-                  <a:srgbClr val="1C2530"/>
+                  <a:srgbClr val="022049"/>
                 </a:solidFill>
                 <a:latin typeface="Calibri" pitchFamily="34" charset="0"/>
                 <a:ea typeface="Calibri" pitchFamily="34" charset="-122"/>
@@ -20549,7 +20023,7 @@
             <a:r>
               <a:rPr lang="en-US" sz="1050" dirty="0">
                 <a:solidFill>
-                  <a:srgbClr val="1C2530"/>
+                  <a:srgbClr val="022049"/>
                 </a:solidFill>
                 <a:latin typeface="Calibri" pitchFamily="34" charset="0"/>
                 <a:ea typeface="Calibri" pitchFamily="34" charset="-122"/>
@@ -20588,7 +20062,7 @@
             <a:r>
               <a:rPr lang="en-US" sz="1050" dirty="0">
                 <a:solidFill>
-                  <a:srgbClr val="1C2530"/>
+                  <a:srgbClr val="022049"/>
                 </a:solidFill>
                 <a:latin typeface="Calibri" pitchFamily="34" charset="0"/>
                 <a:ea typeface="Calibri" pitchFamily="34" charset="-122"/>
@@ -20635,7 +20109,7 @@
             <a:avLst/>
           </a:prstGeom>
           <a:solidFill>
-            <a:srgbClr val="C1432A"/>
+            <a:srgbClr val="022049"/>
           </a:solidFill>
           <a:ln/>
         </p:spPr>
@@ -20667,7 +20141,7 @@
             <a:r>
               <a:rPr lang="en-US" sz="1050" b="1" dirty="0">
                 <a:solidFill>
-                  <a:srgbClr val="C1432A"/>
+                  <a:srgbClr val="022049"/>
                 </a:solidFill>
                 <a:latin typeface="Calibri" pitchFamily="34" charset="0"/>
                 <a:ea typeface="Calibri" pitchFamily="34" charset="-122"/>
@@ -20706,7 +20180,7 @@
             <a:r>
               <a:rPr lang="en-US" sz="1050" dirty="0">
                 <a:solidFill>
-                  <a:srgbClr val="1C2530"/>
+                  <a:srgbClr val="022049"/>
                 </a:solidFill>
                 <a:latin typeface="Calibri" pitchFamily="34" charset="0"/>
                 <a:ea typeface="Calibri" pitchFamily="34" charset="-122"/>
@@ -20745,7 +20219,7 @@
             <a:r>
               <a:rPr lang="en-US" sz="1050" dirty="0">
                 <a:solidFill>
-                  <a:srgbClr val="1C2530"/>
+                  <a:srgbClr val="022049"/>
                 </a:solidFill>
                 <a:latin typeface="Calibri" pitchFamily="34" charset="0"/>
                 <a:ea typeface="Calibri" pitchFamily="34" charset="-122"/>
@@ -20784,7 +20258,7 @@
             <a:r>
               <a:rPr lang="en-US" sz="2600" b="1" spc="50" kern="0" dirty="0">
                 <a:solidFill>
-                  <a:srgbClr val="1C2530"/>
+                  <a:srgbClr val="022049"/>
                 </a:solidFill>
                 <a:latin typeface="Arial" pitchFamily="34" charset="0"/>
                 <a:ea typeface="Arial" pitchFamily="34" charset="-122"/>
@@ -20823,7 +20297,7 @@
             <a:r>
               <a:rPr lang="en-US" sz="1150" dirty="0">
                 <a:solidFill>
-                  <a:srgbClr val="5B6672"/>
+                  <a:srgbClr val="4B4B4B"/>
                 </a:solidFill>
                 <a:latin typeface="Calibri" pitchFamily="34" charset="0"/>
                 <a:ea typeface="Calibri" pitchFamily="34" charset="-122"/>
@@ -20852,7 +20326,7 @@
           <a:noFill/>
           <a:ln w="15875">
             <a:solidFill>
-              <a:srgbClr val="1C2530"/>
+              <a:srgbClr val="022049"/>
             </a:solidFill>
             <a:prstDash val="solid"/>
           </a:ln>
@@ -20919,7 +20393,7 @@
             <a:r>
               <a:rPr lang="en-US" sz="800" dirty="0">
                 <a:solidFill>
-                  <a:srgbClr val="5B6672"/>
+                  <a:srgbClr val="4B4B4B"/>
                 </a:solidFill>
                 <a:latin typeface="Courier New" pitchFamily="34" charset="0"/>
                 <a:ea typeface="Courier New" pitchFamily="34" charset="-122"/>
@@ -21027,7 +20501,7 @@
             <a:r>
               <a:rPr lang="en-US" sz="1150" b="1" dirty="0">
                 <a:solidFill>
-                  <a:srgbClr val="1C2530"/>
+                  <a:srgbClr val="022049"/>
                 </a:solidFill>
                 <a:latin typeface="Arial" pitchFamily="34" charset="0"/>
                 <a:ea typeface="Arial" pitchFamily="34" charset="-122"/>
@@ -21069,7 +20543,7 @@
             <a:r>
               <a:rPr lang="en-US" sz="850" dirty="0">
                 <a:solidFill>
-                  <a:srgbClr val="5B6672"/>
+                  <a:srgbClr val="4B4B4B"/>
                 </a:solidFill>
                 <a:latin typeface="Calibri" pitchFamily="34" charset="0"/>
                 <a:ea typeface="Calibri" pitchFamily="34" charset="-122"/>
@@ -21131,7 +20605,7 @@
             <a:r>
               <a:rPr lang="en-US" sz="750" dirty="0">
                 <a:solidFill>
-                  <a:srgbClr val="5B6672"/>
+                  <a:srgbClr val="4B4B4B"/>
                 </a:solidFill>
                 <a:latin typeface="Courier New" pitchFamily="34" charset="0"/>
                 <a:ea typeface="Courier New" pitchFamily="34" charset="-122"/>
@@ -21170,7 +20644,7 @@
             <a:r>
               <a:rPr lang="en-US" sz="750" dirty="0">
                 <a:solidFill>
-                  <a:srgbClr val="C1432A"/>
+                  <a:srgbClr val="022049"/>
                 </a:solidFill>
                 <a:latin typeface="Courier New" pitchFamily="34" charset="0"/>
                 <a:ea typeface="Courier New" pitchFamily="34" charset="-122"/>
@@ -21243,7 +20717,7 @@
             <a:r>
               <a:rPr lang="en-US" sz="800" dirty="0">
                 <a:solidFill>
-                  <a:srgbClr val="5B6672"/>
+                  <a:srgbClr val="4B4B4B"/>
                 </a:solidFill>
                 <a:latin typeface="Courier New" pitchFamily="34" charset="0"/>
                 <a:ea typeface="Courier New" pitchFamily="34" charset="-122"/>
@@ -21351,7 +20825,7 @@
             <a:r>
               <a:rPr lang="en-US" sz="1150" b="1" dirty="0">
                 <a:solidFill>
-                  <a:srgbClr val="1C2530"/>
+                  <a:srgbClr val="022049"/>
                 </a:solidFill>
                 <a:latin typeface="Arial" pitchFamily="34" charset="0"/>
                 <a:ea typeface="Arial" pitchFamily="34" charset="-122"/>
@@ -21393,7 +20867,7 @@
             <a:r>
               <a:rPr lang="en-US" sz="850" dirty="0">
                 <a:solidFill>
-                  <a:srgbClr val="5B6672"/>
+                  <a:srgbClr val="4B4B4B"/>
                 </a:solidFill>
                 <a:latin typeface="Calibri" pitchFamily="34" charset="0"/>
                 <a:ea typeface="Calibri" pitchFamily="34" charset="-122"/>
@@ -21455,7 +20929,7 @@
             <a:r>
               <a:rPr lang="en-US" sz="750" dirty="0">
                 <a:solidFill>
-                  <a:srgbClr val="5B6672"/>
+                  <a:srgbClr val="4B4B4B"/>
                 </a:solidFill>
                 <a:latin typeface="Courier New" pitchFamily="34" charset="0"/>
                 <a:ea typeface="Courier New" pitchFamily="34" charset="-122"/>
@@ -21494,7 +20968,7 @@
             <a:r>
               <a:rPr lang="en-US" sz="750" dirty="0">
                 <a:solidFill>
-                  <a:srgbClr val="C1432A"/>
+                  <a:srgbClr val="022049"/>
                 </a:solidFill>
                 <a:latin typeface="Courier New" pitchFamily="34" charset="0"/>
                 <a:ea typeface="Courier New" pitchFamily="34" charset="-122"/>
@@ -21567,7 +21041,7 @@
             <a:r>
               <a:rPr lang="en-US" sz="800" dirty="0">
                 <a:solidFill>
-                  <a:srgbClr val="5B6672"/>
+                  <a:srgbClr val="4B4B4B"/>
                 </a:solidFill>
                 <a:latin typeface="Courier New" pitchFamily="34" charset="0"/>
                 <a:ea typeface="Courier New" pitchFamily="34" charset="-122"/>
@@ -21609,7 +21083,7 @@
             <a:r>
               <a:rPr lang="en-US" sz="1150" b="1" dirty="0">
                 <a:solidFill>
-                  <a:srgbClr val="1C2530"/>
+                  <a:srgbClr val="022049"/>
                 </a:solidFill>
                 <a:latin typeface="Arial" pitchFamily="34" charset="0"/>
                 <a:ea typeface="Arial" pitchFamily="34" charset="-122"/>
@@ -21651,7 +21125,7 @@
             <a:r>
               <a:rPr lang="en-US" sz="850" dirty="0">
                 <a:solidFill>
-                  <a:srgbClr val="5B6672"/>
+                  <a:srgbClr val="4B4B4B"/>
                 </a:solidFill>
                 <a:latin typeface="Calibri" pitchFamily="34" charset="0"/>
                 <a:ea typeface="Calibri" pitchFamily="34" charset="-122"/>
@@ -21713,7 +21187,7 @@
             <a:r>
               <a:rPr lang="en-US" sz="750" dirty="0">
                 <a:solidFill>
-                  <a:srgbClr val="5B6672"/>
+                  <a:srgbClr val="4B4B4B"/>
                 </a:solidFill>
                 <a:latin typeface="Courier New" pitchFamily="34" charset="0"/>
                 <a:ea typeface="Courier New" pitchFamily="34" charset="-122"/>
@@ -21752,7 +21226,7 @@
             <a:r>
               <a:rPr lang="en-US" sz="750" dirty="0">
                 <a:solidFill>
-                  <a:srgbClr val="C1432A"/>
+                  <a:srgbClr val="022049"/>
                 </a:solidFill>
                 <a:latin typeface="Courier New" pitchFamily="34" charset="0"/>
                 <a:ea typeface="Courier New" pitchFamily="34" charset="-122"/>
@@ -21825,7 +21299,7 @@
             <a:r>
               <a:rPr lang="en-US" sz="800" dirty="0">
                 <a:solidFill>
-                  <a:srgbClr val="5B6672"/>
+                  <a:srgbClr val="4B4B4B"/>
                 </a:solidFill>
                 <a:latin typeface="Courier New" pitchFamily="34" charset="0"/>
                 <a:ea typeface="Courier New" pitchFamily="34" charset="-122"/>
@@ -21867,7 +21341,7 @@
             <a:r>
               <a:rPr lang="en-US" sz="1150" b="1" dirty="0">
                 <a:solidFill>
-                  <a:srgbClr val="1C2530"/>
+                  <a:srgbClr val="022049"/>
                 </a:solidFill>
                 <a:latin typeface="Arial" pitchFamily="34" charset="0"/>
                 <a:ea typeface="Arial" pitchFamily="34" charset="-122"/>
@@ -21909,7 +21383,7 @@
             <a:r>
               <a:rPr lang="en-US" sz="850" dirty="0">
                 <a:solidFill>
-                  <a:srgbClr val="5B6672"/>
+                  <a:srgbClr val="4B4B4B"/>
                 </a:solidFill>
                 <a:latin typeface="Calibri" pitchFamily="34" charset="0"/>
                 <a:ea typeface="Calibri" pitchFamily="34" charset="-122"/>
@@ -21971,7 +21445,7 @@
             <a:r>
               <a:rPr lang="en-US" sz="750" dirty="0">
                 <a:solidFill>
-                  <a:srgbClr val="5B6672"/>
+                  <a:srgbClr val="4B4B4B"/>
                 </a:solidFill>
                 <a:latin typeface="Courier New" pitchFamily="34" charset="0"/>
                 <a:ea typeface="Courier New" pitchFamily="34" charset="-122"/>
@@ -22010,7 +21484,7 @@
             <a:r>
               <a:rPr lang="en-US" sz="750" dirty="0">
                 <a:solidFill>
-                  <a:srgbClr val="C1432A"/>
+                  <a:srgbClr val="022049"/>
                 </a:solidFill>
                 <a:latin typeface="Courier New" pitchFamily="34" charset="0"/>
                 <a:ea typeface="Courier New" pitchFamily="34" charset="-122"/>
@@ -22083,7 +21557,7 @@
             <a:r>
               <a:rPr lang="en-US" sz="800" dirty="0">
                 <a:solidFill>
-                  <a:srgbClr val="5B6672"/>
+                  <a:srgbClr val="4B4B4B"/>
                 </a:solidFill>
                 <a:latin typeface="Courier New" pitchFamily="34" charset="0"/>
                 <a:ea typeface="Courier New" pitchFamily="34" charset="-122"/>
@@ -22125,7 +21599,7 @@
             <a:r>
               <a:rPr lang="en-US" sz="1150" b="1" dirty="0">
                 <a:solidFill>
-                  <a:srgbClr val="1C2530"/>
+                  <a:srgbClr val="022049"/>
                 </a:solidFill>
                 <a:latin typeface="Arial" pitchFamily="34" charset="0"/>
                 <a:ea typeface="Arial" pitchFamily="34" charset="-122"/>
@@ -22167,7 +21641,7 @@
             <a:r>
               <a:rPr lang="en-US" sz="850" dirty="0">
                 <a:solidFill>
-                  <a:srgbClr val="5B6672"/>
+                  <a:srgbClr val="4B4B4B"/>
                 </a:solidFill>
                 <a:latin typeface="Calibri" pitchFamily="34" charset="0"/>
                 <a:ea typeface="Calibri" pitchFamily="34" charset="-122"/>
@@ -22229,7 +21703,7 @@
             <a:r>
               <a:rPr lang="en-US" sz="750" dirty="0">
                 <a:solidFill>
-                  <a:srgbClr val="5B6672"/>
+                  <a:srgbClr val="4B4B4B"/>
                 </a:solidFill>
                 <a:latin typeface="Courier New" pitchFamily="34" charset="0"/>
                 <a:ea typeface="Courier New" pitchFamily="34" charset="-122"/>
@@ -22268,7 +21742,7 @@
             <a:r>
               <a:rPr lang="en-US" sz="750" dirty="0">
                 <a:solidFill>
-                  <a:srgbClr val="C1432A"/>
+                  <a:srgbClr val="022049"/>
                 </a:solidFill>
                 <a:latin typeface="Courier New" pitchFamily="34" charset="0"/>
                 <a:ea typeface="Courier New" pitchFamily="34" charset="-122"/>
@@ -22341,7 +21815,7 @@
             <a:r>
               <a:rPr lang="en-US" sz="800" dirty="0">
                 <a:solidFill>
-                  <a:srgbClr val="5B6672"/>
+                  <a:srgbClr val="4B4B4B"/>
                 </a:solidFill>
                 <a:latin typeface="Courier New" pitchFamily="34" charset="0"/>
                 <a:ea typeface="Courier New" pitchFamily="34" charset="-122"/>
@@ -22383,7 +21857,7 @@
             <a:r>
               <a:rPr lang="en-US" sz="1150" b="1" dirty="0">
                 <a:solidFill>
-                  <a:srgbClr val="1C2530"/>
+                  <a:srgbClr val="022049"/>
                 </a:solidFill>
                 <a:latin typeface="Arial" pitchFamily="34" charset="0"/>
                 <a:ea typeface="Arial" pitchFamily="34" charset="-122"/>
@@ -22425,7 +21899,7 @@
             <a:r>
               <a:rPr lang="en-US" sz="850" dirty="0">
                 <a:solidFill>
-                  <a:srgbClr val="5B6672"/>
+                  <a:srgbClr val="4B4B4B"/>
                 </a:solidFill>
                 <a:latin typeface="Calibri" pitchFamily="34" charset="0"/>
                 <a:ea typeface="Calibri" pitchFamily="34" charset="-122"/>
@@ -22487,7 +21961,7 @@
             <a:r>
               <a:rPr lang="en-US" sz="750" dirty="0">
                 <a:solidFill>
-                  <a:srgbClr val="5B6672"/>
+                  <a:srgbClr val="4B4B4B"/>
                 </a:solidFill>
                 <a:latin typeface="Courier New" pitchFamily="34" charset="0"/>
                 <a:ea typeface="Courier New" pitchFamily="34" charset="-122"/>
@@ -22526,7 +22000,7 @@
             <a:r>
               <a:rPr lang="en-US" sz="750" dirty="0">
                 <a:solidFill>
-                  <a:srgbClr val="C1432A"/>
+                  <a:srgbClr val="022049"/>
                 </a:solidFill>
                 <a:latin typeface="Courier New" pitchFamily="34" charset="0"/>
                 <a:ea typeface="Courier New" pitchFamily="34" charset="-122"/>
@@ -22551,9 +22025,16 @@
   <p:cSld name="Slide 9">
     <p:bg>
       <p:bgPr>
-        <a:solidFill>
-          <a:srgbClr val="EEF1F3"/>
-        </a:solidFill>
+        <a:blipFill dpi="0" rotWithShape="1">
+          <a:blip r:embed="rId1">
+            <a:lum/>
+          </a:blip>
+          <a:srcRect/>
+          <a:stretch>
+            <a:fillRect/>
+          </a:stretch>
+        </a:blipFill>
+        <a:effectLst/>
       </p:bgPr>
     </p:bg>
     <p:spTree>
@@ -22589,7 +22070,7 @@
           </a:solidFill>
           <a:ln w="19050">
             <a:solidFill>
-              <a:srgbClr val="1C2530"/>
+              <a:srgbClr val="022049"/>
             </a:solidFill>
             <a:prstDash val="solid"/>
           </a:ln>
@@ -22691,7 +22172,7 @@
             <a:r>
               <a:rPr lang="en-US" sz="1300" b="1" dirty="0">
                 <a:solidFill>
-                  <a:srgbClr val="1C2530"/>
+                  <a:srgbClr val="022049"/>
                 </a:solidFill>
                 <a:latin typeface="Arial" pitchFamily="34" charset="0"/>
                 <a:ea typeface="Arial" pitchFamily="34" charset="-122"/>
@@ -22730,7 +22211,7 @@
             <a:r>
               <a:rPr lang="en-US" sz="850" spc="100" kern="0" dirty="0">
                 <a:solidFill>
-                  <a:srgbClr val="5B6672"/>
+                  <a:srgbClr val="4B4B4B"/>
                 </a:solidFill>
                 <a:latin typeface="Courier New" pitchFamily="34" charset="0"/>
                 <a:ea typeface="Courier New" pitchFamily="34" charset="-122"/>
@@ -22796,7 +22277,7 @@
             <a:r>
               <a:rPr lang="en-US" sz="950" dirty="0">
                 <a:solidFill>
-                  <a:srgbClr val="5B6672"/>
+                  <a:srgbClr val="4B4B4B"/>
                 </a:solidFill>
                 <a:latin typeface="Courier New" pitchFamily="34" charset="0"/>
                 <a:ea typeface="Courier New" pitchFamily="34" charset="-122"/>
@@ -22835,7 +22316,7 @@
             <a:r>
               <a:rPr lang="en-US" sz="750" spc="100" kern="0" dirty="0">
                 <a:solidFill>
-                  <a:srgbClr val="5B6672"/>
+                  <a:srgbClr val="4B4B4B"/>
                 </a:solidFill>
                 <a:latin typeface="Courier New" pitchFamily="34" charset="0"/>
                 <a:ea typeface="Courier New" pitchFamily="34" charset="-122"/>
@@ -22874,7 +22355,7 @@
             <a:r>
               <a:rPr lang="en-US" sz="1050" dirty="0">
                 <a:solidFill>
-                  <a:srgbClr val="1C2530"/>
+                  <a:srgbClr val="022049"/>
                 </a:solidFill>
                 <a:latin typeface="Courier New" pitchFamily="34" charset="0"/>
                 <a:ea typeface="Courier New" pitchFamily="34" charset="-122"/>
@@ -22977,7 +22458,7 @@
             <a:r>
               <a:rPr lang="en-US" sz="800" spc="100" kern="0" dirty="0">
                 <a:solidFill>
-                  <a:srgbClr val="5B6672"/>
+                  <a:srgbClr val="4B4B4B"/>
                 </a:solidFill>
                 <a:latin typeface="Courier New" pitchFamily="34" charset="0"/>
                 <a:ea typeface="Courier New" pitchFamily="34" charset="-122"/>
@@ -23016,7 +22497,7 @@
             <a:r>
               <a:rPr lang="en-US" sz="1050" dirty="0">
                 <a:solidFill>
-                  <a:srgbClr val="1C2530"/>
+                  <a:srgbClr val="022049"/>
                 </a:solidFill>
                 <a:latin typeface="Calibri" pitchFamily="34" charset="0"/>
                 <a:ea typeface="Calibri" pitchFamily="34" charset="-122"/>
@@ -23055,7 +22536,7 @@
             <a:r>
               <a:rPr lang="en-US" sz="1050" dirty="0">
                 <a:solidFill>
-                  <a:srgbClr val="1C2530"/>
+                  <a:srgbClr val="022049"/>
                 </a:solidFill>
                 <a:latin typeface="Calibri" pitchFamily="34" charset="0"/>
                 <a:ea typeface="Calibri" pitchFamily="34" charset="-122"/>
@@ -23094,7 +22575,7 @@
             <a:r>
               <a:rPr lang="en-US" sz="1050" dirty="0">
                 <a:solidFill>
-                  <a:srgbClr val="1C2530"/>
+                  <a:srgbClr val="022049"/>
                 </a:solidFill>
                 <a:latin typeface="Calibri" pitchFamily="34" charset="0"/>
                 <a:ea typeface="Calibri" pitchFamily="34" charset="-122"/>
@@ -23133,7 +22614,7 @@
             <a:r>
               <a:rPr lang="en-US" sz="1050" dirty="0">
                 <a:solidFill>
-                  <a:srgbClr val="1C2530"/>
+                  <a:srgbClr val="022049"/>
                 </a:solidFill>
                 <a:latin typeface="Calibri" pitchFamily="34" charset="0"/>
                 <a:ea typeface="Calibri" pitchFamily="34" charset="-122"/>
@@ -23172,7 +22653,7 @@
             <a:r>
               <a:rPr lang="en-US" sz="1050" dirty="0">
                 <a:solidFill>
-                  <a:srgbClr val="1C2530"/>
+                  <a:srgbClr val="022049"/>
                 </a:solidFill>
                 <a:latin typeface="Calibri" pitchFamily="34" charset="0"/>
                 <a:ea typeface="Calibri" pitchFamily="34" charset="-122"/>
@@ -23211,7 +22692,7 @@
             <a:r>
               <a:rPr lang="en-US" sz="1050" dirty="0">
                 <a:solidFill>
-                  <a:srgbClr val="1C2530"/>
+                  <a:srgbClr val="022049"/>
                 </a:solidFill>
                 <a:latin typeface="Calibri" pitchFamily="34" charset="0"/>
                 <a:ea typeface="Calibri" pitchFamily="34" charset="-122"/>
@@ -23250,7 +22731,7 @@
             <a:r>
               <a:rPr lang="en-US" sz="1050" dirty="0">
                 <a:solidFill>
-                  <a:srgbClr val="1C2530"/>
+                  <a:srgbClr val="022049"/>
                 </a:solidFill>
                 <a:latin typeface="Calibri" pitchFamily="34" charset="0"/>
                 <a:ea typeface="Calibri" pitchFamily="34" charset="-122"/>
@@ -23297,7 +22778,7 @@
             <a:avLst/>
           </a:prstGeom>
           <a:solidFill>
-            <a:srgbClr val="C1432A"/>
+            <a:srgbClr val="022049"/>
           </a:solidFill>
           <a:ln/>
         </p:spPr>
@@ -23329,7 +22810,7 @@
             <a:r>
               <a:rPr lang="en-US" sz="1050" b="1" dirty="0">
                 <a:solidFill>
-                  <a:srgbClr val="C1432A"/>
+                  <a:srgbClr val="022049"/>
                 </a:solidFill>
                 <a:latin typeface="Calibri" pitchFamily="34" charset="0"/>
                 <a:ea typeface="Calibri" pitchFamily="34" charset="-122"/>
@@ -23368,7 +22849,7 @@
             <a:r>
               <a:rPr lang="en-US" sz="1050" dirty="0">
                 <a:solidFill>
-                  <a:srgbClr val="1C2530"/>
+                  <a:srgbClr val="022049"/>
                 </a:solidFill>
                 <a:latin typeface="Calibri" pitchFamily="34" charset="0"/>
                 <a:ea typeface="Calibri" pitchFamily="34" charset="-122"/>
@@ -23407,7 +22888,7 @@
             <a:r>
               <a:rPr lang="en-US" sz="2600" b="1" spc="50" kern="0" dirty="0">
                 <a:solidFill>
-                  <a:srgbClr val="1C2530"/>
+                  <a:srgbClr val="022049"/>
                 </a:solidFill>
                 <a:latin typeface="Arial" pitchFamily="34" charset="0"/>
                 <a:ea typeface="Arial" pitchFamily="34" charset="-122"/>
@@ -23446,7 +22927,7 @@
             <a:r>
               <a:rPr lang="en-US" sz="1150" dirty="0">
                 <a:solidFill>
-                  <a:srgbClr val="5B6672"/>
+                  <a:srgbClr val="4B4B4B"/>
                 </a:solidFill>
                 <a:latin typeface="Calibri" pitchFamily="34" charset="0"/>
                 <a:ea typeface="Calibri" pitchFamily="34" charset="-122"/>
@@ -23475,7 +22956,7 @@
           <a:noFill/>
           <a:ln w="15875">
             <a:solidFill>
-              <a:srgbClr val="1C2530"/>
+              <a:srgbClr val="022049"/>
             </a:solidFill>
             <a:prstDash val="solid"/>
           </a:ln>
@@ -23542,7 +23023,7 @@
             <a:r>
               <a:rPr lang="en-US" sz="800" dirty="0">
                 <a:solidFill>
-                  <a:srgbClr val="5B6672"/>
+                  <a:srgbClr val="4B4B4B"/>
                 </a:solidFill>
                 <a:latin typeface="Courier New" pitchFamily="34" charset="0"/>
                 <a:ea typeface="Courier New" pitchFamily="34" charset="-122"/>
@@ -23650,7 +23131,7 @@
             <a:r>
               <a:rPr lang="en-US" sz="1050" b="1" dirty="0">
                 <a:solidFill>
-                  <a:srgbClr val="1C2530"/>
+                  <a:srgbClr val="022049"/>
                 </a:solidFill>
                 <a:latin typeface="Arial" pitchFamily="34" charset="0"/>
                 <a:ea typeface="Arial" pitchFamily="34" charset="-122"/>
@@ -23692,7 +23173,7 @@
             <a:r>
               <a:rPr lang="en-US" sz="850" dirty="0">
                 <a:solidFill>
-                  <a:srgbClr val="5B6672"/>
+                  <a:srgbClr val="4B4B4B"/>
                 </a:solidFill>
                 <a:latin typeface="Calibri" pitchFamily="34" charset="0"/>
                 <a:ea typeface="Calibri" pitchFamily="34" charset="-122"/>
@@ -23754,7 +23235,7 @@
             <a:r>
               <a:rPr lang="en-US" sz="750" dirty="0">
                 <a:solidFill>
-                  <a:srgbClr val="5B6672"/>
+                  <a:srgbClr val="4B4B4B"/>
                 </a:solidFill>
                 <a:latin typeface="Courier New" pitchFamily="34" charset="0"/>
                 <a:ea typeface="Courier New" pitchFamily="34" charset="-122"/>
@@ -23793,7 +23274,7 @@
             <a:r>
               <a:rPr lang="en-US" sz="750" dirty="0">
                 <a:solidFill>
-                  <a:srgbClr val="C1432A"/>
+                  <a:srgbClr val="022049"/>
                 </a:solidFill>
                 <a:latin typeface="Courier New" pitchFamily="34" charset="0"/>
                 <a:ea typeface="Courier New" pitchFamily="34" charset="-122"/>
@@ -23866,7 +23347,7 @@
             <a:r>
               <a:rPr lang="en-US" sz="800" dirty="0">
                 <a:solidFill>
-                  <a:srgbClr val="5B6672"/>
+                  <a:srgbClr val="4B4B4B"/>
                 </a:solidFill>
                 <a:latin typeface="Courier New" pitchFamily="34" charset="0"/>
                 <a:ea typeface="Courier New" pitchFamily="34" charset="-122"/>
@@ -23908,7 +23389,7 @@
             <a:r>
               <a:rPr lang="en-US" sz="1050" b="1" dirty="0">
                 <a:solidFill>
-                  <a:srgbClr val="1C2530"/>
+                  <a:srgbClr val="022049"/>
                 </a:solidFill>
                 <a:latin typeface="Arial" pitchFamily="34" charset="0"/>
                 <a:ea typeface="Arial" pitchFamily="34" charset="-122"/>
@@ -23950,7 +23431,7 @@
             <a:r>
               <a:rPr lang="en-US" sz="850" dirty="0">
                 <a:solidFill>
-                  <a:srgbClr val="5B6672"/>
+                  <a:srgbClr val="4B4B4B"/>
                 </a:solidFill>
                 <a:latin typeface="Calibri" pitchFamily="34" charset="0"/>
                 <a:ea typeface="Calibri" pitchFamily="34" charset="-122"/>
@@ -24012,7 +23493,7 @@
             <a:r>
               <a:rPr lang="en-US" sz="750" dirty="0">
                 <a:solidFill>
-                  <a:srgbClr val="5B6672"/>
+                  <a:srgbClr val="4B4B4B"/>
                 </a:solidFill>
                 <a:latin typeface="Courier New" pitchFamily="34" charset="0"/>
                 <a:ea typeface="Courier New" pitchFamily="34" charset="-122"/>
@@ -24051,7 +23532,7 @@
             <a:r>
               <a:rPr lang="en-US" sz="750" dirty="0">
                 <a:solidFill>
-                  <a:srgbClr val="C1432A"/>
+                  <a:srgbClr val="022049"/>
                 </a:solidFill>
                 <a:latin typeface="Courier New" pitchFamily="34" charset="0"/>
                 <a:ea typeface="Courier New" pitchFamily="34" charset="-122"/>
@@ -24124,7 +23605,7 @@
             <a:r>
               <a:rPr lang="en-US" sz="800" dirty="0">
                 <a:solidFill>
-                  <a:srgbClr val="5B6672"/>
+                  <a:srgbClr val="4B4B4B"/>
                 </a:solidFill>
                 <a:latin typeface="Courier New" pitchFamily="34" charset="0"/>
                 <a:ea typeface="Courier New" pitchFamily="34" charset="-122"/>
@@ -24166,7 +23647,7 @@
             <a:r>
               <a:rPr lang="en-US" sz="1050" b="1" dirty="0">
                 <a:solidFill>
-                  <a:srgbClr val="1C2530"/>
+                  <a:srgbClr val="022049"/>
                 </a:solidFill>
                 <a:latin typeface="Arial" pitchFamily="34" charset="0"/>
                 <a:ea typeface="Arial" pitchFamily="34" charset="-122"/>
@@ -24208,7 +23689,7 @@
             <a:r>
               <a:rPr lang="en-US" sz="850" dirty="0">
                 <a:solidFill>
-                  <a:srgbClr val="5B6672"/>
+                  <a:srgbClr val="4B4B4B"/>
                 </a:solidFill>
                 <a:latin typeface="Calibri" pitchFamily="34" charset="0"/>
                 <a:ea typeface="Calibri" pitchFamily="34" charset="-122"/>
@@ -24270,7 +23751,7 @@
             <a:r>
               <a:rPr lang="en-US" sz="750" dirty="0">
                 <a:solidFill>
-                  <a:srgbClr val="5B6672"/>
+                  <a:srgbClr val="4B4B4B"/>
                 </a:solidFill>
                 <a:latin typeface="Courier New" pitchFamily="34" charset="0"/>
                 <a:ea typeface="Courier New" pitchFamily="34" charset="-122"/>
@@ -24309,7 +23790,7 @@
             <a:r>
               <a:rPr lang="en-US" sz="750" dirty="0">
                 <a:solidFill>
-                  <a:srgbClr val="C1432A"/>
+                  <a:srgbClr val="022049"/>
                 </a:solidFill>
                 <a:latin typeface="Courier New" pitchFamily="34" charset="0"/>
                 <a:ea typeface="Courier New" pitchFamily="34" charset="-122"/>
@@ -24382,7 +23863,7 @@
             <a:r>
               <a:rPr lang="en-US" sz="800" dirty="0">
                 <a:solidFill>
-                  <a:srgbClr val="5B6672"/>
+                  <a:srgbClr val="4B4B4B"/>
                 </a:solidFill>
                 <a:latin typeface="Courier New" pitchFamily="34" charset="0"/>
                 <a:ea typeface="Courier New" pitchFamily="34" charset="-122"/>
@@ -24424,7 +23905,7 @@
             <a:r>
               <a:rPr lang="en-US" sz="1050" b="1" dirty="0">
                 <a:solidFill>
-                  <a:srgbClr val="1C2530"/>
+                  <a:srgbClr val="022049"/>
                 </a:solidFill>
                 <a:latin typeface="Arial" pitchFamily="34" charset="0"/>
                 <a:ea typeface="Arial" pitchFamily="34" charset="-122"/>
@@ -24466,7 +23947,7 @@
             <a:r>
               <a:rPr lang="en-US" sz="850" dirty="0">
                 <a:solidFill>
-                  <a:srgbClr val="5B6672"/>
+                  <a:srgbClr val="4B4B4B"/>
                 </a:solidFill>
                 <a:latin typeface="Calibri" pitchFamily="34" charset="0"/>
                 <a:ea typeface="Calibri" pitchFamily="34" charset="-122"/>
@@ -24528,7 +24009,7 @@
             <a:r>
               <a:rPr lang="en-US" sz="750" dirty="0">
                 <a:solidFill>
-                  <a:srgbClr val="5B6672"/>
+                  <a:srgbClr val="4B4B4B"/>
                 </a:solidFill>
                 <a:latin typeface="Courier New" pitchFamily="34" charset="0"/>
                 <a:ea typeface="Courier New" pitchFamily="34" charset="-122"/>
@@ -24567,7 +24048,7 @@
             <a:r>
               <a:rPr lang="en-US" sz="750" dirty="0">
                 <a:solidFill>
-                  <a:srgbClr val="C1432A"/>
+                  <a:srgbClr val="022049"/>
                 </a:solidFill>
                 <a:latin typeface="Courier New" pitchFamily="34" charset="0"/>
                 <a:ea typeface="Courier New" pitchFamily="34" charset="-122"/>
@@ -24640,7 +24121,7 @@
             <a:r>
               <a:rPr lang="en-US" sz="800" dirty="0">
                 <a:solidFill>
-                  <a:srgbClr val="5B6672"/>
+                  <a:srgbClr val="4B4B4B"/>
                 </a:solidFill>
                 <a:latin typeface="Courier New" pitchFamily="34" charset="0"/>
                 <a:ea typeface="Courier New" pitchFamily="34" charset="-122"/>
@@ -24748,7 +24229,7 @@
             <a:r>
               <a:rPr lang="en-US" sz="1050" b="1" dirty="0">
                 <a:solidFill>
-                  <a:srgbClr val="1C2530"/>
+                  <a:srgbClr val="022049"/>
                 </a:solidFill>
                 <a:latin typeface="Arial" pitchFamily="34" charset="0"/>
                 <a:ea typeface="Arial" pitchFamily="34" charset="-122"/>
@@ -24790,7 +24271,7 @@
             <a:r>
               <a:rPr lang="en-US" sz="850" dirty="0">
                 <a:solidFill>
-                  <a:srgbClr val="5B6672"/>
+                  <a:srgbClr val="4B4B4B"/>
                 </a:solidFill>
                 <a:latin typeface="Calibri" pitchFamily="34" charset="0"/>
                 <a:ea typeface="Calibri" pitchFamily="34" charset="-122"/>
@@ -24852,7 +24333,7 @@
             <a:r>
               <a:rPr lang="en-US" sz="750" dirty="0">
                 <a:solidFill>
-                  <a:srgbClr val="5B6672"/>
+                  <a:srgbClr val="4B4B4B"/>
                 </a:solidFill>
                 <a:latin typeface="Courier New" pitchFamily="34" charset="0"/>
                 <a:ea typeface="Courier New" pitchFamily="34" charset="-122"/>
@@ -24891,7 +24372,7 @@
             <a:r>
               <a:rPr lang="en-US" sz="750" dirty="0">
                 <a:solidFill>
-                  <a:srgbClr val="C1432A"/>
+                  <a:srgbClr val="022049"/>
                 </a:solidFill>
                 <a:latin typeface="Courier New" pitchFamily="34" charset="0"/>
                 <a:ea typeface="Courier New" pitchFamily="34" charset="-122"/>
@@ -24964,7 +24445,7 @@
             <a:r>
               <a:rPr lang="en-US" sz="800" dirty="0">
                 <a:solidFill>
-                  <a:srgbClr val="5B6672"/>
+                  <a:srgbClr val="4B4B4B"/>
                 </a:solidFill>
                 <a:latin typeface="Courier New" pitchFamily="34" charset="0"/>
                 <a:ea typeface="Courier New" pitchFamily="34" charset="-122"/>
@@ -25006,7 +24487,7 @@
             <a:r>
               <a:rPr lang="en-US" sz="1050" b="1" dirty="0">
                 <a:solidFill>
-                  <a:srgbClr val="1C2530"/>
+                  <a:srgbClr val="022049"/>
                 </a:solidFill>
                 <a:latin typeface="Arial" pitchFamily="34" charset="0"/>
                 <a:ea typeface="Arial" pitchFamily="34" charset="-122"/>
@@ -25048,7 +24529,7 @@
             <a:r>
               <a:rPr lang="en-US" sz="850" dirty="0">
                 <a:solidFill>
-                  <a:srgbClr val="5B6672"/>
+                  <a:srgbClr val="4B4B4B"/>
                 </a:solidFill>
                 <a:latin typeface="Calibri" pitchFamily="34" charset="0"/>
                 <a:ea typeface="Calibri" pitchFamily="34" charset="-122"/>
@@ -25110,7 +24591,7 @@
             <a:r>
               <a:rPr lang="en-US" sz="750" dirty="0">
                 <a:solidFill>
-                  <a:srgbClr val="5B6672"/>
+                  <a:srgbClr val="4B4B4B"/>
                 </a:solidFill>
                 <a:latin typeface="Courier New" pitchFamily="34" charset="0"/>
                 <a:ea typeface="Courier New" pitchFamily="34" charset="-122"/>
@@ -25149,7 +24630,7 @@
             <a:r>
               <a:rPr lang="en-US" sz="750" dirty="0">
                 <a:solidFill>
-                  <a:srgbClr val="C1432A"/>
+                  <a:srgbClr val="022049"/>
                 </a:solidFill>
                 <a:latin typeface="Courier New" pitchFamily="34" charset="0"/>
                 <a:ea typeface="Courier New" pitchFamily="34" charset="-122"/>
@@ -25222,7 +24703,7 @@
             <a:r>
               <a:rPr lang="en-US" sz="800" dirty="0">
                 <a:solidFill>
-                  <a:srgbClr val="5B6672"/>
+                  <a:srgbClr val="4B4B4B"/>
                 </a:solidFill>
                 <a:latin typeface="Courier New" pitchFamily="34" charset="0"/>
                 <a:ea typeface="Courier New" pitchFamily="34" charset="-122"/>
@@ -25264,7 +24745,7 @@
             <a:r>
               <a:rPr lang="en-US" sz="1050" b="1" dirty="0">
                 <a:solidFill>
-                  <a:srgbClr val="1C2530"/>
+                  <a:srgbClr val="022049"/>
                 </a:solidFill>
                 <a:latin typeface="Arial" pitchFamily="34" charset="0"/>
                 <a:ea typeface="Arial" pitchFamily="34" charset="-122"/>
@@ -25306,7 +24787,7 @@
             <a:r>
               <a:rPr lang="en-US" sz="850" dirty="0">
                 <a:solidFill>
-                  <a:srgbClr val="5B6672"/>
+                  <a:srgbClr val="4B4B4B"/>
                 </a:solidFill>
                 <a:latin typeface="Calibri" pitchFamily="34" charset="0"/>
                 <a:ea typeface="Calibri" pitchFamily="34" charset="-122"/>
@@ -25368,7 +24849,7 @@
             <a:r>
               <a:rPr lang="en-US" sz="750" dirty="0">
                 <a:solidFill>
-                  <a:srgbClr val="5B6672"/>
+                  <a:srgbClr val="4B4B4B"/>
                 </a:solidFill>
                 <a:latin typeface="Courier New" pitchFamily="34" charset="0"/>
                 <a:ea typeface="Courier New" pitchFamily="34" charset="-122"/>
@@ -25407,7 +24888,7 @@
             <a:r>
               <a:rPr lang="en-US" sz="750" dirty="0">
                 <a:solidFill>
-                  <a:srgbClr val="C1432A"/>
+                  <a:srgbClr val="022049"/>
                 </a:solidFill>
                 <a:latin typeface="Courier New" pitchFamily="34" charset="0"/>
                 <a:ea typeface="Courier New" pitchFamily="34" charset="-122"/>
@@ -25480,7 +24961,7 @@
             <a:r>
               <a:rPr lang="en-US" sz="800" dirty="0">
                 <a:solidFill>
-                  <a:srgbClr val="5B6672"/>
+                  <a:srgbClr val="4B4B4B"/>
                 </a:solidFill>
                 <a:latin typeface="Courier New" pitchFamily="34" charset="0"/>
                 <a:ea typeface="Courier New" pitchFamily="34" charset="-122"/>
@@ -25588,7 +25069,7 @@
             <a:r>
               <a:rPr lang="en-US" sz="1050" b="1" dirty="0">
                 <a:solidFill>
-                  <a:srgbClr val="1C2530"/>
+                  <a:srgbClr val="022049"/>
                 </a:solidFill>
                 <a:latin typeface="Arial" pitchFamily="34" charset="0"/>
                 <a:ea typeface="Arial" pitchFamily="34" charset="-122"/>
@@ -25630,7 +25111,7 @@
             <a:r>
               <a:rPr lang="en-US" sz="850" dirty="0">
                 <a:solidFill>
-                  <a:srgbClr val="5B6672"/>
+                  <a:srgbClr val="4B4B4B"/>
                 </a:solidFill>
                 <a:latin typeface="Calibri" pitchFamily="34" charset="0"/>
                 <a:ea typeface="Calibri" pitchFamily="34" charset="-122"/>
@@ -25692,7 +25173,7 @@
             <a:r>
               <a:rPr lang="en-US" sz="750" dirty="0">
                 <a:solidFill>
-                  <a:srgbClr val="5B6672"/>
+                  <a:srgbClr val="4B4B4B"/>
                 </a:solidFill>
                 <a:latin typeface="Courier New" pitchFamily="34" charset="0"/>
                 <a:ea typeface="Courier New" pitchFamily="34" charset="-122"/>
@@ -25731,7 +25212,7 @@
             <a:r>
               <a:rPr lang="en-US" sz="750" dirty="0">
                 <a:solidFill>
-                  <a:srgbClr val="C1432A"/>
+                  <a:srgbClr val="022049"/>
                 </a:solidFill>
                 <a:latin typeface="Courier New" pitchFamily="34" charset="0"/>
                 <a:ea typeface="Courier New" pitchFamily="34" charset="-122"/>

--- a/office-hub-concept.pptx
+++ b/office-hub-concept.pptx
@@ -5594,35 +5594,50 @@
         </p:nvSpPr>
         <p:spPr>
           <a:xfrm>
-            <a:off x="2286000" y="1956816"/>
-            <a:ext cx="1475689" cy="987552"/>
+            <a:off x="2139696" y="1920240"/>
+            <a:ext cx="9878263" cy="1344168"/>
           </a:xfrm>
           <a:prstGeom prst="roundRect">
             <a:avLst>
-              <a:gd name="adj" fmla="val 5556"/>
+              <a:gd name="adj" fmla="val 5442"/>
             </a:avLst>
           </a:prstGeom>
           <a:solidFill>
-            <a:srgbClr val="FBFCFC"/>
+            <a:srgbClr val="022049"/>
           </a:solidFill>
-          <a:ln w="12700">
-            <a:solidFill>
-              <a:srgbClr val="C9D1D6"/>
-            </a:solidFill>
-            <a:prstDash val="solid"/>
-          </a:ln>
+          <a:ln/>
           <a:effectLst>
-            <a:outerShdw sx="100000" sy="100000" kx="0" ky="0" algn="bl" rotWithShape="0" blurRad="63500" dist="25400" dir="5400000">
-              <a:srgbClr val="022049">
-                <a:alpha val="14000"/>
+            <a:outerShdw sx="100000" sy="100000" kx="0" ky="0" algn="bl" rotWithShape="0" blurRad="101600" dist="38100" dir="5400000">
+              <a:srgbClr val="000000">
+                <a:alpha val="25000"/>
               </a:srgbClr>
             </a:outerShdw>
           </a:effectLst>
         </p:spPr>
       </p:sp>
+      <p:sp>
+        <p:nvSpPr>
+          <p:cNvPr id="30" name="Shape 28"/>
+          <p:cNvSpPr/>
+          <p:nvPr/>
+        </p:nvSpPr>
+        <p:spPr>
+          <a:xfrm>
+            <a:off x="2678082" y="2176272"/>
+            <a:ext cx="475488" cy="475488"/>
+          </a:xfrm>
+          <a:prstGeom prst="ellipse">
+            <a:avLst/>
+          </a:prstGeom>
+          <a:solidFill>
+            <a:srgbClr val="FFFFFF"/>
+          </a:solidFill>
+          <a:ln/>
+        </p:spPr>
+      </p:sp>
       <p:pic>
         <p:nvPicPr>
-          <p:cNvPr id="30" name="Image 0" descr="/tmp/claude-0/-home-user-drawing-set/4abccc73-5df9-5ad5-9792-19a3f012db48/scratchpad/icons/standards.png">    </p:cNvPr>
+          <p:cNvPr id="31" name="Image 0" descr="/tmp/claude-0/-home-user-drawing-set/4abccc73-5df9-5ad5-9792-19a3f012db48/scratchpad/icons/standards.png">    </p:cNvPr>
           <p:cNvPicPr>
             <a:picLocks noChangeAspect="1"/>
           </p:cNvPicPr>
@@ -5636,8 +5651,8 @@
         </p:blipFill>
         <p:spPr>
           <a:xfrm>
-            <a:off x="2850109" y="2084832"/>
-            <a:ext cx="347472" cy="347472"/>
+            <a:off x="2769522" y="2267712"/>
+            <a:ext cx="292608" cy="292608"/>
           </a:xfrm>
           <a:prstGeom prst="rect">
             <a:avLst/>
@@ -5646,14 +5661,14 @@
       </p:pic>
       <p:sp>
         <p:nvSpPr>
-          <p:cNvPr id="31" name="Text 28"/>
-          <p:cNvSpPr txBox="1"/>
-          <p:nvPr/>
-        </p:nvSpPr>
-        <p:spPr>
-          <a:xfrm>
-            <a:off x="2286000" y="2487168"/>
-            <a:ext cx="1475689" cy="365760"/>
+          <p:cNvPr id="32" name="Text 29"/>
+          <p:cNvSpPr txBox="1"/>
+          <p:nvPr/>
+        </p:nvSpPr>
+        <p:spPr>
+          <a:xfrm>
+            <a:off x="2286000" y="2724912"/>
+            <a:ext cx="1259651" cy="329184"/>
           </a:xfrm>
           <a:prstGeom prst="rect">
             <a:avLst/>
@@ -5669,9 +5684,9 @@
               <a:buNone/>
             </a:pPr>
             <a:r>
-              <a:rPr lang="en-US" sz="950" b="1" dirty="0">
-                <a:solidFill>
-                  <a:srgbClr val="022049"/>
+              <a:rPr lang="en-US" sz="900" b="1" dirty="0">
+                <a:solidFill>
+                  <a:srgbClr val="FFFFFF"/>
                 </a:solidFill>
                 <a:latin typeface="Arial" pitchFamily="34" charset="0"/>
                 <a:ea typeface="Arial" pitchFamily="34" charset="-122"/>
@@ -5679,47 +5694,33 @@
               </a:rPr>
               <a:t>STANDARDS</a:t>
             </a:r>
-            <a:endParaRPr lang="en-US" sz="950" dirty="0"/>
-          </a:p>
-        </p:txBody>
-      </p:sp>
-      <p:sp>
-        <p:nvSpPr>
-          <p:cNvPr id="32" name="Shape 29"/>
+            <a:endParaRPr lang="en-US" sz="900" dirty="0"/>
+          </a:p>
+        </p:txBody>
+      </p:sp>
+      <p:sp>
+        <p:nvSpPr>
+          <p:cNvPr id="33" name="Shape 30"/>
           <p:cNvSpPr/>
           <p:nvPr/>
         </p:nvSpPr>
         <p:spPr>
           <a:xfrm>
-            <a:off x="3907993" y="1956816"/>
-            <a:ext cx="1475689" cy="987552"/>
-          </a:xfrm>
-          <a:prstGeom prst="roundRect">
-            <a:avLst>
-              <a:gd name="adj" fmla="val 5556"/>
-            </a:avLst>
+            <a:off x="4065749" y="2176272"/>
+            <a:ext cx="475488" cy="475488"/>
+          </a:xfrm>
+          <a:prstGeom prst="ellipse">
+            <a:avLst/>
           </a:prstGeom>
           <a:solidFill>
-            <a:srgbClr val="FBFCFC"/>
+            <a:srgbClr val="FFFFFF"/>
           </a:solidFill>
-          <a:ln w="12700">
-            <a:solidFill>
-              <a:srgbClr val="C9D1D6"/>
-            </a:solidFill>
-            <a:prstDash val="solid"/>
-          </a:ln>
-          <a:effectLst>
-            <a:outerShdw sx="100000" sy="100000" kx="0" ky="0" algn="bl" rotWithShape="0" blurRad="63500" dist="25400" dir="5400000">
-              <a:srgbClr val="022049">
-                <a:alpha val="14000"/>
-              </a:srgbClr>
-            </a:outerShdw>
-          </a:effectLst>
+          <a:ln/>
         </p:spPr>
       </p:sp>
       <p:pic>
         <p:nvPicPr>
-          <p:cNvPr id="33" name="Image 1" descr="/tmp/claude-0/-home-user-drawing-set/4abccc73-5df9-5ad5-9792-19a3f012db48/scratchpad/icons/templates.png">    </p:cNvPr>
+          <p:cNvPr id="34" name="Image 1" descr="/tmp/claude-0/-home-user-drawing-set/4abccc73-5df9-5ad5-9792-19a3f012db48/scratchpad/icons/templates.png">    </p:cNvPr>
           <p:cNvPicPr>
             <a:picLocks noChangeAspect="1"/>
           </p:cNvPicPr>
@@ -5733,8 +5734,8 @@
         </p:blipFill>
         <p:spPr>
           <a:xfrm>
-            <a:off x="4472102" y="2084832"/>
-            <a:ext cx="347472" cy="347472"/>
+            <a:off x="4157189" y="2267712"/>
+            <a:ext cx="292608" cy="292608"/>
           </a:xfrm>
           <a:prstGeom prst="rect">
             <a:avLst/>
@@ -5743,14 +5744,14 @@
       </p:pic>
       <p:sp>
         <p:nvSpPr>
-          <p:cNvPr id="34" name="Text 30"/>
-          <p:cNvSpPr txBox="1"/>
-          <p:nvPr/>
-        </p:nvSpPr>
-        <p:spPr>
-          <a:xfrm>
-            <a:off x="3907993" y="2487168"/>
-            <a:ext cx="1475689" cy="365760"/>
+          <p:cNvPr id="35" name="Text 31"/>
+          <p:cNvSpPr txBox="1"/>
+          <p:nvPr/>
+        </p:nvSpPr>
+        <p:spPr>
+          <a:xfrm>
+            <a:off x="3673667" y="2724912"/>
+            <a:ext cx="1259651" cy="329184"/>
           </a:xfrm>
           <a:prstGeom prst="rect">
             <a:avLst/>
@@ -5766,9 +5767,9 @@
               <a:buNone/>
             </a:pPr>
             <a:r>
-              <a:rPr lang="en-US" sz="950" b="1" dirty="0">
-                <a:solidFill>
-                  <a:srgbClr val="022049"/>
+              <a:rPr lang="en-US" sz="900" b="1" dirty="0">
+                <a:solidFill>
+                  <a:srgbClr val="FFFFFF"/>
                 </a:solidFill>
                 <a:latin typeface="Arial" pitchFamily="34" charset="0"/>
                 <a:ea typeface="Arial" pitchFamily="34" charset="-122"/>
@@ -5776,47 +5777,33 @@
               </a:rPr>
               <a:t>TEMPLATES</a:t>
             </a:r>
-            <a:endParaRPr lang="en-US" sz="950" dirty="0"/>
-          </a:p>
-        </p:txBody>
-      </p:sp>
-      <p:sp>
-        <p:nvSpPr>
-          <p:cNvPr id="35" name="Shape 31"/>
+            <a:endParaRPr lang="en-US" sz="900" dirty="0"/>
+          </a:p>
+        </p:txBody>
+      </p:sp>
+      <p:sp>
+        <p:nvSpPr>
+          <p:cNvPr id="36" name="Shape 32"/>
           <p:cNvSpPr/>
           <p:nvPr/>
         </p:nvSpPr>
         <p:spPr>
           <a:xfrm>
-            <a:off x="5529986" y="1956816"/>
-            <a:ext cx="1475689" cy="987552"/>
-          </a:xfrm>
-          <a:prstGeom prst="roundRect">
-            <a:avLst>
-              <a:gd name="adj" fmla="val 5556"/>
-            </a:avLst>
+            <a:off x="5453416" y="2176272"/>
+            <a:ext cx="475488" cy="475488"/>
+          </a:xfrm>
+          <a:prstGeom prst="ellipse">
+            <a:avLst/>
           </a:prstGeom>
           <a:solidFill>
-            <a:srgbClr val="FBFCFC"/>
+            <a:srgbClr val="FFFFFF"/>
           </a:solidFill>
-          <a:ln w="12700">
-            <a:solidFill>
-              <a:srgbClr val="C9D1D6"/>
-            </a:solidFill>
-            <a:prstDash val="solid"/>
-          </a:ln>
-          <a:effectLst>
-            <a:outerShdw sx="100000" sy="100000" kx="0" ky="0" algn="bl" rotWithShape="0" blurRad="63500" dist="25400" dir="5400000">
-              <a:srgbClr val="022049">
-                <a:alpha val="14000"/>
-              </a:srgbClr>
-            </a:outerShdw>
-          </a:effectLst>
+          <a:ln/>
         </p:spPr>
       </p:sp>
       <p:pic>
         <p:nvPicPr>
-          <p:cNvPr id="36" name="Image 2" descr="/tmp/claude-0/-home-user-drawing-set/4abccc73-5df9-5ad5-9792-19a3f012db48/scratchpad/icons/forms.png">    </p:cNvPr>
+          <p:cNvPr id="37" name="Image 2" descr="/tmp/claude-0/-home-user-drawing-set/4abccc73-5df9-5ad5-9792-19a3f012db48/scratchpad/icons/forms.png">    </p:cNvPr>
           <p:cNvPicPr>
             <a:picLocks noChangeAspect="1"/>
           </p:cNvPicPr>
@@ -5830,8 +5817,8 @@
         </p:blipFill>
         <p:spPr>
           <a:xfrm>
-            <a:off x="6094095" y="2084832"/>
-            <a:ext cx="347472" cy="347472"/>
+            <a:off x="5544856" y="2267712"/>
+            <a:ext cx="292608" cy="292608"/>
           </a:xfrm>
           <a:prstGeom prst="rect">
             <a:avLst/>
@@ -5840,14 +5827,14 @@
       </p:pic>
       <p:sp>
         <p:nvSpPr>
-          <p:cNvPr id="37" name="Text 32"/>
-          <p:cNvSpPr txBox="1"/>
-          <p:nvPr/>
-        </p:nvSpPr>
-        <p:spPr>
-          <a:xfrm>
-            <a:off x="5529986" y="2487168"/>
-            <a:ext cx="1475689" cy="365760"/>
+          <p:cNvPr id="38" name="Text 33"/>
+          <p:cNvSpPr txBox="1"/>
+          <p:nvPr/>
+        </p:nvSpPr>
+        <p:spPr>
+          <a:xfrm>
+            <a:off x="5061335" y="2724912"/>
+            <a:ext cx="1259651" cy="329184"/>
           </a:xfrm>
           <a:prstGeom prst="rect">
             <a:avLst/>
@@ -5863,9 +5850,9 @@
               <a:buNone/>
             </a:pPr>
             <a:r>
-              <a:rPr lang="en-US" sz="950" b="1" dirty="0">
-                <a:solidFill>
-                  <a:srgbClr val="022049"/>
+              <a:rPr lang="en-US" sz="900" b="1" dirty="0">
+                <a:solidFill>
+                  <a:srgbClr val="FFFFFF"/>
                 </a:solidFill>
                 <a:latin typeface="Arial" pitchFamily="34" charset="0"/>
                 <a:ea typeface="Arial" pitchFamily="34" charset="-122"/>
@@ -5873,47 +5860,33 @@
               </a:rPr>
               <a:t>FORMS</a:t>
             </a:r>
-            <a:endParaRPr lang="en-US" sz="950" dirty="0"/>
-          </a:p>
-        </p:txBody>
-      </p:sp>
-      <p:sp>
-        <p:nvSpPr>
-          <p:cNvPr id="38" name="Shape 33"/>
+            <a:endParaRPr lang="en-US" sz="900" dirty="0"/>
+          </a:p>
+        </p:txBody>
+      </p:sp>
+      <p:sp>
+        <p:nvSpPr>
+          <p:cNvPr id="39" name="Shape 34"/>
           <p:cNvSpPr/>
           <p:nvPr/>
         </p:nvSpPr>
         <p:spPr>
           <a:xfrm>
-            <a:off x="7151980" y="1956816"/>
-            <a:ext cx="1475689" cy="987552"/>
-          </a:xfrm>
-          <a:prstGeom prst="roundRect">
-            <a:avLst>
-              <a:gd name="adj" fmla="val 5556"/>
-            </a:avLst>
+            <a:off x="6841084" y="2176272"/>
+            <a:ext cx="475488" cy="475488"/>
+          </a:xfrm>
+          <a:prstGeom prst="ellipse">
+            <a:avLst/>
           </a:prstGeom>
           <a:solidFill>
-            <a:srgbClr val="FBFCFC"/>
+            <a:srgbClr val="FFFFFF"/>
           </a:solidFill>
-          <a:ln w="12700">
-            <a:solidFill>
-              <a:srgbClr val="C9D1D6"/>
-            </a:solidFill>
-            <a:prstDash val="solid"/>
-          </a:ln>
-          <a:effectLst>
-            <a:outerShdw sx="100000" sy="100000" kx="0" ky="0" algn="bl" rotWithShape="0" blurRad="63500" dist="25400" dir="5400000">
-              <a:srgbClr val="022049">
-                <a:alpha val="14000"/>
-              </a:srgbClr>
-            </a:outerShdw>
-          </a:effectLst>
+          <a:ln/>
         </p:spPr>
       </p:sp>
       <p:pic>
         <p:nvPicPr>
-          <p:cNvPr id="39" name="Image 3" descr="/tmp/claude-0/-home-user-drawing-set/4abccc73-5df9-5ad5-9792-19a3f012db48/scratchpad/icons/policies.png">    </p:cNvPr>
+          <p:cNvPr id="40" name="Image 3" descr="/tmp/claude-0/-home-user-drawing-set/4abccc73-5df9-5ad5-9792-19a3f012db48/scratchpad/icons/policies.png">    </p:cNvPr>
           <p:cNvPicPr>
             <a:picLocks noChangeAspect="1"/>
           </p:cNvPicPr>
@@ -5927,8 +5900,8 @@
         </p:blipFill>
         <p:spPr>
           <a:xfrm>
-            <a:off x="7716088" y="2084832"/>
-            <a:ext cx="347472" cy="347472"/>
+            <a:off x="6932524" y="2267712"/>
+            <a:ext cx="292608" cy="292608"/>
           </a:xfrm>
           <a:prstGeom prst="rect">
             <a:avLst/>
@@ -5937,14 +5910,14 @@
       </p:pic>
       <p:sp>
         <p:nvSpPr>
-          <p:cNvPr id="40" name="Text 34"/>
-          <p:cNvSpPr txBox="1"/>
-          <p:nvPr/>
-        </p:nvSpPr>
-        <p:spPr>
-          <a:xfrm>
-            <a:off x="7151980" y="2487168"/>
-            <a:ext cx="1475689" cy="365760"/>
+          <p:cNvPr id="41" name="Text 35"/>
+          <p:cNvSpPr txBox="1"/>
+          <p:nvPr/>
+        </p:nvSpPr>
+        <p:spPr>
+          <a:xfrm>
+            <a:off x="6449002" y="2724912"/>
+            <a:ext cx="1259651" cy="329184"/>
           </a:xfrm>
           <a:prstGeom prst="rect">
             <a:avLst/>
@@ -5960,9 +5933,9 @@
               <a:buNone/>
             </a:pPr>
             <a:r>
-              <a:rPr lang="en-US" sz="950" b="1" dirty="0">
-                <a:solidFill>
-                  <a:srgbClr val="022049"/>
+              <a:rPr lang="en-US" sz="900" b="1" dirty="0">
+                <a:solidFill>
+                  <a:srgbClr val="FFFFFF"/>
                 </a:solidFill>
                 <a:latin typeface="Arial" pitchFamily="34" charset="0"/>
                 <a:ea typeface="Arial" pitchFamily="34" charset="-122"/>
@@ -5970,47 +5943,33 @@
               </a:rPr>
               <a:t>POLICIES</a:t>
             </a:r>
-            <a:endParaRPr lang="en-US" sz="950" dirty="0"/>
-          </a:p>
-        </p:txBody>
-      </p:sp>
-      <p:sp>
-        <p:nvSpPr>
-          <p:cNvPr id="41" name="Shape 35"/>
+            <a:endParaRPr lang="en-US" sz="900" dirty="0"/>
+          </a:p>
+        </p:txBody>
+      </p:sp>
+      <p:sp>
+        <p:nvSpPr>
+          <p:cNvPr id="42" name="Shape 36"/>
           <p:cNvSpPr/>
           <p:nvPr/>
         </p:nvSpPr>
         <p:spPr>
           <a:xfrm>
-            <a:off x="8773973" y="1956816"/>
-            <a:ext cx="1475689" cy="987552"/>
-          </a:xfrm>
-          <a:prstGeom prst="roundRect">
-            <a:avLst>
-              <a:gd name="adj" fmla="val 5556"/>
-            </a:avLst>
+            <a:off x="8228751" y="2176272"/>
+            <a:ext cx="475488" cy="475488"/>
+          </a:xfrm>
+          <a:prstGeom prst="ellipse">
+            <a:avLst/>
           </a:prstGeom>
           <a:solidFill>
-            <a:srgbClr val="FBFCFC"/>
+            <a:srgbClr val="FFFFFF"/>
           </a:solidFill>
-          <a:ln w="12700">
-            <a:solidFill>
-              <a:srgbClr val="C9D1D6"/>
-            </a:solidFill>
-            <a:prstDash val="solid"/>
-          </a:ln>
-          <a:effectLst>
-            <a:outerShdw sx="100000" sy="100000" kx="0" ky="0" algn="bl" rotWithShape="0" blurRad="63500" dist="25400" dir="5400000">
-              <a:srgbClr val="022049">
-                <a:alpha val="14000"/>
-              </a:srgbClr>
-            </a:outerShdw>
-          </a:effectLst>
+          <a:ln/>
         </p:spPr>
       </p:sp>
       <p:pic>
         <p:nvPicPr>
-          <p:cNvPr id="42" name="Image 4" descr="/tmp/claude-0/-home-user-drawing-set/4abccc73-5df9-5ad5-9792-19a3f012db48/scratchpad/icons/sops.png">    </p:cNvPr>
+          <p:cNvPr id="43" name="Image 4" descr="/tmp/claude-0/-home-user-drawing-set/4abccc73-5df9-5ad5-9792-19a3f012db48/scratchpad/icons/sops.png">    </p:cNvPr>
           <p:cNvPicPr>
             <a:picLocks noChangeAspect="1"/>
           </p:cNvPicPr>
@@ -6024,8 +5983,8 @@
         </p:blipFill>
         <p:spPr>
           <a:xfrm>
-            <a:off x="9338081" y="2084832"/>
-            <a:ext cx="347472" cy="347472"/>
+            <a:off x="8320191" y="2267712"/>
+            <a:ext cx="292608" cy="292608"/>
           </a:xfrm>
           <a:prstGeom prst="rect">
             <a:avLst/>
@@ -6034,14 +5993,14 @@
       </p:pic>
       <p:sp>
         <p:nvSpPr>
-          <p:cNvPr id="43" name="Text 36"/>
-          <p:cNvSpPr txBox="1"/>
-          <p:nvPr/>
-        </p:nvSpPr>
-        <p:spPr>
-          <a:xfrm>
-            <a:off x="8773973" y="2487168"/>
-            <a:ext cx="1475689" cy="365760"/>
+          <p:cNvPr id="44" name="Text 37"/>
+          <p:cNvSpPr txBox="1"/>
+          <p:nvPr/>
+        </p:nvSpPr>
+        <p:spPr>
+          <a:xfrm>
+            <a:off x="7836669" y="2724912"/>
+            <a:ext cx="1259651" cy="329184"/>
           </a:xfrm>
           <a:prstGeom prst="rect">
             <a:avLst/>
@@ -6057,9 +6016,9 @@
               <a:buNone/>
             </a:pPr>
             <a:r>
-              <a:rPr lang="en-US" sz="950" b="1" dirty="0">
-                <a:solidFill>
-                  <a:srgbClr val="022049"/>
+              <a:rPr lang="en-US" sz="900" b="1" dirty="0">
+                <a:solidFill>
+                  <a:srgbClr val="FFFFFF"/>
                 </a:solidFill>
                 <a:latin typeface="Arial" pitchFamily="34" charset="0"/>
                 <a:ea typeface="Arial" pitchFamily="34" charset="-122"/>
@@ -6067,47 +6026,33 @@
               </a:rPr>
               <a:t>SOPS</a:t>
             </a:r>
-            <a:endParaRPr lang="en-US" sz="950" dirty="0"/>
-          </a:p>
-        </p:txBody>
-      </p:sp>
-      <p:sp>
-        <p:nvSpPr>
-          <p:cNvPr id="44" name="Shape 37"/>
+            <a:endParaRPr lang="en-US" sz="900" dirty="0"/>
+          </a:p>
+        </p:txBody>
+      </p:sp>
+      <p:sp>
+        <p:nvSpPr>
+          <p:cNvPr id="45" name="Shape 38"/>
           <p:cNvSpPr/>
           <p:nvPr/>
         </p:nvSpPr>
         <p:spPr>
           <a:xfrm>
-            <a:off x="10395966" y="1956816"/>
-            <a:ext cx="1475689" cy="987552"/>
-          </a:xfrm>
-          <a:prstGeom prst="roundRect">
-            <a:avLst>
-              <a:gd name="adj" fmla="val 5556"/>
-            </a:avLst>
+            <a:off x="9616418" y="2176272"/>
+            <a:ext cx="475488" cy="475488"/>
+          </a:xfrm>
+          <a:prstGeom prst="ellipse">
+            <a:avLst/>
           </a:prstGeom>
           <a:solidFill>
-            <a:srgbClr val="FBFCFC"/>
+            <a:srgbClr val="FFFFFF"/>
           </a:solidFill>
-          <a:ln w="12700">
-            <a:solidFill>
-              <a:srgbClr val="C9D1D6"/>
-            </a:solidFill>
-            <a:prstDash val="solid"/>
-          </a:ln>
-          <a:effectLst>
-            <a:outerShdw sx="100000" sy="100000" kx="0" ky="0" algn="bl" rotWithShape="0" blurRad="63500" dist="25400" dir="5400000">
-              <a:srgbClr val="022049">
-                <a:alpha val="14000"/>
-              </a:srgbClr>
-            </a:outerShdw>
-          </a:effectLst>
+          <a:ln/>
         </p:spPr>
       </p:sp>
       <p:pic>
         <p:nvPicPr>
-          <p:cNvPr id="45" name="Image 5" descr="/tmp/claude-0/-home-user-drawing-set/4abccc73-5df9-5ad5-9792-19a3f012db48/scratchpad/icons/revit.png">    </p:cNvPr>
+          <p:cNvPr id="46" name="Image 5" descr="/tmp/claude-0/-home-user-drawing-set/4abccc73-5df9-5ad5-9792-19a3f012db48/scratchpad/icons/revit.png">    </p:cNvPr>
           <p:cNvPicPr>
             <a:picLocks noChangeAspect="1"/>
           </p:cNvPicPr>
@@ -6121,8 +6066,8 @@
         </p:blipFill>
         <p:spPr>
           <a:xfrm>
-            <a:off x="10960075" y="2084832"/>
-            <a:ext cx="347472" cy="347472"/>
+            <a:off x="9707858" y="2267712"/>
+            <a:ext cx="292608" cy="292608"/>
           </a:xfrm>
           <a:prstGeom prst="rect">
             <a:avLst/>
@@ -6131,14 +6076,14 @@
       </p:pic>
       <p:sp>
         <p:nvSpPr>
-          <p:cNvPr id="46" name="Text 38"/>
-          <p:cNvSpPr txBox="1"/>
-          <p:nvPr/>
-        </p:nvSpPr>
-        <p:spPr>
-          <a:xfrm>
-            <a:off x="10395966" y="2487168"/>
-            <a:ext cx="1475689" cy="365760"/>
+          <p:cNvPr id="47" name="Text 39"/>
+          <p:cNvSpPr txBox="1"/>
+          <p:nvPr/>
+        </p:nvSpPr>
+        <p:spPr>
+          <a:xfrm>
+            <a:off x="9224337" y="2724912"/>
+            <a:ext cx="1259651" cy="329184"/>
           </a:xfrm>
           <a:prstGeom prst="rect">
             <a:avLst/>
@@ -6154,9 +6099,9 @@
               <a:buNone/>
             </a:pPr>
             <a:r>
-              <a:rPr lang="en-US" sz="950" b="1" dirty="0">
-                <a:solidFill>
-                  <a:srgbClr val="022049"/>
+              <a:rPr lang="en-US" sz="900" b="1" dirty="0">
+                <a:solidFill>
+                  <a:srgbClr val="FFFFFF"/>
                 </a:solidFill>
                 <a:latin typeface="Arial" pitchFamily="34" charset="0"/>
                 <a:ea typeface="Arial" pitchFamily="34" charset="-122"/>
@@ -6164,19 +6109,122 @@
               </a:rPr>
               <a:t>REVIT STD.</a:t>
             </a:r>
-            <a:endParaRPr lang="en-US" sz="950" dirty="0"/>
-          </a:p>
-        </p:txBody>
-      </p:sp>
-      <p:sp>
-        <p:nvSpPr>
-          <p:cNvPr id="47" name="Text 39"/>
-          <p:cNvSpPr txBox="1"/>
-          <p:nvPr/>
-        </p:nvSpPr>
-        <p:spPr>
-          <a:xfrm>
-            <a:off x="2286000" y="3163824"/>
+            <a:endParaRPr lang="en-US" sz="900" dirty="0"/>
+          </a:p>
+        </p:txBody>
+      </p:sp>
+      <p:sp>
+        <p:nvSpPr>
+          <p:cNvPr id="48" name="Shape 40"/>
+          <p:cNvSpPr/>
+          <p:nvPr/>
+        </p:nvSpPr>
+        <p:spPr>
+          <a:xfrm>
+            <a:off x="11004086" y="2176272"/>
+            <a:ext cx="475488" cy="475488"/>
+          </a:xfrm>
+          <a:prstGeom prst="ellipse">
+            <a:avLst/>
+          </a:prstGeom>
+          <a:solidFill>
+            <a:srgbClr val="FFFFFF"/>
+          </a:solidFill>
+          <a:ln/>
+        </p:spPr>
+      </p:sp>
+      <p:pic>
+        <p:nvPicPr>
+          <p:cNvPr id="49" name="Image 6" descr="/tmp/claude-0/-home-user-drawing-set/4abccc73-5df9-5ad5-9792-19a3f012db48/scratchpad/icons/learning.png">    </p:cNvPr>
+          <p:cNvPicPr>
+            <a:picLocks noChangeAspect="1"/>
+          </p:cNvPicPr>
+          <p:nvPr/>
+        </p:nvPicPr>
+        <p:blipFill>
+          <a:blip r:embed="rId8"/>
+          <a:stretch>
+            <a:fillRect/>
+          </a:stretch>
+        </p:blipFill>
+        <p:spPr>
+          <a:xfrm>
+            <a:off x="11095526" y="2267712"/>
+            <a:ext cx="292608" cy="292608"/>
+          </a:xfrm>
+          <a:prstGeom prst="rect">
+            <a:avLst/>
+          </a:prstGeom>
+        </p:spPr>
+      </p:pic>
+      <p:sp>
+        <p:nvSpPr>
+          <p:cNvPr id="50" name="Text 41"/>
+          <p:cNvSpPr txBox="1"/>
+          <p:nvPr/>
+        </p:nvSpPr>
+        <p:spPr>
+          <a:xfrm>
+            <a:off x="10612004" y="2724912"/>
+            <a:ext cx="1259651" cy="329184"/>
+          </a:xfrm>
+          <a:prstGeom prst="rect">
+            <a:avLst/>
+          </a:prstGeom>
+          <a:noFill/>
+          <a:ln/>
+        </p:spPr>
+        <p:txBody>
+          <a:bodyPr wrap="square" lIns="0" tIns="0" rIns="0" bIns="0" rtlCol="0" anchor="t"/>
+          <a:lstStyle/>
+          <a:p>
+            <a:pPr algn="ctr" indent="0" marL="0">
+              <a:buNone/>
+            </a:pPr>
+            <a:r>
+              <a:rPr lang="en-US" sz="900" b="1" dirty="0">
+                <a:solidFill>
+                  <a:srgbClr val="FFFFFF"/>
+                </a:solidFill>
+                <a:latin typeface="Arial" pitchFamily="34" charset="0"/>
+                <a:ea typeface="Arial" pitchFamily="34" charset="-122"/>
+                <a:cs typeface="Arial" pitchFamily="34" charset="-120"/>
+              </a:rPr>
+              <a:t>LEARNING</a:t>
+            </a:r>
+            <a:endParaRPr lang="en-US" sz="900" dirty="0"/>
+          </a:p>
+        </p:txBody>
+      </p:sp>
+      <p:sp>
+        <p:nvSpPr>
+          <p:cNvPr id="51" name="Shape 42"/>
+          <p:cNvSpPr/>
+          <p:nvPr/>
+        </p:nvSpPr>
+        <p:spPr>
+          <a:xfrm>
+            <a:off x="2286000" y="3520440"/>
+            <a:ext cx="109728" cy="109728"/>
+          </a:xfrm>
+          <a:prstGeom prst="rect">
+            <a:avLst/>
+          </a:prstGeom>
+          <a:solidFill>
+            <a:srgbClr val="022049"/>
+          </a:solidFill>
+          <a:ln/>
+        </p:spPr>
+      </p:sp>
+      <p:sp>
+        <p:nvSpPr>
+          <p:cNvPr id="52" name="Text 43"/>
+          <p:cNvSpPr txBox="1"/>
+          <p:nvPr/>
+        </p:nvSpPr>
+        <p:spPr>
+          <a:xfrm>
+            <a:off x="2468880" y="3502152"/>
             <a:ext cx="3657600" cy="219456"/>
           </a:xfrm>
           <a:prstGeom prst="rect">
@@ -6195,7 +6243,7 @@
             <a:r>
               <a:rPr lang="en-US" sz="900" spc="100" kern="0" dirty="0">
                 <a:solidFill>
-                  <a:srgbClr val="4B4B4B"/>
+                  <a:srgbClr val="022049"/>
                 </a:solidFill>
                 <a:latin typeface="Courier New" pitchFamily="34" charset="0"/>
                 <a:ea typeface="Courier New" pitchFamily="34" charset="-122"/>
@@ -6209,18 +6257,18 @@
       </p:sp>
       <p:sp>
         <p:nvSpPr>
-          <p:cNvPr id="48" name="Shape 40"/>
+          <p:cNvPr id="53" name="Shape 44"/>
           <p:cNvSpPr/>
           <p:nvPr/>
         </p:nvSpPr>
         <p:spPr>
           <a:xfrm>
-            <a:off x="2286000" y="3438144"/>
-            <a:ext cx="3048914" cy="1737360"/>
+            <a:off x="2286000" y="3776472"/>
+            <a:ext cx="3048914" cy="1554480"/>
           </a:xfrm>
           <a:prstGeom prst="roundRect">
             <a:avLst>
-              <a:gd name="adj" fmla="val 2632"/>
+              <a:gd name="adj" fmla="val 2941"/>
             </a:avLst>
           </a:prstGeom>
           <a:solidFill>
@@ -6243,13 +6291,13 @@
       </p:sp>
       <p:sp>
         <p:nvSpPr>
-          <p:cNvPr id="49" name="Text 41"/>
-          <p:cNvSpPr txBox="1"/>
-          <p:nvPr/>
-        </p:nvSpPr>
-        <p:spPr>
-          <a:xfrm>
-            <a:off x="2414016" y="3529584"/>
+          <p:cNvPr id="54" name="Text 45"/>
+          <p:cNvSpPr txBox="1"/>
+          <p:nvPr/>
+        </p:nvSpPr>
+        <p:spPr>
+          <a:xfrm>
+            <a:off x="2414016" y="3867912"/>
             <a:ext cx="1676903" cy="182880"/>
           </a:xfrm>
           <a:prstGeom prst="rect">
@@ -6282,13 +6330,13 @@
       </p:sp>
       <p:sp>
         <p:nvSpPr>
-          <p:cNvPr id="50" name="Shape 42"/>
+          <p:cNvPr id="55" name="Shape 46"/>
           <p:cNvSpPr/>
           <p:nvPr/>
         </p:nvSpPr>
         <p:spPr>
           <a:xfrm>
-            <a:off x="4621682" y="3520440"/>
+            <a:off x="4621682" y="3858768"/>
             <a:ext cx="621792" cy="173736"/>
           </a:xfrm>
           <a:prstGeom prst="roundRect">
@@ -6309,13 +6357,13 @@
       </p:sp>
       <p:sp>
         <p:nvSpPr>
-          <p:cNvPr id="51" name="Text 43"/>
-          <p:cNvSpPr txBox="1"/>
-          <p:nvPr/>
-        </p:nvSpPr>
-        <p:spPr>
-          <a:xfrm>
-            <a:off x="4621682" y="3520440"/>
+          <p:cNvPr id="56" name="Text 47"/>
+          <p:cNvSpPr txBox="1"/>
+          <p:nvPr/>
+        </p:nvSpPr>
+        <p:spPr>
+          <a:xfrm>
+            <a:off x="4621682" y="3858768"/>
             <a:ext cx="621792" cy="173736"/>
           </a:xfrm>
           <a:prstGeom prst="rect">
@@ -6348,13 +6396,13 @@
       </p:sp>
       <p:sp>
         <p:nvSpPr>
-          <p:cNvPr id="52" name="Text 44"/>
-          <p:cNvSpPr txBox="1"/>
-          <p:nvPr/>
-        </p:nvSpPr>
-        <p:spPr>
-          <a:xfrm>
-            <a:off x="2414016" y="3730752"/>
+          <p:cNvPr id="57" name="Text 48"/>
+          <p:cNvSpPr txBox="1"/>
+          <p:nvPr/>
+        </p:nvSpPr>
+        <p:spPr>
+          <a:xfrm>
+            <a:off x="2414016" y="4069080"/>
             <a:ext cx="2792882" cy="512064"/>
           </a:xfrm>
           <a:prstGeom prst="rect">
@@ -6390,14 +6438,14 @@
       </p:sp>
       <p:sp>
         <p:nvSpPr>
-          <p:cNvPr id="53" name="Text 45"/>
-          <p:cNvSpPr txBox="1"/>
-          <p:nvPr/>
-        </p:nvSpPr>
-        <p:spPr>
-          <a:xfrm>
-            <a:off x="2414016" y="4279392"/>
-            <a:ext cx="2792882" cy="530352"/>
+          <p:cNvPr id="58" name="Text 49"/>
+          <p:cNvSpPr txBox="1"/>
+          <p:nvPr/>
+        </p:nvSpPr>
+        <p:spPr>
+          <a:xfrm>
+            <a:off x="2414016" y="4617720"/>
+            <a:ext cx="2792882" cy="347472"/>
           </a:xfrm>
           <a:prstGeom prst="rect">
             <a:avLst/>
@@ -6432,13 +6480,13 @@
       </p:sp>
       <p:sp>
         <p:nvSpPr>
-          <p:cNvPr id="54" name="Shape 46"/>
+          <p:cNvPr id="59" name="Shape 50"/>
           <p:cNvSpPr/>
           <p:nvPr/>
         </p:nvSpPr>
         <p:spPr>
           <a:xfrm>
-            <a:off x="2414016" y="4882896"/>
+            <a:off x="2414016" y="5038344"/>
             <a:ext cx="2792882" cy="0"/>
           </a:xfrm>
           <a:prstGeom prst="line">
@@ -6455,13 +6503,13 @@
       </p:sp>
       <p:sp>
         <p:nvSpPr>
-          <p:cNvPr id="55" name="Text 47"/>
-          <p:cNvSpPr txBox="1"/>
-          <p:nvPr/>
-        </p:nvSpPr>
-        <p:spPr>
-          <a:xfrm>
-            <a:off x="2414016" y="4928616"/>
+          <p:cNvPr id="60" name="Text 51"/>
+          <p:cNvSpPr txBox="1"/>
+          <p:nvPr/>
+        </p:nvSpPr>
+        <p:spPr>
+          <a:xfrm>
+            <a:off x="2414016" y="5084064"/>
             <a:ext cx="1829349" cy="182880"/>
           </a:xfrm>
           <a:prstGeom prst="rect">
@@ -6494,13 +6542,13 @@
       </p:sp>
       <p:sp>
         <p:nvSpPr>
-          <p:cNvPr id="56" name="Text 48"/>
-          <p:cNvSpPr txBox="1"/>
-          <p:nvPr/>
-        </p:nvSpPr>
-        <p:spPr>
-          <a:xfrm>
-            <a:off x="4557674" y="4928616"/>
+          <p:cNvPr id="61" name="Text 52"/>
+          <p:cNvSpPr txBox="1"/>
+          <p:nvPr/>
+        </p:nvSpPr>
+        <p:spPr>
+          <a:xfrm>
+            <a:off x="4557674" y="5084064"/>
             <a:ext cx="658368" cy="182880"/>
           </a:xfrm>
           <a:prstGeom prst="rect">
@@ -6533,18 +6581,18 @@
       </p:sp>
       <p:sp>
         <p:nvSpPr>
-          <p:cNvPr id="57" name="Shape 49"/>
+          <p:cNvPr id="62" name="Shape 53"/>
           <p:cNvSpPr/>
           <p:nvPr/>
         </p:nvSpPr>
         <p:spPr>
           <a:xfrm>
-            <a:off x="5554370" y="3438144"/>
-            <a:ext cx="3048914" cy="1737360"/>
+            <a:off x="5554370" y="3776472"/>
+            <a:ext cx="3048914" cy="1554480"/>
           </a:xfrm>
           <a:prstGeom prst="roundRect">
             <a:avLst>
-              <a:gd name="adj" fmla="val 2632"/>
+              <a:gd name="adj" fmla="val 2941"/>
             </a:avLst>
           </a:prstGeom>
           <a:solidFill>
@@ -6567,13 +6615,13 @@
       </p:sp>
       <p:sp>
         <p:nvSpPr>
-          <p:cNvPr id="58" name="Text 50"/>
-          <p:cNvSpPr txBox="1"/>
-          <p:nvPr/>
-        </p:nvSpPr>
-        <p:spPr>
-          <a:xfrm>
-            <a:off x="5682386" y="3529584"/>
+          <p:cNvPr id="63" name="Text 54"/>
+          <p:cNvSpPr txBox="1"/>
+          <p:nvPr/>
+        </p:nvSpPr>
+        <p:spPr>
+          <a:xfrm>
+            <a:off x="5682386" y="3867912"/>
             <a:ext cx="1676903" cy="182880"/>
           </a:xfrm>
           <a:prstGeom prst="rect">
@@ -6606,13 +6654,13 @@
       </p:sp>
       <p:sp>
         <p:nvSpPr>
-          <p:cNvPr id="59" name="Shape 51"/>
+          <p:cNvPr id="64" name="Shape 55"/>
           <p:cNvSpPr/>
           <p:nvPr/>
         </p:nvSpPr>
         <p:spPr>
           <a:xfrm>
-            <a:off x="7890053" y="3520440"/>
+            <a:off x="7890053" y="3858768"/>
             <a:ext cx="621792" cy="173736"/>
           </a:xfrm>
           <a:prstGeom prst="roundRect">
@@ -6633,13 +6681,13 @@
       </p:sp>
       <p:sp>
         <p:nvSpPr>
-          <p:cNvPr id="60" name="Text 52"/>
-          <p:cNvSpPr txBox="1"/>
-          <p:nvPr/>
-        </p:nvSpPr>
-        <p:spPr>
-          <a:xfrm>
-            <a:off x="7890053" y="3520440"/>
+          <p:cNvPr id="65" name="Text 56"/>
+          <p:cNvSpPr txBox="1"/>
+          <p:nvPr/>
+        </p:nvSpPr>
+        <p:spPr>
+          <a:xfrm>
+            <a:off x="7890053" y="3858768"/>
             <a:ext cx="621792" cy="173736"/>
           </a:xfrm>
           <a:prstGeom prst="rect">
@@ -6672,13 +6720,13 @@
       </p:sp>
       <p:sp>
         <p:nvSpPr>
-          <p:cNvPr id="61" name="Text 53"/>
-          <p:cNvSpPr txBox="1"/>
-          <p:nvPr/>
-        </p:nvSpPr>
-        <p:spPr>
-          <a:xfrm>
-            <a:off x="5682386" y="3730752"/>
+          <p:cNvPr id="66" name="Text 57"/>
+          <p:cNvSpPr txBox="1"/>
+          <p:nvPr/>
+        </p:nvSpPr>
+        <p:spPr>
+          <a:xfrm>
+            <a:off x="5682386" y="4069080"/>
             <a:ext cx="2792882" cy="512064"/>
           </a:xfrm>
           <a:prstGeom prst="rect">
@@ -6714,14 +6762,14 @@
       </p:sp>
       <p:sp>
         <p:nvSpPr>
-          <p:cNvPr id="62" name="Text 54"/>
-          <p:cNvSpPr txBox="1"/>
-          <p:nvPr/>
-        </p:nvSpPr>
-        <p:spPr>
-          <a:xfrm>
-            <a:off x="5682386" y="4279392"/>
-            <a:ext cx="2792882" cy="530352"/>
+          <p:cNvPr id="67" name="Text 58"/>
+          <p:cNvSpPr txBox="1"/>
+          <p:nvPr/>
+        </p:nvSpPr>
+        <p:spPr>
+          <a:xfrm>
+            <a:off x="5682386" y="4617720"/>
+            <a:ext cx="2792882" cy="347472"/>
           </a:xfrm>
           <a:prstGeom prst="rect">
             <a:avLst/>
@@ -6756,13 +6804,13 @@
       </p:sp>
       <p:sp>
         <p:nvSpPr>
-          <p:cNvPr id="63" name="Shape 55"/>
+          <p:cNvPr id="68" name="Shape 59"/>
           <p:cNvSpPr/>
           <p:nvPr/>
         </p:nvSpPr>
         <p:spPr>
           <a:xfrm>
-            <a:off x="5682386" y="4882896"/>
+            <a:off x="5682386" y="5038344"/>
             <a:ext cx="2792882" cy="0"/>
           </a:xfrm>
           <a:prstGeom prst="line">
@@ -6779,13 +6827,13 @@
       </p:sp>
       <p:sp>
         <p:nvSpPr>
-          <p:cNvPr id="64" name="Text 56"/>
-          <p:cNvSpPr txBox="1"/>
-          <p:nvPr/>
-        </p:nvSpPr>
-        <p:spPr>
-          <a:xfrm>
-            <a:off x="5682386" y="4928616"/>
+          <p:cNvPr id="69" name="Text 60"/>
+          <p:cNvSpPr txBox="1"/>
+          <p:nvPr/>
+        </p:nvSpPr>
+        <p:spPr>
+          <a:xfrm>
+            <a:off x="5682386" y="5084064"/>
             <a:ext cx="1829349" cy="182880"/>
           </a:xfrm>
           <a:prstGeom prst="rect">
@@ -6818,13 +6866,13 @@
       </p:sp>
       <p:sp>
         <p:nvSpPr>
-          <p:cNvPr id="65" name="Text 57"/>
-          <p:cNvSpPr txBox="1"/>
-          <p:nvPr/>
-        </p:nvSpPr>
-        <p:spPr>
-          <a:xfrm>
-            <a:off x="7826045" y="4928616"/>
+          <p:cNvPr id="70" name="Text 61"/>
+          <p:cNvSpPr txBox="1"/>
+          <p:nvPr/>
+        </p:nvSpPr>
+        <p:spPr>
+          <a:xfrm>
+            <a:off x="7826045" y="5084064"/>
             <a:ext cx="658368" cy="182880"/>
           </a:xfrm>
           <a:prstGeom prst="rect">
@@ -6857,18 +6905,18 @@
       </p:sp>
       <p:sp>
         <p:nvSpPr>
-          <p:cNvPr id="66" name="Shape 58"/>
+          <p:cNvPr id="71" name="Shape 62"/>
           <p:cNvSpPr/>
           <p:nvPr/>
         </p:nvSpPr>
         <p:spPr>
           <a:xfrm>
-            <a:off x="8822741" y="3438144"/>
-            <a:ext cx="3048914" cy="1737360"/>
+            <a:off x="8822741" y="3776472"/>
+            <a:ext cx="3048914" cy="1554480"/>
           </a:xfrm>
           <a:prstGeom prst="roundRect">
             <a:avLst>
-              <a:gd name="adj" fmla="val 2632"/>
+              <a:gd name="adj" fmla="val 2941"/>
             </a:avLst>
           </a:prstGeom>
           <a:solidFill>
@@ -6891,13 +6939,13 @@
       </p:sp>
       <p:sp>
         <p:nvSpPr>
-          <p:cNvPr id="67" name="Text 59"/>
-          <p:cNvSpPr txBox="1"/>
-          <p:nvPr/>
-        </p:nvSpPr>
-        <p:spPr>
-          <a:xfrm>
-            <a:off x="8950757" y="3529584"/>
+          <p:cNvPr id="72" name="Text 63"/>
+          <p:cNvSpPr txBox="1"/>
+          <p:nvPr/>
+        </p:nvSpPr>
+        <p:spPr>
+          <a:xfrm>
+            <a:off x="8950757" y="3867912"/>
             <a:ext cx="1676903" cy="182880"/>
           </a:xfrm>
           <a:prstGeom prst="rect">
@@ -6930,13 +6978,13 @@
       </p:sp>
       <p:sp>
         <p:nvSpPr>
-          <p:cNvPr id="68" name="Text 60"/>
-          <p:cNvSpPr txBox="1"/>
-          <p:nvPr/>
-        </p:nvSpPr>
-        <p:spPr>
-          <a:xfrm>
-            <a:off x="8950757" y="3730752"/>
+          <p:cNvPr id="73" name="Text 64"/>
+          <p:cNvSpPr txBox="1"/>
+          <p:nvPr/>
+        </p:nvSpPr>
+        <p:spPr>
+          <a:xfrm>
+            <a:off x="8950757" y="4069080"/>
             <a:ext cx="2792882" cy="512064"/>
           </a:xfrm>
           <a:prstGeom prst="rect">
@@ -6972,14 +7020,14 @@
       </p:sp>
       <p:sp>
         <p:nvSpPr>
-          <p:cNvPr id="69" name="Text 61"/>
-          <p:cNvSpPr txBox="1"/>
-          <p:nvPr/>
-        </p:nvSpPr>
-        <p:spPr>
-          <a:xfrm>
-            <a:off x="8950757" y="4279392"/>
-            <a:ext cx="2792882" cy="530352"/>
+          <p:cNvPr id="74" name="Text 65"/>
+          <p:cNvSpPr txBox="1"/>
+          <p:nvPr/>
+        </p:nvSpPr>
+        <p:spPr>
+          <a:xfrm>
+            <a:off x="8950757" y="4617720"/>
+            <a:ext cx="2792882" cy="347472"/>
           </a:xfrm>
           <a:prstGeom prst="rect">
             <a:avLst/>
@@ -7014,13 +7062,13 @@
       </p:sp>
       <p:sp>
         <p:nvSpPr>
-          <p:cNvPr id="70" name="Shape 62"/>
+          <p:cNvPr id="75" name="Shape 66"/>
           <p:cNvSpPr/>
           <p:nvPr/>
         </p:nvSpPr>
         <p:spPr>
           <a:xfrm>
-            <a:off x="8950757" y="4882896"/>
+            <a:off x="8950757" y="5038344"/>
             <a:ext cx="2792882" cy="0"/>
           </a:xfrm>
           <a:prstGeom prst="line">
@@ -7037,13 +7085,13 @@
       </p:sp>
       <p:sp>
         <p:nvSpPr>
-          <p:cNvPr id="71" name="Text 63"/>
-          <p:cNvSpPr txBox="1"/>
-          <p:nvPr/>
-        </p:nvSpPr>
-        <p:spPr>
-          <a:xfrm>
-            <a:off x="8950757" y="4928616"/>
+          <p:cNvPr id="76" name="Text 67"/>
+          <p:cNvSpPr txBox="1"/>
+          <p:nvPr/>
+        </p:nvSpPr>
+        <p:spPr>
+          <a:xfrm>
+            <a:off x="8950757" y="5084064"/>
             <a:ext cx="1829349" cy="182880"/>
           </a:xfrm>
           <a:prstGeom prst="rect">
@@ -7076,13 +7124,13 @@
       </p:sp>
       <p:sp>
         <p:nvSpPr>
-          <p:cNvPr id="72" name="Text 64"/>
-          <p:cNvSpPr txBox="1"/>
-          <p:nvPr/>
-        </p:nvSpPr>
-        <p:spPr>
-          <a:xfrm>
-            <a:off x="11094415" y="4928616"/>
+          <p:cNvPr id="77" name="Text 68"/>
+          <p:cNvSpPr txBox="1"/>
+          <p:nvPr/>
+        </p:nvSpPr>
+        <p:spPr>
+          <a:xfrm>
+            <a:off x="11094415" y="5084064"/>
             <a:ext cx="658368" cy="182880"/>
           </a:xfrm>
           <a:prstGeom prst="rect">
@@ -7115,13 +7163,33 @@
       </p:sp>
       <p:sp>
         <p:nvSpPr>
-          <p:cNvPr id="73" name="Text 65"/>
-          <p:cNvSpPr txBox="1"/>
-          <p:nvPr/>
-        </p:nvSpPr>
-        <p:spPr>
-          <a:xfrm>
-            <a:off x="2286000" y="5376672"/>
+          <p:cNvPr id="78" name="Shape 69"/>
+          <p:cNvSpPr/>
+          <p:nvPr/>
+        </p:nvSpPr>
+        <p:spPr>
+          <a:xfrm>
+            <a:off x="2286000" y="5550408"/>
+            <a:ext cx="109728" cy="109728"/>
+          </a:xfrm>
+          <a:prstGeom prst="rect">
+            <a:avLst/>
+          </a:prstGeom>
+          <a:solidFill>
+            <a:srgbClr val="C1432A"/>
+          </a:solidFill>
+          <a:ln/>
+        </p:spPr>
+      </p:sp>
+      <p:sp>
+        <p:nvSpPr>
+          <p:cNvPr id="79" name="Text 70"/>
+          <p:cNvSpPr txBox="1"/>
+          <p:nvPr/>
+        </p:nvSpPr>
+        <p:spPr>
+          <a:xfrm>
+            <a:off x="2468880" y="5532120"/>
             <a:ext cx="4572000" cy="219456"/>
           </a:xfrm>
           <a:prstGeom prst="rect">
@@ -7140,7 +7208,7 @@
             <a:r>
               <a:rPr lang="en-US" sz="900" spc="100" kern="0" dirty="0">
                 <a:solidFill>
-                  <a:srgbClr val="4B4B4B"/>
+                  <a:srgbClr val="022049"/>
                 </a:solidFill>
                 <a:latin typeface="Courier New" pitchFamily="34" charset="0"/>
                 <a:ea typeface="Courier New" pitchFamily="34" charset="-122"/>
@@ -7154,13 +7222,13 @@
       </p:sp>
       <p:sp>
         <p:nvSpPr>
-          <p:cNvPr id="74" name="Shape 66"/>
+          <p:cNvPr id="80" name="Shape 71"/>
           <p:cNvSpPr/>
           <p:nvPr/>
         </p:nvSpPr>
         <p:spPr>
           <a:xfrm>
-            <a:off x="2286000" y="5632704"/>
+            <a:off x="2286000" y="5788152"/>
             <a:ext cx="9585655" cy="658368"/>
           </a:xfrm>
           <a:prstGeom prst="roundRect">
@@ -7169,7 +7237,7 @@
             </a:avLst>
           </a:prstGeom>
           <a:solidFill>
-            <a:srgbClr val="FBFCFC"/>
+            <a:srgbClr val="E4EAF3"/>
           </a:solidFill>
           <a:ln w="12700">
             <a:solidFill>
@@ -7181,14 +7249,14 @@
       </p:sp>
       <p:sp>
         <p:nvSpPr>
-          <p:cNvPr id="75" name="Shape 67"/>
+          <p:cNvPr id="81" name="Shape 72"/>
           <p:cNvSpPr/>
           <p:nvPr/>
         </p:nvSpPr>
         <p:spPr>
           <a:xfrm>
-            <a:off x="2286000" y="5632704"/>
-            <a:ext cx="45720" cy="658368"/>
+            <a:off x="2286000" y="5788152"/>
+            <a:ext cx="54864" cy="658368"/>
           </a:xfrm>
           <a:prstGeom prst="rect">
             <a:avLst/>
@@ -7201,13 +7269,13 @@
       </p:sp>
       <p:sp>
         <p:nvSpPr>
-          <p:cNvPr id="76" name="Text 68"/>
-          <p:cNvSpPr txBox="1"/>
-          <p:nvPr/>
-        </p:nvSpPr>
-        <p:spPr>
-          <a:xfrm>
-            <a:off x="2514600" y="5705856"/>
+          <p:cNvPr id="82" name="Text 73"/>
+          <p:cNvSpPr txBox="1"/>
+          <p:nvPr/>
+        </p:nvSpPr>
+        <p:spPr>
+          <a:xfrm>
+            <a:off x="2514600" y="5861304"/>
             <a:ext cx="5486400" cy="237744"/>
           </a:xfrm>
           <a:prstGeom prst="rect">
@@ -7240,13 +7308,13 @@
       </p:sp>
       <p:sp>
         <p:nvSpPr>
-          <p:cNvPr id="77" name="Text 69"/>
-          <p:cNvSpPr txBox="1"/>
-          <p:nvPr/>
-        </p:nvSpPr>
-        <p:spPr>
-          <a:xfrm>
-            <a:off x="2514600" y="5961888"/>
+          <p:cNvPr id="83" name="Text 74"/>
+          <p:cNvSpPr txBox="1"/>
+          <p:nvPr/>
+        </p:nvSpPr>
+        <p:spPr>
+          <a:xfrm>
+            <a:off x="2514600" y="6117336"/>
             <a:ext cx="7315200" cy="310896"/>
           </a:xfrm>
           <a:prstGeom prst="rect">
@@ -7279,13 +7347,13 @@
       </p:sp>
       <p:sp>
         <p:nvSpPr>
-          <p:cNvPr id="78" name="Text 70"/>
-          <p:cNvSpPr txBox="1"/>
-          <p:nvPr/>
-        </p:nvSpPr>
-        <p:spPr>
-          <a:xfrm>
-            <a:off x="10728655" y="5705856"/>
+          <p:cNvPr id="84" name="Text 75"/>
+          <p:cNvSpPr txBox="1"/>
+          <p:nvPr/>
+        </p:nvSpPr>
+        <p:spPr>
+          <a:xfrm>
+            <a:off x="10728655" y="5861304"/>
             <a:ext cx="1005840" cy="219456"/>
           </a:xfrm>
           <a:prstGeom prst="rect">

--- a/office-hub-concept.pptx
+++ b/office-hub-concept.pptx
@@ -5586,26 +5586,28 @@
           </a:ln>
         </p:spPr>
       </p:sp>
-      <p:sp>
-        <p:nvSpPr>
-          <p:cNvPr id="29" name="Shape 27"/>
-          <p:cNvSpPr/>
-          <p:nvPr/>
-        </p:nvSpPr>
+      <p:pic>
+        <p:nvPicPr>
+          <p:cNvPr id="29" name="Image 0" descr="/tmp/claude-0/-home-user-drawing-set/4abccc73-5df9-5ad5-9792-19a3f012db48/scratchpad/tile_band.png">    </p:cNvPr>
+          <p:cNvPicPr>
+            <a:picLocks noChangeAspect="1"/>
+          </p:cNvPicPr>
+          <p:nvPr/>
+        </p:nvPicPr>
+        <p:blipFill>
+          <a:blip r:embed="rId2"/>
+          <a:stretch>
+            <a:fillRect/>
+          </a:stretch>
+        </p:blipFill>
         <p:spPr>
           <a:xfrm>
             <a:off x="2139696" y="1920240"/>
             <a:ext cx="9878263" cy="1344168"/>
           </a:xfrm>
-          <a:prstGeom prst="roundRect">
-            <a:avLst>
-              <a:gd name="adj" fmla="val 5442"/>
-            </a:avLst>
-          </a:prstGeom>
-          <a:solidFill>
-            <a:srgbClr val="022049"/>
-          </a:solidFill>
-          <a:ln/>
+          <a:prstGeom prst="rect">
+            <a:avLst/>
+          </a:prstGeom>
           <a:effectLst>
             <a:outerShdw sx="100000" sy="100000" kx="0" ky="0" algn="bl" rotWithShape="0" blurRad="101600" dist="38100" dir="5400000">
               <a:srgbClr val="000000">
@@ -5614,10 +5616,10 @@
             </a:outerShdw>
           </a:effectLst>
         </p:spPr>
-      </p:sp>
-      <p:sp>
-        <p:nvSpPr>
-          <p:cNvPr id="30" name="Shape 28"/>
+      </p:pic>
+      <p:sp>
+        <p:nvSpPr>
+          <p:cNvPr id="30" name="Shape 27"/>
           <p:cNvSpPr/>
           <p:nvPr/>
         </p:nvSpPr>
@@ -5637,90 +5639,7 @@
       </p:sp>
       <p:pic>
         <p:nvPicPr>
-          <p:cNvPr id="31" name="Image 0" descr="/tmp/claude-0/-home-user-drawing-set/4abccc73-5df9-5ad5-9792-19a3f012db48/scratchpad/icons/standards.png">    </p:cNvPr>
-          <p:cNvPicPr>
-            <a:picLocks noChangeAspect="1"/>
-          </p:cNvPicPr>
-          <p:nvPr/>
-        </p:nvPicPr>
-        <p:blipFill>
-          <a:blip r:embed="rId2"/>
-          <a:stretch>
-            <a:fillRect/>
-          </a:stretch>
-        </p:blipFill>
-        <p:spPr>
-          <a:xfrm>
-            <a:off x="2769522" y="2267712"/>
-            <a:ext cx="292608" cy="292608"/>
-          </a:xfrm>
-          <a:prstGeom prst="rect">
-            <a:avLst/>
-          </a:prstGeom>
-        </p:spPr>
-      </p:pic>
-      <p:sp>
-        <p:nvSpPr>
-          <p:cNvPr id="32" name="Text 29"/>
-          <p:cNvSpPr txBox="1"/>
-          <p:nvPr/>
-        </p:nvSpPr>
-        <p:spPr>
-          <a:xfrm>
-            <a:off x="2286000" y="2724912"/>
-            <a:ext cx="1259651" cy="329184"/>
-          </a:xfrm>
-          <a:prstGeom prst="rect">
-            <a:avLst/>
-          </a:prstGeom>
-          <a:noFill/>
-          <a:ln/>
-        </p:spPr>
-        <p:txBody>
-          <a:bodyPr wrap="square" lIns="0" tIns="0" rIns="0" bIns="0" rtlCol="0" anchor="t"/>
-          <a:lstStyle/>
-          <a:p>
-            <a:pPr algn="ctr" indent="0" marL="0">
-              <a:buNone/>
-            </a:pPr>
-            <a:r>
-              <a:rPr lang="en-US" sz="900" b="1" dirty="0">
-                <a:solidFill>
-                  <a:srgbClr val="FFFFFF"/>
-                </a:solidFill>
-                <a:latin typeface="Arial" pitchFamily="34" charset="0"/>
-                <a:ea typeface="Arial" pitchFamily="34" charset="-122"/>
-                <a:cs typeface="Arial" pitchFamily="34" charset="-120"/>
-              </a:rPr>
-              <a:t>STANDARDS</a:t>
-            </a:r>
-            <a:endParaRPr lang="en-US" sz="900" dirty="0"/>
-          </a:p>
-        </p:txBody>
-      </p:sp>
-      <p:sp>
-        <p:nvSpPr>
-          <p:cNvPr id="33" name="Shape 30"/>
-          <p:cNvSpPr/>
-          <p:nvPr/>
-        </p:nvSpPr>
-        <p:spPr>
-          <a:xfrm>
-            <a:off x="4065749" y="2176272"/>
-            <a:ext cx="475488" cy="475488"/>
-          </a:xfrm>
-          <a:prstGeom prst="ellipse">
-            <a:avLst/>
-          </a:prstGeom>
-          <a:solidFill>
-            <a:srgbClr val="FFFFFF"/>
-          </a:solidFill>
-          <a:ln/>
-        </p:spPr>
-      </p:sp>
-      <p:pic>
-        <p:nvPicPr>
-          <p:cNvPr id="34" name="Image 1" descr="/tmp/claude-0/-home-user-drawing-set/4abccc73-5df9-5ad5-9792-19a3f012db48/scratchpad/icons/templates.png">    </p:cNvPr>
+          <p:cNvPr id="31" name="Image 1" descr="/tmp/claude-0/-home-user-drawing-set/4abccc73-5df9-5ad5-9792-19a3f012db48/scratchpad/icons/standards.png">    </p:cNvPr>
           <p:cNvPicPr>
             <a:picLocks noChangeAspect="1"/>
           </p:cNvPicPr>
@@ -5734,7 +5653,7 @@
         </p:blipFill>
         <p:spPr>
           <a:xfrm>
-            <a:off x="4157189" y="2267712"/>
+            <a:off x="2769522" y="2267712"/>
             <a:ext cx="292608" cy="292608"/>
           </a:xfrm>
           <a:prstGeom prst="rect">
@@ -5744,13 +5663,13 @@
       </p:pic>
       <p:sp>
         <p:nvSpPr>
-          <p:cNvPr id="35" name="Text 31"/>
-          <p:cNvSpPr txBox="1"/>
-          <p:nvPr/>
-        </p:nvSpPr>
-        <p:spPr>
-          <a:xfrm>
-            <a:off x="3673667" y="2724912"/>
+          <p:cNvPr id="32" name="Text 28"/>
+          <p:cNvSpPr txBox="1"/>
+          <p:nvPr/>
+        </p:nvSpPr>
+        <p:spPr>
+          <a:xfrm>
+            <a:off x="2286000" y="2724912"/>
             <a:ext cx="1259651" cy="329184"/>
           </a:xfrm>
           <a:prstGeom prst="rect">
@@ -5775,7 +5694,7 @@
                 <a:ea typeface="Arial" pitchFamily="34" charset="-122"/>
                 <a:cs typeface="Arial" pitchFamily="34" charset="-120"/>
               </a:rPr>
-              <a:t>TEMPLATES</a:t>
+              <a:t>STANDARDS</a:t>
             </a:r>
             <a:endParaRPr lang="en-US" sz="900" dirty="0"/>
           </a:p>
@@ -5783,13 +5702,13 @@
       </p:sp>
       <p:sp>
         <p:nvSpPr>
-          <p:cNvPr id="36" name="Shape 32"/>
+          <p:cNvPr id="33" name="Shape 29"/>
           <p:cNvSpPr/>
           <p:nvPr/>
         </p:nvSpPr>
         <p:spPr>
           <a:xfrm>
-            <a:off x="5453416" y="2176272"/>
+            <a:off x="4065749" y="2176272"/>
             <a:ext cx="475488" cy="475488"/>
           </a:xfrm>
           <a:prstGeom prst="ellipse">
@@ -5803,7 +5722,7 @@
       </p:sp>
       <p:pic>
         <p:nvPicPr>
-          <p:cNvPr id="37" name="Image 2" descr="/tmp/claude-0/-home-user-drawing-set/4abccc73-5df9-5ad5-9792-19a3f012db48/scratchpad/icons/forms.png">    </p:cNvPr>
+          <p:cNvPr id="34" name="Image 2" descr="/tmp/claude-0/-home-user-drawing-set/4abccc73-5df9-5ad5-9792-19a3f012db48/scratchpad/icons/templates.png">    </p:cNvPr>
           <p:cNvPicPr>
             <a:picLocks noChangeAspect="1"/>
           </p:cNvPicPr>
@@ -5817,7 +5736,7 @@
         </p:blipFill>
         <p:spPr>
           <a:xfrm>
-            <a:off x="5544856" y="2267712"/>
+            <a:off x="4157189" y="2267712"/>
             <a:ext cx="292608" cy="292608"/>
           </a:xfrm>
           <a:prstGeom prst="rect">
@@ -5827,13 +5746,13 @@
       </p:pic>
       <p:sp>
         <p:nvSpPr>
-          <p:cNvPr id="38" name="Text 33"/>
-          <p:cNvSpPr txBox="1"/>
-          <p:nvPr/>
-        </p:nvSpPr>
-        <p:spPr>
-          <a:xfrm>
-            <a:off x="5061335" y="2724912"/>
+          <p:cNvPr id="35" name="Text 30"/>
+          <p:cNvSpPr txBox="1"/>
+          <p:nvPr/>
+        </p:nvSpPr>
+        <p:spPr>
+          <a:xfrm>
+            <a:off x="3673667" y="2724912"/>
             <a:ext cx="1259651" cy="329184"/>
           </a:xfrm>
           <a:prstGeom prst="rect">
@@ -5858,7 +5777,7 @@
                 <a:ea typeface="Arial" pitchFamily="34" charset="-122"/>
                 <a:cs typeface="Arial" pitchFamily="34" charset="-120"/>
               </a:rPr>
-              <a:t>FORMS</a:t>
+              <a:t>TEMPLATES</a:t>
             </a:r>
             <a:endParaRPr lang="en-US" sz="900" dirty="0"/>
           </a:p>
@@ -5866,13 +5785,13 @@
       </p:sp>
       <p:sp>
         <p:nvSpPr>
-          <p:cNvPr id="39" name="Shape 34"/>
+          <p:cNvPr id="36" name="Shape 31"/>
           <p:cNvSpPr/>
           <p:nvPr/>
         </p:nvSpPr>
         <p:spPr>
           <a:xfrm>
-            <a:off x="6841084" y="2176272"/>
+            <a:off x="5453416" y="2176272"/>
             <a:ext cx="475488" cy="475488"/>
           </a:xfrm>
           <a:prstGeom prst="ellipse">
@@ -5886,7 +5805,7 @@
       </p:sp>
       <p:pic>
         <p:nvPicPr>
-          <p:cNvPr id="40" name="Image 3" descr="/tmp/claude-0/-home-user-drawing-set/4abccc73-5df9-5ad5-9792-19a3f012db48/scratchpad/icons/policies.png">    </p:cNvPr>
+          <p:cNvPr id="37" name="Image 3" descr="/tmp/claude-0/-home-user-drawing-set/4abccc73-5df9-5ad5-9792-19a3f012db48/scratchpad/icons/forms.png">    </p:cNvPr>
           <p:cNvPicPr>
             <a:picLocks noChangeAspect="1"/>
           </p:cNvPicPr>
@@ -5900,7 +5819,7 @@
         </p:blipFill>
         <p:spPr>
           <a:xfrm>
-            <a:off x="6932524" y="2267712"/>
+            <a:off x="5544856" y="2267712"/>
             <a:ext cx="292608" cy="292608"/>
           </a:xfrm>
           <a:prstGeom prst="rect">
@@ -5910,13 +5829,13 @@
       </p:pic>
       <p:sp>
         <p:nvSpPr>
-          <p:cNvPr id="41" name="Text 35"/>
-          <p:cNvSpPr txBox="1"/>
-          <p:nvPr/>
-        </p:nvSpPr>
-        <p:spPr>
-          <a:xfrm>
-            <a:off x="6449002" y="2724912"/>
+          <p:cNvPr id="38" name="Text 32"/>
+          <p:cNvSpPr txBox="1"/>
+          <p:nvPr/>
+        </p:nvSpPr>
+        <p:spPr>
+          <a:xfrm>
+            <a:off x="5061335" y="2724912"/>
             <a:ext cx="1259651" cy="329184"/>
           </a:xfrm>
           <a:prstGeom prst="rect">
@@ -5941,7 +5860,7 @@
                 <a:ea typeface="Arial" pitchFamily="34" charset="-122"/>
                 <a:cs typeface="Arial" pitchFamily="34" charset="-120"/>
               </a:rPr>
-              <a:t>POLICIES</a:t>
+              <a:t>FORMS</a:t>
             </a:r>
             <a:endParaRPr lang="en-US" sz="900" dirty="0"/>
           </a:p>
@@ -5949,13 +5868,13 @@
       </p:sp>
       <p:sp>
         <p:nvSpPr>
-          <p:cNvPr id="42" name="Shape 36"/>
+          <p:cNvPr id="39" name="Shape 33"/>
           <p:cNvSpPr/>
           <p:nvPr/>
         </p:nvSpPr>
         <p:spPr>
           <a:xfrm>
-            <a:off x="8228751" y="2176272"/>
+            <a:off x="6841084" y="2176272"/>
             <a:ext cx="475488" cy="475488"/>
           </a:xfrm>
           <a:prstGeom prst="ellipse">
@@ -5969,7 +5888,7 @@
       </p:sp>
       <p:pic>
         <p:nvPicPr>
-          <p:cNvPr id="43" name="Image 4" descr="/tmp/claude-0/-home-user-drawing-set/4abccc73-5df9-5ad5-9792-19a3f012db48/scratchpad/icons/sops.png">    </p:cNvPr>
+          <p:cNvPr id="40" name="Image 4" descr="/tmp/claude-0/-home-user-drawing-set/4abccc73-5df9-5ad5-9792-19a3f012db48/scratchpad/icons/policies.png">    </p:cNvPr>
           <p:cNvPicPr>
             <a:picLocks noChangeAspect="1"/>
           </p:cNvPicPr>
@@ -5983,7 +5902,7 @@
         </p:blipFill>
         <p:spPr>
           <a:xfrm>
-            <a:off x="8320191" y="2267712"/>
+            <a:off x="6932524" y="2267712"/>
             <a:ext cx="292608" cy="292608"/>
           </a:xfrm>
           <a:prstGeom prst="rect">
@@ -5993,13 +5912,13 @@
       </p:pic>
       <p:sp>
         <p:nvSpPr>
-          <p:cNvPr id="44" name="Text 37"/>
-          <p:cNvSpPr txBox="1"/>
-          <p:nvPr/>
-        </p:nvSpPr>
-        <p:spPr>
-          <a:xfrm>
-            <a:off x="7836669" y="2724912"/>
+          <p:cNvPr id="41" name="Text 34"/>
+          <p:cNvSpPr txBox="1"/>
+          <p:nvPr/>
+        </p:nvSpPr>
+        <p:spPr>
+          <a:xfrm>
+            <a:off x="6449002" y="2724912"/>
             <a:ext cx="1259651" cy="329184"/>
           </a:xfrm>
           <a:prstGeom prst="rect">
@@ -6024,7 +5943,7 @@
                 <a:ea typeface="Arial" pitchFamily="34" charset="-122"/>
                 <a:cs typeface="Arial" pitchFamily="34" charset="-120"/>
               </a:rPr>
-              <a:t>SOPS</a:t>
+              <a:t>POLICIES</a:t>
             </a:r>
             <a:endParaRPr lang="en-US" sz="900" dirty="0"/>
           </a:p>
@@ -6032,13 +5951,13 @@
       </p:sp>
       <p:sp>
         <p:nvSpPr>
-          <p:cNvPr id="45" name="Shape 38"/>
+          <p:cNvPr id="42" name="Shape 35"/>
           <p:cNvSpPr/>
           <p:nvPr/>
         </p:nvSpPr>
         <p:spPr>
           <a:xfrm>
-            <a:off x="9616418" y="2176272"/>
+            <a:off x="8228751" y="2176272"/>
             <a:ext cx="475488" cy="475488"/>
           </a:xfrm>
           <a:prstGeom prst="ellipse">
@@ -6052,7 +5971,7 @@
       </p:sp>
       <p:pic>
         <p:nvPicPr>
-          <p:cNvPr id="46" name="Image 5" descr="/tmp/claude-0/-home-user-drawing-set/4abccc73-5df9-5ad5-9792-19a3f012db48/scratchpad/icons/revit.png">    </p:cNvPr>
+          <p:cNvPr id="43" name="Image 5" descr="/tmp/claude-0/-home-user-drawing-set/4abccc73-5df9-5ad5-9792-19a3f012db48/scratchpad/icons/sops.png">    </p:cNvPr>
           <p:cNvPicPr>
             <a:picLocks noChangeAspect="1"/>
           </p:cNvPicPr>
@@ -6066,7 +5985,7 @@
         </p:blipFill>
         <p:spPr>
           <a:xfrm>
-            <a:off x="9707858" y="2267712"/>
+            <a:off x="8320191" y="2267712"/>
             <a:ext cx="292608" cy="292608"/>
           </a:xfrm>
           <a:prstGeom prst="rect">
@@ -6076,13 +5995,13 @@
       </p:pic>
       <p:sp>
         <p:nvSpPr>
-          <p:cNvPr id="47" name="Text 39"/>
-          <p:cNvSpPr txBox="1"/>
-          <p:nvPr/>
-        </p:nvSpPr>
-        <p:spPr>
-          <a:xfrm>
-            <a:off x="9224337" y="2724912"/>
+          <p:cNvPr id="44" name="Text 36"/>
+          <p:cNvSpPr txBox="1"/>
+          <p:nvPr/>
+        </p:nvSpPr>
+        <p:spPr>
+          <a:xfrm>
+            <a:off x="7836669" y="2724912"/>
             <a:ext cx="1259651" cy="329184"/>
           </a:xfrm>
           <a:prstGeom prst="rect">
@@ -6107,7 +6026,7 @@
                 <a:ea typeface="Arial" pitchFamily="34" charset="-122"/>
                 <a:cs typeface="Arial" pitchFamily="34" charset="-120"/>
               </a:rPr>
-              <a:t>REVIT STD.</a:t>
+              <a:t>SOPS</a:t>
             </a:r>
             <a:endParaRPr lang="en-US" sz="900" dirty="0"/>
           </a:p>
@@ -6115,13 +6034,13 @@
       </p:sp>
       <p:sp>
         <p:nvSpPr>
-          <p:cNvPr id="48" name="Shape 40"/>
+          <p:cNvPr id="45" name="Shape 37"/>
           <p:cNvSpPr/>
           <p:nvPr/>
         </p:nvSpPr>
         <p:spPr>
           <a:xfrm>
-            <a:off x="11004086" y="2176272"/>
+            <a:off x="9616418" y="2176272"/>
             <a:ext cx="475488" cy="475488"/>
           </a:xfrm>
           <a:prstGeom prst="ellipse">
@@ -6135,7 +6054,7 @@
       </p:sp>
       <p:pic>
         <p:nvPicPr>
-          <p:cNvPr id="49" name="Image 6" descr="/tmp/claude-0/-home-user-drawing-set/4abccc73-5df9-5ad5-9792-19a3f012db48/scratchpad/icons/learning.png">    </p:cNvPr>
+          <p:cNvPr id="46" name="Image 6" descr="/tmp/claude-0/-home-user-drawing-set/4abccc73-5df9-5ad5-9792-19a3f012db48/scratchpad/icons/revit.png">    </p:cNvPr>
           <p:cNvPicPr>
             <a:picLocks noChangeAspect="1"/>
           </p:cNvPicPr>
@@ -6149,7 +6068,7 @@
         </p:blipFill>
         <p:spPr>
           <a:xfrm>
-            <a:off x="11095526" y="2267712"/>
+            <a:off x="9707858" y="2267712"/>
             <a:ext cx="292608" cy="292608"/>
           </a:xfrm>
           <a:prstGeom prst="rect">
@@ -6159,13 +6078,13 @@
       </p:pic>
       <p:sp>
         <p:nvSpPr>
-          <p:cNvPr id="50" name="Text 41"/>
-          <p:cNvSpPr txBox="1"/>
-          <p:nvPr/>
-        </p:nvSpPr>
-        <p:spPr>
-          <a:xfrm>
-            <a:off x="10612004" y="2724912"/>
+          <p:cNvPr id="47" name="Text 38"/>
+          <p:cNvSpPr txBox="1"/>
+          <p:nvPr/>
+        </p:nvSpPr>
+        <p:spPr>
+          <a:xfrm>
+            <a:off x="9224337" y="2724912"/>
             <a:ext cx="1259651" cy="329184"/>
           </a:xfrm>
           <a:prstGeom prst="rect">
@@ -6190,6 +6109,89 @@
                 <a:ea typeface="Arial" pitchFamily="34" charset="-122"/>
                 <a:cs typeface="Arial" pitchFamily="34" charset="-120"/>
               </a:rPr>
+              <a:t>REVIT STD.</a:t>
+            </a:r>
+            <a:endParaRPr lang="en-US" sz="900" dirty="0"/>
+          </a:p>
+        </p:txBody>
+      </p:sp>
+      <p:sp>
+        <p:nvSpPr>
+          <p:cNvPr id="48" name="Shape 39"/>
+          <p:cNvSpPr/>
+          <p:nvPr/>
+        </p:nvSpPr>
+        <p:spPr>
+          <a:xfrm>
+            <a:off x="11004086" y="2176272"/>
+            <a:ext cx="475488" cy="475488"/>
+          </a:xfrm>
+          <a:prstGeom prst="ellipse">
+            <a:avLst/>
+          </a:prstGeom>
+          <a:solidFill>
+            <a:srgbClr val="FFFFFF"/>
+          </a:solidFill>
+          <a:ln/>
+        </p:spPr>
+      </p:sp>
+      <p:pic>
+        <p:nvPicPr>
+          <p:cNvPr id="49" name="Image 7" descr="/tmp/claude-0/-home-user-drawing-set/4abccc73-5df9-5ad5-9792-19a3f012db48/scratchpad/icons/learning.png">    </p:cNvPr>
+          <p:cNvPicPr>
+            <a:picLocks noChangeAspect="1"/>
+          </p:cNvPicPr>
+          <p:nvPr/>
+        </p:nvPicPr>
+        <p:blipFill>
+          <a:blip r:embed="rId9"/>
+          <a:stretch>
+            <a:fillRect/>
+          </a:stretch>
+        </p:blipFill>
+        <p:spPr>
+          <a:xfrm>
+            <a:off x="11095526" y="2267712"/>
+            <a:ext cx="292608" cy="292608"/>
+          </a:xfrm>
+          <a:prstGeom prst="rect">
+            <a:avLst/>
+          </a:prstGeom>
+        </p:spPr>
+      </p:pic>
+      <p:sp>
+        <p:nvSpPr>
+          <p:cNvPr id="50" name="Text 40"/>
+          <p:cNvSpPr txBox="1"/>
+          <p:nvPr/>
+        </p:nvSpPr>
+        <p:spPr>
+          <a:xfrm>
+            <a:off x="10612004" y="2724912"/>
+            <a:ext cx="1259651" cy="329184"/>
+          </a:xfrm>
+          <a:prstGeom prst="rect">
+            <a:avLst/>
+          </a:prstGeom>
+          <a:noFill/>
+          <a:ln/>
+        </p:spPr>
+        <p:txBody>
+          <a:bodyPr wrap="square" lIns="0" tIns="0" rIns="0" bIns="0" rtlCol="0" anchor="t"/>
+          <a:lstStyle/>
+          <a:p>
+            <a:pPr algn="ctr" indent="0" marL="0">
+              <a:buNone/>
+            </a:pPr>
+            <a:r>
+              <a:rPr lang="en-US" sz="900" b="1" dirty="0">
+                <a:solidFill>
+                  <a:srgbClr val="FFFFFF"/>
+                </a:solidFill>
+                <a:latin typeface="Arial" pitchFamily="34" charset="0"/>
+                <a:ea typeface="Arial" pitchFamily="34" charset="-122"/>
+                <a:cs typeface="Arial" pitchFamily="34" charset="-120"/>
+              </a:rPr>
               <a:t>LEARNING</a:t>
             </a:r>
             <a:endParaRPr lang="en-US" sz="900" dirty="0"/>
@@ -6198,7 +6200,7 @@
       </p:sp>
       <p:sp>
         <p:nvSpPr>
-          <p:cNvPr id="51" name="Shape 42"/>
+          <p:cNvPr id="51" name="Shape 41"/>
           <p:cNvSpPr/>
           <p:nvPr/>
         </p:nvSpPr>
@@ -6218,7 +6220,7 @@
       </p:sp>
       <p:sp>
         <p:nvSpPr>
-          <p:cNvPr id="52" name="Text 43"/>
+          <p:cNvPr id="52" name="Text 42"/>
           <p:cNvSpPr txBox="1"/>
           <p:nvPr/>
         </p:nvSpPr>
@@ -6257,7 +6259,7 @@
       </p:sp>
       <p:sp>
         <p:nvSpPr>
-          <p:cNvPr id="53" name="Shape 44"/>
+          <p:cNvPr id="53" name="Shape 43"/>
           <p:cNvSpPr/>
           <p:nvPr/>
         </p:nvSpPr>
@@ -6291,7 +6293,7 @@
       </p:sp>
       <p:sp>
         <p:nvSpPr>
-          <p:cNvPr id="54" name="Text 45"/>
+          <p:cNvPr id="54" name="Text 44"/>
           <p:cNvSpPr txBox="1"/>
           <p:nvPr/>
         </p:nvSpPr>
@@ -6330,7 +6332,7 @@
       </p:sp>
       <p:sp>
         <p:nvSpPr>
-          <p:cNvPr id="55" name="Shape 46"/>
+          <p:cNvPr id="55" name="Shape 45"/>
           <p:cNvSpPr/>
           <p:nvPr/>
         </p:nvSpPr>
@@ -6357,7 +6359,7 @@
       </p:sp>
       <p:sp>
         <p:nvSpPr>
-          <p:cNvPr id="56" name="Text 47"/>
+          <p:cNvPr id="56" name="Text 46"/>
           <p:cNvSpPr txBox="1"/>
           <p:nvPr/>
         </p:nvSpPr>
@@ -6396,7 +6398,7 @@
       </p:sp>
       <p:sp>
         <p:nvSpPr>
-          <p:cNvPr id="57" name="Text 48"/>
+          <p:cNvPr id="57" name="Text 47"/>
           <p:cNvSpPr txBox="1"/>
           <p:nvPr/>
         </p:nvSpPr>
@@ -6438,7 +6440,7 @@
       </p:sp>
       <p:sp>
         <p:nvSpPr>
-          <p:cNvPr id="58" name="Text 49"/>
+          <p:cNvPr id="58" name="Text 48"/>
           <p:cNvSpPr txBox="1"/>
           <p:nvPr/>
         </p:nvSpPr>
@@ -6480,7 +6482,7 @@
       </p:sp>
       <p:sp>
         <p:nvSpPr>
-          <p:cNvPr id="59" name="Shape 50"/>
+          <p:cNvPr id="59" name="Shape 49"/>
           <p:cNvSpPr/>
           <p:nvPr/>
         </p:nvSpPr>
@@ -6503,7 +6505,7 @@
       </p:sp>
       <p:sp>
         <p:nvSpPr>
-          <p:cNvPr id="60" name="Text 51"/>
+          <p:cNvPr id="60" name="Text 50"/>
           <p:cNvSpPr txBox="1"/>
           <p:nvPr/>
         </p:nvSpPr>
@@ -6542,7 +6544,7 @@
       </p:sp>
       <p:sp>
         <p:nvSpPr>
-          <p:cNvPr id="61" name="Text 52"/>
+          <p:cNvPr id="61" name="Text 51"/>
           <p:cNvSpPr txBox="1"/>
           <p:nvPr/>
         </p:nvSpPr>
@@ -6581,7 +6583,7 @@
       </p:sp>
       <p:sp>
         <p:nvSpPr>
-          <p:cNvPr id="62" name="Shape 53"/>
+          <p:cNvPr id="62" name="Shape 52"/>
           <p:cNvSpPr/>
           <p:nvPr/>
         </p:nvSpPr>
@@ -6615,7 +6617,7 @@
       </p:sp>
       <p:sp>
         <p:nvSpPr>
-          <p:cNvPr id="63" name="Text 54"/>
+          <p:cNvPr id="63" name="Text 53"/>
           <p:cNvSpPr txBox="1"/>
           <p:nvPr/>
         </p:nvSpPr>
@@ -6654,7 +6656,7 @@
       </p:sp>
       <p:sp>
         <p:nvSpPr>
-          <p:cNvPr id="64" name="Shape 55"/>
+          <p:cNvPr id="64" name="Shape 54"/>
           <p:cNvSpPr/>
           <p:nvPr/>
         </p:nvSpPr>
@@ -6681,7 +6683,7 @@
       </p:sp>
       <p:sp>
         <p:nvSpPr>
-          <p:cNvPr id="65" name="Text 56"/>
+          <p:cNvPr id="65" name="Text 55"/>
           <p:cNvSpPr txBox="1"/>
           <p:nvPr/>
         </p:nvSpPr>
@@ -6720,7 +6722,7 @@
       </p:sp>
       <p:sp>
         <p:nvSpPr>
-          <p:cNvPr id="66" name="Text 57"/>
+          <p:cNvPr id="66" name="Text 56"/>
           <p:cNvSpPr txBox="1"/>
           <p:nvPr/>
         </p:nvSpPr>
@@ -6762,7 +6764,7 @@
       </p:sp>
       <p:sp>
         <p:nvSpPr>
-          <p:cNvPr id="67" name="Text 58"/>
+          <p:cNvPr id="67" name="Text 57"/>
           <p:cNvSpPr txBox="1"/>
           <p:nvPr/>
         </p:nvSpPr>
@@ -6804,7 +6806,7 @@
       </p:sp>
       <p:sp>
         <p:nvSpPr>
-          <p:cNvPr id="68" name="Shape 59"/>
+          <p:cNvPr id="68" name="Shape 58"/>
           <p:cNvSpPr/>
           <p:nvPr/>
         </p:nvSpPr>
@@ -6827,7 +6829,7 @@
       </p:sp>
       <p:sp>
         <p:nvSpPr>
-          <p:cNvPr id="69" name="Text 60"/>
+          <p:cNvPr id="69" name="Text 59"/>
           <p:cNvSpPr txBox="1"/>
           <p:nvPr/>
         </p:nvSpPr>
@@ -6866,7 +6868,7 @@
       </p:sp>
       <p:sp>
         <p:nvSpPr>
-          <p:cNvPr id="70" name="Text 61"/>
+          <p:cNvPr id="70" name="Text 60"/>
           <p:cNvSpPr txBox="1"/>
           <p:nvPr/>
         </p:nvSpPr>
@@ -6905,7 +6907,7 @@
       </p:sp>
       <p:sp>
         <p:nvSpPr>
-          <p:cNvPr id="71" name="Shape 62"/>
+          <p:cNvPr id="71" name="Shape 61"/>
           <p:cNvSpPr/>
           <p:nvPr/>
         </p:nvSpPr>
@@ -6939,7 +6941,7 @@
       </p:sp>
       <p:sp>
         <p:nvSpPr>
-          <p:cNvPr id="72" name="Text 63"/>
+          <p:cNvPr id="72" name="Text 62"/>
           <p:cNvSpPr txBox="1"/>
           <p:nvPr/>
         </p:nvSpPr>
@@ -6978,7 +6980,7 @@
       </p:sp>
       <p:sp>
         <p:nvSpPr>
-          <p:cNvPr id="73" name="Text 64"/>
+          <p:cNvPr id="73" name="Text 63"/>
           <p:cNvSpPr txBox="1"/>
           <p:nvPr/>
         </p:nvSpPr>
@@ -7020,7 +7022,7 @@
       </p:sp>
       <p:sp>
         <p:nvSpPr>
-          <p:cNvPr id="74" name="Text 65"/>
+          <p:cNvPr id="74" name="Text 64"/>
           <p:cNvSpPr txBox="1"/>
           <p:nvPr/>
         </p:nvSpPr>
@@ -7062,7 +7064,7 @@
       </p:sp>
       <p:sp>
         <p:nvSpPr>
-          <p:cNvPr id="75" name="Shape 66"/>
+          <p:cNvPr id="75" name="Shape 65"/>
           <p:cNvSpPr/>
           <p:nvPr/>
         </p:nvSpPr>
@@ -7085,7 +7087,7 @@
       </p:sp>
       <p:sp>
         <p:nvSpPr>
-          <p:cNvPr id="76" name="Text 67"/>
+          <p:cNvPr id="76" name="Text 66"/>
           <p:cNvSpPr txBox="1"/>
           <p:nvPr/>
         </p:nvSpPr>
@@ -7124,7 +7126,7 @@
       </p:sp>
       <p:sp>
         <p:nvSpPr>
-          <p:cNvPr id="77" name="Text 68"/>
+          <p:cNvPr id="77" name="Text 67"/>
           <p:cNvSpPr txBox="1"/>
           <p:nvPr/>
         </p:nvSpPr>
@@ -7163,7 +7165,7 @@
       </p:sp>
       <p:sp>
         <p:nvSpPr>
-          <p:cNvPr id="78" name="Shape 69"/>
+          <p:cNvPr id="78" name="Shape 68"/>
           <p:cNvSpPr/>
           <p:nvPr/>
         </p:nvSpPr>
@@ -7183,7 +7185,7 @@
       </p:sp>
       <p:sp>
         <p:nvSpPr>
-          <p:cNvPr id="79" name="Text 70"/>
+          <p:cNvPr id="79" name="Text 69"/>
           <p:cNvSpPr txBox="1"/>
           <p:nvPr/>
         </p:nvSpPr>
@@ -7222,7 +7224,7 @@
       </p:sp>
       <p:sp>
         <p:nvSpPr>
-          <p:cNvPr id="80" name="Shape 71"/>
+          <p:cNvPr id="80" name="Shape 70"/>
           <p:cNvSpPr/>
           <p:nvPr/>
         </p:nvSpPr>
@@ -7249,7 +7251,7 @@
       </p:sp>
       <p:sp>
         <p:nvSpPr>
-          <p:cNvPr id="81" name="Shape 72"/>
+          <p:cNvPr id="81" name="Shape 71"/>
           <p:cNvSpPr/>
           <p:nvPr/>
         </p:nvSpPr>
@@ -7269,7 +7271,7 @@
       </p:sp>
       <p:sp>
         <p:nvSpPr>
-          <p:cNvPr id="82" name="Text 73"/>
+          <p:cNvPr id="82" name="Text 72"/>
           <p:cNvSpPr txBox="1"/>
           <p:nvPr/>
         </p:nvSpPr>
@@ -7308,7 +7310,7 @@
       </p:sp>
       <p:sp>
         <p:nvSpPr>
-          <p:cNvPr id="83" name="Text 74"/>
+          <p:cNvPr id="83" name="Text 73"/>
           <p:cNvSpPr txBox="1"/>
           <p:nvPr/>
         </p:nvSpPr>
@@ -7347,7 +7349,7 @@
       </p:sp>
       <p:sp>
         <p:nvSpPr>
-          <p:cNvPr id="84" name="Text 75"/>
+          <p:cNvPr id="84" name="Text 74"/>
           <p:cNvSpPr txBox="1"/>
           <p:nvPr/>
         </p:nvSpPr>

--- a/office-hub-concept.pptx
+++ b/office-hub-concept.pptx
@@ -4677,7 +4677,46 @@
       </p:grpSpPr>
       <p:sp>
         <p:nvSpPr>
-          <p:cNvPr id="2" name="Shape 0"/>
+          <p:cNvPr id="2" name="Text 0"/>
+          <p:cNvSpPr txBox="1"/>
+          <p:nvPr/>
+        </p:nvSpPr>
+        <p:spPr>
+          <a:xfrm>
+            <a:off x="8808415" y="6547104"/>
+            <a:ext cx="3108960" cy="219456"/>
+          </a:xfrm>
+          <a:prstGeom prst="rect">
+            <a:avLst/>
+          </a:prstGeom>
+          <a:noFill/>
+          <a:ln/>
+        </p:spPr>
+        <p:txBody>
+          <a:bodyPr wrap="square" lIns="0" tIns="0" rIns="0" bIns="0" rtlCol="0" anchor="ctr"/>
+          <a:lstStyle/>
+          <a:p>
+            <a:pPr algn="r" indent="0" marL="0">
+              <a:buNone/>
+            </a:pPr>
+            <a:r>
+              <a:rPr lang="en-US" sz="750" spc="60" kern="0" dirty="0">
+                <a:solidFill>
+                  <a:srgbClr val="9AA6B2"/>
+                </a:solidFill>
+                <a:latin typeface="Courier New" pitchFamily="34" charset="0"/>
+                <a:ea typeface="Courier New" pitchFamily="34" charset="-122"/>
+                <a:cs typeface="Courier New" pitchFamily="34" charset="-120"/>
+              </a:rPr>
+              <a:t>BACKGROUND 01 — CORNER WASH</a:t>
+            </a:r>
+            <a:endParaRPr lang="en-US" sz="750" dirty="0"/>
+          </a:p>
+        </p:txBody>
+      </p:sp>
+      <p:sp>
+        <p:nvSpPr>
+          <p:cNvPr id="3" name="Shape 1"/>
           <p:cNvSpPr/>
           <p:nvPr/>
         </p:nvSpPr>
@@ -4702,7 +4741,7 @@
       </p:sp>
       <p:sp>
         <p:nvSpPr>
-          <p:cNvPr id="3" name="Shape 1"/>
+          <p:cNvPr id="4" name="Shape 2"/>
           <p:cNvSpPr/>
           <p:nvPr/>
         </p:nvSpPr>
@@ -4725,7 +4764,7 @@
       </p:sp>
       <p:sp>
         <p:nvSpPr>
-          <p:cNvPr id="4" name="Shape 2"/>
+          <p:cNvPr id="5" name="Shape 3"/>
           <p:cNvSpPr/>
           <p:nvPr/>
         </p:nvSpPr>
@@ -4748,7 +4787,7 @@
       </p:sp>
       <p:sp>
         <p:nvSpPr>
-          <p:cNvPr id="5" name="Shape 3"/>
+          <p:cNvPr id="6" name="Shape 4"/>
           <p:cNvSpPr/>
           <p:nvPr/>
         </p:nvSpPr>
@@ -4771,7 +4810,7 @@
       </p:sp>
       <p:sp>
         <p:nvSpPr>
-          <p:cNvPr id="6" name="Text 4"/>
+          <p:cNvPr id="7" name="Text 5"/>
           <p:cNvSpPr txBox="1"/>
           <p:nvPr/>
         </p:nvSpPr>
@@ -4810,7 +4849,7 @@
       </p:sp>
       <p:sp>
         <p:nvSpPr>
-          <p:cNvPr id="7" name="Text 5"/>
+          <p:cNvPr id="8" name="Text 6"/>
           <p:cNvSpPr txBox="1"/>
           <p:nvPr/>
         </p:nvSpPr>
@@ -4849,7 +4888,7 @@
       </p:sp>
       <p:sp>
         <p:nvSpPr>
-          <p:cNvPr id="8" name="Shape 6"/>
+          <p:cNvPr id="9" name="Shape 7"/>
           <p:cNvSpPr/>
           <p:nvPr/>
         </p:nvSpPr>
@@ -4876,7 +4915,7 @@
       </p:sp>
       <p:sp>
         <p:nvSpPr>
-          <p:cNvPr id="9" name="Text 7"/>
+          <p:cNvPr id="10" name="Text 8"/>
           <p:cNvSpPr txBox="1"/>
           <p:nvPr/>
         </p:nvSpPr>
@@ -4915,7 +4954,7 @@
       </p:sp>
       <p:sp>
         <p:nvSpPr>
-          <p:cNvPr id="10" name="Text 8"/>
+          <p:cNvPr id="11" name="Text 9"/>
           <p:cNvSpPr txBox="1"/>
           <p:nvPr/>
         </p:nvSpPr>
@@ -4954,7 +4993,7 @@
       </p:sp>
       <p:sp>
         <p:nvSpPr>
-          <p:cNvPr id="11" name="Text 9"/>
+          <p:cNvPr id="12" name="Text 10"/>
           <p:cNvSpPr txBox="1"/>
           <p:nvPr/>
         </p:nvSpPr>
@@ -4993,7 +5032,7 @@
       </p:sp>
       <p:sp>
         <p:nvSpPr>
-          <p:cNvPr id="12" name="Text 10"/>
+          <p:cNvPr id="13" name="Text 11"/>
           <p:cNvSpPr txBox="1"/>
           <p:nvPr/>
         </p:nvSpPr>
@@ -5032,7 +5071,7 @@
       </p:sp>
       <p:sp>
         <p:nvSpPr>
-          <p:cNvPr id="13" name="Shape 11"/>
+          <p:cNvPr id="14" name="Shape 12"/>
           <p:cNvSpPr/>
           <p:nvPr/>
         </p:nvSpPr>
@@ -5057,7 +5096,7 @@
       </p:sp>
       <p:sp>
         <p:nvSpPr>
-          <p:cNvPr id="14" name="Text 12"/>
+          <p:cNvPr id="15" name="Text 13"/>
           <p:cNvSpPr txBox="1"/>
           <p:nvPr/>
         </p:nvSpPr>
@@ -5096,7 +5135,7 @@
       </p:sp>
       <p:sp>
         <p:nvSpPr>
-          <p:cNvPr id="15" name="Shape 13"/>
+          <p:cNvPr id="16" name="Shape 14"/>
           <p:cNvSpPr/>
           <p:nvPr/>
         </p:nvSpPr>
@@ -5116,7 +5155,7 @@
       </p:sp>
       <p:sp>
         <p:nvSpPr>
-          <p:cNvPr id="16" name="Shape 14"/>
+          <p:cNvPr id="17" name="Shape 15"/>
           <p:cNvSpPr/>
           <p:nvPr/>
         </p:nvSpPr>
@@ -5136,7 +5175,7 @@
       </p:sp>
       <p:sp>
         <p:nvSpPr>
-          <p:cNvPr id="17" name="Text 15"/>
+          <p:cNvPr id="18" name="Text 16"/>
           <p:cNvSpPr txBox="1"/>
           <p:nvPr/>
         </p:nvSpPr>
@@ -5175,7 +5214,7 @@
       </p:sp>
       <p:sp>
         <p:nvSpPr>
-          <p:cNvPr id="18" name="Text 16"/>
+          <p:cNvPr id="19" name="Text 17"/>
           <p:cNvSpPr txBox="1"/>
           <p:nvPr/>
         </p:nvSpPr>
@@ -5214,7 +5253,7 @@
       </p:sp>
       <p:sp>
         <p:nvSpPr>
-          <p:cNvPr id="19" name="Text 17"/>
+          <p:cNvPr id="20" name="Text 18"/>
           <p:cNvSpPr txBox="1"/>
           <p:nvPr/>
         </p:nvSpPr>
@@ -5253,7 +5292,7 @@
       </p:sp>
       <p:sp>
         <p:nvSpPr>
-          <p:cNvPr id="20" name="Text 18"/>
+          <p:cNvPr id="21" name="Text 19"/>
           <p:cNvSpPr txBox="1"/>
           <p:nvPr/>
         </p:nvSpPr>
@@ -5292,7 +5331,7 @@
       </p:sp>
       <p:sp>
         <p:nvSpPr>
-          <p:cNvPr id="21" name="Text 19"/>
+          <p:cNvPr id="22" name="Text 20"/>
           <p:cNvSpPr txBox="1"/>
           <p:nvPr/>
         </p:nvSpPr>
@@ -5331,7 +5370,7 @@
       </p:sp>
       <p:sp>
         <p:nvSpPr>
-          <p:cNvPr id="22" name="Text 20"/>
+          <p:cNvPr id="23" name="Text 21"/>
           <p:cNvSpPr txBox="1"/>
           <p:nvPr/>
         </p:nvSpPr>
@@ -5370,7 +5409,7 @@
       </p:sp>
       <p:sp>
         <p:nvSpPr>
-          <p:cNvPr id="23" name="Text 21"/>
+          <p:cNvPr id="24" name="Text 22"/>
           <p:cNvSpPr txBox="1"/>
           <p:nvPr/>
         </p:nvSpPr>
@@ -5409,7 +5448,7 @@
       </p:sp>
       <p:sp>
         <p:nvSpPr>
-          <p:cNvPr id="24" name="Text 22"/>
+          <p:cNvPr id="25" name="Text 23"/>
           <p:cNvSpPr txBox="1"/>
           <p:nvPr/>
         </p:nvSpPr>
@@ -5448,7 +5487,7 @@
       </p:sp>
       <p:sp>
         <p:nvSpPr>
-          <p:cNvPr id="25" name="Text 23"/>
+          <p:cNvPr id="26" name="Text 24"/>
           <p:cNvSpPr txBox="1"/>
           <p:nvPr/>
         </p:nvSpPr>
@@ -5487,7 +5526,7 @@
       </p:sp>
       <p:sp>
         <p:nvSpPr>
-          <p:cNvPr id="26" name="Text 24"/>
+          <p:cNvPr id="27" name="Text 25"/>
           <p:cNvSpPr txBox="1"/>
           <p:nvPr/>
         </p:nvSpPr>
@@ -5526,7 +5565,7 @@
       </p:sp>
       <p:sp>
         <p:nvSpPr>
-          <p:cNvPr id="27" name="Text 25"/>
+          <p:cNvPr id="28" name="Text 26"/>
           <p:cNvSpPr txBox="1"/>
           <p:nvPr/>
         </p:nvSpPr>
@@ -5565,7 +5604,7 @@
       </p:sp>
       <p:sp>
         <p:nvSpPr>
-          <p:cNvPr id="28" name="Shape 26"/>
+          <p:cNvPr id="29" name="Shape 27"/>
           <p:cNvSpPr/>
           <p:nvPr/>
         </p:nvSpPr>
@@ -5588,7 +5627,7 @@
       </p:sp>
       <p:pic>
         <p:nvPicPr>
-          <p:cNvPr id="29" name="Image 0" descr="/tmp/claude-0/-home-user-drawing-set/4abccc73-5df9-5ad5-9792-19a3f012db48/scratchpad/tile_band.png">    </p:cNvPr>
+          <p:cNvPr id="30" name="Image 0" descr="/tmp/claude-0/-home-user-drawing-set/4abccc73-5df9-5ad5-9792-19a3f012db48/scratchpad/tile_band.png">    </p:cNvPr>
           <p:cNvPicPr>
             <a:picLocks noChangeAspect="1"/>
           </p:cNvPicPr>
@@ -5619,7 +5658,7 @@
       </p:pic>
       <p:sp>
         <p:nvSpPr>
-          <p:cNvPr id="30" name="Shape 27"/>
+          <p:cNvPr id="31" name="Shape 28"/>
           <p:cNvSpPr/>
           <p:nvPr/>
         </p:nvSpPr>
@@ -5639,7 +5678,7 @@
       </p:sp>
       <p:pic>
         <p:nvPicPr>
-          <p:cNvPr id="31" name="Image 1" descr="/tmp/claude-0/-home-user-drawing-set/4abccc73-5df9-5ad5-9792-19a3f012db48/scratchpad/icons/standards.png">    </p:cNvPr>
+          <p:cNvPr id="32" name="Image 1" descr="/tmp/claude-0/-home-user-drawing-set/4abccc73-5df9-5ad5-9792-19a3f012db48/scratchpad/icons/standards.png">    </p:cNvPr>
           <p:cNvPicPr>
             <a:picLocks noChangeAspect="1"/>
           </p:cNvPicPr>
@@ -5663,7 +5702,7 @@
       </p:pic>
       <p:sp>
         <p:nvSpPr>
-          <p:cNvPr id="32" name="Text 28"/>
+          <p:cNvPr id="33" name="Text 29"/>
           <p:cNvSpPr txBox="1"/>
           <p:nvPr/>
         </p:nvSpPr>
@@ -5702,7 +5741,7 @@
       </p:sp>
       <p:sp>
         <p:nvSpPr>
-          <p:cNvPr id="33" name="Shape 29"/>
+          <p:cNvPr id="34" name="Shape 30"/>
           <p:cNvSpPr/>
           <p:nvPr/>
         </p:nvSpPr>
@@ -5722,7 +5761,7 @@
       </p:sp>
       <p:pic>
         <p:nvPicPr>
-          <p:cNvPr id="34" name="Image 2" descr="/tmp/claude-0/-home-user-drawing-set/4abccc73-5df9-5ad5-9792-19a3f012db48/scratchpad/icons/templates.png">    </p:cNvPr>
+          <p:cNvPr id="35" name="Image 2" descr="/tmp/claude-0/-home-user-drawing-set/4abccc73-5df9-5ad5-9792-19a3f012db48/scratchpad/icons/templates.png">    </p:cNvPr>
           <p:cNvPicPr>
             <a:picLocks noChangeAspect="1"/>
           </p:cNvPicPr>
@@ -5746,7 +5785,7 @@
       </p:pic>
       <p:sp>
         <p:nvSpPr>
-          <p:cNvPr id="35" name="Text 30"/>
+          <p:cNvPr id="36" name="Text 31"/>
           <p:cNvSpPr txBox="1"/>
           <p:nvPr/>
         </p:nvSpPr>
@@ -5785,7 +5824,7 @@
       </p:sp>
       <p:sp>
         <p:nvSpPr>
-          <p:cNvPr id="36" name="Shape 31"/>
+          <p:cNvPr id="37" name="Shape 32"/>
           <p:cNvSpPr/>
           <p:nvPr/>
         </p:nvSpPr>
@@ -5805,7 +5844,7 @@
       </p:sp>
       <p:pic>
         <p:nvPicPr>
-          <p:cNvPr id="37" name="Image 3" descr="/tmp/claude-0/-home-user-drawing-set/4abccc73-5df9-5ad5-9792-19a3f012db48/scratchpad/icons/forms.png">    </p:cNvPr>
+          <p:cNvPr id="38" name="Image 3" descr="/tmp/claude-0/-home-user-drawing-set/4abccc73-5df9-5ad5-9792-19a3f012db48/scratchpad/icons/forms.png">    </p:cNvPr>
           <p:cNvPicPr>
             <a:picLocks noChangeAspect="1"/>
           </p:cNvPicPr>
@@ -5829,7 +5868,7 @@
       </p:pic>
       <p:sp>
         <p:nvSpPr>
-          <p:cNvPr id="38" name="Text 32"/>
+          <p:cNvPr id="39" name="Text 33"/>
           <p:cNvSpPr txBox="1"/>
           <p:nvPr/>
         </p:nvSpPr>
@@ -5868,7 +5907,7 @@
       </p:sp>
       <p:sp>
         <p:nvSpPr>
-          <p:cNvPr id="39" name="Shape 33"/>
+          <p:cNvPr id="40" name="Shape 34"/>
           <p:cNvSpPr/>
           <p:nvPr/>
         </p:nvSpPr>
@@ -5888,7 +5927,7 @@
       </p:sp>
       <p:pic>
         <p:nvPicPr>
-          <p:cNvPr id="40" name="Image 4" descr="/tmp/claude-0/-home-user-drawing-set/4abccc73-5df9-5ad5-9792-19a3f012db48/scratchpad/icons/policies.png">    </p:cNvPr>
+          <p:cNvPr id="41" name="Image 4" descr="/tmp/claude-0/-home-user-drawing-set/4abccc73-5df9-5ad5-9792-19a3f012db48/scratchpad/icons/policies.png">    </p:cNvPr>
           <p:cNvPicPr>
             <a:picLocks noChangeAspect="1"/>
           </p:cNvPicPr>
@@ -5912,7 +5951,7 @@
       </p:pic>
       <p:sp>
         <p:nvSpPr>
-          <p:cNvPr id="41" name="Text 34"/>
+          <p:cNvPr id="42" name="Text 35"/>
           <p:cNvSpPr txBox="1"/>
           <p:nvPr/>
         </p:nvSpPr>
@@ -5951,7 +5990,7 @@
       </p:sp>
       <p:sp>
         <p:nvSpPr>
-          <p:cNvPr id="42" name="Shape 35"/>
+          <p:cNvPr id="43" name="Shape 36"/>
           <p:cNvSpPr/>
           <p:nvPr/>
         </p:nvSpPr>
@@ -5971,7 +6010,7 @@
       </p:sp>
       <p:pic>
         <p:nvPicPr>
-          <p:cNvPr id="43" name="Image 5" descr="/tmp/claude-0/-home-user-drawing-set/4abccc73-5df9-5ad5-9792-19a3f012db48/scratchpad/icons/sops.png">    </p:cNvPr>
+          <p:cNvPr id="44" name="Image 5" descr="/tmp/claude-0/-home-user-drawing-set/4abccc73-5df9-5ad5-9792-19a3f012db48/scratchpad/icons/sops.png">    </p:cNvPr>
           <p:cNvPicPr>
             <a:picLocks noChangeAspect="1"/>
           </p:cNvPicPr>
@@ -5995,7 +6034,7 @@
       </p:pic>
       <p:sp>
         <p:nvSpPr>
-          <p:cNvPr id="44" name="Text 36"/>
+          <p:cNvPr id="45" name="Text 37"/>
           <p:cNvSpPr txBox="1"/>
           <p:nvPr/>
         </p:nvSpPr>
@@ -6034,7 +6073,7 @@
       </p:sp>
       <p:sp>
         <p:nvSpPr>
-          <p:cNvPr id="45" name="Shape 37"/>
+          <p:cNvPr id="46" name="Shape 38"/>
           <p:cNvSpPr/>
           <p:nvPr/>
         </p:nvSpPr>
@@ -6054,7 +6093,7 @@
       </p:sp>
       <p:pic>
         <p:nvPicPr>
-          <p:cNvPr id="46" name="Image 6" descr="/tmp/claude-0/-home-user-drawing-set/4abccc73-5df9-5ad5-9792-19a3f012db48/scratchpad/icons/revit.png">    </p:cNvPr>
+          <p:cNvPr id="47" name="Image 6" descr="/tmp/claude-0/-home-user-drawing-set/4abccc73-5df9-5ad5-9792-19a3f012db48/scratchpad/icons/revit.png">    </p:cNvPr>
           <p:cNvPicPr>
             <a:picLocks noChangeAspect="1"/>
           </p:cNvPicPr>
@@ -6078,7 +6117,7 @@
       </p:pic>
       <p:sp>
         <p:nvSpPr>
-          <p:cNvPr id="47" name="Text 38"/>
+          <p:cNvPr id="48" name="Text 39"/>
           <p:cNvSpPr txBox="1"/>
           <p:nvPr/>
         </p:nvSpPr>
@@ -6117,7 +6156,7 @@
       </p:sp>
       <p:sp>
         <p:nvSpPr>
-          <p:cNvPr id="48" name="Shape 39"/>
+          <p:cNvPr id="49" name="Shape 40"/>
           <p:cNvSpPr/>
           <p:nvPr/>
         </p:nvSpPr>
@@ -6137,7 +6176,7 @@
       </p:sp>
       <p:pic>
         <p:nvPicPr>
-          <p:cNvPr id="49" name="Image 7" descr="/tmp/claude-0/-home-user-drawing-set/4abccc73-5df9-5ad5-9792-19a3f012db48/scratchpad/icons/learning.png">    </p:cNvPr>
+          <p:cNvPr id="50" name="Image 7" descr="/tmp/claude-0/-home-user-drawing-set/4abccc73-5df9-5ad5-9792-19a3f012db48/scratchpad/icons/learning.png">    </p:cNvPr>
           <p:cNvPicPr>
             <a:picLocks noChangeAspect="1"/>
           </p:cNvPicPr>
@@ -6161,7 +6200,7 @@
       </p:pic>
       <p:sp>
         <p:nvSpPr>
-          <p:cNvPr id="50" name="Text 40"/>
+          <p:cNvPr id="51" name="Text 41"/>
           <p:cNvSpPr txBox="1"/>
           <p:nvPr/>
         </p:nvSpPr>
@@ -6200,7 +6239,7 @@
       </p:sp>
       <p:sp>
         <p:nvSpPr>
-          <p:cNvPr id="51" name="Shape 41"/>
+          <p:cNvPr id="52" name="Shape 42"/>
           <p:cNvSpPr/>
           <p:nvPr/>
         </p:nvSpPr>
@@ -6220,7 +6259,7 @@
       </p:sp>
       <p:sp>
         <p:nvSpPr>
-          <p:cNvPr id="52" name="Text 42"/>
+          <p:cNvPr id="53" name="Text 43"/>
           <p:cNvSpPr txBox="1"/>
           <p:nvPr/>
         </p:nvSpPr>
@@ -6259,7 +6298,7 @@
       </p:sp>
       <p:sp>
         <p:nvSpPr>
-          <p:cNvPr id="53" name="Shape 43"/>
+          <p:cNvPr id="54" name="Shape 44"/>
           <p:cNvSpPr/>
           <p:nvPr/>
         </p:nvSpPr>
@@ -6293,7 +6332,7 @@
       </p:sp>
       <p:sp>
         <p:nvSpPr>
-          <p:cNvPr id="54" name="Text 44"/>
+          <p:cNvPr id="55" name="Text 45"/>
           <p:cNvSpPr txBox="1"/>
           <p:nvPr/>
         </p:nvSpPr>
@@ -6332,7 +6371,7 @@
       </p:sp>
       <p:sp>
         <p:nvSpPr>
-          <p:cNvPr id="55" name="Shape 45"/>
+          <p:cNvPr id="56" name="Shape 46"/>
           <p:cNvSpPr/>
           <p:nvPr/>
         </p:nvSpPr>
@@ -6359,7 +6398,7 @@
       </p:sp>
       <p:sp>
         <p:nvSpPr>
-          <p:cNvPr id="56" name="Text 46"/>
+          <p:cNvPr id="57" name="Text 47"/>
           <p:cNvSpPr txBox="1"/>
           <p:nvPr/>
         </p:nvSpPr>
@@ -6398,7 +6437,7 @@
       </p:sp>
       <p:sp>
         <p:nvSpPr>
-          <p:cNvPr id="57" name="Text 47"/>
+          <p:cNvPr id="58" name="Text 48"/>
           <p:cNvSpPr txBox="1"/>
           <p:nvPr/>
         </p:nvSpPr>
@@ -6440,7 +6479,7 @@
       </p:sp>
       <p:sp>
         <p:nvSpPr>
-          <p:cNvPr id="58" name="Text 48"/>
+          <p:cNvPr id="59" name="Text 49"/>
           <p:cNvSpPr txBox="1"/>
           <p:nvPr/>
         </p:nvSpPr>
@@ -6482,7 +6521,7 @@
       </p:sp>
       <p:sp>
         <p:nvSpPr>
-          <p:cNvPr id="59" name="Shape 49"/>
+          <p:cNvPr id="60" name="Shape 50"/>
           <p:cNvSpPr/>
           <p:nvPr/>
         </p:nvSpPr>
@@ -6505,7 +6544,7 @@
       </p:sp>
       <p:sp>
         <p:nvSpPr>
-          <p:cNvPr id="60" name="Text 50"/>
+          <p:cNvPr id="61" name="Text 51"/>
           <p:cNvSpPr txBox="1"/>
           <p:nvPr/>
         </p:nvSpPr>
@@ -6544,7 +6583,7 @@
       </p:sp>
       <p:sp>
         <p:nvSpPr>
-          <p:cNvPr id="61" name="Text 51"/>
+          <p:cNvPr id="62" name="Text 52"/>
           <p:cNvSpPr txBox="1"/>
           <p:nvPr/>
         </p:nvSpPr>
@@ -6583,7 +6622,7 @@
       </p:sp>
       <p:sp>
         <p:nvSpPr>
-          <p:cNvPr id="62" name="Shape 52"/>
+          <p:cNvPr id="63" name="Shape 53"/>
           <p:cNvSpPr/>
           <p:nvPr/>
         </p:nvSpPr>
@@ -6617,7 +6656,7 @@
       </p:sp>
       <p:sp>
         <p:nvSpPr>
-          <p:cNvPr id="63" name="Text 53"/>
+          <p:cNvPr id="64" name="Text 54"/>
           <p:cNvSpPr txBox="1"/>
           <p:nvPr/>
         </p:nvSpPr>
@@ -6656,7 +6695,7 @@
       </p:sp>
       <p:sp>
         <p:nvSpPr>
-          <p:cNvPr id="64" name="Shape 54"/>
+          <p:cNvPr id="65" name="Shape 55"/>
           <p:cNvSpPr/>
           <p:nvPr/>
         </p:nvSpPr>
@@ -6683,7 +6722,7 @@
       </p:sp>
       <p:sp>
         <p:nvSpPr>
-          <p:cNvPr id="65" name="Text 55"/>
+          <p:cNvPr id="66" name="Text 56"/>
           <p:cNvSpPr txBox="1"/>
           <p:nvPr/>
         </p:nvSpPr>
@@ -6722,7 +6761,7 @@
       </p:sp>
       <p:sp>
         <p:nvSpPr>
-          <p:cNvPr id="66" name="Text 56"/>
+          <p:cNvPr id="67" name="Text 57"/>
           <p:cNvSpPr txBox="1"/>
           <p:nvPr/>
         </p:nvSpPr>
@@ -6764,7 +6803,7 @@
       </p:sp>
       <p:sp>
         <p:nvSpPr>
-          <p:cNvPr id="67" name="Text 57"/>
+          <p:cNvPr id="68" name="Text 58"/>
           <p:cNvSpPr txBox="1"/>
           <p:nvPr/>
         </p:nvSpPr>
@@ -6806,7 +6845,7 @@
       </p:sp>
       <p:sp>
         <p:nvSpPr>
-          <p:cNvPr id="68" name="Shape 58"/>
+          <p:cNvPr id="69" name="Shape 59"/>
           <p:cNvSpPr/>
           <p:nvPr/>
         </p:nvSpPr>
@@ -6829,7 +6868,7 @@
       </p:sp>
       <p:sp>
         <p:nvSpPr>
-          <p:cNvPr id="69" name="Text 59"/>
+          <p:cNvPr id="70" name="Text 60"/>
           <p:cNvSpPr txBox="1"/>
           <p:nvPr/>
         </p:nvSpPr>
@@ -6868,7 +6907,7 @@
       </p:sp>
       <p:sp>
         <p:nvSpPr>
-          <p:cNvPr id="70" name="Text 60"/>
+          <p:cNvPr id="71" name="Text 61"/>
           <p:cNvSpPr txBox="1"/>
           <p:nvPr/>
         </p:nvSpPr>
@@ -6907,7 +6946,7 @@
       </p:sp>
       <p:sp>
         <p:nvSpPr>
-          <p:cNvPr id="71" name="Shape 61"/>
+          <p:cNvPr id="72" name="Shape 62"/>
           <p:cNvSpPr/>
           <p:nvPr/>
         </p:nvSpPr>
@@ -6941,7 +6980,7 @@
       </p:sp>
       <p:sp>
         <p:nvSpPr>
-          <p:cNvPr id="72" name="Text 62"/>
+          <p:cNvPr id="73" name="Text 63"/>
           <p:cNvSpPr txBox="1"/>
           <p:nvPr/>
         </p:nvSpPr>
@@ -6980,7 +7019,7 @@
       </p:sp>
       <p:sp>
         <p:nvSpPr>
-          <p:cNvPr id="73" name="Text 63"/>
+          <p:cNvPr id="74" name="Text 64"/>
           <p:cNvSpPr txBox="1"/>
           <p:nvPr/>
         </p:nvSpPr>
@@ -7022,7 +7061,7 @@
       </p:sp>
       <p:sp>
         <p:nvSpPr>
-          <p:cNvPr id="74" name="Text 64"/>
+          <p:cNvPr id="75" name="Text 65"/>
           <p:cNvSpPr txBox="1"/>
           <p:nvPr/>
         </p:nvSpPr>
@@ -7064,7 +7103,7 @@
       </p:sp>
       <p:sp>
         <p:nvSpPr>
-          <p:cNvPr id="75" name="Shape 65"/>
+          <p:cNvPr id="76" name="Shape 66"/>
           <p:cNvSpPr/>
           <p:nvPr/>
         </p:nvSpPr>
@@ -7087,7 +7126,7 @@
       </p:sp>
       <p:sp>
         <p:nvSpPr>
-          <p:cNvPr id="76" name="Text 66"/>
+          <p:cNvPr id="77" name="Text 67"/>
           <p:cNvSpPr txBox="1"/>
           <p:nvPr/>
         </p:nvSpPr>
@@ -7126,7 +7165,7 @@
       </p:sp>
       <p:sp>
         <p:nvSpPr>
-          <p:cNvPr id="77" name="Text 67"/>
+          <p:cNvPr id="78" name="Text 68"/>
           <p:cNvSpPr txBox="1"/>
           <p:nvPr/>
         </p:nvSpPr>
@@ -7165,7 +7204,7 @@
       </p:sp>
       <p:sp>
         <p:nvSpPr>
-          <p:cNvPr id="78" name="Shape 68"/>
+          <p:cNvPr id="79" name="Shape 69"/>
           <p:cNvSpPr/>
           <p:nvPr/>
         </p:nvSpPr>
@@ -7185,7 +7224,7 @@
       </p:sp>
       <p:sp>
         <p:nvSpPr>
-          <p:cNvPr id="79" name="Text 69"/>
+          <p:cNvPr id="80" name="Text 70"/>
           <p:cNvSpPr txBox="1"/>
           <p:nvPr/>
         </p:nvSpPr>
@@ -7224,7 +7263,7 @@
       </p:sp>
       <p:sp>
         <p:nvSpPr>
-          <p:cNvPr id="80" name="Shape 70"/>
+          <p:cNvPr id="81" name="Shape 71"/>
           <p:cNvSpPr/>
           <p:nvPr/>
         </p:nvSpPr>
@@ -7251,7 +7290,7 @@
       </p:sp>
       <p:sp>
         <p:nvSpPr>
-          <p:cNvPr id="81" name="Shape 71"/>
+          <p:cNvPr id="82" name="Shape 72"/>
           <p:cNvSpPr/>
           <p:nvPr/>
         </p:nvSpPr>
@@ -7271,7 +7310,7 @@
       </p:sp>
       <p:sp>
         <p:nvSpPr>
-          <p:cNvPr id="82" name="Text 72"/>
+          <p:cNvPr id="83" name="Text 73"/>
           <p:cNvSpPr txBox="1"/>
           <p:nvPr/>
         </p:nvSpPr>
@@ -7310,7 +7349,7 @@
       </p:sp>
       <p:sp>
         <p:nvSpPr>
-          <p:cNvPr id="83" name="Text 73"/>
+          <p:cNvPr id="84" name="Text 74"/>
           <p:cNvSpPr txBox="1"/>
           <p:nvPr/>
         </p:nvSpPr>
@@ -7349,7 +7388,7 @@
       </p:sp>
       <p:sp>
         <p:nvSpPr>
-          <p:cNvPr id="84" name="Text 74"/>
+          <p:cNvPr id="85" name="Text 75"/>
           <p:cNvSpPr txBox="1"/>
           <p:nvPr/>
         </p:nvSpPr>
@@ -7427,7 +7466,46 @@
       </p:grpSpPr>
       <p:sp>
         <p:nvSpPr>
-          <p:cNvPr id="2" name="Shape 0"/>
+          <p:cNvPr id="2" name="Text 0"/>
+          <p:cNvSpPr txBox="1"/>
+          <p:nvPr/>
+        </p:nvSpPr>
+        <p:spPr>
+          <a:xfrm>
+            <a:off x="8808415" y="6547104"/>
+            <a:ext cx="3108960" cy="219456"/>
+          </a:xfrm>
+          <a:prstGeom prst="rect">
+            <a:avLst/>
+          </a:prstGeom>
+          <a:noFill/>
+          <a:ln/>
+        </p:spPr>
+        <p:txBody>
+          <a:bodyPr wrap="square" lIns="0" tIns="0" rIns="0" bIns="0" rtlCol="0" anchor="ctr"/>
+          <a:lstStyle/>
+          <a:p>
+            <a:pPr algn="r" indent="0" marL="0">
+              <a:buNone/>
+            </a:pPr>
+            <a:r>
+              <a:rPr lang="en-US" sz="750" spc="60" kern="0" dirty="0">
+                <a:solidFill>
+                  <a:srgbClr val="9AA6B2"/>
+                </a:solidFill>
+                <a:latin typeface="Courier New" pitchFamily="34" charset="0"/>
+                <a:ea typeface="Courier New" pitchFamily="34" charset="-122"/>
+                <a:cs typeface="Courier New" pitchFamily="34" charset="-120"/>
+              </a:rPr>
+              <a:t>BACKGROUND 02 — DIAGONAL SWEEP</a:t>
+            </a:r>
+            <a:endParaRPr lang="en-US" sz="750" dirty="0"/>
+          </a:p>
+        </p:txBody>
+      </p:sp>
+      <p:sp>
+        <p:nvSpPr>
+          <p:cNvPr id="3" name="Shape 1"/>
           <p:cNvSpPr/>
           <p:nvPr/>
         </p:nvSpPr>
@@ -7452,7 +7530,7 @@
       </p:sp>
       <p:sp>
         <p:nvSpPr>
-          <p:cNvPr id="3" name="Shape 1"/>
+          <p:cNvPr id="4" name="Shape 2"/>
           <p:cNvSpPr/>
           <p:nvPr/>
         </p:nvSpPr>
@@ -7475,7 +7553,7 @@
       </p:sp>
       <p:sp>
         <p:nvSpPr>
-          <p:cNvPr id="4" name="Shape 2"/>
+          <p:cNvPr id="5" name="Shape 3"/>
           <p:cNvSpPr/>
           <p:nvPr/>
         </p:nvSpPr>
@@ -7498,7 +7576,7 @@
       </p:sp>
       <p:sp>
         <p:nvSpPr>
-          <p:cNvPr id="5" name="Shape 3"/>
+          <p:cNvPr id="6" name="Shape 4"/>
           <p:cNvSpPr/>
           <p:nvPr/>
         </p:nvSpPr>
@@ -7521,7 +7599,7 @@
       </p:sp>
       <p:sp>
         <p:nvSpPr>
-          <p:cNvPr id="6" name="Text 4"/>
+          <p:cNvPr id="7" name="Text 5"/>
           <p:cNvSpPr txBox="1"/>
           <p:nvPr/>
         </p:nvSpPr>
@@ -7560,7 +7638,7 @@
       </p:sp>
       <p:sp>
         <p:nvSpPr>
-          <p:cNvPr id="7" name="Text 5"/>
+          <p:cNvPr id="8" name="Text 6"/>
           <p:cNvSpPr txBox="1"/>
           <p:nvPr/>
         </p:nvSpPr>
@@ -7599,7 +7677,7 @@
       </p:sp>
       <p:sp>
         <p:nvSpPr>
-          <p:cNvPr id="8" name="Shape 6"/>
+          <p:cNvPr id="9" name="Shape 7"/>
           <p:cNvSpPr/>
           <p:nvPr/>
         </p:nvSpPr>
@@ -7626,7 +7704,7 @@
       </p:sp>
       <p:sp>
         <p:nvSpPr>
-          <p:cNvPr id="9" name="Text 7"/>
+          <p:cNvPr id="10" name="Text 8"/>
           <p:cNvSpPr txBox="1"/>
           <p:nvPr/>
         </p:nvSpPr>
@@ -7665,7 +7743,7 @@
       </p:sp>
       <p:sp>
         <p:nvSpPr>
-          <p:cNvPr id="10" name="Text 8"/>
+          <p:cNvPr id="11" name="Text 9"/>
           <p:cNvSpPr txBox="1"/>
           <p:nvPr/>
         </p:nvSpPr>
@@ -7704,7 +7782,7 @@
       </p:sp>
       <p:sp>
         <p:nvSpPr>
-          <p:cNvPr id="11" name="Text 9"/>
+          <p:cNvPr id="12" name="Text 10"/>
           <p:cNvSpPr txBox="1"/>
           <p:nvPr/>
         </p:nvSpPr>
@@ -7743,7 +7821,7 @@
       </p:sp>
       <p:sp>
         <p:nvSpPr>
-          <p:cNvPr id="12" name="Text 10"/>
+          <p:cNvPr id="13" name="Text 11"/>
           <p:cNvSpPr txBox="1"/>
           <p:nvPr/>
         </p:nvSpPr>
@@ -7782,7 +7860,7 @@
       </p:sp>
       <p:sp>
         <p:nvSpPr>
-          <p:cNvPr id="13" name="Shape 11"/>
+          <p:cNvPr id="14" name="Shape 12"/>
           <p:cNvSpPr/>
           <p:nvPr/>
         </p:nvSpPr>
@@ -7807,7 +7885,7 @@
       </p:sp>
       <p:sp>
         <p:nvSpPr>
-          <p:cNvPr id="14" name="Text 12"/>
+          <p:cNvPr id="15" name="Text 13"/>
           <p:cNvSpPr txBox="1"/>
           <p:nvPr/>
         </p:nvSpPr>
@@ -7846,7 +7924,7 @@
       </p:sp>
       <p:sp>
         <p:nvSpPr>
-          <p:cNvPr id="15" name="Text 13"/>
+          <p:cNvPr id="16" name="Text 14"/>
           <p:cNvSpPr txBox="1"/>
           <p:nvPr/>
         </p:nvSpPr>
@@ -7885,7 +7963,7 @@
       </p:sp>
       <p:sp>
         <p:nvSpPr>
-          <p:cNvPr id="16" name="Shape 14"/>
+          <p:cNvPr id="17" name="Shape 15"/>
           <p:cNvSpPr/>
           <p:nvPr/>
         </p:nvSpPr>
@@ -7905,7 +7983,7 @@
       </p:sp>
       <p:sp>
         <p:nvSpPr>
-          <p:cNvPr id="17" name="Shape 15"/>
+          <p:cNvPr id="18" name="Shape 16"/>
           <p:cNvSpPr/>
           <p:nvPr/>
         </p:nvSpPr>
@@ -7925,7 +8003,7 @@
       </p:sp>
       <p:sp>
         <p:nvSpPr>
-          <p:cNvPr id="18" name="Text 16"/>
+          <p:cNvPr id="19" name="Text 17"/>
           <p:cNvSpPr txBox="1"/>
           <p:nvPr/>
         </p:nvSpPr>
@@ -7964,7 +8042,7 @@
       </p:sp>
       <p:sp>
         <p:nvSpPr>
-          <p:cNvPr id="19" name="Text 17"/>
+          <p:cNvPr id="20" name="Text 18"/>
           <p:cNvSpPr txBox="1"/>
           <p:nvPr/>
         </p:nvSpPr>
@@ -8003,7 +8081,7 @@
       </p:sp>
       <p:sp>
         <p:nvSpPr>
-          <p:cNvPr id="20" name="Text 18"/>
+          <p:cNvPr id="21" name="Text 19"/>
           <p:cNvSpPr txBox="1"/>
           <p:nvPr/>
         </p:nvSpPr>
@@ -8042,7 +8120,7 @@
       </p:sp>
       <p:sp>
         <p:nvSpPr>
-          <p:cNvPr id="21" name="Text 19"/>
+          <p:cNvPr id="22" name="Text 20"/>
           <p:cNvSpPr txBox="1"/>
           <p:nvPr/>
         </p:nvSpPr>
@@ -8081,7 +8159,7 @@
       </p:sp>
       <p:sp>
         <p:nvSpPr>
-          <p:cNvPr id="22" name="Text 20"/>
+          <p:cNvPr id="23" name="Text 21"/>
           <p:cNvSpPr txBox="1"/>
           <p:nvPr/>
         </p:nvSpPr>
@@ -8120,7 +8198,7 @@
       </p:sp>
       <p:sp>
         <p:nvSpPr>
-          <p:cNvPr id="23" name="Text 21"/>
+          <p:cNvPr id="24" name="Text 22"/>
           <p:cNvSpPr txBox="1"/>
           <p:nvPr/>
         </p:nvSpPr>
@@ -8159,7 +8237,7 @@
       </p:sp>
       <p:sp>
         <p:nvSpPr>
-          <p:cNvPr id="24" name="Text 22"/>
+          <p:cNvPr id="25" name="Text 23"/>
           <p:cNvSpPr txBox="1"/>
           <p:nvPr/>
         </p:nvSpPr>
@@ -8198,7 +8276,7 @@
       </p:sp>
       <p:sp>
         <p:nvSpPr>
-          <p:cNvPr id="25" name="Text 23"/>
+          <p:cNvPr id="26" name="Text 24"/>
           <p:cNvSpPr txBox="1"/>
           <p:nvPr/>
         </p:nvSpPr>
@@ -8237,7 +8315,7 @@
       </p:sp>
       <p:sp>
         <p:nvSpPr>
-          <p:cNvPr id="26" name="Text 24"/>
+          <p:cNvPr id="27" name="Text 25"/>
           <p:cNvSpPr txBox="1"/>
           <p:nvPr/>
         </p:nvSpPr>
@@ -8276,7 +8354,7 @@
       </p:sp>
       <p:sp>
         <p:nvSpPr>
-          <p:cNvPr id="27" name="Text 25"/>
+          <p:cNvPr id="28" name="Text 26"/>
           <p:cNvSpPr txBox="1"/>
           <p:nvPr/>
         </p:nvSpPr>
@@ -8315,7 +8393,7 @@
       </p:sp>
       <p:sp>
         <p:nvSpPr>
-          <p:cNvPr id="28" name="Shape 26"/>
+          <p:cNvPr id="29" name="Shape 27"/>
           <p:cNvSpPr/>
           <p:nvPr/>
         </p:nvSpPr>
@@ -8338,7 +8416,7 @@
       </p:sp>
       <p:sp>
         <p:nvSpPr>
-          <p:cNvPr id="29" name="Shape 27"/>
+          <p:cNvPr id="30" name="Shape 28"/>
           <p:cNvSpPr/>
           <p:nvPr/>
         </p:nvSpPr>
@@ -8365,7 +8443,7 @@
       </p:sp>
       <p:sp>
         <p:nvSpPr>
-          <p:cNvPr id="30" name="Shape 28"/>
+          <p:cNvPr id="31" name="Shape 29"/>
           <p:cNvSpPr/>
           <p:nvPr/>
         </p:nvSpPr>
@@ -8385,7 +8463,7 @@
       </p:sp>
       <p:sp>
         <p:nvSpPr>
-          <p:cNvPr id="31" name="Text 29"/>
+          <p:cNvPr id="32" name="Text 30"/>
           <p:cNvSpPr txBox="1"/>
           <p:nvPr/>
         </p:nvSpPr>
@@ -8424,7 +8502,7 @@
       </p:sp>
       <p:sp>
         <p:nvSpPr>
-          <p:cNvPr id="32" name="Text 30"/>
+          <p:cNvPr id="33" name="Text 31"/>
           <p:cNvSpPr txBox="1"/>
           <p:nvPr/>
         </p:nvSpPr>
@@ -8463,7 +8541,7 @@
       </p:sp>
       <p:sp>
         <p:nvSpPr>
-          <p:cNvPr id="33" name="Text 31"/>
+          <p:cNvPr id="34" name="Text 32"/>
           <p:cNvSpPr txBox="1"/>
           <p:nvPr/>
         </p:nvSpPr>
@@ -8502,7 +8580,7 @@
       </p:sp>
       <p:sp>
         <p:nvSpPr>
-          <p:cNvPr id="34" name="Shape 32"/>
+          <p:cNvPr id="35" name="Shape 33"/>
           <p:cNvSpPr/>
           <p:nvPr/>
         </p:nvSpPr>
@@ -8529,7 +8607,7 @@
       </p:sp>
       <p:sp>
         <p:nvSpPr>
-          <p:cNvPr id="35" name="Shape 33"/>
+          <p:cNvPr id="36" name="Shape 34"/>
           <p:cNvSpPr/>
           <p:nvPr/>
         </p:nvSpPr>
@@ -8549,7 +8627,7 @@
       </p:sp>
       <p:sp>
         <p:nvSpPr>
-          <p:cNvPr id="36" name="Text 34"/>
+          <p:cNvPr id="37" name="Text 35"/>
           <p:cNvSpPr txBox="1"/>
           <p:nvPr/>
         </p:nvSpPr>
@@ -8588,7 +8666,7 @@
       </p:sp>
       <p:sp>
         <p:nvSpPr>
-          <p:cNvPr id="37" name="Text 35"/>
+          <p:cNvPr id="38" name="Text 36"/>
           <p:cNvSpPr txBox="1"/>
           <p:nvPr/>
         </p:nvSpPr>
@@ -8627,7 +8705,7 @@
       </p:sp>
       <p:sp>
         <p:nvSpPr>
-          <p:cNvPr id="38" name="Text 36"/>
+          <p:cNvPr id="39" name="Text 37"/>
           <p:cNvSpPr txBox="1"/>
           <p:nvPr/>
         </p:nvSpPr>
@@ -8666,7 +8744,7 @@
       </p:sp>
       <p:sp>
         <p:nvSpPr>
-          <p:cNvPr id="39" name="Shape 37"/>
+          <p:cNvPr id="40" name="Shape 38"/>
           <p:cNvSpPr/>
           <p:nvPr/>
         </p:nvSpPr>
@@ -8693,7 +8771,7 @@
       </p:sp>
       <p:sp>
         <p:nvSpPr>
-          <p:cNvPr id="40" name="Shape 38"/>
+          <p:cNvPr id="41" name="Shape 39"/>
           <p:cNvSpPr/>
           <p:nvPr/>
         </p:nvSpPr>
@@ -8713,7 +8791,7 @@
       </p:sp>
       <p:sp>
         <p:nvSpPr>
-          <p:cNvPr id="41" name="Text 39"/>
+          <p:cNvPr id="42" name="Text 40"/>
           <p:cNvSpPr txBox="1"/>
           <p:nvPr/>
         </p:nvSpPr>
@@ -8752,7 +8830,7 @@
       </p:sp>
       <p:sp>
         <p:nvSpPr>
-          <p:cNvPr id="42" name="Text 40"/>
+          <p:cNvPr id="43" name="Text 41"/>
           <p:cNvSpPr txBox="1"/>
           <p:nvPr/>
         </p:nvSpPr>
@@ -8791,7 +8869,7 @@
       </p:sp>
       <p:sp>
         <p:nvSpPr>
-          <p:cNvPr id="43" name="Text 41"/>
+          <p:cNvPr id="44" name="Text 42"/>
           <p:cNvSpPr txBox="1"/>
           <p:nvPr/>
         </p:nvSpPr>
@@ -8830,7 +8908,7 @@
       </p:sp>
       <p:sp>
         <p:nvSpPr>
-          <p:cNvPr id="44" name="Shape 42"/>
+          <p:cNvPr id="45" name="Shape 43"/>
           <p:cNvSpPr/>
           <p:nvPr/>
         </p:nvSpPr>
@@ -8857,7 +8935,7 @@
       </p:sp>
       <p:sp>
         <p:nvSpPr>
-          <p:cNvPr id="45" name="Shape 43"/>
+          <p:cNvPr id="46" name="Shape 44"/>
           <p:cNvSpPr/>
           <p:nvPr/>
         </p:nvSpPr>
@@ -8877,7 +8955,7 @@
       </p:sp>
       <p:sp>
         <p:nvSpPr>
-          <p:cNvPr id="46" name="Text 44"/>
+          <p:cNvPr id="47" name="Text 45"/>
           <p:cNvSpPr txBox="1"/>
           <p:nvPr/>
         </p:nvSpPr>
@@ -8916,7 +8994,7 @@
       </p:sp>
       <p:sp>
         <p:nvSpPr>
-          <p:cNvPr id="47" name="Text 45"/>
+          <p:cNvPr id="48" name="Text 46"/>
           <p:cNvSpPr txBox="1"/>
           <p:nvPr/>
         </p:nvSpPr>
@@ -8955,7 +9033,7 @@
       </p:sp>
       <p:sp>
         <p:nvSpPr>
-          <p:cNvPr id="48" name="Text 46"/>
+          <p:cNvPr id="49" name="Text 47"/>
           <p:cNvSpPr txBox="1"/>
           <p:nvPr/>
         </p:nvSpPr>
@@ -9033,7 +9111,46 @@
       </p:grpSpPr>
       <p:sp>
         <p:nvSpPr>
-          <p:cNvPr id="2" name="Shape 0"/>
+          <p:cNvPr id="2" name="Text 0"/>
+          <p:cNvSpPr txBox="1"/>
+          <p:nvPr/>
+        </p:nvSpPr>
+        <p:spPr>
+          <a:xfrm>
+            <a:off x="8808415" y="6547104"/>
+            <a:ext cx="3108960" cy="219456"/>
+          </a:xfrm>
+          <a:prstGeom prst="rect">
+            <a:avLst/>
+          </a:prstGeom>
+          <a:noFill/>
+          <a:ln/>
+        </p:spPr>
+        <p:txBody>
+          <a:bodyPr wrap="square" lIns="0" tIns="0" rIns="0" bIns="0" rtlCol="0" anchor="ctr"/>
+          <a:lstStyle/>
+          <a:p>
+            <a:pPr algn="r" indent="0" marL="0">
+              <a:buNone/>
+            </a:pPr>
+            <a:r>
+              <a:rPr lang="en-US" sz="750" spc="60" kern="0" dirty="0">
+                <a:solidFill>
+                  <a:srgbClr val="9AA6B2"/>
+                </a:solidFill>
+                <a:latin typeface="Courier New" pitchFamily="34" charset="0"/>
+                <a:ea typeface="Courier New" pitchFamily="34" charset="-122"/>
+                <a:cs typeface="Courier New" pitchFamily="34" charset="-120"/>
+              </a:rPr>
+              <a:t>BACKGROUND 03 — BLUEPRINT GRID</a:t>
+            </a:r>
+            <a:endParaRPr lang="en-US" sz="750" dirty="0"/>
+          </a:p>
+        </p:txBody>
+      </p:sp>
+      <p:sp>
+        <p:nvSpPr>
+          <p:cNvPr id="3" name="Shape 1"/>
           <p:cNvSpPr/>
           <p:nvPr/>
         </p:nvSpPr>
@@ -9058,7 +9175,7 @@
       </p:sp>
       <p:sp>
         <p:nvSpPr>
-          <p:cNvPr id="3" name="Shape 1"/>
+          <p:cNvPr id="4" name="Shape 2"/>
           <p:cNvSpPr/>
           <p:nvPr/>
         </p:nvSpPr>
@@ -9081,7 +9198,7 @@
       </p:sp>
       <p:sp>
         <p:nvSpPr>
-          <p:cNvPr id="4" name="Shape 2"/>
+          <p:cNvPr id="5" name="Shape 3"/>
           <p:cNvSpPr/>
           <p:nvPr/>
         </p:nvSpPr>
@@ -9104,7 +9221,7 @@
       </p:sp>
       <p:sp>
         <p:nvSpPr>
-          <p:cNvPr id="5" name="Shape 3"/>
+          <p:cNvPr id="6" name="Shape 4"/>
           <p:cNvSpPr/>
           <p:nvPr/>
         </p:nvSpPr>
@@ -9127,7 +9244,7 @@
       </p:sp>
       <p:sp>
         <p:nvSpPr>
-          <p:cNvPr id="6" name="Text 4"/>
+          <p:cNvPr id="7" name="Text 5"/>
           <p:cNvSpPr txBox="1"/>
           <p:nvPr/>
         </p:nvSpPr>
@@ -9166,7 +9283,7 @@
       </p:sp>
       <p:sp>
         <p:nvSpPr>
-          <p:cNvPr id="7" name="Text 5"/>
+          <p:cNvPr id="8" name="Text 6"/>
           <p:cNvSpPr txBox="1"/>
           <p:nvPr/>
         </p:nvSpPr>
@@ -9205,7 +9322,7 @@
       </p:sp>
       <p:sp>
         <p:nvSpPr>
-          <p:cNvPr id="8" name="Shape 6"/>
+          <p:cNvPr id="9" name="Shape 7"/>
           <p:cNvSpPr/>
           <p:nvPr/>
         </p:nvSpPr>
@@ -9232,7 +9349,7 @@
       </p:sp>
       <p:sp>
         <p:nvSpPr>
-          <p:cNvPr id="9" name="Text 7"/>
+          <p:cNvPr id="10" name="Text 8"/>
           <p:cNvSpPr txBox="1"/>
           <p:nvPr/>
         </p:nvSpPr>
@@ -9271,7 +9388,7 @@
       </p:sp>
       <p:sp>
         <p:nvSpPr>
-          <p:cNvPr id="10" name="Text 8"/>
+          <p:cNvPr id="11" name="Text 9"/>
           <p:cNvSpPr txBox="1"/>
           <p:nvPr/>
         </p:nvSpPr>
@@ -9310,7 +9427,7 @@
       </p:sp>
       <p:sp>
         <p:nvSpPr>
-          <p:cNvPr id="11" name="Text 9"/>
+          <p:cNvPr id="12" name="Text 10"/>
           <p:cNvSpPr txBox="1"/>
           <p:nvPr/>
         </p:nvSpPr>
@@ -9349,7 +9466,7 @@
       </p:sp>
       <p:sp>
         <p:nvSpPr>
-          <p:cNvPr id="12" name="Text 10"/>
+          <p:cNvPr id="13" name="Text 11"/>
           <p:cNvSpPr txBox="1"/>
           <p:nvPr/>
         </p:nvSpPr>
@@ -9388,7 +9505,7 @@
       </p:sp>
       <p:sp>
         <p:nvSpPr>
-          <p:cNvPr id="13" name="Shape 11"/>
+          <p:cNvPr id="14" name="Shape 12"/>
           <p:cNvSpPr/>
           <p:nvPr/>
         </p:nvSpPr>
@@ -9413,7 +9530,7 @@
       </p:sp>
       <p:sp>
         <p:nvSpPr>
-          <p:cNvPr id="14" name="Text 12"/>
+          <p:cNvPr id="15" name="Text 13"/>
           <p:cNvSpPr txBox="1"/>
           <p:nvPr/>
         </p:nvSpPr>
@@ -9452,7 +9569,7 @@
       </p:sp>
       <p:sp>
         <p:nvSpPr>
-          <p:cNvPr id="15" name="Text 13"/>
+          <p:cNvPr id="16" name="Text 14"/>
           <p:cNvSpPr txBox="1"/>
           <p:nvPr/>
         </p:nvSpPr>
@@ -9491,7 +9608,7 @@
       </p:sp>
       <p:sp>
         <p:nvSpPr>
-          <p:cNvPr id="16" name="Text 14"/>
+          <p:cNvPr id="17" name="Text 15"/>
           <p:cNvSpPr txBox="1"/>
           <p:nvPr/>
         </p:nvSpPr>
@@ -9530,7 +9647,7 @@
       </p:sp>
       <p:sp>
         <p:nvSpPr>
-          <p:cNvPr id="17" name="Shape 15"/>
+          <p:cNvPr id="18" name="Shape 16"/>
           <p:cNvSpPr/>
           <p:nvPr/>
         </p:nvSpPr>
@@ -9550,7 +9667,7 @@
       </p:sp>
       <p:sp>
         <p:nvSpPr>
-          <p:cNvPr id="18" name="Shape 16"/>
+          <p:cNvPr id="19" name="Shape 17"/>
           <p:cNvSpPr/>
           <p:nvPr/>
         </p:nvSpPr>
@@ -9570,7 +9687,7 @@
       </p:sp>
       <p:sp>
         <p:nvSpPr>
-          <p:cNvPr id="19" name="Text 17"/>
+          <p:cNvPr id="20" name="Text 18"/>
           <p:cNvSpPr txBox="1"/>
           <p:nvPr/>
         </p:nvSpPr>
@@ -9609,7 +9726,7 @@
       </p:sp>
       <p:sp>
         <p:nvSpPr>
-          <p:cNvPr id="20" name="Text 18"/>
+          <p:cNvPr id="21" name="Text 19"/>
           <p:cNvSpPr txBox="1"/>
           <p:nvPr/>
         </p:nvSpPr>
@@ -9648,7 +9765,7 @@
       </p:sp>
       <p:sp>
         <p:nvSpPr>
-          <p:cNvPr id="21" name="Text 19"/>
+          <p:cNvPr id="22" name="Text 20"/>
           <p:cNvSpPr txBox="1"/>
           <p:nvPr/>
         </p:nvSpPr>
@@ -9687,7 +9804,7 @@
       </p:sp>
       <p:sp>
         <p:nvSpPr>
-          <p:cNvPr id="22" name="Text 20"/>
+          <p:cNvPr id="23" name="Text 21"/>
           <p:cNvSpPr txBox="1"/>
           <p:nvPr/>
         </p:nvSpPr>
@@ -9726,7 +9843,7 @@
       </p:sp>
       <p:sp>
         <p:nvSpPr>
-          <p:cNvPr id="23" name="Text 21"/>
+          <p:cNvPr id="24" name="Text 22"/>
           <p:cNvSpPr txBox="1"/>
           <p:nvPr/>
         </p:nvSpPr>
@@ -9765,7 +9882,7 @@
       </p:sp>
       <p:sp>
         <p:nvSpPr>
-          <p:cNvPr id="24" name="Text 22"/>
+          <p:cNvPr id="25" name="Text 23"/>
           <p:cNvSpPr txBox="1"/>
           <p:nvPr/>
         </p:nvSpPr>
@@ -9804,7 +9921,7 @@
       </p:sp>
       <p:sp>
         <p:nvSpPr>
-          <p:cNvPr id="25" name="Text 23"/>
+          <p:cNvPr id="26" name="Text 24"/>
           <p:cNvSpPr txBox="1"/>
           <p:nvPr/>
         </p:nvSpPr>
@@ -9843,7 +9960,7 @@
       </p:sp>
       <p:sp>
         <p:nvSpPr>
-          <p:cNvPr id="26" name="Text 24"/>
+          <p:cNvPr id="27" name="Text 25"/>
           <p:cNvSpPr txBox="1"/>
           <p:nvPr/>
         </p:nvSpPr>
@@ -9882,7 +9999,7 @@
       </p:sp>
       <p:sp>
         <p:nvSpPr>
-          <p:cNvPr id="27" name="Text 25"/>
+          <p:cNvPr id="28" name="Text 26"/>
           <p:cNvSpPr txBox="1"/>
           <p:nvPr/>
         </p:nvSpPr>
@@ -9921,7 +10038,7 @@
       </p:sp>
       <p:sp>
         <p:nvSpPr>
-          <p:cNvPr id="28" name="Shape 26"/>
+          <p:cNvPr id="29" name="Shape 27"/>
           <p:cNvSpPr/>
           <p:nvPr/>
         </p:nvSpPr>
@@ -9944,7 +10061,7 @@
       </p:sp>
       <p:sp>
         <p:nvSpPr>
-          <p:cNvPr id="29" name="Shape 27"/>
+          <p:cNvPr id="30" name="Shape 28"/>
           <p:cNvSpPr/>
           <p:nvPr/>
         </p:nvSpPr>
@@ -9978,7 +10095,7 @@
       </p:sp>
       <p:sp>
         <p:nvSpPr>
-          <p:cNvPr id="30" name="Text 28"/>
+          <p:cNvPr id="31" name="Text 29"/>
           <p:cNvSpPr txBox="1"/>
           <p:nvPr/>
         </p:nvSpPr>
@@ -10017,7 +10134,7 @@
       </p:sp>
       <p:sp>
         <p:nvSpPr>
-          <p:cNvPr id="31" name="Shape 29"/>
+          <p:cNvPr id="32" name="Shape 30"/>
           <p:cNvSpPr/>
           <p:nvPr/>
         </p:nvSpPr>
@@ -10044,7 +10161,7 @@
       </p:sp>
       <p:sp>
         <p:nvSpPr>
-          <p:cNvPr id="32" name="Text 30"/>
+          <p:cNvPr id="33" name="Text 31"/>
           <p:cNvSpPr txBox="1"/>
           <p:nvPr/>
         </p:nvSpPr>
@@ -10083,7 +10200,7 @@
       </p:sp>
       <p:sp>
         <p:nvSpPr>
-          <p:cNvPr id="33" name="Text 31"/>
+          <p:cNvPr id="34" name="Text 32"/>
           <p:cNvSpPr txBox="1"/>
           <p:nvPr/>
         </p:nvSpPr>
@@ -10125,7 +10242,7 @@
       </p:sp>
       <p:sp>
         <p:nvSpPr>
-          <p:cNvPr id="34" name="Text 32"/>
+          <p:cNvPr id="35" name="Text 33"/>
           <p:cNvSpPr txBox="1"/>
           <p:nvPr/>
         </p:nvSpPr>
@@ -10167,7 +10284,7 @@
       </p:sp>
       <p:sp>
         <p:nvSpPr>
-          <p:cNvPr id="35" name="Shape 33"/>
+          <p:cNvPr id="36" name="Shape 34"/>
           <p:cNvSpPr/>
           <p:nvPr/>
         </p:nvSpPr>
@@ -10190,7 +10307,7 @@
       </p:sp>
       <p:sp>
         <p:nvSpPr>
-          <p:cNvPr id="36" name="Text 34"/>
+          <p:cNvPr id="37" name="Text 35"/>
           <p:cNvSpPr txBox="1"/>
           <p:nvPr/>
         </p:nvSpPr>
@@ -10229,7 +10346,7 @@
       </p:sp>
       <p:sp>
         <p:nvSpPr>
-          <p:cNvPr id="37" name="Text 35"/>
+          <p:cNvPr id="38" name="Text 36"/>
           <p:cNvSpPr txBox="1"/>
           <p:nvPr/>
         </p:nvSpPr>
@@ -10268,7 +10385,7 @@
       </p:sp>
       <p:sp>
         <p:nvSpPr>
-          <p:cNvPr id="38" name="Shape 36"/>
+          <p:cNvPr id="39" name="Shape 37"/>
           <p:cNvSpPr/>
           <p:nvPr/>
         </p:nvSpPr>
@@ -10302,7 +10419,7 @@
       </p:sp>
       <p:sp>
         <p:nvSpPr>
-          <p:cNvPr id="39" name="Text 37"/>
+          <p:cNvPr id="40" name="Text 38"/>
           <p:cNvSpPr txBox="1"/>
           <p:nvPr/>
         </p:nvSpPr>
@@ -10341,7 +10458,7 @@
       </p:sp>
       <p:sp>
         <p:nvSpPr>
-          <p:cNvPr id="40" name="Shape 38"/>
+          <p:cNvPr id="41" name="Shape 39"/>
           <p:cNvSpPr/>
           <p:nvPr/>
         </p:nvSpPr>
@@ -10368,7 +10485,7 @@
       </p:sp>
       <p:sp>
         <p:nvSpPr>
-          <p:cNvPr id="41" name="Text 39"/>
+          <p:cNvPr id="42" name="Text 40"/>
           <p:cNvSpPr txBox="1"/>
           <p:nvPr/>
         </p:nvSpPr>
@@ -10407,7 +10524,7 @@
       </p:sp>
       <p:sp>
         <p:nvSpPr>
-          <p:cNvPr id="42" name="Text 40"/>
+          <p:cNvPr id="43" name="Text 41"/>
           <p:cNvSpPr txBox="1"/>
           <p:nvPr/>
         </p:nvSpPr>
@@ -10449,7 +10566,7 @@
       </p:sp>
       <p:sp>
         <p:nvSpPr>
-          <p:cNvPr id="43" name="Text 41"/>
+          <p:cNvPr id="44" name="Text 42"/>
           <p:cNvSpPr txBox="1"/>
           <p:nvPr/>
         </p:nvSpPr>
@@ -10491,7 +10608,7 @@
       </p:sp>
       <p:sp>
         <p:nvSpPr>
-          <p:cNvPr id="44" name="Shape 42"/>
+          <p:cNvPr id="45" name="Shape 43"/>
           <p:cNvSpPr/>
           <p:nvPr/>
         </p:nvSpPr>
@@ -10514,7 +10631,7 @@
       </p:sp>
       <p:sp>
         <p:nvSpPr>
-          <p:cNvPr id="45" name="Text 43"/>
+          <p:cNvPr id="46" name="Text 44"/>
           <p:cNvSpPr txBox="1"/>
           <p:nvPr/>
         </p:nvSpPr>
@@ -10553,7 +10670,7 @@
       </p:sp>
       <p:sp>
         <p:nvSpPr>
-          <p:cNvPr id="46" name="Text 44"/>
+          <p:cNvPr id="47" name="Text 45"/>
           <p:cNvSpPr txBox="1"/>
           <p:nvPr/>
         </p:nvSpPr>
@@ -10592,7 +10709,7 @@
       </p:sp>
       <p:sp>
         <p:nvSpPr>
-          <p:cNvPr id="47" name="Shape 45"/>
+          <p:cNvPr id="48" name="Shape 46"/>
           <p:cNvSpPr/>
           <p:nvPr/>
         </p:nvSpPr>
@@ -10626,7 +10743,7 @@
       </p:sp>
       <p:sp>
         <p:nvSpPr>
-          <p:cNvPr id="48" name="Text 46"/>
+          <p:cNvPr id="49" name="Text 47"/>
           <p:cNvSpPr txBox="1"/>
           <p:nvPr/>
         </p:nvSpPr>
@@ -10665,7 +10782,7 @@
       </p:sp>
       <p:sp>
         <p:nvSpPr>
-          <p:cNvPr id="49" name="Shape 47"/>
+          <p:cNvPr id="50" name="Shape 48"/>
           <p:cNvSpPr/>
           <p:nvPr/>
         </p:nvSpPr>
@@ -10692,7 +10809,7 @@
       </p:sp>
       <p:sp>
         <p:nvSpPr>
-          <p:cNvPr id="50" name="Text 48"/>
+          <p:cNvPr id="51" name="Text 49"/>
           <p:cNvSpPr txBox="1"/>
           <p:nvPr/>
         </p:nvSpPr>
@@ -10731,7 +10848,7 @@
       </p:sp>
       <p:sp>
         <p:nvSpPr>
-          <p:cNvPr id="51" name="Text 49"/>
+          <p:cNvPr id="52" name="Text 50"/>
           <p:cNvSpPr txBox="1"/>
           <p:nvPr/>
         </p:nvSpPr>
@@ -10773,7 +10890,7 @@
       </p:sp>
       <p:sp>
         <p:nvSpPr>
-          <p:cNvPr id="52" name="Text 50"/>
+          <p:cNvPr id="53" name="Text 51"/>
           <p:cNvSpPr txBox="1"/>
           <p:nvPr/>
         </p:nvSpPr>
@@ -10815,7 +10932,7 @@
       </p:sp>
       <p:sp>
         <p:nvSpPr>
-          <p:cNvPr id="53" name="Shape 51"/>
+          <p:cNvPr id="54" name="Shape 52"/>
           <p:cNvSpPr/>
           <p:nvPr/>
         </p:nvSpPr>
@@ -10838,7 +10955,7 @@
       </p:sp>
       <p:sp>
         <p:nvSpPr>
-          <p:cNvPr id="54" name="Text 52"/>
+          <p:cNvPr id="55" name="Text 53"/>
           <p:cNvSpPr txBox="1"/>
           <p:nvPr/>
         </p:nvSpPr>
@@ -10877,7 +10994,7 @@
       </p:sp>
       <p:sp>
         <p:nvSpPr>
-          <p:cNvPr id="55" name="Text 53"/>
+          <p:cNvPr id="56" name="Text 54"/>
           <p:cNvSpPr txBox="1"/>
           <p:nvPr/>
         </p:nvSpPr>
@@ -10916,7 +11033,7 @@
       </p:sp>
       <p:sp>
         <p:nvSpPr>
-          <p:cNvPr id="56" name="Shape 54"/>
+          <p:cNvPr id="57" name="Shape 55"/>
           <p:cNvSpPr/>
           <p:nvPr/>
         </p:nvSpPr>
@@ -10950,7 +11067,7 @@
       </p:sp>
       <p:sp>
         <p:nvSpPr>
-          <p:cNvPr id="57" name="Text 55"/>
+          <p:cNvPr id="58" name="Text 56"/>
           <p:cNvSpPr txBox="1"/>
           <p:nvPr/>
         </p:nvSpPr>
@@ -10989,7 +11106,7 @@
       </p:sp>
       <p:sp>
         <p:nvSpPr>
-          <p:cNvPr id="58" name="Text 56"/>
+          <p:cNvPr id="59" name="Text 57"/>
           <p:cNvSpPr txBox="1"/>
           <p:nvPr/>
         </p:nvSpPr>
@@ -11031,7 +11148,7 @@
       </p:sp>
       <p:sp>
         <p:nvSpPr>
-          <p:cNvPr id="59" name="Text 57"/>
+          <p:cNvPr id="60" name="Text 58"/>
           <p:cNvSpPr txBox="1"/>
           <p:nvPr/>
         </p:nvSpPr>
@@ -11073,7 +11190,7 @@
       </p:sp>
       <p:sp>
         <p:nvSpPr>
-          <p:cNvPr id="60" name="Shape 58"/>
+          <p:cNvPr id="61" name="Shape 59"/>
           <p:cNvSpPr/>
           <p:nvPr/>
         </p:nvSpPr>
@@ -11096,7 +11213,7 @@
       </p:sp>
       <p:sp>
         <p:nvSpPr>
-          <p:cNvPr id="61" name="Text 59"/>
+          <p:cNvPr id="62" name="Text 60"/>
           <p:cNvSpPr txBox="1"/>
           <p:nvPr/>
         </p:nvSpPr>
@@ -11135,7 +11252,7 @@
       </p:sp>
       <p:sp>
         <p:nvSpPr>
-          <p:cNvPr id="62" name="Text 60"/>
+          <p:cNvPr id="63" name="Text 61"/>
           <p:cNvSpPr txBox="1"/>
           <p:nvPr/>
         </p:nvSpPr>
@@ -11174,7 +11291,7 @@
       </p:sp>
       <p:sp>
         <p:nvSpPr>
-          <p:cNvPr id="63" name="Shape 61"/>
+          <p:cNvPr id="64" name="Shape 62"/>
           <p:cNvSpPr/>
           <p:nvPr/>
         </p:nvSpPr>
@@ -11208,7 +11325,7 @@
       </p:sp>
       <p:sp>
         <p:nvSpPr>
-          <p:cNvPr id="64" name="Text 62"/>
+          <p:cNvPr id="65" name="Text 63"/>
           <p:cNvSpPr txBox="1"/>
           <p:nvPr/>
         </p:nvSpPr>
@@ -11247,7 +11364,7 @@
       </p:sp>
       <p:sp>
         <p:nvSpPr>
-          <p:cNvPr id="65" name="Shape 63"/>
+          <p:cNvPr id="66" name="Shape 64"/>
           <p:cNvSpPr/>
           <p:nvPr/>
         </p:nvSpPr>
@@ -11274,7 +11391,7 @@
       </p:sp>
       <p:sp>
         <p:nvSpPr>
-          <p:cNvPr id="66" name="Text 64"/>
+          <p:cNvPr id="67" name="Text 65"/>
           <p:cNvSpPr txBox="1"/>
           <p:nvPr/>
         </p:nvSpPr>
@@ -11313,7 +11430,7 @@
       </p:sp>
       <p:sp>
         <p:nvSpPr>
-          <p:cNvPr id="67" name="Text 65"/>
+          <p:cNvPr id="68" name="Text 66"/>
           <p:cNvSpPr txBox="1"/>
           <p:nvPr/>
         </p:nvSpPr>
@@ -11355,7 +11472,7 @@
       </p:sp>
       <p:sp>
         <p:nvSpPr>
-          <p:cNvPr id="68" name="Text 66"/>
+          <p:cNvPr id="69" name="Text 67"/>
           <p:cNvSpPr txBox="1"/>
           <p:nvPr/>
         </p:nvSpPr>
@@ -11397,7 +11514,7 @@
       </p:sp>
       <p:sp>
         <p:nvSpPr>
-          <p:cNvPr id="69" name="Shape 67"/>
+          <p:cNvPr id="70" name="Shape 68"/>
           <p:cNvSpPr/>
           <p:nvPr/>
         </p:nvSpPr>
@@ -11420,7 +11537,7 @@
       </p:sp>
       <p:sp>
         <p:nvSpPr>
-          <p:cNvPr id="70" name="Text 68"/>
+          <p:cNvPr id="71" name="Text 69"/>
           <p:cNvSpPr txBox="1"/>
           <p:nvPr/>
         </p:nvSpPr>
@@ -11459,7 +11576,7 @@
       </p:sp>
       <p:sp>
         <p:nvSpPr>
-          <p:cNvPr id="71" name="Text 69"/>
+          <p:cNvPr id="72" name="Text 70"/>
           <p:cNvSpPr txBox="1"/>
           <p:nvPr/>
         </p:nvSpPr>
@@ -11498,7 +11615,7 @@
       </p:sp>
       <p:sp>
         <p:nvSpPr>
-          <p:cNvPr id="72" name="Shape 70"/>
+          <p:cNvPr id="73" name="Shape 71"/>
           <p:cNvSpPr/>
           <p:nvPr/>
         </p:nvSpPr>
@@ -11532,7 +11649,7 @@
       </p:sp>
       <p:sp>
         <p:nvSpPr>
-          <p:cNvPr id="73" name="Text 71"/>
+          <p:cNvPr id="74" name="Text 72"/>
           <p:cNvSpPr txBox="1"/>
           <p:nvPr/>
         </p:nvSpPr>
@@ -11571,7 +11688,7 @@
       </p:sp>
       <p:sp>
         <p:nvSpPr>
-          <p:cNvPr id="74" name="Text 72"/>
+          <p:cNvPr id="75" name="Text 73"/>
           <p:cNvSpPr txBox="1"/>
           <p:nvPr/>
         </p:nvSpPr>
@@ -11613,7 +11730,7 @@
       </p:sp>
       <p:sp>
         <p:nvSpPr>
-          <p:cNvPr id="75" name="Text 73"/>
+          <p:cNvPr id="76" name="Text 74"/>
           <p:cNvSpPr txBox="1"/>
           <p:nvPr/>
         </p:nvSpPr>
@@ -11655,7 +11772,7 @@
       </p:sp>
       <p:sp>
         <p:nvSpPr>
-          <p:cNvPr id="76" name="Shape 74"/>
+          <p:cNvPr id="77" name="Shape 75"/>
           <p:cNvSpPr/>
           <p:nvPr/>
         </p:nvSpPr>
@@ -11678,7 +11795,7 @@
       </p:sp>
       <p:sp>
         <p:nvSpPr>
-          <p:cNvPr id="77" name="Text 75"/>
+          <p:cNvPr id="78" name="Text 76"/>
           <p:cNvSpPr txBox="1"/>
           <p:nvPr/>
         </p:nvSpPr>
@@ -11717,7 +11834,7 @@
       </p:sp>
       <p:sp>
         <p:nvSpPr>
-          <p:cNvPr id="78" name="Text 76"/>
+          <p:cNvPr id="79" name="Text 77"/>
           <p:cNvSpPr txBox="1"/>
           <p:nvPr/>
         </p:nvSpPr>
@@ -11795,7 +11912,46 @@
       </p:grpSpPr>
       <p:sp>
         <p:nvSpPr>
-          <p:cNvPr id="2" name="Shape 0"/>
+          <p:cNvPr id="2" name="Text 0"/>
+          <p:cNvSpPr txBox="1"/>
+          <p:nvPr/>
+        </p:nvSpPr>
+        <p:spPr>
+          <a:xfrm>
+            <a:off x="8808415" y="6547104"/>
+            <a:ext cx="3108960" cy="219456"/>
+          </a:xfrm>
+          <a:prstGeom prst="rect">
+            <a:avLst/>
+          </a:prstGeom>
+          <a:noFill/>
+          <a:ln/>
+        </p:spPr>
+        <p:txBody>
+          <a:bodyPr wrap="square" lIns="0" tIns="0" rIns="0" bIns="0" rtlCol="0" anchor="ctr"/>
+          <a:lstStyle/>
+          <a:p>
+            <a:pPr algn="r" indent="0" marL="0">
+              <a:buNone/>
+            </a:pPr>
+            <a:r>
+              <a:rPr lang="en-US" sz="750" spc="60" kern="0" dirty="0">
+                <a:solidFill>
+                  <a:srgbClr val="9AA6B2"/>
+                </a:solidFill>
+                <a:latin typeface="Courier New" pitchFamily="34" charset="0"/>
+                <a:ea typeface="Courier New" pitchFamily="34" charset="-122"/>
+                <a:cs typeface="Courier New" pitchFamily="34" charset="-120"/>
+              </a:rPr>
+              <a:t>BACKGROUND 04 — BOTTOM GLOW</a:t>
+            </a:r>
+            <a:endParaRPr lang="en-US" sz="750" dirty="0"/>
+          </a:p>
+        </p:txBody>
+      </p:sp>
+      <p:sp>
+        <p:nvSpPr>
+          <p:cNvPr id="3" name="Shape 1"/>
           <p:cNvSpPr/>
           <p:nvPr/>
         </p:nvSpPr>
@@ -11820,7 +11976,7 @@
       </p:sp>
       <p:sp>
         <p:nvSpPr>
-          <p:cNvPr id="3" name="Shape 1"/>
+          <p:cNvPr id="4" name="Shape 2"/>
           <p:cNvSpPr/>
           <p:nvPr/>
         </p:nvSpPr>
@@ -11843,7 +11999,7 @@
       </p:sp>
       <p:sp>
         <p:nvSpPr>
-          <p:cNvPr id="4" name="Shape 2"/>
+          <p:cNvPr id="5" name="Shape 3"/>
           <p:cNvSpPr/>
           <p:nvPr/>
         </p:nvSpPr>
@@ -11866,7 +12022,7 @@
       </p:sp>
       <p:sp>
         <p:nvSpPr>
-          <p:cNvPr id="5" name="Shape 3"/>
+          <p:cNvPr id="6" name="Shape 4"/>
           <p:cNvSpPr/>
           <p:nvPr/>
         </p:nvSpPr>
@@ -11889,7 +12045,7 @@
       </p:sp>
       <p:sp>
         <p:nvSpPr>
-          <p:cNvPr id="6" name="Text 4"/>
+          <p:cNvPr id="7" name="Text 5"/>
           <p:cNvSpPr txBox="1"/>
           <p:nvPr/>
         </p:nvSpPr>
@@ -11928,7 +12084,7 @@
       </p:sp>
       <p:sp>
         <p:nvSpPr>
-          <p:cNvPr id="7" name="Text 5"/>
+          <p:cNvPr id="8" name="Text 6"/>
           <p:cNvSpPr txBox="1"/>
           <p:nvPr/>
         </p:nvSpPr>
@@ -11967,7 +12123,7 @@
       </p:sp>
       <p:sp>
         <p:nvSpPr>
-          <p:cNvPr id="8" name="Shape 6"/>
+          <p:cNvPr id="9" name="Shape 7"/>
           <p:cNvSpPr/>
           <p:nvPr/>
         </p:nvSpPr>
@@ -11994,7 +12150,7 @@
       </p:sp>
       <p:sp>
         <p:nvSpPr>
-          <p:cNvPr id="9" name="Text 7"/>
+          <p:cNvPr id="10" name="Text 8"/>
           <p:cNvSpPr txBox="1"/>
           <p:nvPr/>
         </p:nvSpPr>
@@ -12033,7 +12189,7 @@
       </p:sp>
       <p:sp>
         <p:nvSpPr>
-          <p:cNvPr id="10" name="Text 8"/>
+          <p:cNvPr id="11" name="Text 9"/>
           <p:cNvSpPr txBox="1"/>
           <p:nvPr/>
         </p:nvSpPr>
@@ -12072,7 +12228,7 @@
       </p:sp>
       <p:sp>
         <p:nvSpPr>
-          <p:cNvPr id="11" name="Text 9"/>
+          <p:cNvPr id="12" name="Text 10"/>
           <p:cNvSpPr txBox="1"/>
           <p:nvPr/>
         </p:nvSpPr>
@@ -12111,7 +12267,7 @@
       </p:sp>
       <p:sp>
         <p:nvSpPr>
-          <p:cNvPr id="12" name="Text 10"/>
+          <p:cNvPr id="13" name="Text 11"/>
           <p:cNvSpPr txBox="1"/>
           <p:nvPr/>
         </p:nvSpPr>
@@ -12150,7 +12306,7 @@
       </p:sp>
       <p:sp>
         <p:nvSpPr>
-          <p:cNvPr id="13" name="Shape 11"/>
+          <p:cNvPr id="14" name="Shape 12"/>
           <p:cNvSpPr/>
           <p:nvPr/>
         </p:nvSpPr>
@@ -12175,7 +12331,7 @@
       </p:sp>
       <p:sp>
         <p:nvSpPr>
-          <p:cNvPr id="14" name="Text 12"/>
+          <p:cNvPr id="15" name="Text 13"/>
           <p:cNvSpPr txBox="1"/>
           <p:nvPr/>
         </p:nvSpPr>
@@ -12214,7 +12370,7 @@
       </p:sp>
       <p:sp>
         <p:nvSpPr>
-          <p:cNvPr id="15" name="Text 13"/>
+          <p:cNvPr id="16" name="Text 14"/>
           <p:cNvSpPr txBox="1"/>
           <p:nvPr/>
         </p:nvSpPr>
@@ -12253,7 +12409,7 @@
       </p:sp>
       <p:sp>
         <p:nvSpPr>
-          <p:cNvPr id="16" name="Text 14"/>
+          <p:cNvPr id="17" name="Text 15"/>
           <p:cNvSpPr txBox="1"/>
           <p:nvPr/>
         </p:nvSpPr>
@@ -12292,7 +12448,7 @@
       </p:sp>
       <p:sp>
         <p:nvSpPr>
-          <p:cNvPr id="17" name="Text 15"/>
+          <p:cNvPr id="18" name="Text 16"/>
           <p:cNvSpPr txBox="1"/>
           <p:nvPr/>
         </p:nvSpPr>
@@ -12331,7 +12487,7 @@
       </p:sp>
       <p:sp>
         <p:nvSpPr>
-          <p:cNvPr id="18" name="Shape 16"/>
+          <p:cNvPr id="19" name="Shape 17"/>
           <p:cNvSpPr/>
           <p:nvPr/>
         </p:nvSpPr>
@@ -12351,7 +12507,7 @@
       </p:sp>
       <p:sp>
         <p:nvSpPr>
-          <p:cNvPr id="19" name="Shape 17"/>
+          <p:cNvPr id="20" name="Shape 18"/>
           <p:cNvSpPr/>
           <p:nvPr/>
         </p:nvSpPr>
@@ -12371,7 +12527,7 @@
       </p:sp>
       <p:sp>
         <p:nvSpPr>
-          <p:cNvPr id="20" name="Text 18"/>
+          <p:cNvPr id="21" name="Text 19"/>
           <p:cNvSpPr txBox="1"/>
           <p:nvPr/>
         </p:nvSpPr>
@@ -12410,7 +12566,7 @@
       </p:sp>
       <p:sp>
         <p:nvSpPr>
-          <p:cNvPr id="21" name="Text 19"/>
+          <p:cNvPr id="22" name="Text 20"/>
           <p:cNvSpPr txBox="1"/>
           <p:nvPr/>
         </p:nvSpPr>
@@ -12449,7 +12605,7 @@
       </p:sp>
       <p:sp>
         <p:nvSpPr>
-          <p:cNvPr id="22" name="Text 20"/>
+          <p:cNvPr id="23" name="Text 21"/>
           <p:cNvSpPr txBox="1"/>
           <p:nvPr/>
         </p:nvSpPr>
@@ -12488,7 +12644,7 @@
       </p:sp>
       <p:sp>
         <p:nvSpPr>
-          <p:cNvPr id="23" name="Text 21"/>
+          <p:cNvPr id="24" name="Text 22"/>
           <p:cNvSpPr txBox="1"/>
           <p:nvPr/>
         </p:nvSpPr>
@@ -12527,7 +12683,7 @@
       </p:sp>
       <p:sp>
         <p:nvSpPr>
-          <p:cNvPr id="24" name="Text 22"/>
+          <p:cNvPr id="25" name="Text 23"/>
           <p:cNvSpPr txBox="1"/>
           <p:nvPr/>
         </p:nvSpPr>
@@ -12566,7 +12722,7 @@
       </p:sp>
       <p:sp>
         <p:nvSpPr>
-          <p:cNvPr id="25" name="Text 23"/>
+          <p:cNvPr id="26" name="Text 24"/>
           <p:cNvSpPr txBox="1"/>
           <p:nvPr/>
         </p:nvSpPr>
@@ -12605,7 +12761,7 @@
       </p:sp>
       <p:sp>
         <p:nvSpPr>
-          <p:cNvPr id="26" name="Text 24"/>
+          <p:cNvPr id="27" name="Text 25"/>
           <p:cNvSpPr txBox="1"/>
           <p:nvPr/>
         </p:nvSpPr>
@@ -12644,7 +12800,7 @@
       </p:sp>
       <p:sp>
         <p:nvSpPr>
-          <p:cNvPr id="27" name="Text 25"/>
+          <p:cNvPr id="28" name="Text 26"/>
           <p:cNvSpPr txBox="1"/>
           <p:nvPr/>
         </p:nvSpPr>
@@ -12683,7 +12839,7 @@
       </p:sp>
       <p:sp>
         <p:nvSpPr>
-          <p:cNvPr id="28" name="Shape 26"/>
+          <p:cNvPr id="29" name="Shape 27"/>
           <p:cNvSpPr/>
           <p:nvPr/>
         </p:nvSpPr>
@@ -12706,7 +12862,7 @@
       </p:sp>
       <p:sp>
         <p:nvSpPr>
-          <p:cNvPr id="29" name="Shape 27"/>
+          <p:cNvPr id="30" name="Shape 28"/>
           <p:cNvSpPr/>
           <p:nvPr/>
         </p:nvSpPr>
@@ -12740,7 +12896,7 @@
       </p:sp>
       <p:sp>
         <p:nvSpPr>
-          <p:cNvPr id="30" name="Text 28"/>
+          <p:cNvPr id="31" name="Text 29"/>
           <p:cNvSpPr txBox="1"/>
           <p:nvPr/>
         </p:nvSpPr>
@@ -12779,7 +12935,7 @@
       </p:sp>
       <p:sp>
         <p:nvSpPr>
-          <p:cNvPr id="31" name="Shape 29"/>
+          <p:cNvPr id="32" name="Shape 30"/>
           <p:cNvSpPr/>
           <p:nvPr/>
         </p:nvSpPr>
@@ -12806,7 +12962,7 @@
       </p:sp>
       <p:sp>
         <p:nvSpPr>
-          <p:cNvPr id="32" name="Text 30"/>
+          <p:cNvPr id="33" name="Text 31"/>
           <p:cNvSpPr txBox="1"/>
           <p:nvPr/>
         </p:nvSpPr>
@@ -12845,7 +13001,7 @@
       </p:sp>
       <p:sp>
         <p:nvSpPr>
-          <p:cNvPr id="33" name="Text 31"/>
+          <p:cNvPr id="34" name="Text 32"/>
           <p:cNvSpPr txBox="1"/>
           <p:nvPr/>
         </p:nvSpPr>
@@ -12887,7 +13043,7 @@
       </p:sp>
       <p:sp>
         <p:nvSpPr>
-          <p:cNvPr id="34" name="Text 32"/>
+          <p:cNvPr id="35" name="Text 33"/>
           <p:cNvSpPr txBox="1"/>
           <p:nvPr/>
         </p:nvSpPr>
@@ -12929,7 +13085,7 @@
       </p:sp>
       <p:sp>
         <p:nvSpPr>
-          <p:cNvPr id="35" name="Shape 33"/>
+          <p:cNvPr id="36" name="Shape 34"/>
           <p:cNvSpPr/>
           <p:nvPr/>
         </p:nvSpPr>
@@ -12952,7 +13108,7 @@
       </p:sp>
       <p:sp>
         <p:nvSpPr>
-          <p:cNvPr id="36" name="Text 34"/>
+          <p:cNvPr id="37" name="Text 35"/>
           <p:cNvSpPr txBox="1"/>
           <p:nvPr/>
         </p:nvSpPr>
@@ -12991,7 +13147,7 @@
       </p:sp>
       <p:sp>
         <p:nvSpPr>
-          <p:cNvPr id="37" name="Text 35"/>
+          <p:cNvPr id="38" name="Text 36"/>
           <p:cNvSpPr txBox="1"/>
           <p:nvPr/>
         </p:nvSpPr>
@@ -13030,7 +13186,7 @@
       </p:sp>
       <p:sp>
         <p:nvSpPr>
-          <p:cNvPr id="38" name="Shape 36"/>
+          <p:cNvPr id="39" name="Shape 37"/>
           <p:cNvSpPr/>
           <p:nvPr/>
         </p:nvSpPr>
@@ -13064,7 +13220,7 @@
       </p:sp>
       <p:sp>
         <p:nvSpPr>
-          <p:cNvPr id="39" name="Text 37"/>
+          <p:cNvPr id="40" name="Text 38"/>
           <p:cNvSpPr txBox="1"/>
           <p:nvPr/>
         </p:nvSpPr>
@@ -13103,7 +13259,7 @@
       </p:sp>
       <p:sp>
         <p:nvSpPr>
-          <p:cNvPr id="40" name="Text 38"/>
+          <p:cNvPr id="41" name="Text 39"/>
           <p:cNvSpPr txBox="1"/>
           <p:nvPr/>
         </p:nvSpPr>
@@ -13145,7 +13301,7 @@
       </p:sp>
       <p:sp>
         <p:nvSpPr>
-          <p:cNvPr id="41" name="Text 39"/>
+          <p:cNvPr id="42" name="Text 40"/>
           <p:cNvSpPr txBox="1"/>
           <p:nvPr/>
         </p:nvSpPr>
@@ -13187,7 +13343,7 @@
       </p:sp>
       <p:sp>
         <p:nvSpPr>
-          <p:cNvPr id="42" name="Shape 40"/>
+          <p:cNvPr id="43" name="Shape 41"/>
           <p:cNvSpPr/>
           <p:nvPr/>
         </p:nvSpPr>
@@ -13210,7 +13366,7 @@
       </p:sp>
       <p:sp>
         <p:nvSpPr>
-          <p:cNvPr id="43" name="Text 41"/>
+          <p:cNvPr id="44" name="Text 42"/>
           <p:cNvSpPr txBox="1"/>
           <p:nvPr/>
         </p:nvSpPr>
@@ -13249,7 +13405,7 @@
       </p:sp>
       <p:sp>
         <p:nvSpPr>
-          <p:cNvPr id="44" name="Text 42"/>
+          <p:cNvPr id="45" name="Text 43"/>
           <p:cNvSpPr txBox="1"/>
           <p:nvPr/>
         </p:nvSpPr>
@@ -13288,7 +13444,7 @@
       </p:sp>
       <p:sp>
         <p:nvSpPr>
-          <p:cNvPr id="45" name="Shape 43"/>
+          <p:cNvPr id="46" name="Shape 44"/>
           <p:cNvSpPr/>
           <p:nvPr/>
         </p:nvSpPr>
@@ -13322,7 +13478,7 @@
       </p:sp>
       <p:sp>
         <p:nvSpPr>
-          <p:cNvPr id="46" name="Text 44"/>
+          <p:cNvPr id="47" name="Text 45"/>
           <p:cNvSpPr txBox="1"/>
           <p:nvPr/>
         </p:nvSpPr>
@@ -13361,7 +13517,7 @@
       </p:sp>
       <p:sp>
         <p:nvSpPr>
-          <p:cNvPr id="47" name="Text 45"/>
+          <p:cNvPr id="48" name="Text 46"/>
           <p:cNvSpPr txBox="1"/>
           <p:nvPr/>
         </p:nvSpPr>
@@ -13403,7 +13559,7 @@
       </p:sp>
       <p:sp>
         <p:nvSpPr>
-          <p:cNvPr id="48" name="Text 46"/>
+          <p:cNvPr id="49" name="Text 47"/>
           <p:cNvSpPr txBox="1"/>
           <p:nvPr/>
         </p:nvSpPr>
@@ -13445,7 +13601,7 @@
       </p:sp>
       <p:sp>
         <p:nvSpPr>
-          <p:cNvPr id="49" name="Shape 47"/>
+          <p:cNvPr id="50" name="Shape 48"/>
           <p:cNvSpPr/>
           <p:nvPr/>
         </p:nvSpPr>
@@ -13468,7 +13624,7 @@
       </p:sp>
       <p:sp>
         <p:nvSpPr>
-          <p:cNvPr id="50" name="Text 48"/>
+          <p:cNvPr id="51" name="Text 49"/>
           <p:cNvSpPr txBox="1"/>
           <p:nvPr/>
         </p:nvSpPr>
@@ -13507,7 +13663,7 @@
       </p:sp>
       <p:sp>
         <p:nvSpPr>
-          <p:cNvPr id="51" name="Text 49"/>
+          <p:cNvPr id="52" name="Text 50"/>
           <p:cNvSpPr txBox="1"/>
           <p:nvPr/>
         </p:nvSpPr>
@@ -13546,7 +13702,7 @@
       </p:sp>
       <p:sp>
         <p:nvSpPr>
-          <p:cNvPr id="52" name="Shape 50"/>
+          <p:cNvPr id="53" name="Shape 51"/>
           <p:cNvSpPr/>
           <p:nvPr/>
         </p:nvSpPr>
@@ -13580,7 +13736,7 @@
       </p:sp>
       <p:sp>
         <p:nvSpPr>
-          <p:cNvPr id="53" name="Text 51"/>
+          <p:cNvPr id="54" name="Text 52"/>
           <p:cNvSpPr txBox="1"/>
           <p:nvPr/>
         </p:nvSpPr>
@@ -13619,7 +13775,7 @@
       </p:sp>
       <p:sp>
         <p:nvSpPr>
-          <p:cNvPr id="54" name="Text 52"/>
+          <p:cNvPr id="55" name="Text 53"/>
           <p:cNvSpPr txBox="1"/>
           <p:nvPr/>
         </p:nvSpPr>
@@ -13661,7 +13817,7 @@
       </p:sp>
       <p:sp>
         <p:nvSpPr>
-          <p:cNvPr id="55" name="Text 53"/>
+          <p:cNvPr id="56" name="Text 54"/>
           <p:cNvSpPr txBox="1"/>
           <p:nvPr/>
         </p:nvSpPr>
@@ -13703,7 +13859,7 @@
       </p:sp>
       <p:sp>
         <p:nvSpPr>
-          <p:cNvPr id="56" name="Shape 54"/>
+          <p:cNvPr id="57" name="Shape 55"/>
           <p:cNvSpPr/>
           <p:nvPr/>
         </p:nvSpPr>
@@ -13726,7 +13882,7 @@
       </p:sp>
       <p:sp>
         <p:nvSpPr>
-          <p:cNvPr id="57" name="Text 55"/>
+          <p:cNvPr id="58" name="Text 56"/>
           <p:cNvSpPr txBox="1"/>
           <p:nvPr/>
         </p:nvSpPr>
@@ -13765,7 +13921,7 @@
       </p:sp>
       <p:sp>
         <p:nvSpPr>
-          <p:cNvPr id="58" name="Text 56"/>
+          <p:cNvPr id="59" name="Text 57"/>
           <p:cNvSpPr txBox="1"/>
           <p:nvPr/>
         </p:nvSpPr>
@@ -13804,7 +13960,7 @@
       </p:sp>
       <p:sp>
         <p:nvSpPr>
-          <p:cNvPr id="59" name="Shape 57"/>
+          <p:cNvPr id="60" name="Shape 58"/>
           <p:cNvSpPr/>
           <p:nvPr/>
         </p:nvSpPr>
@@ -13838,7 +13994,7 @@
       </p:sp>
       <p:sp>
         <p:nvSpPr>
-          <p:cNvPr id="60" name="Text 58"/>
+          <p:cNvPr id="61" name="Text 59"/>
           <p:cNvSpPr txBox="1"/>
           <p:nvPr/>
         </p:nvSpPr>
@@ -13877,7 +14033,7 @@
       </p:sp>
       <p:sp>
         <p:nvSpPr>
-          <p:cNvPr id="61" name="Shape 59"/>
+          <p:cNvPr id="62" name="Shape 60"/>
           <p:cNvSpPr/>
           <p:nvPr/>
         </p:nvSpPr>
@@ -13904,7 +14060,7 @@
       </p:sp>
       <p:sp>
         <p:nvSpPr>
-          <p:cNvPr id="62" name="Text 60"/>
+          <p:cNvPr id="63" name="Text 61"/>
           <p:cNvSpPr txBox="1"/>
           <p:nvPr/>
         </p:nvSpPr>
@@ -13943,7 +14099,7 @@
       </p:sp>
       <p:sp>
         <p:nvSpPr>
-          <p:cNvPr id="63" name="Text 61"/>
+          <p:cNvPr id="64" name="Text 62"/>
           <p:cNvSpPr txBox="1"/>
           <p:nvPr/>
         </p:nvSpPr>
@@ -13985,7 +14141,7 @@
       </p:sp>
       <p:sp>
         <p:nvSpPr>
-          <p:cNvPr id="64" name="Text 62"/>
+          <p:cNvPr id="65" name="Text 63"/>
           <p:cNvSpPr txBox="1"/>
           <p:nvPr/>
         </p:nvSpPr>
@@ -14027,7 +14183,7 @@
       </p:sp>
       <p:sp>
         <p:nvSpPr>
-          <p:cNvPr id="65" name="Shape 63"/>
+          <p:cNvPr id="66" name="Shape 64"/>
           <p:cNvSpPr/>
           <p:nvPr/>
         </p:nvSpPr>
@@ -14050,7 +14206,7 @@
       </p:sp>
       <p:sp>
         <p:nvSpPr>
-          <p:cNvPr id="66" name="Text 64"/>
+          <p:cNvPr id="67" name="Text 65"/>
           <p:cNvSpPr txBox="1"/>
           <p:nvPr/>
         </p:nvSpPr>
@@ -14089,7 +14245,7 @@
       </p:sp>
       <p:sp>
         <p:nvSpPr>
-          <p:cNvPr id="67" name="Text 65"/>
+          <p:cNvPr id="68" name="Text 66"/>
           <p:cNvSpPr txBox="1"/>
           <p:nvPr/>
         </p:nvSpPr>
@@ -14128,7 +14284,7 @@
       </p:sp>
       <p:sp>
         <p:nvSpPr>
-          <p:cNvPr id="68" name="Shape 66"/>
+          <p:cNvPr id="69" name="Shape 67"/>
           <p:cNvSpPr/>
           <p:nvPr/>
         </p:nvSpPr>
@@ -14162,7 +14318,7 @@
       </p:sp>
       <p:sp>
         <p:nvSpPr>
-          <p:cNvPr id="69" name="Text 67"/>
+          <p:cNvPr id="70" name="Text 68"/>
           <p:cNvSpPr txBox="1"/>
           <p:nvPr/>
         </p:nvSpPr>
@@ -14201,7 +14357,7 @@
       </p:sp>
       <p:sp>
         <p:nvSpPr>
-          <p:cNvPr id="70" name="Text 68"/>
+          <p:cNvPr id="71" name="Text 69"/>
           <p:cNvSpPr txBox="1"/>
           <p:nvPr/>
         </p:nvSpPr>
@@ -14243,7 +14399,7 @@
       </p:sp>
       <p:sp>
         <p:nvSpPr>
-          <p:cNvPr id="71" name="Text 69"/>
+          <p:cNvPr id="72" name="Text 70"/>
           <p:cNvSpPr txBox="1"/>
           <p:nvPr/>
         </p:nvSpPr>
@@ -14285,7 +14441,7 @@
       </p:sp>
       <p:sp>
         <p:nvSpPr>
-          <p:cNvPr id="72" name="Shape 70"/>
+          <p:cNvPr id="73" name="Shape 71"/>
           <p:cNvSpPr/>
           <p:nvPr/>
         </p:nvSpPr>
@@ -14308,7 +14464,7 @@
       </p:sp>
       <p:sp>
         <p:nvSpPr>
-          <p:cNvPr id="73" name="Text 71"/>
+          <p:cNvPr id="74" name="Text 72"/>
           <p:cNvSpPr txBox="1"/>
           <p:nvPr/>
         </p:nvSpPr>
@@ -14347,7 +14503,7 @@
       </p:sp>
       <p:sp>
         <p:nvSpPr>
-          <p:cNvPr id="74" name="Text 72"/>
+          <p:cNvPr id="75" name="Text 73"/>
           <p:cNvSpPr txBox="1"/>
           <p:nvPr/>
         </p:nvSpPr>
@@ -14425,7 +14581,46 @@
       </p:grpSpPr>
       <p:sp>
         <p:nvSpPr>
-          <p:cNvPr id="2" name="Shape 0"/>
+          <p:cNvPr id="2" name="Text 0"/>
+          <p:cNvSpPr txBox="1"/>
+          <p:nvPr/>
+        </p:nvSpPr>
+        <p:spPr>
+          <a:xfrm>
+            <a:off x="8808415" y="6547104"/>
+            <a:ext cx="3108960" cy="219456"/>
+          </a:xfrm>
+          <a:prstGeom prst="rect">
+            <a:avLst/>
+          </a:prstGeom>
+          <a:noFill/>
+          <a:ln/>
+        </p:spPr>
+        <p:txBody>
+          <a:bodyPr wrap="square" lIns="0" tIns="0" rIns="0" bIns="0" rtlCol="0" anchor="ctr"/>
+          <a:lstStyle/>
+          <a:p>
+            <a:pPr algn="r" indent="0" marL="0">
+              <a:buNone/>
+            </a:pPr>
+            <a:r>
+              <a:rPr lang="en-US" sz="750" spc="60" kern="0" dirty="0">
+                <a:solidFill>
+                  <a:srgbClr val="9AA6B2"/>
+                </a:solidFill>
+                <a:latin typeface="Courier New" pitchFamily="34" charset="0"/>
+                <a:ea typeface="Courier New" pitchFamily="34" charset="-122"/>
+                <a:cs typeface="Courier New" pitchFamily="34" charset="-120"/>
+              </a:rPr>
+              <a:t>BACKGROUND 05 — VIGNETTE</a:t>
+            </a:r>
+            <a:endParaRPr lang="en-US" sz="750" dirty="0"/>
+          </a:p>
+        </p:txBody>
+      </p:sp>
+      <p:sp>
+        <p:nvSpPr>
+          <p:cNvPr id="3" name="Shape 1"/>
           <p:cNvSpPr/>
           <p:nvPr/>
         </p:nvSpPr>
@@ -14450,7 +14645,7 @@
       </p:sp>
       <p:sp>
         <p:nvSpPr>
-          <p:cNvPr id="3" name="Shape 1"/>
+          <p:cNvPr id="4" name="Shape 2"/>
           <p:cNvSpPr/>
           <p:nvPr/>
         </p:nvSpPr>
@@ -14473,7 +14668,7 @@
       </p:sp>
       <p:sp>
         <p:nvSpPr>
-          <p:cNvPr id="4" name="Shape 2"/>
+          <p:cNvPr id="5" name="Shape 3"/>
           <p:cNvSpPr/>
           <p:nvPr/>
         </p:nvSpPr>
@@ -14496,7 +14691,7 @@
       </p:sp>
       <p:sp>
         <p:nvSpPr>
-          <p:cNvPr id="5" name="Shape 3"/>
+          <p:cNvPr id="6" name="Shape 4"/>
           <p:cNvSpPr/>
           <p:nvPr/>
         </p:nvSpPr>
@@ -14519,7 +14714,7 @@
       </p:sp>
       <p:sp>
         <p:nvSpPr>
-          <p:cNvPr id="6" name="Text 4"/>
+          <p:cNvPr id="7" name="Text 5"/>
           <p:cNvSpPr txBox="1"/>
           <p:nvPr/>
         </p:nvSpPr>
@@ -14558,7 +14753,7 @@
       </p:sp>
       <p:sp>
         <p:nvSpPr>
-          <p:cNvPr id="7" name="Text 5"/>
+          <p:cNvPr id="8" name="Text 6"/>
           <p:cNvSpPr txBox="1"/>
           <p:nvPr/>
         </p:nvSpPr>
@@ -14597,7 +14792,7 @@
       </p:sp>
       <p:sp>
         <p:nvSpPr>
-          <p:cNvPr id="8" name="Shape 6"/>
+          <p:cNvPr id="9" name="Shape 7"/>
           <p:cNvSpPr/>
           <p:nvPr/>
         </p:nvSpPr>
@@ -14624,7 +14819,7 @@
       </p:sp>
       <p:sp>
         <p:nvSpPr>
-          <p:cNvPr id="9" name="Text 7"/>
+          <p:cNvPr id="10" name="Text 8"/>
           <p:cNvSpPr txBox="1"/>
           <p:nvPr/>
         </p:nvSpPr>
@@ -14663,7 +14858,7 @@
       </p:sp>
       <p:sp>
         <p:nvSpPr>
-          <p:cNvPr id="10" name="Text 8"/>
+          <p:cNvPr id="11" name="Text 9"/>
           <p:cNvSpPr txBox="1"/>
           <p:nvPr/>
         </p:nvSpPr>
@@ -14702,7 +14897,7 @@
       </p:sp>
       <p:sp>
         <p:nvSpPr>
-          <p:cNvPr id="11" name="Text 9"/>
+          <p:cNvPr id="12" name="Text 10"/>
           <p:cNvSpPr txBox="1"/>
           <p:nvPr/>
         </p:nvSpPr>
@@ -14741,7 +14936,7 @@
       </p:sp>
       <p:sp>
         <p:nvSpPr>
-          <p:cNvPr id="12" name="Text 10"/>
+          <p:cNvPr id="13" name="Text 11"/>
           <p:cNvSpPr txBox="1"/>
           <p:nvPr/>
         </p:nvSpPr>
@@ -14780,7 +14975,7 @@
       </p:sp>
       <p:sp>
         <p:nvSpPr>
-          <p:cNvPr id="13" name="Shape 11"/>
+          <p:cNvPr id="14" name="Shape 12"/>
           <p:cNvSpPr/>
           <p:nvPr/>
         </p:nvSpPr>
@@ -14805,7 +15000,7 @@
       </p:sp>
       <p:sp>
         <p:nvSpPr>
-          <p:cNvPr id="14" name="Text 12"/>
+          <p:cNvPr id="15" name="Text 13"/>
           <p:cNvSpPr txBox="1"/>
           <p:nvPr/>
         </p:nvSpPr>
@@ -14844,7 +15039,7 @@
       </p:sp>
       <p:sp>
         <p:nvSpPr>
-          <p:cNvPr id="15" name="Text 13"/>
+          <p:cNvPr id="16" name="Text 14"/>
           <p:cNvSpPr txBox="1"/>
           <p:nvPr/>
         </p:nvSpPr>
@@ -14883,7 +15078,7 @@
       </p:sp>
       <p:sp>
         <p:nvSpPr>
-          <p:cNvPr id="16" name="Text 14"/>
+          <p:cNvPr id="17" name="Text 15"/>
           <p:cNvSpPr txBox="1"/>
           <p:nvPr/>
         </p:nvSpPr>
@@ -14922,7 +15117,7 @@
       </p:sp>
       <p:sp>
         <p:nvSpPr>
-          <p:cNvPr id="17" name="Text 15"/>
+          <p:cNvPr id="18" name="Text 16"/>
           <p:cNvSpPr txBox="1"/>
           <p:nvPr/>
         </p:nvSpPr>
@@ -14961,7 +15156,7 @@
       </p:sp>
       <p:sp>
         <p:nvSpPr>
-          <p:cNvPr id="18" name="Text 16"/>
+          <p:cNvPr id="19" name="Text 17"/>
           <p:cNvSpPr txBox="1"/>
           <p:nvPr/>
         </p:nvSpPr>
@@ -15000,7 +15195,7 @@
       </p:sp>
       <p:sp>
         <p:nvSpPr>
-          <p:cNvPr id="19" name="Shape 17"/>
+          <p:cNvPr id="20" name="Shape 18"/>
           <p:cNvSpPr/>
           <p:nvPr/>
         </p:nvSpPr>
@@ -15020,7 +15215,7 @@
       </p:sp>
       <p:sp>
         <p:nvSpPr>
-          <p:cNvPr id="20" name="Shape 18"/>
+          <p:cNvPr id="21" name="Shape 19"/>
           <p:cNvSpPr/>
           <p:nvPr/>
         </p:nvSpPr>
@@ -15040,7 +15235,7 @@
       </p:sp>
       <p:sp>
         <p:nvSpPr>
-          <p:cNvPr id="21" name="Text 19"/>
+          <p:cNvPr id="22" name="Text 20"/>
           <p:cNvSpPr txBox="1"/>
           <p:nvPr/>
         </p:nvSpPr>
@@ -15079,7 +15274,7 @@
       </p:sp>
       <p:sp>
         <p:nvSpPr>
-          <p:cNvPr id="22" name="Text 20"/>
+          <p:cNvPr id="23" name="Text 21"/>
           <p:cNvSpPr txBox="1"/>
           <p:nvPr/>
         </p:nvSpPr>
@@ -15118,7 +15313,7 @@
       </p:sp>
       <p:sp>
         <p:nvSpPr>
-          <p:cNvPr id="23" name="Text 21"/>
+          <p:cNvPr id="24" name="Text 22"/>
           <p:cNvSpPr txBox="1"/>
           <p:nvPr/>
         </p:nvSpPr>
@@ -15157,7 +15352,7 @@
       </p:sp>
       <p:sp>
         <p:nvSpPr>
-          <p:cNvPr id="24" name="Text 22"/>
+          <p:cNvPr id="25" name="Text 23"/>
           <p:cNvSpPr txBox="1"/>
           <p:nvPr/>
         </p:nvSpPr>
@@ -15196,7 +15391,7 @@
       </p:sp>
       <p:sp>
         <p:nvSpPr>
-          <p:cNvPr id="25" name="Text 23"/>
+          <p:cNvPr id="26" name="Text 24"/>
           <p:cNvSpPr txBox="1"/>
           <p:nvPr/>
         </p:nvSpPr>
@@ -15235,7 +15430,7 @@
       </p:sp>
       <p:sp>
         <p:nvSpPr>
-          <p:cNvPr id="26" name="Text 24"/>
+          <p:cNvPr id="27" name="Text 25"/>
           <p:cNvSpPr txBox="1"/>
           <p:nvPr/>
         </p:nvSpPr>
@@ -15274,7 +15469,7 @@
       </p:sp>
       <p:sp>
         <p:nvSpPr>
-          <p:cNvPr id="27" name="Text 25"/>
+          <p:cNvPr id="28" name="Text 26"/>
           <p:cNvSpPr txBox="1"/>
           <p:nvPr/>
         </p:nvSpPr>
@@ -15313,7 +15508,7 @@
       </p:sp>
       <p:sp>
         <p:nvSpPr>
-          <p:cNvPr id="28" name="Shape 26"/>
+          <p:cNvPr id="29" name="Shape 27"/>
           <p:cNvSpPr/>
           <p:nvPr/>
         </p:nvSpPr>
@@ -15336,7 +15531,7 @@
       </p:sp>
       <p:sp>
         <p:nvSpPr>
-          <p:cNvPr id="29" name="Shape 27"/>
+          <p:cNvPr id="30" name="Shape 28"/>
           <p:cNvSpPr/>
           <p:nvPr/>
         </p:nvSpPr>
@@ -15370,7 +15565,7 @@
       </p:sp>
       <p:sp>
         <p:nvSpPr>
-          <p:cNvPr id="30" name="Text 28"/>
+          <p:cNvPr id="31" name="Text 29"/>
           <p:cNvSpPr txBox="1"/>
           <p:nvPr/>
         </p:nvSpPr>
@@ -15409,7 +15604,7 @@
       </p:sp>
       <p:sp>
         <p:nvSpPr>
-          <p:cNvPr id="31" name="Shape 29"/>
+          <p:cNvPr id="32" name="Shape 30"/>
           <p:cNvSpPr/>
           <p:nvPr/>
         </p:nvSpPr>
@@ -15436,7 +15631,7 @@
       </p:sp>
       <p:sp>
         <p:nvSpPr>
-          <p:cNvPr id="32" name="Text 30"/>
+          <p:cNvPr id="33" name="Text 31"/>
           <p:cNvSpPr txBox="1"/>
           <p:nvPr/>
         </p:nvSpPr>
@@ -15475,7 +15670,7 @@
       </p:sp>
       <p:sp>
         <p:nvSpPr>
-          <p:cNvPr id="33" name="Text 31"/>
+          <p:cNvPr id="34" name="Text 32"/>
           <p:cNvSpPr txBox="1"/>
           <p:nvPr/>
         </p:nvSpPr>
@@ -15517,7 +15712,7 @@
       </p:sp>
       <p:sp>
         <p:nvSpPr>
-          <p:cNvPr id="34" name="Text 32"/>
+          <p:cNvPr id="35" name="Text 33"/>
           <p:cNvSpPr txBox="1"/>
           <p:nvPr/>
         </p:nvSpPr>
@@ -15559,7 +15754,7 @@
       </p:sp>
       <p:sp>
         <p:nvSpPr>
-          <p:cNvPr id="35" name="Shape 33"/>
+          <p:cNvPr id="36" name="Shape 34"/>
           <p:cNvSpPr/>
           <p:nvPr/>
         </p:nvSpPr>
@@ -15582,7 +15777,7 @@
       </p:sp>
       <p:sp>
         <p:nvSpPr>
-          <p:cNvPr id="36" name="Text 34"/>
+          <p:cNvPr id="37" name="Text 35"/>
           <p:cNvSpPr txBox="1"/>
           <p:nvPr/>
         </p:nvSpPr>
@@ -15621,7 +15816,7 @@
       </p:sp>
       <p:sp>
         <p:nvSpPr>
-          <p:cNvPr id="37" name="Text 35"/>
+          <p:cNvPr id="38" name="Text 36"/>
           <p:cNvSpPr txBox="1"/>
           <p:nvPr/>
         </p:nvSpPr>
@@ -15660,7 +15855,7 @@
       </p:sp>
       <p:sp>
         <p:nvSpPr>
-          <p:cNvPr id="38" name="Shape 36"/>
+          <p:cNvPr id="39" name="Shape 37"/>
           <p:cNvSpPr/>
           <p:nvPr/>
         </p:nvSpPr>
@@ -15694,7 +15889,7 @@
       </p:sp>
       <p:sp>
         <p:nvSpPr>
-          <p:cNvPr id="39" name="Text 37"/>
+          <p:cNvPr id="40" name="Text 38"/>
           <p:cNvSpPr txBox="1"/>
           <p:nvPr/>
         </p:nvSpPr>
@@ -15733,7 +15928,7 @@
       </p:sp>
       <p:sp>
         <p:nvSpPr>
-          <p:cNvPr id="40" name="Text 38"/>
+          <p:cNvPr id="41" name="Text 39"/>
           <p:cNvSpPr txBox="1"/>
           <p:nvPr/>
         </p:nvSpPr>
@@ -15775,7 +15970,7 @@
       </p:sp>
       <p:sp>
         <p:nvSpPr>
-          <p:cNvPr id="41" name="Text 39"/>
+          <p:cNvPr id="42" name="Text 40"/>
           <p:cNvSpPr txBox="1"/>
           <p:nvPr/>
         </p:nvSpPr>
@@ -15817,7 +16012,7 @@
       </p:sp>
       <p:sp>
         <p:nvSpPr>
-          <p:cNvPr id="42" name="Shape 40"/>
+          <p:cNvPr id="43" name="Shape 41"/>
           <p:cNvSpPr/>
           <p:nvPr/>
         </p:nvSpPr>
@@ -15840,7 +16035,7 @@
       </p:sp>
       <p:sp>
         <p:nvSpPr>
-          <p:cNvPr id="43" name="Text 41"/>
+          <p:cNvPr id="44" name="Text 42"/>
           <p:cNvSpPr txBox="1"/>
           <p:nvPr/>
         </p:nvSpPr>
@@ -15879,7 +16074,7 @@
       </p:sp>
       <p:sp>
         <p:nvSpPr>
-          <p:cNvPr id="44" name="Text 42"/>
+          <p:cNvPr id="45" name="Text 43"/>
           <p:cNvSpPr txBox="1"/>
           <p:nvPr/>
         </p:nvSpPr>
@@ -15918,7 +16113,7 @@
       </p:sp>
       <p:sp>
         <p:nvSpPr>
-          <p:cNvPr id="45" name="Shape 43"/>
+          <p:cNvPr id="46" name="Shape 44"/>
           <p:cNvSpPr/>
           <p:nvPr/>
         </p:nvSpPr>
@@ -15952,7 +16147,7 @@
       </p:sp>
       <p:sp>
         <p:nvSpPr>
-          <p:cNvPr id="46" name="Text 44"/>
+          <p:cNvPr id="47" name="Text 45"/>
           <p:cNvSpPr txBox="1"/>
           <p:nvPr/>
         </p:nvSpPr>
@@ -15991,7 +16186,7 @@
       </p:sp>
       <p:sp>
         <p:nvSpPr>
-          <p:cNvPr id="47" name="Text 45"/>
+          <p:cNvPr id="48" name="Text 46"/>
           <p:cNvSpPr txBox="1"/>
           <p:nvPr/>
         </p:nvSpPr>
@@ -16033,7 +16228,7 @@
       </p:sp>
       <p:sp>
         <p:nvSpPr>
-          <p:cNvPr id="48" name="Text 46"/>
+          <p:cNvPr id="49" name="Text 47"/>
           <p:cNvSpPr txBox="1"/>
           <p:nvPr/>
         </p:nvSpPr>
@@ -16075,7 +16270,7 @@
       </p:sp>
       <p:sp>
         <p:nvSpPr>
-          <p:cNvPr id="49" name="Shape 47"/>
+          <p:cNvPr id="50" name="Shape 48"/>
           <p:cNvSpPr/>
           <p:nvPr/>
         </p:nvSpPr>
@@ -16098,7 +16293,7 @@
       </p:sp>
       <p:sp>
         <p:nvSpPr>
-          <p:cNvPr id="50" name="Text 48"/>
+          <p:cNvPr id="51" name="Text 49"/>
           <p:cNvSpPr txBox="1"/>
           <p:nvPr/>
         </p:nvSpPr>
@@ -16137,7 +16332,7 @@
       </p:sp>
       <p:sp>
         <p:nvSpPr>
-          <p:cNvPr id="51" name="Text 49"/>
+          <p:cNvPr id="52" name="Text 50"/>
           <p:cNvSpPr txBox="1"/>
           <p:nvPr/>
         </p:nvSpPr>
@@ -16176,7 +16371,7 @@
       </p:sp>
       <p:sp>
         <p:nvSpPr>
-          <p:cNvPr id="52" name="Shape 50"/>
+          <p:cNvPr id="53" name="Shape 51"/>
           <p:cNvSpPr/>
           <p:nvPr/>
         </p:nvSpPr>
@@ -16210,7 +16405,7 @@
       </p:sp>
       <p:sp>
         <p:nvSpPr>
-          <p:cNvPr id="53" name="Text 51"/>
+          <p:cNvPr id="54" name="Text 52"/>
           <p:cNvSpPr txBox="1"/>
           <p:nvPr/>
         </p:nvSpPr>
@@ -16249,7 +16444,7 @@
       </p:sp>
       <p:sp>
         <p:nvSpPr>
-          <p:cNvPr id="54" name="Text 52"/>
+          <p:cNvPr id="55" name="Text 53"/>
           <p:cNvSpPr txBox="1"/>
           <p:nvPr/>
         </p:nvSpPr>
@@ -16291,7 +16486,7 @@
       </p:sp>
       <p:sp>
         <p:nvSpPr>
-          <p:cNvPr id="55" name="Text 53"/>
+          <p:cNvPr id="56" name="Text 54"/>
           <p:cNvSpPr txBox="1"/>
           <p:nvPr/>
         </p:nvSpPr>
@@ -16333,7 +16528,7 @@
       </p:sp>
       <p:sp>
         <p:nvSpPr>
-          <p:cNvPr id="56" name="Shape 54"/>
+          <p:cNvPr id="57" name="Shape 55"/>
           <p:cNvSpPr/>
           <p:nvPr/>
         </p:nvSpPr>
@@ -16356,7 +16551,7 @@
       </p:sp>
       <p:sp>
         <p:nvSpPr>
-          <p:cNvPr id="57" name="Text 55"/>
+          <p:cNvPr id="58" name="Text 56"/>
           <p:cNvSpPr txBox="1"/>
           <p:nvPr/>
         </p:nvSpPr>
@@ -16395,7 +16590,7 @@
       </p:sp>
       <p:sp>
         <p:nvSpPr>
-          <p:cNvPr id="58" name="Text 56"/>
+          <p:cNvPr id="59" name="Text 57"/>
           <p:cNvSpPr txBox="1"/>
           <p:nvPr/>
         </p:nvSpPr>
@@ -16434,7 +16629,7 @@
       </p:sp>
       <p:sp>
         <p:nvSpPr>
-          <p:cNvPr id="59" name="Shape 57"/>
+          <p:cNvPr id="60" name="Shape 58"/>
           <p:cNvSpPr/>
           <p:nvPr/>
         </p:nvSpPr>
@@ -16468,7 +16663,7 @@
       </p:sp>
       <p:sp>
         <p:nvSpPr>
-          <p:cNvPr id="60" name="Text 58"/>
+          <p:cNvPr id="61" name="Text 59"/>
           <p:cNvSpPr txBox="1"/>
           <p:nvPr/>
         </p:nvSpPr>
@@ -16507,7 +16702,7 @@
       </p:sp>
       <p:sp>
         <p:nvSpPr>
-          <p:cNvPr id="61" name="Shape 59"/>
+          <p:cNvPr id="62" name="Shape 60"/>
           <p:cNvSpPr/>
           <p:nvPr/>
         </p:nvSpPr>
@@ -16534,7 +16729,7 @@
       </p:sp>
       <p:sp>
         <p:nvSpPr>
-          <p:cNvPr id="62" name="Text 60"/>
+          <p:cNvPr id="63" name="Text 61"/>
           <p:cNvSpPr txBox="1"/>
           <p:nvPr/>
         </p:nvSpPr>
@@ -16573,7 +16768,7 @@
       </p:sp>
       <p:sp>
         <p:nvSpPr>
-          <p:cNvPr id="63" name="Text 61"/>
+          <p:cNvPr id="64" name="Text 62"/>
           <p:cNvSpPr txBox="1"/>
           <p:nvPr/>
         </p:nvSpPr>
@@ -16615,7 +16810,7 @@
       </p:sp>
       <p:sp>
         <p:nvSpPr>
-          <p:cNvPr id="64" name="Text 62"/>
+          <p:cNvPr id="65" name="Text 63"/>
           <p:cNvSpPr txBox="1"/>
           <p:nvPr/>
         </p:nvSpPr>
@@ -16657,7 +16852,7 @@
       </p:sp>
       <p:sp>
         <p:nvSpPr>
-          <p:cNvPr id="65" name="Shape 63"/>
+          <p:cNvPr id="66" name="Shape 64"/>
           <p:cNvSpPr/>
           <p:nvPr/>
         </p:nvSpPr>
@@ -16680,7 +16875,7 @@
       </p:sp>
       <p:sp>
         <p:nvSpPr>
-          <p:cNvPr id="66" name="Text 64"/>
+          <p:cNvPr id="67" name="Text 65"/>
           <p:cNvSpPr txBox="1"/>
           <p:nvPr/>
         </p:nvSpPr>
@@ -16719,7 +16914,7 @@
       </p:sp>
       <p:sp>
         <p:nvSpPr>
-          <p:cNvPr id="67" name="Text 65"/>
+          <p:cNvPr id="68" name="Text 66"/>
           <p:cNvSpPr txBox="1"/>
           <p:nvPr/>
         </p:nvSpPr>
@@ -16758,7 +16953,7 @@
       </p:sp>
       <p:sp>
         <p:nvSpPr>
-          <p:cNvPr id="68" name="Shape 66"/>
+          <p:cNvPr id="69" name="Shape 67"/>
           <p:cNvSpPr/>
           <p:nvPr/>
         </p:nvSpPr>
@@ -16792,7 +16987,7 @@
       </p:sp>
       <p:sp>
         <p:nvSpPr>
-          <p:cNvPr id="69" name="Text 67"/>
+          <p:cNvPr id="70" name="Text 68"/>
           <p:cNvSpPr txBox="1"/>
           <p:nvPr/>
         </p:nvSpPr>
@@ -16831,7 +17026,7 @@
       </p:sp>
       <p:sp>
         <p:nvSpPr>
-          <p:cNvPr id="70" name="Text 68"/>
+          <p:cNvPr id="71" name="Text 69"/>
           <p:cNvSpPr txBox="1"/>
           <p:nvPr/>
         </p:nvSpPr>
@@ -16873,7 +17068,7 @@
       </p:sp>
       <p:sp>
         <p:nvSpPr>
-          <p:cNvPr id="71" name="Text 69"/>
+          <p:cNvPr id="72" name="Text 70"/>
           <p:cNvSpPr txBox="1"/>
           <p:nvPr/>
         </p:nvSpPr>
@@ -16915,7 +17110,7 @@
       </p:sp>
       <p:sp>
         <p:nvSpPr>
-          <p:cNvPr id="72" name="Shape 70"/>
+          <p:cNvPr id="73" name="Shape 71"/>
           <p:cNvSpPr/>
           <p:nvPr/>
         </p:nvSpPr>
@@ -16938,7 +17133,7 @@
       </p:sp>
       <p:sp>
         <p:nvSpPr>
-          <p:cNvPr id="73" name="Text 71"/>
+          <p:cNvPr id="74" name="Text 72"/>
           <p:cNvSpPr txBox="1"/>
           <p:nvPr/>
         </p:nvSpPr>
@@ -16977,7 +17172,7 @@
       </p:sp>
       <p:sp>
         <p:nvSpPr>
-          <p:cNvPr id="74" name="Text 72"/>
+          <p:cNvPr id="75" name="Text 73"/>
           <p:cNvSpPr txBox="1"/>
           <p:nvPr/>
         </p:nvSpPr>
@@ -17055,7 +17250,46 @@
       </p:grpSpPr>
       <p:sp>
         <p:nvSpPr>
-          <p:cNvPr id="2" name="Shape 0"/>
+          <p:cNvPr id="2" name="Text 0"/>
+          <p:cNvSpPr txBox="1"/>
+          <p:nvPr/>
+        </p:nvSpPr>
+        <p:spPr>
+          <a:xfrm>
+            <a:off x="8808415" y="6547104"/>
+            <a:ext cx="3108960" cy="219456"/>
+          </a:xfrm>
+          <a:prstGeom prst="rect">
+            <a:avLst/>
+          </a:prstGeom>
+          <a:noFill/>
+          <a:ln/>
+        </p:spPr>
+        <p:txBody>
+          <a:bodyPr wrap="square" lIns="0" tIns="0" rIns="0" bIns="0" rtlCol="0" anchor="ctr"/>
+          <a:lstStyle/>
+          <a:p>
+            <a:pPr algn="r" indent="0" marL="0">
+              <a:buNone/>
+            </a:pPr>
+            <a:r>
+              <a:rPr lang="en-US" sz="750" spc="60" kern="0" dirty="0">
+                <a:solidFill>
+                  <a:srgbClr val="9AA6B2"/>
+                </a:solidFill>
+                <a:latin typeface="Courier New" pitchFamily="34" charset="0"/>
+                <a:ea typeface="Courier New" pitchFamily="34" charset="-122"/>
+                <a:cs typeface="Courier New" pitchFamily="34" charset="-120"/>
+              </a:rPr>
+              <a:t>BACKGROUND 06 — DOT MATRIX</a:t>
+            </a:r>
+            <a:endParaRPr lang="en-US" sz="750" dirty="0"/>
+          </a:p>
+        </p:txBody>
+      </p:sp>
+      <p:sp>
+        <p:nvSpPr>
+          <p:cNvPr id="3" name="Shape 1"/>
           <p:cNvSpPr/>
           <p:nvPr/>
         </p:nvSpPr>
@@ -17080,7 +17314,7 @@
       </p:sp>
       <p:sp>
         <p:nvSpPr>
-          <p:cNvPr id="3" name="Shape 1"/>
+          <p:cNvPr id="4" name="Shape 2"/>
           <p:cNvSpPr/>
           <p:nvPr/>
         </p:nvSpPr>
@@ -17103,7 +17337,7 @@
       </p:sp>
       <p:sp>
         <p:nvSpPr>
-          <p:cNvPr id="4" name="Shape 2"/>
+          <p:cNvPr id="5" name="Shape 3"/>
           <p:cNvSpPr/>
           <p:nvPr/>
         </p:nvSpPr>
@@ -17126,7 +17360,7 @@
       </p:sp>
       <p:sp>
         <p:nvSpPr>
-          <p:cNvPr id="5" name="Shape 3"/>
+          <p:cNvPr id="6" name="Shape 4"/>
           <p:cNvSpPr/>
           <p:nvPr/>
         </p:nvSpPr>
@@ -17149,7 +17383,7 @@
       </p:sp>
       <p:sp>
         <p:nvSpPr>
-          <p:cNvPr id="6" name="Text 4"/>
+          <p:cNvPr id="7" name="Text 5"/>
           <p:cNvSpPr txBox="1"/>
           <p:nvPr/>
         </p:nvSpPr>
@@ -17188,7 +17422,7 @@
       </p:sp>
       <p:sp>
         <p:nvSpPr>
-          <p:cNvPr id="7" name="Text 5"/>
+          <p:cNvPr id="8" name="Text 6"/>
           <p:cNvSpPr txBox="1"/>
           <p:nvPr/>
         </p:nvSpPr>
@@ -17227,7 +17461,7 @@
       </p:sp>
       <p:sp>
         <p:nvSpPr>
-          <p:cNvPr id="8" name="Shape 6"/>
+          <p:cNvPr id="9" name="Shape 7"/>
           <p:cNvSpPr/>
           <p:nvPr/>
         </p:nvSpPr>
@@ -17254,7 +17488,7 @@
       </p:sp>
       <p:sp>
         <p:nvSpPr>
-          <p:cNvPr id="9" name="Text 7"/>
+          <p:cNvPr id="10" name="Text 8"/>
           <p:cNvSpPr txBox="1"/>
           <p:nvPr/>
         </p:nvSpPr>
@@ -17293,7 +17527,7 @@
       </p:sp>
       <p:sp>
         <p:nvSpPr>
-          <p:cNvPr id="10" name="Text 8"/>
+          <p:cNvPr id="11" name="Text 9"/>
           <p:cNvSpPr txBox="1"/>
           <p:nvPr/>
         </p:nvSpPr>
@@ -17332,7 +17566,7 @@
       </p:sp>
       <p:sp>
         <p:nvSpPr>
-          <p:cNvPr id="11" name="Text 9"/>
+          <p:cNvPr id="12" name="Text 10"/>
           <p:cNvSpPr txBox="1"/>
           <p:nvPr/>
         </p:nvSpPr>
@@ -17371,7 +17605,7 @@
       </p:sp>
       <p:sp>
         <p:nvSpPr>
-          <p:cNvPr id="12" name="Text 10"/>
+          <p:cNvPr id="13" name="Text 11"/>
           <p:cNvSpPr txBox="1"/>
           <p:nvPr/>
         </p:nvSpPr>
@@ -17410,7 +17644,7 @@
       </p:sp>
       <p:sp>
         <p:nvSpPr>
-          <p:cNvPr id="13" name="Shape 11"/>
+          <p:cNvPr id="14" name="Shape 12"/>
           <p:cNvSpPr/>
           <p:nvPr/>
         </p:nvSpPr>
@@ -17435,7 +17669,7 @@
       </p:sp>
       <p:sp>
         <p:nvSpPr>
-          <p:cNvPr id="14" name="Text 12"/>
+          <p:cNvPr id="15" name="Text 13"/>
           <p:cNvSpPr txBox="1"/>
           <p:nvPr/>
         </p:nvSpPr>
@@ -17474,7 +17708,7 @@
       </p:sp>
       <p:sp>
         <p:nvSpPr>
-          <p:cNvPr id="15" name="Text 13"/>
+          <p:cNvPr id="16" name="Text 14"/>
           <p:cNvSpPr txBox="1"/>
           <p:nvPr/>
         </p:nvSpPr>
@@ -17513,7 +17747,7 @@
       </p:sp>
       <p:sp>
         <p:nvSpPr>
-          <p:cNvPr id="16" name="Text 14"/>
+          <p:cNvPr id="17" name="Text 15"/>
           <p:cNvSpPr txBox="1"/>
           <p:nvPr/>
         </p:nvSpPr>
@@ -17552,7 +17786,7 @@
       </p:sp>
       <p:sp>
         <p:nvSpPr>
-          <p:cNvPr id="17" name="Text 15"/>
+          <p:cNvPr id="18" name="Text 16"/>
           <p:cNvSpPr txBox="1"/>
           <p:nvPr/>
         </p:nvSpPr>
@@ -17591,7 +17825,7 @@
       </p:sp>
       <p:sp>
         <p:nvSpPr>
-          <p:cNvPr id="18" name="Text 16"/>
+          <p:cNvPr id="19" name="Text 17"/>
           <p:cNvSpPr txBox="1"/>
           <p:nvPr/>
         </p:nvSpPr>
@@ -17630,7 +17864,7 @@
       </p:sp>
       <p:sp>
         <p:nvSpPr>
-          <p:cNvPr id="19" name="Text 17"/>
+          <p:cNvPr id="20" name="Text 18"/>
           <p:cNvSpPr txBox="1"/>
           <p:nvPr/>
         </p:nvSpPr>
@@ -17669,7 +17903,7 @@
       </p:sp>
       <p:sp>
         <p:nvSpPr>
-          <p:cNvPr id="20" name="Shape 18"/>
+          <p:cNvPr id="21" name="Shape 19"/>
           <p:cNvSpPr/>
           <p:nvPr/>
         </p:nvSpPr>
@@ -17689,7 +17923,7 @@
       </p:sp>
       <p:sp>
         <p:nvSpPr>
-          <p:cNvPr id="21" name="Shape 19"/>
+          <p:cNvPr id="22" name="Shape 20"/>
           <p:cNvSpPr/>
           <p:nvPr/>
         </p:nvSpPr>
@@ -17709,7 +17943,7 @@
       </p:sp>
       <p:sp>
         <p:nvSpPr>
-          <p:cNvPr id="22" name="Text 20"/>
+          <p:cNvPr id="23" name="Text 21"/>
           <p:cNvSpPr txBox="1"/>
           <p:nvPr/>
         </p:nvSpPr>
@@ -17748,7 +17982,7 @@
       </p:sp>
       <p:sp>
         <p:nvSpPr>
-          <p:cNvPr id="23" name="Text 21"/>
+          <p:cNvPr id="24" name="Text 22"/>
           <p:cNvSpPr txBox="1"/>
           <p:nvPr/>
         </p:nvSpPr>
@@ -17787,7 +18021,7 @@
       </p:sp>
       <p:sp>
         <p:nvSpPr>
-          <p:cNvPr id="24" name="Text 22"/>
+          <p:cNvPr id="25" name="Text 23"/>
           <p:cNvSpPr txBox="1"/>
           <p:nvPr/>
         </p:nvSpPr>
@@ -17826,7 +18060,7 @@
       </p:sp>
       <p:sp>
         <p:nvSpPr>
-          <p:cNvPr id="25" name="Text 23"/>
+          <p:cNvPr id="26" name="Text 24"/>
           <p:cNvSpPr txBox="1"/>
           <p:nvPr/>
         </p:nvSpPr>
@@ -17865,7 +18099,7 @@
       </p:sp>
       <p:sp>
         <p:nvSpPr>
-          <p:cNvPr id="26" name="Text 24"/>
+          <p:cNvPr id="27" name="Text 25"/>
           <p:cNvSpPr txBox="1"/>
           <p:nvPr/>
         </p:nvSpPr>
@@ -17904,7 +18138,7 @@
       </p:sp>
       <p:sp>
         <p:nvSpPr>
-          <p:cNvPr id="27" name="Text 25"/>
+          <p:cNvPr id="28" name="Text 26"/>
           <p:cNvSpPr txBox="1"/>
           <p:nvPr/>
         </p:nvSpPr>
@@ -17943,7 +18177,7 @@
       </p:sp>
       <p:sp>
         <p:nvSpPr>
-          <p:cNvPr id="28" name="Shape 26"/>
+          <p:cNvPr id="29" name="Shape 27"/>
           <p:cNvSpPr/>
           <p:nvPr/>
         </p:nvSpPr>
@@ -17966,7 +18200,7 @@
       </p:sp>
       <p:sp>
         <p:nvSpPr>
-          <p:cNvPr id="29" name="Shape 27"/>
+          <p:cNvPr id="30" name="Shape 28"/>
           <p:cNvSpPr/>
           <p:nvPr/>
         </p:nvSpPr>
@@ -18000,7 +18234,7 @@
       </p:sp>
       <p:sp>
         <p:nvSpPr>
-          <p:cNvPr id="30" name="Text 28"/>
+          <p:cNvPr id="31" name="Text 29"/>
           <p:cNvSpPr txBox="1"/>
           <p:nvPr/>
         </p:nvSpPr>
@@ -18039,7 +18273,7 @@
       </p:sp>
       <p:sp>
         <p:nvSpPr>
-          <p:cNvPr id="31" name="Shape 29"/>
+          <p:cNvPr id="32" name="Shape 30"/>
           <p:cNvSpPr/>
           <p:nvPr/>
         </p:nvSpPr>
@@ -18066,7 +18300,7 @@
       </p:sp>
       <p:sp>
         <p:nvSpPr>
-          <p:cNvPr id="32" name="Text 30"/>
+          <p:cNvPr id="33" name="Text 31"/>
           <p:cNvSpPr txBox="1"/>
           <p:nvPr/>
         </p:nvSpPr>
@@ -18105,7 +18339,7 @@
       </p:sp>
       <p:sp>
         <p:nvSpPr>
-          <p:cNvPr id="33" name="Text 31"/>
+          <p:cNvPr id="34" name="Text 32"/>
           <p:cNvSpPr txBox="1"/>
           <p:nvPr/>
         </p:nvSpPr>
@@ -18147,7 +18381,7 @@
       </p:sp>
       <p:sp>
         <p:nvSpPr>
-          <p:cNvPr id="34" name="Text 32"/>
+          <p:cNvPr id="35" name="Text 33"/>
           <p:cNvSpPr txBox="1"/>
           <p:nvPr/>
         </p:nvSpPr>
@@ -18189,7 +18423,7 @@
       </p:sp>
       <p:sp>
         <p:nvSpPr>
-          <p:cNvPr id="35" name="Shape 33"/>
+          <p:cNvPr id="36" name="Shape 34"/>
           <p:cNvSpPr/>
           <p:nvPr/>
         </p:nvSpPr>
@@ -18212,7 +18446,7 @@
       </p:sp>
       <p:sp>
         <p:nvSpPr>
-          <p:cNvPr id="36" name="Text 34"/>
+          <p:cNvPr id="37" name="Text 35"/>
           <p:cNvSpPr txBox="1"/>
           <p:nvPr/>
         </p:nvSpPr>
@@ -18251,7 +18485,7 @@
       </p:sp>
       <p:sp>
         <p:nvSpPr>
-          <p:cNvPr id="37" name="Text 35"/>
+          <p:cNvPr id="38" name="Text 36"/>
           <p:cNvSpPr txBox="1"/>
           <p:nvPr/>
         </p:nvSpPr>
@@ -18290,7 +18524,7 @@
       </p:sp>
       <p:sp>
         <p:nvSpPr>
-          <p:cNvPr id="38" name="Shape 36"/>
+          <p:cNvPr id="39" name="Shape 37"/>
           <p:cNvSpPr/>
           <p:nvPr/>
         </p:nvSpPr>
@@ -18324,7 +18558,7 @@
       </p:sp>
       <p:sp>
         <p:nvSpPr>
-          <p:cNvPr id="39" name="Text 37"/>
+          <p:cNvPr id="40" name="Text 38"/>
           <p:cNvSpPr txBox="1"/>
           <p:nvPr/>
         </p:nvSpPr>
@@ -18363,7 +18597,7 @@
       </p:sp>
       <p:sp>
         <p:nvSpPr>
-          <p:cNvPr id="40" name="Shape 38"/>
+          <p:cNvPr id="41" name="Shape 39"/>
           <p:cNvSpPr/>
           <p:nvPr/>
         </p:nvSpPr>
@@ -18390,7 +18624,7 @@
       </p:sp>
       <p:sp>
         <p:nvSpPr>
-          <p:cNvPr id="41" name="Text 39"/>
+          <p:cNvPr id="42" name="Text 40"/>
           <p:cNvSpPr txBox="1"/>
           <p:nvPr/>
         </p:nvSpPr>
@@ -18429,7 +18663,7 @@
       </p:sp>
       <p:sp>
         <p:nvSpPr>
-          <p:cNvPr id="42" name="Text 40"/>
+          <p:cNvPr id="43" name="Text 41"/>
           <p:cNvSpPr txBox="1"/>
           <p:nvPr/>
         </p:nvSpPr>
@@ -18471,7 +18705,7 @@
       </p:sp>
       <p:sp>
         <p:nvSpPr>
-          <p:cNvPr id="43" name="Text 41"/>
+          <p:cNvPr id="44" name="Text 42"/>
           <p:cNvSpPr txBox="1"/>
           <p:nvPr/>
         </p:nvSpPr>
@@ -18513,7 +18747,7 @@
       </p:sp>
       <p:sp>
         <p:nvSpPr>
-          <p:cNvPr id="44" name="Shape 42"/>
+          <p:cNvPr id="45" name="Shape 43"/>
           <p:cNvSpPr/>
           <p:nvPr/>
         </p:nvSpPr>
@@ -18536,7 +18770,7 @@
       </p:sp>
       <p:sp>
         <p:nvSpPr>
-          <p:cNvPr id="45" name="Text 43"/>
+          <p:cNvPr id="46" name="Text 44"/>
           <p:cNvSpPr txBox="1"/>
           <p:nvPr/>
         </p:nvSpPr>
@@ -18575,7 +18809,7 @@
       </p:sp>
       <p:sp>
         <p:nvSpPr>
-          <p:cNvPr id="46" name="Text 44"/>
+          <p:cNvPr id="47" name="Text 45"/>
           <p:cNvSpPr txBox="1"/>
           <p:nvPr/>
         </p:nvSpPr>
@@ -18614,7 +18848,7 @@
       </p:sp>
       <p:sp>
         <p:nvSpPr>
-          <p:cNvPr id="47" name="Shape 45"/>
+          <p:cNvPr id="48" name="Shape 46"/>
           <p:cNvSpPr/>
           <p:nvPr/>
         </p:nvSpPr>
@@ -18648,7 +18882,7 @@
       </p:sp>
       <p:sp>
         <p:nvSpPr>
-          <p:cNvPr id="48" name="Text 46"/>
+          <p:cNvPr id="49" name="Text 47"/>
           <p:cNvSpPr txBox="1"/>
           <p:nvPr/>
         </p:nvSpPr>
@@ -18687,7 +18921,7 @@
       </p:sp>
       <p:sp>
         <p:nvSpPr>
-          <p:cNvPr id="49" name="Text 47"/>
+          <p:cNvPr id="50" name="Text 48"/>
           <p:cNvSpPr txBox="1"/>
           <p:nvPr/>
         </p:nvSpPr>
@@ -18729,7 +18963,7 @@
       </p:sp>
       <p:sp>
         <p:nvSpPr>
-          <p:cNvPr id="50" name="Text 48"/>
+          <p:cNvPr id="51" name="Text 49"/>
           <p:cNvSpPr txBox="1"/>
           <p:nvPr/>
         </p:nvSpPr>
@@ -18771,7 +19005,7 @@
       </p:sp>
       <p:sp>
         <p:nvSpPr>
-          <p:cNvPr id="51" name="Shape 49"/>
+          <p:cNvPr id="52" name="Shape 50"/>
           <p:cNvSpPr/>
           <p:nvPr/>
         </p:nvSpPr>
@@ -18794,7 +19028,7 @@
       </p:sp>
       <p:sp>
         <p:nvSpPr>
-          <p:cNvPr id="52" name="Text 50"/>
+          <p:cNvPr id="53" name="Text 51"/>
           <p:cNvSpPr txBox="1"/>
           <p:nvPr/>
         </p:nvSpPr>
@@ -18833,7 +19067,7 @@
       </p:sp>
       <p:sp>
         <p:nvSpPr>
-          <p:cNvPr id="53" name="Text 51"/>
+          <p:cNvPr id="54" name="Text 52"/>
           <p:cNvSpPr txBox="1"/>
           <p:nvPr/>
         </p:nvSpPr>
@@ -18872,7 +19106,7 @@
       </p:sp>
       <p:sp>
         <p:nvSpPr>
-          <p:cNvPr id="54" name="Shape 52"/>
+          <p:cNvPr id="55" name="Shape 53"/>
           <p:cNvSpPr/>
           <p:nvPr/>
         </p:nvSpPr>
@@ -18906,7 +19140,7 @@
       </p:sp>
       <p:sp>
         <p:nvSpPr>
-          <p:cNvPr id="55" name="Text 53"/>
+          <p:cNvPr id="56" name="Text 54"/>
           <p:cNvSpPr txBox="1"/>
           <p:nvPr/>
         </p:nvSpPr>
@@ -18945,7 +19179,7 @@
       </p:sp>
       <p:sp>
         <p:nvSpPr>
-          <p:cNvPr id="56" name="Text 54"/>
+          <p:cNvPr id="57" name="Text 55"/>
           <p:cNvSpPr txBox="1"/>
           <p:nvPr/>
         </p:nvSpPr>
@@ -18987,7 +19221,7 @@
       </p:sp>
       <p:sp>
         <p:nvSpPr>
-          <p:cNvPr id="57" name="Text 55"/>
+          <p:cNvPr id="58" name="Text 56"/>
           <p:cNvSpPr txBox="1"/>
           <p:nvPr/>
         </p:nvSpPr>
@@ -19029,7 +19263,7 @@
       </p:sp>
       <p:sp>
         <p:nvSpPr>
-          <p:cNvPr id="58" name="Shape 56"/>
+          <p:cNvPr id="59" name="Shape 57"/>
           <p:cNvSpPr/>
           <p:nvPr/>
         </p:nvSpPr>
@@ -19052,7 +19286,7 @@
       </p:sp>
       <p:sp>
         <p:nvSpPr>
-          <p:cNvPr id="59" name="Text 57"/>
+          <p:cNvPr id="60" name="Text 58"/>
           <p:cNvSpPr txBox="1"/>
           <p:nvPr/>
         </p:nvSpPr>
@@ -19091,7 +19325,7 @@
       </p:sp>
       <p:sp>
         <p:nvSpPr>
-          <p:cNvPr id="60" name="Text 58"/>
+          <p:cNvPr id="61" name="Text 59"/>
           <p:cNvSpPr txBox="1"/>
           <p:nvPr/>
         </p:nvSpPr>
@@ -19130,7 +19364,7 @@
       </p:sp>
       <p:sp>
         <p:nvSpPr>
-          <p:cNvPr id="61" name="Shape 59"/>
+          <p:cNvPr id="62" name="Shape 60"/>
           <p:cNvSpPr/>
           <p:nvPr/>
         </p:nvSpPr>
@@ -19164,7 +19398,7 @@
       </p:sp>
       <p:sp>
         <p:nvSpPr>
-          <p:cNvPr id="62" name="Text 60"/>
+          <p:cNvPr id="63" name="Text 61"/>
           <p:cNvSpPr txBox="1"/>
           <p:nvPr/>
         </p:nvSpPr>
@@ -19203,7 +19437,7 @@
       </p:sp>
       <p:sp>
         <p:nvSpPr>
-          <p:cNvPr id="63" name="Shape 61"/>
+          <p:cNvPr id="64" name="Shape 62"/>
           <p:cNvSpPr/>
           <p:nvPr/>
         </p:nvSpPr>
@@ -19230,7 +19464,7 @@
       </p:sp>
       <p:sp>
         <p:nvSpPr>
-          <p:cNvPr id="64" name="Text 62"/>
+          <p:cNvPr id="65" name="Text 63"/>
           <p:cNvSpPr txBox="1"/>
           <p:nvPr/>
         </p:nvSpPr>
@@ -19269,7 +19503,7 @@
       </p:sp>
       <p:sp>
         <p:nvSpPr>
-          <p:cNvPr id="65" name="Text 63"/>
+          <p:cNvPr id="66" name="Text 64"/>
           <p:cNvSpPr txBox="1"/>
           <p:nvPr/>
         </p:nvSpPr>
@@ -19311,7 +19545,7 @@
       </p:sp>
       <p:sp>
         <p:nvSpPr>
-          <p:cNvPr id="66" name="Text 64"/>
+          <p:cNvPr id="67" name="Text 65"/>
           <p:cNvSpPr txBox="1"/>
           <p:nvPr/>
         </p:nvSpPr>
@@ -19353,7 +19587,7 @@
       </p:sp>
       <p:sp>
         <p:nvSpPr>
-          <p:cNvPr id="67" name="Shape 65"/>
+          <p:cNvPr id="68" name="Shape 66"/>
           <p:cNvSpPr/>
           <p:nvPr/>
         </p:nvSpPr>
@@ -19376,7 +19610,7 @@
       </p:sp>
       <p:sp>
         <p:nvSpPr>
-          <p:cNvPr id="68" name="Text 66"/>
+          <p:cNvPr id="69" name="Text 67"/>
           <p:cNvSpPr txBox="1"/>
           <p:nvPr/>
         </p:nvSpPr>
@@ -19415,7 +19649,7 @@
       </p:sp>
       <p:sp>
         <p:nvSpPr>
-          <p:cNvPr id="69" name="Text 67"/>
+          <p:cNvPr id="70" name="Text 68"/>
           <p:cNvSpPr txBox="1"/>
           <p:nvPr/>
         </p:nvSpPr>
@@ -19493,7 +19727,46 @@
       </p:grpSpPr>
       <p:sp>
         <p:nvSpPr>
-          <p:cNvPr id="2" name="Shape 0"/>
+          <p:cNvPr id="2" name="Text 0"/>
+          <p:cNvSpPr txBox="1"/>
+          <p:nvPr/>
+        </p:nvSpPr>
+        <p:spPr>
+          <a:xfrm>
+            <a:off x="8808415" y="6547104"/>
+            <a:ext cx="3108960" cy="219456"/>
+          </a:xfrm>
+          <a:prstGeom prst="rect">
+            <a:avLst/>
+          </a:prstGeom>
+          <a:noFill/>
+          <a:ln/>
+        </p:spPr>
+        <p:txBody>
+          <a:bodyPr wrap="square" lIns="0" tIns="0" rIns="0" bIns="0" rtlCol="0" anchor="ctr"/>
+          <a:lstStyle/>
+          <a:p>
+            <a:pPr algn="r" indent="0" marL="0">
+              <a:buNone/>
+            </a:pPr>
+            <a:r>
+              <a:rPr lang="en-US" sz="750" spc="60" kern="0" dirty="0">
+                <a:solidFill>
+                  <a:srgbClr val="9AA6B2"/>
+                </a:solidFill>
+                <a:latin typeface="Courier New" pitchFamily="34" charset="0"/>
+                <a:ea typeface="Courier New" pitchFamily="34" charset="-122"/>
+                <a:cs typeface="Courier New" pitchFamily="34" charset="-120"/>
+              </a:rPr>
+              <a:t>BACKGROUND 07 — SIDE FADE</a:t>
+            </a:r>
+            <a:endParaRPr lang="en-US" sz="750" dirty="0"/>
+          </a:p>
+        </p:txBody>
+      </p:sp>
+      <p:sp>
+        <p:nvSpPr>
+          <p:cNvPr id="3" name="Shape 1"/>
           <p:cNvSpPr/>
           <p:nvPr/>
         </p:nvSpPr>
@@ -19518,7 +19791,7 @@
       </p:sp>
       <p:sp>
         <p:nvSpPr>
-          <p:cNvPr id="3" name="Shape 1"/>
+          <p:cNvPr id="4" name="Shape 2"/>
           <p:cNvSpPr/>
           <p:nvPr/>
         </p:nvSpPr>
@@ -19541,7 +19814,7 @@
       </p:sp>
       <p:sp>
         <p:nvSpPr>
-          <p:cNvPr id="4" name="Shape 2"/>
+          <p:cNvPr id="5" name="Shape 3"/>
           <p:cNvSpPr/>
           <p:nvPr/>
         </p:nvSpPr>
@@ -19564,7 +19837,7 @@
       </p:sp>
       <p:sp>
         <p:nvSpPr>
-          <p:cNvPr id="5" name="Shape 3"/>
+          <p:cNvPr id="6" name="Shape 4"/>
           <p:cNvSpPr/>
           <p:nvPr/>
         </p:nvSpPr>
@@ -19587,7 +19860,7 @@
       </p:sp>
       <p:sp>
         <p:nvSpPr>
-          <p:cNvPr id="6" name="Text 4"/>
+          <p:cNvPr id="7" name="Text 5"/>
           <p:cNvSpPr txBox="1"/>
           <p:nvPr/>
         </p:nvSpPr>
@@ -19626,7 +19899,7 @@
       </p:sp>
       <p:sp>
         <p:nvSpPr>
-          <p:cNvPr id="7" name="Text 5"/>
+          <p:cNvPr id="8" name="Text 6"/>
           <p:cNvSpPr txBox="1"/>
           <p:nvPr/>
         </p:nvSpPr>
@@ -19665,7 +19938,7 @@
       </p:sp>
       <p:sp>
         <p:nvSpPr>
-          <p:cNvPr id="8" name="Shape 6"/>
+          <p:cNvPr id="9" name="Shape 7"/>
           <p:cNvSpPr/>
           <p:nvPr/>
         </p:nvSpPr>
@@ -19692,7 +19965,7 @@
       </p:sp>
       <p:sp>
         <p:nvSpPr>
-          <p:cNvPr id="9" name="Text 7"/>
+          <p:cNvPr id="10" name="Text 8"/>
           <p:cNvSpPr txBox="1"/>
           <p:nvPr/>
         </p:nvSpPr>
@@ -19731,7 +20004,7 @@
       </p:sp>
       <p:sp>
         <p:nvSpPr>
-          <p:cNvPr id="10" name="Text 8"/>
+          <p:cNvPr id="11" name="Text 9"/>
           <p:cNvSpPr txBox="1"/>
           <p:nvPr/>
         </p:nvSpPr>
@@ -19770,7 +20043,7 @@
       </p:sp>
       <p:sp>
         <p:nvSpPr>
-          <p:cNvPr id="11" name="Text 9"/>
+          <p:cNvPr id="12" name="Text 10"/>
           <p:cNvSpPr txBox="1"/>
           <p:nvPr/>
         </p:nvSpPr>
@@ -19809,7 +20082,7 @@
       </p:sp>
       <p:sp>
         <p:nvSpPr>
-          <p:cNvPr id="12" name="Text 10"/>
+          <p:cNvPr id="13" name="Text 11"/>
           <p:cNvSpPr txBox="1"/>
           <p:nvPr/>
         </p:nvSpPr>
@@ -19848,7 +20121,7 @@
       </p:sp>
       <p:sp>
         <p:nvSpPr>
-          <p:cNvPr id="13" name="Shape 11"/>
+          <p:cNvPr id="14" name="Shape 12"/>
           <p:cNvSpPr/>
           <p:nvPr/>
         </p:nvSpPr>
@@ -19873,7 +20146,7 @@
       </p:sp>
       <p:sp>
         <p:nvSpPr>
-          <p:cNvPr id="14" name="Text 12"/>
+          <p:cNvPr id="15" name="Text 13"/>
           <p:cNvSpPr txBox="1"/>
           <p:nvPr/>
         </p:nvSpPr>
@@ -19912,7 +20185,7 @@
       </p:sp>
       <p:sp>
         <p:nvSpPr>
-          <p:cNvPr id="15" name="Text 13"/>
+          <p:cNvPr id="16" name="Text 14"/>
           <p:cNvSpPr txBox="1"/>
           <p:nvPr/>
         </p:nvSpPr>
@@ -19951,7 +20224,7 @@
       </p:sp>
       <p:sp>
         <p:nvSpPr>
-          <p:cNvPr id="16" name="Text 14"/>
+          <p:cNvPr id="17" name="Text 15"/>
           <p:cNvSpPr txBox="1"/>
           <p:nvPr/>
         </p:nvSpPr>
@@ -19990,7 +20263,7 @@
       </p:sp>
       <p:sp>
         <p:nvSpPr>
-          <p:cNvPr id="17" name="Text 15"/>
+          <p:cNvPr id="18" name="Text 16"/>
           <p:cNvSpPr txBox="1"/>
           <p:nvPr/>
         </p:nvSpPr>
@@ -20029,7 +20302,7 @@
       </p:sp>
       <p:sp>
         <p:nvSpPr>
-          <p:cNvPr id="18" name="Text 16"/>
+          <p:cNvPr id="19" name="Text 17"/>
           <p:cNvSpPr txBox="1"/>
           <p:nvPr/>
         </p:nvSpPr>
@@ -20068,7 +20341,7 @@
       </p:sp>
       <p:sp>
         <p:nvSpPr>
-          <p:cNvPr id="19" name="Text 17"/>
+          <p:cNvPr id="20" name="Text 18"/>
           <p:cNvSpPr txBox="1"/>
           <p:nvPr/>
         </p:nvSpPr>
@@ -20107,7 +20380,7 @@
       </p:sp>
       <p:sp>
         <p:nvSpPr>
-          <p:cNvPr id="20" name="Text 18"/>
+          <p:cNvPr id="21" name="Text 19"/>
           <p:cNvSpPr txBox="1"/>
           <p:nvPr/>
         </p:nvSpPr>
@@ -20146,7 +20419,7 @@
       </p:sp>
       <p:sp>
         <p:nvSpPr>
-          <p:cNvPr id="21" name="Shape 19"/>
+          <p:cNvPr id="22" name="Shape 20"/>
           <p:cNvSpPr/>
           <p:nvPr/>
         </p:nvSpPr>
@@ -20166,7 +20439,7 @@
       </p:sp>
       <p:sp>
         <p:nvSpPr>
-          <p:cNvPr id="22" name="Shape 20"/>
+          <p:cNvPr id="23" name="Shape 21"/>
           <p:cNvSpPr/>
           <p:nvPr/>
         </p:nvSpPr>
@@ -20186,7 +20459,7 @@
       </p:sp>
       <p:sp>
         <p:nvSpPr>
-          <p:cNvPr id="23" name="Text 21"/>
+          <p:cNvPr id="24" name="Text 22"/>
           <p:cNvSpPr txBox="1"/>
           <p:nvPr/>
         </p:nvSpPr>
@@ -20225,7 +20498,7 @@
       </p:sp>
       <p:sp>
         <p:nvSpPr>
-          <p:cNvPr id="24" name="Text 22"/>
+          <p:cNvPr id="25" name="Text 23"/>
           <p:cNvSpPr txBox="1"/>
           <p:nvPr/>
         </p:nvSpPr>
@@ -20264,7 +20537,7 @@
       </p:sp>
       <p:sp>
         <p:nvSpPr>
-          <p:cNvPr id="25" name="Text 23"/>
+          <p:cNvPr id="26" name="Text 24"/>
           <p:cNvSpPr txBox="1"/>
           <p:nvPr/>
         </p:nvSpPr>
@@ -20303,7 +20576,7 @@
       </p:sp>
       <p:sp>
         <p:nvSpPr>
-          <p:cNvPr id="26" name="Text 24"/>
+          <p:cNvPr id="27" name="Text 25"/>
           <p:cNvSpPr txBox="1"/>
           <p:nvPr/>
         </p:nvSpPr>
@@ -20342,7 +20615,7 @@
       </p:sp>
       <p:sp>
         <p:nvSpPr>
-          <p:cNvPr id="27" name="Text 25"/>
+          <p:cNvPr id="28" name="Text 26"/>
           <p:cNvSpPr txBox="1"/>
           <p:nvPr/>
         </p:nvSpPr>
@@ -20381,7 +20654,7 @@
       </p:sp>
       <p:sp>
         <p:nvSpPr>
-          <p:cNvPr id="28" name="Shape 26"/>
+          <p:cNvPr id="29" name="Shape 27"/>
           <p:cNvSpPr/>
           <p:nvPr/>
         </p:nvSpPr>
@@ -20404,7 +20677,7 @@
       </p:sp>
       <p:sp>
         <p:nvSpPr>
-          <p:cNvPr id="29" name="Shape 27"/>
+          <p:cNvPr id="30" name="Shape 28"/>
           <p:cNvSpPr/>
           <p:nvPr/>
         </p:nvSpPr>
@@ -20438,7 +20711,7 @@
       </p:sp>
       <p:sp>
         <p:nvSpPr>
-          <p:cNvPr id="30" name="Text 28"/>
+          <p:cNvPr id="31" name="Text 29"/>
           <p:cNvSpPr txBox="1"/>
           <p:nvPr/>
         </p:nvSpPr>
@@ -20477,7 +20750,7 @@
       </p:sp>
       <p:sp>
         <p:nvSpPr>
-          <p:cNvPr id="31" name="Shape 29"/>
+          <p:cNvPr id="32" name="Shape 30"/>
           <p:cNvSpPr/>
           <p:nvPr/>
         </p:nvSpPr>
@@ -20504,7 +20777,7 @@
       </p:sp>
       <p:sp>
         <p:nvSpPr>
-          <p:cNvPr id="32" name="Text 30"/>
+          <p:cNvPr id="33" name="Text 31"/>
           <p:cNvSpPr txBox="1"/>
           <p:nvPr/>
         </p:nvSpPr>
@@ -20543,7 +20816,7 @@
       </p:sp>
       <p:sp>
         <p:nvSpPr>
-          <p:cNvPr id="33" name="Text 31"/>
+          <p:cNvPr id="34" name="Text 32"/>
           <p:cNvSpPr txBox="1"/>
           <p:nvPr/>
         </p:nvSpPr>
@@ -20585,7 +20858,7 @@
       </p:sp>
       <p:sp>
         <p:nvSpPr>
-          <p:cNvPr id="34" name="Text 32"/>
+          <p:cNvPr id="35" name="Text 33"/>
           <p:cNvSpPr txBox="1"/>
           <p:nvPr/>
         </p:nvSpPr>
@@ -20627,7 +20900,7 @@
       </p:sp>
       <p:sp>
         <p:nvSpPr>
-          <p:cNvPr id="35" name="Shape 33"/>
+          <p:cNvPr id="36" name="Shape 34"/>
           <p:cNvSpPr/>
           <p:nvPr/>
         </p:nvSpPr>
@@ -20650,7 +20923,7 @@
       </p:sp>
       <p:sp>
         <p:nvSpPr>
-          <p:cNvPr id="36" name="Text 34"/>
+          <p:cNvPr id="37" name="Text 35"/>
           <p:cNvSpPr txBox="1"/>
           <p:nvPr/>
         </p:nvSpPr>
@@ -20689,7 +20962,7 @@
       </p:sp>
       <p:sp>
         <p:nvSpPr>
-          <p:cNvPr id="37" name="Text 35"/>
+          <p:cNvPr id="38" name="Text 36"/>
           <p:cNvSpPr txBox="1"/>
           <p:nvPr/>
         </p:nvSpPr>
@@ -20728,7 +21001,7 @@
       </p:sp>
       <p:sp>
         <p:nvSpPr>
-          <p:cNvPr id="38" name="Shape 36"/>
+          <p:cNvPr id="39" name="Shape 37"/>
           <p:cNvSpPr/>
           <p:nvPr/>
         </p:nvSpPr>
@@ -20762,7 +21035,7 @@
       </p:sp>
       <p:sp>
         <p:nvSpPr>
-          <p:cNvPr id="39" name="Text 37"/>
+          <p:cNvPr id="40" name="Text 38"/>
           <p:cNvSpPr txBox="1"/>
           <p:nvPr/>
         </p:nvSpPr>
@@ -20801,7 +21074,7 @@
       </p:sp>
       <p:sp>
         <p:nvSpPr>
-          <p:cNvPr id="40" name="Shape 38"/>
+          <p:cNvPr id="41" name="Shape 39"/>
           <p:cNvSpPr/>
           <p:nvPr/>
         </p:nvSpPr>
@@ -20828,7 +21101,7 @@
       </p:sp>
       <p:sp>
         <p:nvSpPr>
-          <p:cNvPr id="41" name="Text 39"/>
+          <p:cNvPr id="42" name="Text 40"/>
           <p:cNvSpPr txBox="1"/>
           <p:nvPr/>
         </p:nvSpPr>
@@ -20867,7 +21140,7 @@
       </p:sp>
       <p:sp>
         <p:nvSpPr>
-          <p:cNvPr id="42" name="Text 40"/>
+          <p:cNvPr id="43" name="Text 41"/>
           <p:cNvSpPr txBox="1"/>
           <p:nvPr/>
         </p:nvSpPr>
@@ -20909,7 +21182,7 @@
       </p:sp>
       <p:sp>
         <p:nvSpPr>
-          <p:cNvPr id="43" name="Text 41"/>
+          <p:cNvPr id="44" name="Text 42"/>
           <p:cNvSpPr txBox="1"/>
           <p:nvPr/>
         </p:nvSpPr>
@@ -20951,7 +21224,7 @@
       </p:sp>
       <p:sp>
         <p:nvSpPr>
-          <p:cNvPr id="44" name="Shape 42"/>
+          <p:cNvPr id="45" name="Shape 43"/>
           <p:cNvSpPr/>
           <p:nvPr/>
         </p:nvSpPr>
@@ -20974,7 +21247,7 @@
       </p:sp>
       <p:sp>
         <p:nvSpPr>
-          <p:cNvPr id="45" name="Text 43"/>
+          <p:cNvPr id="46" name="Text 44"/>
           <p:cNvSpPr txBox="1"/>
           <p:nvPr/>
         </p:nvSpPr>
@@ -21013,7 +21286,7 @@
       </p:sp>
       <p:sp>
         <p:nvSpPr>
-          <p:cNvPr id="46" name="Text 44"/>
+          <p:cNvPr id="47" name="Text 45"/>
           <p:cNvSpPr txBox="1"/>
           <p:nvPr/>
         </p:nvSpPr>
@@ -21052,7 +21325,7 @@
       </p:sp>
       <p:sp>
         <p:nvSpPr>
-          <p:cNvPr id="47" name="Shape 45"/>
+          <p:cNvPr id="48" name="Shape 46"/>
           <p:cNvSpPr/>
           <p:nvPr/>
         </p:nvSpPr>
@@ -21086,7 +21359,7 @@
       </p:sp>
       <p:sp>
         <p:nvSpPr>
-          <p:cNvPr id="48" name="Text 46"/>
+          <p:cNvPr id="49" name="Text 47"/>
           <p:cNvSpPr txBox="1"/>
           <p:nvPr/>
         </p:nvSpPr>
@@ -21125,7 +21398,7 @@
       </p:sp>
       <p:sp>
         <p:nvSpPr>
-          <p:cNvPr id="49" name="Text 47"/>
+          <p:cNvPr id="50" name="Text 48"/>
           <p:cNvSpPr txBox="1"/>
           <p:nvPr/>
         </p:nvSpPr>
@@ -21167,7 +21440,7 @@
       </p:sp>
       <p:sp>
         <p:nvSpPr>
-          <p:cNvPr id="50" name="Text 48"/>
+          <p:cNvPr id="51" name="Text 49"/>
           <p:cNvSpPr txBox="1"/>
           <p:nvPr/>
         </p:nvSpPr>
@@ -21209,7 +21482,7 @@
       </p:sp>
       <p:sp>
         <p:nvSpPr>
-          <p:cNvPr id="51" name="Shape 49"/>
+          <p:cNvPr id="52" name="Shape 50"/>
           <p:cNvSpPr/>
           <p:nvPr/>
         </p:nvSpPr>
@@ -21232,7 +21505,7 @@
       </p:sp>
       <p:sp>
         <p:nvSpPr>
-          <p:cNvPr id="52" name="Text 50"/>
+          <p:cNvPr id="53" name="Text 51"/>
           <p:cNvSpPr txBox="1"/>
           <p:nvPr/>
         </p:nvSpPr>
@@ -21271,7 +21544,7 @@
       </p:sp>
       <p:sp>
         <p:nvSpPr>
-          <p:cNvPr id="53" name="Text 51"/>
+          <p:cNvPr id="54" name="Text 52"/>
           <p:cNvSpPr txBox="1"/>
           <p:nvPr/>
         </p:nvSpPr>
@@ -21310,7 +21583,7 @@
       </p:sp>
       <p:sp>
         <p:nvSpPr>
-          <p:cNvPr id="54" name="Shape 52"/>
+          <p:cNvPr id="55" name="Shape 53"/>
           <p:cNvSpPr/>
           <p:nvPr/>
         </p:nvSpPr>
@@ -21344,7 +21617,7 @@
       </p:sp>
       <p:sp>
         <p:nvSpPr>
-          <p:cNvPr id="55" name="Text 53"/>
+          <p:cNvPr id="56" name="Text 54"/>
           <p:cNvSpPr txBox="1"/>
           <p:nvPr/>
         </p:nvSpPr>
@@ -21383,7 +21656,7 @@
       </p:sp>
       <p:sp>
         <p:nvSpPr>
-          <p:cNvPr id="56" name="Text 54"/>
+          <p:cNvPr id="57" name="Text 55"/>
           <p:cNvSpPr txBox="1"/>
           <p:nvPr/>
         </p:nvSpPr>
@@ -21425,7 +21698,7 @@
       </p:sp>
       <p:sp>
         <p:nvSpPr>
-          <p:cNvPr id="57" name="Text 55"/>
+          <p:cNvPr id="58" name="Text 56"/>
           <p:cNvSpPr txBox="1"/>
           <p:nvPr/>
         </p:nvSpPr>
@@ -21467,7 +21740,7 @@
       </p:sp>
       <p:sp>
         <p:nvSpPr>
-          <p:cNvPr id="58" name="Shape 56"/>
+          <p:cNvPr id="59" name="Shape 57"/>
           <p:cNvSpPr/>
           <p:nvPr/>
         </p:nvSpPr>
@@ -21490,7 +21763,7 @@
       </p:sp>
       <p:sp>
         <p:nvSpPr>
-          <p:cNvPr id="59" name="Text 57"/>
+          <p:cNvPr id="60" name="Text 58"/>
           <p:cNvSpPr txBox="1"/>
           <p:nvPr/>
         </p:nvSpPr>
@@ -21529,7 +21802,7 @@
       </p:sp>
       <p:sp>
         <p:nvSpPr>
-          <p:cNvPr id="60" name="Text 58"/>
+          <p:cNvPr id="61" name="Text 59"/>
           <p:cNvSpPr txBox="1"/>
           <p:nvPr/>
         </p:nvSpPr>
@@ -21568,7 +21841,7 @@
       </p:sp>
       <p:sp>
         <p:nvSpPr>
-          <p:cNvPr id="61" name="Shape 59"/>
+          <p:cNvPr id="62" name="Shape 60"/>
           <p:cNvSpPr/>
           <p:nvPr/>
         </p:nvSpPr>
@@ -21602,7 +21875,7 @@
       </p:sp>
       <p:sp>
         <p:nvSpPr>
-          <p:cNvPr id="62" name="Text 60"/>
+          <p:cNvPr id="63" name="Text 61"/>
           <p:cNvSpPr txBox="1"/>
           <p:nvPr/>
         </p:nvSpPr>
@@ -21641,7 +21914,7 @@
       </p:sp>
       <p:sp>
         <p:nvSpPr>
-          <p:cNvPr id="63" name="Text 61"/>
+          <p:cNvPr id="64" name="Text 62"/>
           <p:cNvSpPr txBox="1"/>
           <p:nvPr/>
         </p:nvSpPr>
@@ -21683,7 +21956,7 @@
       </p:sp>
       <p:sp>
         <p:nvSpPr>
-          <p:cNvPr id="64" name="Text 62"/>
+          <p:cNvPr id="65" name="Text 63"/>
           <p:cNvSpPr txBox="1"/>
           <p:nvPr/>
         </p:nvSpPr>
@@ -21725,7 +21998,7 @@
       </p:sp>
       <p:sp>
         <p:nvSpPr>
-          <p:cNvPr id="65" name="Shape 63"/>
+          <p:cNvPr id="66" name="Shape 64"/>
           <p:cNvSpPr/>
           <p:nvPr/>
         </p:nvSpPr>
@@ -21748,7 +22021,7 @@
       </p:sp>
       <p:sp>
         <p:nvSpPr>
-          <p:cNvPr id="66" name="Text 64"/>
+          <p:cNvPr id="67" name="Text 65"/>
           <p:cNvSpPr txBox="1"/>
           <p:nvPr/>
         </p:nvSpPr>
@@ -21787,7 +22060,7 @@
       </p:sp>
       <p:sp>
         <p:nvSpPr>
-          <p:cNvPr id="67" name="Text 65"/>
+          <p:cNvPr id="68" name="Text 66"/>
           <p:cNvSpPr txBox="1"/>
           <p:nvPr/>
         </p:nvSpPr>
@@ -21826,7 +22099,7 @@
       </p:sp>
       <p:sp>
         <p:nvSpPr>
-          <p:cNvPr id="68" name="Shape 66"/>
+          <p:cNvPr id="69" name="Shape 67"/>
           <p:cNvSpPr/>
           <p:nvPr/>
         </p:nvSpPr>
@@ -21860,7 +22133,7 @@
       </p:sp>
       <p:sp>
         <p:nvSpPr>
-          <p:cNvPr id="69" name="Text 67"/>
+          <p:cNvPr id="70" name="Text 68"/>
           <p:cNvSpPr txBox="1"/>
           <p:nvPr/>
         </p:nvSpPr>
@@ -21899,7 +22172,7 @@
       </p:sp>
       <p:sp>
         <p:nvSpPr>
-          <p:cNvPr id="70" name="Text 68"/>
+          <p:cNvPr id="71" name="Text 69"/>
           <p:cNvSpPr txBox="1"/>
           <p:nvPr/>
         </p:nvSpPr>
@@ -21941,7 +22214,7 @@
       </p:sp>
       <p:sp>
         <p:nvSpPr>
-          <p:cNvPr id="71" name="Text 69"/>
+          <p:cNvPr id="72" name="Text 70"/>
           <p:cNvSpPr txBox="1"/>
           <p:nvPr/>
         </p:nvSpPr>
@@ -21983,7 +22256,7 @@
       </p:sp>
       <p:sp>
         <p:nvSpPr>
-          <p:cNvPr id="72" name="Shape 70"/>
+          <p:cNvPr id="73" name="Shape 71"/>
           <p:cNvSpPr/>
           <p:nvPr/>
         </p:nvSpPr>
@@ -22006,7 +22279,7 @@
       </p:sp>
       <p:sp>
         <p:nvSpPr>
-          <p:cNvPr id="73" name="Text 71"/>
+          <p:cNvPr id="74" name="Text 72"/>
           <p:cNvSpPr txBox="1"/>
           <p:nvPr/>
         </p:nvSpPr>
@@ -22045,7 +22318,7 @@
       </p:sp>
       <p:sp>
         <p:nvSpPr>
-          <p:cNvPr id="74" name="Text 72"/>
+          <p:cNvPr id="75" name="Text 73"/>
           <p:cNvSpPr txBox="1"/>
           <p:nvPr/>
         </p:nvSpPr>
@@ -22123,7 +22396,46 @@
       </p:grpSpPr>
       <p:sp>
         <p:nvSpPr>
-          <p:cNvPr id="2" name="Shape 0"/>
+          <p:cNvPr id="2" name="Text 0"/>
+          <p:cNvSpPr txBox="1"/>
+          <p:nvPr/>
+        </p:nvSpPr>
+        <p:spPr>
+          <a:xfrm>
+            <a:off x="8808415" y="6547104"/>
+            <a:ext cx="3108960" cy="219456"/>
+          </a:xfrm>
+          <a:prstGeom prst="rect">
+            <a:avLst/>
+          </a:prstGeom>
+          <a:noFill/>
+          <a:ln/>
+        </p:spPr>
+        <p:txBody>
+          <a:bodyPr wrap="square" lIns="0" tIns="0" rIns="0" bIns="0" rtlCol="0" anchor="ctr"/>
+          <a:lstStyle/>
+          <a:p>
+            <a:pPr algn="r" indent="0" marL="0">
+              <a:buNone/>
+            </a:pPr>
+            <a:r>
+              <a:rPr lang="en-US" sz="750" spc="60" kern="0" dirty="0">
+                <a:solidFill>
+                  <a:srgbClr val="9AA6B2"/>
+                </a:solidFill>
+                <a:latin typeface="Courier New" pitchFamily="34" charset="0"/>
+                <a:ea typeface="Courier New" pitchFamily="34" charset="-122"/>
+                <a:cs typeface="Courier New" pitchFamily="34" charset="-120"/>
+              </a:rPr>
+              <a:t>BACKGROUND 08 — CONTOUR LINES</a:t>
+            </a:r>
+            <a:endParaRPr lang="en-US" sz="750" dirty="0"/>
+          </a:p>
+        </p:txBody>
+      </p:sp>
+      <p:sp>
+        <p:nvSpPr>
+          <p:cNvPr id="3" name="Shape 1"/>
           <p:cNvSpPr/>
           <p:nvPr/>
         </p:nvSpPr>
@@ -22148,7 +22460,7 @@
       </p:sp>
       <p:sp>
         <p:nvSpPr>
-          <p:cNvPr id="3" name="Shape 1"/>
+          <p:cNvPr id="4" name="Shape 2"/>
           <p:cNvSpPr/>
           <p:nvPr/>
         </p:nvSpPr>
@@ -22171,7 +22483,7 @@
       </p:sp>
       <p:sp>
         <p:nvSpPr>
-          <p:cNvPr id="4" name="Shape 2"/>
+          <p:cNvPr id="5" name="Shape 3"/>
           <p:cNvSpPr/>
           <p:nvPr/>
         </p:nvSpPr>
@@ -22194,7 +22506,7 @@
       </p:sp>
       <p:sp>
         <p:nvSpPr>
-          <p:cNvPr id="5" name="Shape 3"/>
+          <p:cNvPr id="6" name="Shape 4"/>
           <p:cNvSpPr/>
           <p:nvPr/>
         </p:nvSpPr>
@@ -22217,7 +22529,7 @@
       </p:sp>
       <p:sp>
         <p:nvSpPr>
-          <p:cNvPr id="6" name="Text 4"/>
+          <p:cNvPr id="7" name="Text 5"/>
           <p:cNvSpPr txBox="1"/>
           <p:nvPr/>
         </p:nvSpPr>
@@ -22256,7 +22568,7 @@
       </p:sp>
       <p:sp>
         <p:nvSpPr>
-          <p:cNvPr id="7" name="Text 5"/>
+          <p:cNvPr id="8" name="Text 6"/>
           <p:cNvSpPr txBox="1"/>
           <p:nvPr/>
         </p:nvSpPr>
@@ -22295,7 +22607,7 @@
       </p:sp>
       <p:sp>
         <p:nvSpPr>
-          <p:cNvPr id="8" name="Shape 6"/>
+          <p:cNvPr id="9" name="Shape 7"/>
           <p:cNvSpPr/>
           <p:nvPr/>
         </p:nvSpPr>
@@ -22322,7 +22634,7 @@
       </p:sp>
       <p:sp>
         <p:nvSpPr>
-          <p:cNvPr id="9" name="Text 7"/>
+          <p:cNvPr id="10" name="Text 8"/>
           <p:cNvSpPr txBox="1"/>
           <p:nvPr/>
         </p:nvSpPr>
@@ -22361,7 +22673,7 @@
       </p:sp>
       <p:sp>
         <p:nvSpPr>
-          <p:cNvPr id="10" name="Text 8"/>
+          <p:cNvPr id="11" name="Text 9"/>
           <p:cNvSpPr txBox="1"/>
           <p:nvPr/>
         </p:nvSpPr>
@@ -22400,7 +22712,7 @@
       </p:sp>
       <p:sp>
         <p:nvSpPr>
-          <p:cNvPr id="11" name="Text 9"/>
+          <p:cNvPr id="12" name="Text 10"/>
           <p:cNvSpPr txBox="1"/>
           <p:nvPr/>
         </p:nvSpPr>
@@ -22439,7 +22751,7 @@
       </p:sp>
       <p:sp>
         <p:nvSpPr>
-          <p:cNvPr id="12" name="Text 10"/>
+          <p:cNvPr id="13" name="Text 11"/>
           <p:cNvSpPr txBox="1"/>
           <p:nvPr/>
         </p:nvSpPr>
@@ -22478,7 +22790,7 @@
       </p:sp>
       <p:sp>
         <p:nvSpPr>
-          <p:cNvPr id="13" name="Shape 11"/>
+          <p:cNvPr id="14" name="Shape 12"/>
           <p:cNvSpPr/>
           <p:nvPr/>
         </p:nvSpPr>
@@ -22503,7 +22815,7 @@
       </p:sp>
       <p:sp>
         <p:nvSpPr>
-          <p:cNvPr id="14" name="Text 12"/>
+          <p:cNvPr id="15" name="Text 13"/>
           <p:cNvSpPr txBox="1"/>
           <p:nvPr/>
         </p:nvSpPr>
@@ -22542,7 +22854,7 @@
       </p:sp>
       <p:sp>
         <p:nvSpPr>
-          <p:cNvPr id="15" name="Text 13"/>
+          <p:cNvPr id="16" name="Text 14"/>
           <p:cNvSpPr txBox="1"/>
           <p:nvPr/>
         </p:nvSpPr>
@@ -22581,7 +22893,7 @@
       </p:sp>
       <p:sp>
         <p:nvSpPr>
-          <p:cNvPr id="16" name="Text 14"/>
+          <p:cNvPr id="17" name="Text 15"/>
           <p:cNvSpPr txBox="1"/>
           <p:nvPr/>
         </p:nvSpPr>
@@ -22620,7 +22932,7 @@
       </p:sp>
       <p:sp>
         <p:nvSpPr>
-          <p:cNvPr id="17" name="Text 15"/>
+          <p:cNvPr id="18" name="Text 16"/>
           <p:cNvSpPr txBox="1"/>
           <p:nvPr/>
         </p:nvSpPr>
@@ -22659,7 +22971,7 @@
       </p:sp>
       <p:sp>
         <p:nvSpPr>
-          <p:cNvPr id="18" name="Text 16"/>
+          <p:cNvPr id="19" name="Text 17"/>
           <p:cNvSpPr txBox="1"/>
           <p:nvPr/>
         </p:nvSpPr>
@@ -22698,7 +23010,7 @@
       </p:sp>
       <p:sp>
         <p:nvSpPr>
-          <p:cNvPr id="19" name="Text 17"/>
+          <p:cNvPr id="20" name="Text 18"/>
           <p:cNvSpPr txBox="1"/>
           <p:nvPr/>
         </p:nvSpPr>
@@ -22737,7 +23049,7 @@
       </p:sp>
       <p:sp>
         <p:nvSpPr>
-          <p:cNvPr id="20" name="Text 18"/>
+          <p:cNvPr id="21" name="Text 19"/>
           <p:cNvSpPr txBox="1"/>
           <p:nvPr/>
         </p:nvSpPr>
@@ -22776,7 +23088,7 @@
       </p:sp>
       <p:sp>
         <p:nvSpPr>
-          <p:cNvPr id="21" name="Text 19"/>
+          <p:cNvPr id="22" name="Text 20"/>
           <p:cNvSpPr txBox="1"/>
           <p:nvPr/>
         </p:nvSpPr>
@@ -22815,7 +23127,7 @@
       </p:sp>
       <p:sp>
         <p:nvSpPr>
-          <p:cNvPr id="22" name="Shape 20"/>
+          <p:cNvPr id="23" name="Shape 21"/>
           <p:cNvSpPr/>
           <p:nvPr/>
         </p:nvSpPr>
@@ -22835,7 +23147,7 @@
       </p:sp>
       <p:sp>
         <p:nvSpPr>
-          <p:cNvPr id="23" name="Shape 21"/>
+          <p:cNvPr id="24" name="Shape 22"/>
           <p:cNvSpPr/>
           <p:nvPr/>
         </p:nvSpPr>
@@ -22855,7 +23167,7 @@
       </p:sp>
       <p:sp>
         <p:nvSpPr>
-          <p:cNvPr id="24" name="Text 22"/>
+          <p:cNvPr id="25" name="Text 23"/>
           <p:cNvSpPr txBox="1"/>
           <p:nvPr/>
         </p:nvSpPr>
@@ -22894,7 +23206,7 @@
       </p:sp>
       <p:sp>
         <p:nvSpPr>
-          <p:cNvPr id="25" name="Text 23"/>
+          <p:cNvPr id="26" name="Text 24"/>
           <p:cNvSpPr txBox="1"/>
           <p:nvPr/>
         </p:nvSpPr>
@@ -22933,7 +23245,7 @@
       </p:sp>
       <p:sp>
         <p:nvSpPr>
-          <p:cNvPr id="26" name="Text 24"/>
+          <p:cNvPr id="27" name="Text 25"/>
           <p:cNvSpPr txBox="1"/>
           <p:nvPr/>
         </p:nvSpPr>
@@ -22972,7 +23284,7 @@
       </p:sp>
       <p:sp>
         <p:nvSpPr>
-          <p:cNvPr id="27" name="Text 25"/>
+          <p:cNvPr id="28" name="Text 26"/>
           <p:cNvSpPr txBox="1"/>
           <p:nvPr/>
         </p:nvSpPr>
@@ -23011,7 +23323,7 @@
       </p:sp>
       <p:sp>
         <p:nvSpPr>
-          <p:cNvPr id="28" name="Shape 26"/>
+          <p:cNvPr id="29" name="Shape 27"/>
           <p:cNvSpPr/>
           <p:nvPr/>
         </p:nvSpPr>
@@ -23034,7 +23346,7 @@
       </p:sp>
       <p:sp>
         <p:nvSpPr>
-          <p:cNvPr id="29" name="Shape 27"/>
+          <p:cNvPr id="30" name="Shape 28"/>
           <p:cNvSpPr/>
           <p:nvPr/>
         </p:nvSpPr>
@@ -23068,7 +23380,7 @@
       </p:sp>
       <p:sp>
         <p:nvSpPr>
-          <p:cNvPr id="30" name="Text 28"/>
+          <p:cNvPr id="31" name="Text 29"/>
           <p:cNvSpPr txBox="1"/>
           <p:nvPr/>
         </p:nvSpPr>
@@ -23107,7 +23419,7 @@
       </p:sp>
       <p:sp>
         <p:nvSpPr>
-          <p:cNvPr id="31" name="Shape 29"/>
+          <p:cNvPr id="32" name="Shape 30"/>
           <p:cNvSpPr/>
           <p:nvPr/>
         </p:nvSpPr>
@@ -23134,7 +23446,7 @@
       </p:sp>
       <p:sp>
         <p:nvSpPr>
-          <p:cNvPr id="32" name="Text 30"/>
+          <p:cNvPr id="33" name="Text 31"/>
           <p:cNvSpPr txBox="1"/>
           <p:nvPr/>
         </p:nvSpPr>
@@ -23173,7 +23485,7 @@
       </p:sp>
       <p:sp>
         <p:nvSpPr>
-          <p:cNvPr id="33" name="Text 31"/>
+          <p:cNvPr id="34" name="Text 32"/>
           <p:cNvSpPr txBox="1"/>
           <p:nvPr/>
         </p:nvSpPr>
@@ -23215,7 +23527,7 @@
       </p:sp>
       <p:sp>
         <p:nvSpPr>
-          <p:cNvPr id="34" name="Text 32"/>
+          <p:cNvPr id="35" name="Text 33"/>
           <p:cNvSpPr txBox="1"/>
           <p:nvPr/>
         </p:nvSpPr>
@@ -23257,7 +23569,7 @@
       </p:sp>
       <p:sp>
         <p:nvSpPr>
-          <p:cNvPr id="35" name="Shape 33"/>
+          <p:cNvPr id="36" name="Shape 34"/>
           <p:cNvSpPr/>
           <p:nvPr/>
         </p:nvSpPr>
@@ -23280,7 +23592,7 @@
       </p:sp>
       <p:sp>
         <p:nvSpPr>
-          <p:cNvPr id="36" name="Text 34"/>
+          <p:cNvPr id="37" name="Text 35"/>
           <p:cNvSpPr txBox="1"/>
           <p:nvPr/>
         </p:nvSpPr>
@@ -23319,7 +23631,7 @@
       </p:sp>
       <p:sp>
         <p:nvSpPr>
-          <p:cNvPr id="37" name="Text 35"/>
+          <p:cNvPr id="38" name="Text 36"/>
           <p:cNvSpPr txBox="1"/>
           <p:nvPr/>
         </p:nvSpPr>
@@ -23358,7 +23670,7 @@
       </p:sp>
       <p:sp>
         <p:nvSpPr>
-          <p:cNvPr id="38" name="Shape 36"/>
+          <p:cNvPr id="39" name="Shape 37"/>
           <p:cNvSpPr/>
           <p:nvPr/>
         </p:nvSpPr>
@@ -23392,7 +23704,7 @@
       </p:sp>
       <p:sp>
         <p:nvSpPr>
-          <p:cNvPr id="39" name="Text 37"/>
+          <p:cNvPr id="40" name="Text 38"/>
           <p:cNvSpPr txBox="1"/>
           <p:nvPr/>
         </p:nvSpPr>
@@ -23431,7 +23743,7 @@
       </p:sp>
       <p:sp>
         <p:nvSpPr>
-          <p:cNvPr id="40" name="Text 38"/>
+          <p:cNvPr id="41" name="Text 39"/>
           <p:cNvSpPr txBox="1"/>
           <p:nvPr/>
         </p:nvSpPr>
@@ -23473,7 +23785,7 @@
       </p:sp>
       <p:sp>
         <p:nvSpPr>
-          <p:cNvPr id="41" name="Text 39"/>
+          <p:cNvPr id="42" name="Text 40"/>
           <p:cNvSpPr txBox="1"/>
           <p:nvPr/>
         </p:nvSpPr>
@@ -23515,7 +23827,7 @@
       </p:sp>
       <p:sp>
         <p:nvSpPr>
-          <p:cNvPr id="42" name="Shape 40"/>
+          <p:cNvPr id="43" name="Shape 41"/>
           <p:cNvSpPr/>
           <p:nvPr/>
         </p:nvSpPr>
@@ -23538,7 +23850,7 @@
       </p:sp>
       <p:sp>
         <p:nvSpPr>
-          <p:cNvPr id="43" name="Text 41"/>
+          <p:cNvPr id="44" name="Text 42"/>
           <p:cNvSpPr txBox="1"/>
           <p:nvPr/>
         </p:nvSpPr>
@@ -23577,7 +23889,7 @@
       </p:sp>
       <p:sp>
         <p:nvSpPr>
-          <p:cNvPr id="44" name="Text 42"/>
+          <p:cNvPr id="45" name="Text 43"/>
           <p:cNvSpPr txBox="1"/>
           <p:nvPr/>
         </p:nvSpPr>
@@ -23616,7 +23928,7 @@
       </p:sp>
       <p:sp>
         <p:nvSpPr>
-          <p:cNvPr id="45" name="Shape 43"/>
+          <p:cNvPr id="46" name="Shape 44"/>
           <p:cNvSpPr/>
           <p:nvPr/>
         </p:nvSpPr>
@@ -23650,7 +23962,7 @@
       </p:sp>
       <p:sp>
         <p:nvSpPr>
-          <p:cNvPr id="46" name="Text 44"/>
+          <p:cNvPr id="47" name="Text 45"/>
           <p:cNvSpPr txBox="1"/>
           <p:nvPr/>
         </p:nvSpPr>
@@ -23689,7 +24001,7 @@
       </p:sp>
       <p:sp>
         <p:nvSpPr>
-          <p:cNvPr id="47" name="Text 45"/>
+          <p:cNvPr id="48" name="Text 46"/>
           <p:cNvSpPr txBox="1"/>
           <p:nvPr/>
         </p:nvSpPr>
@@ -23731,7 +24043,7 @@
       </p:sp>
       <p:sp>
         <p:nvSpPr>
-          <p:cNvPr id="48" name="Text 46"/>
+          <p:cNvPr id="49" name="Text 47"/>
           <p:cNvSpPr txBox="1"/>
           <p:nvPr/>
         </p:nvSpPr>
@@ -23773,7 +24085,7 @@
       </p:sp>
       <p:sp>
         <p:nvSpPr>
-          <p:cNvPr id="49" name="Shape 47"/>
+          <p:cNvPr id="50" name="Shape 48"/>
           <p:cNvSpPr/>
           <p:nvPr/>
         </p:nvSpPr>
@@ -23796,7 +24108,7 @@
       </p:sp>
       <p:sp>
         <p:nvSpPr>
-          <p:cNvPr id="50" name="Text 48"/>
+          <p:cNvPr id="51" name="Text 49"/>
           <p:cNvSpPr txBox="1"/>
           <p:nvPr/>
         </p:nvSpPr>
@@ -23835,7 +24147,7 @@
       </p:sp>
       <p:sp>
         <p:nvSpPr>
-          <p:cNvPr id="51" name="Text 49"/>
+          <p:cNvPr id="52" name="Text 50"/>
           <p:cNvSpPr txBox="1"/>
           <p:nvPr/>
         </p:nvSpPr>
@@ -23874,7 +24186,7 @@
       </p:sp>
       <p:sp>
         <p:nvSpPr>
-          <p:cNvPr id="52" name="Shape 50"/>
+          <p:cNvPr id="53" name="Shape 51"/>
           <p:cNvSpPr/>
           <p:nvPr/>
         </p:nvSpPr>
@@ -23908,7 +24220,7 @@
       </p:sp>
       <p:sp>
         <p:nvSpPr>
-          <p:cNvPr id="53" name="Text 51"/>
+          <p:cNvPr id="54" name="Text 52"/>
           <p:cNvSpPr txBox="1"/>
           <p:nvPr/>
         </p:nvSpPr>
@@ -23947,7 +24259,7 @@
       </p:sp>
       <p:sp>
         <p:nvSpPr>
-          <p:cNvPr id="54" name="Text 52"/>
+          <p:cNvPr id="55" name="Text 53"/>
           <p:cNvSpPr txBox="1"/>
           <p:nvPr/>
         </p:nvSpPr>
@@ -23989,7 +24301,7 @@
       </p:sp>
       <p:sp>
         <p:nvSpPr>
-          <p:cNvPr id="55" name="Text 53"/>
+          <p:cNvPr id="56" name="Text 54"/>
           <p:cNvSpPr txBox="1"/>
           <p:nvPr/>
         </p:nvSpPr>
@@ -24031,7 +24343,7 @@
       </p:sp>
       <p:sp>
         <p:nvSpPr>
-          <p:cNvPr id="56" name="Shape 54"/>
+          <p:cNvPr id="57" name="Shape 55"/>
           <p:cNvSpPr/>
           <p:nvPr/>
         </p:nvSpPr>
@@ -24054,7 +24366,7 @@
       </p:sp>
       <p:sp>
         <p:nvSpPr>
-          <p:cNvPr id="57" name="Text 55"/>
+          <p:cNvPr id="58" name="Text 56"/>
           <p:cNvSpPr txBox="1"/>
           <p:nvPr/>
         </p:nvSpPr>
@@ -24093,7 +24405,7 @@
       </p:sp>
       <p:sp>
         <p:nvSpPr>
-          <p:cNvPr id="58" name="Text 56"/>
+          <p:cNvPr id="59" name="Text 57"/>
           <p:cNvSpPr txBox="1"/>
           <p:nvPr/>
         </p:nvSpPr>
@@ -24132,7 +24444,7 @@
       </p:sp>
       <p:sp>
         <p:nvSpPr>
-          <p:cNvPr id="59" name="Shape 57"/>
+          <p:cNvPr id="60" name="Shape 58"/>
           <p:cNvSpPr/>
           <p:nvPr/>
         </p:nvSpPr>
@@ -24166,7 +24478,7 @@
       </p:sp>
       <p:sp>
         <p:nvSpPr>
-          <p:cNvPr id="60" name="Text 58"/>
+          <p:cNvPr id="61" name="Text 59"/>
           <p:cNvSpPr txBox="1"/>
           <p:nvPr/>
         </p:nvSpPr>
@@ -24205,7 +24517,7 @@
       </p:sp>
       <p:sp>
         <p:nvSpPr>
-          <p:cNvPr id="61" name="Shape 59"/>
+          <p:cNvPr id="62" name="Shape 60"/>
           <p:cNvSpPr/>
           <p:nvPr/>
         </p:nvSpPr>
@@ -24232,7 +24544,7 @@
       </p:sp>
       <p:sp>
         <p:nvSpPr>
-          <p:cNvPr id="62" name="Text 60"/>
+          <p:cNvPr id="63" name="Text 61"/>
           <p:cNvSpPr txBox="1"/>
           <p:nvPr/>
         </p:nvSpPr>
@@ -24271,7 +24583,7 @@
       </p:sp>
       <p:sp>
         <p:nvSpPr>
-          <p:cNvPr id="63" name="Text 61"/>
+          <p:cNvPr id="64" name="Text 62"/>
           <p:cNvSpPr txBox="1"/>
           <p:nvPr/>
         </p:nvSpPr>
@@ -24313,7 +24625,7 @@
       </p:sp>
       <p:sp>
         <p:nvSpPr>
-          <p:cNvPr id="64" name="Text 62"/>
+          <p:cNvPr id="65" name="Text 63"/>
           <p:cNvSpPr txBox="1"/>
           <p:nvPr/>
         </p:nvSpPr>
@@ -24355,7 +24667,7 @@
       </p:sp>
       <p:sp>
         <p:nvSpPr>
-          <p:cNvPr id="65" name="Shape 63"/>
+          <p:cNvPr id="66" name="Shape 64"/>
           <p:cNvSpPr/>
           <p:nvPr/>
         </p:nvSpPr>
@@ -24378,7 +24690,7 @@
       </p:sp>
       <p:sp>
         <p:nvSpPr>
-          <p:cNvPr id="66" name="Text 64"/>
+          <p:cNvPr id="67" name="Text 65"/>
           <p:cNvSpPr txBox="1"/>
           <p:nvPr/>
         </p:nvSpPr>
@@ -24417,7 +24729,7 @@
       </p:sp>
       <p:sp>
         <p:nvSpPr>
-          <p:cNvPr id="67" name="Text 65"/>
+          <p:cNvPr id="68" name="Text 66"/>
           <p:cNvSpPr txBox="1"/>
           <p:nvPr/>
         </p:nvSpPr>
@@ -24456,7 +24768,7 @@
       </p:sp>
       <p:sp>
         <p:nvSpPr>
-          <p:cNvPr id="68" name="Shape 66"/>
+          <p:cNvPr id="69" name="Shape 67"/>
           <p:cNvSpPr/>
           <p:nvPr/>
         </p:nvSpPr>
@@ -24490,7 +24802,7 @@
       </p:sp>
       <p:sp>
         <p:nvSpPr>
-          <p:cNvPr id="69" name="Text 67"/>
+          <p:cNvPr id="70" name="Text 68"/>
           <p:cNvSpPr txBox="1"/>
           <p:nvPr/>
         </p:nvSpPr>
@@ -24529,7 +24841,7 @@
       </p:sp>
       <p:sp>
         <p:nvSpPr>
-          <p:cNvPr id="70" name="Text 68"/>
+          <p:cNvPr id="71" name="Text 69"/>
           <p:cNvSpPr txBox="1"/>
           <p:nvPr/>
         </p:nvSpPr>
@@ -24571,7 +24883,7 @@
       </p:sp>
       <p:sp>
         <p:nvSpPr>
-          <p:cNvPr id="71" name="Text 69"/>
+          <p:cNvPr id="72" name="Text 70"/>
           <p:cNvSpPr txBox="1"/>
           <p:nvPr/>
         </p:nvSpPr>
@@ -24613,7 +24925,7 @@
       </p:sp>
       <p:sp>
         <p:nvSpPr>
-          <p:cNvPr id="72" name="Shape 70"/>
+          <p:cNvPr id="73" name="Shape 71"/>
           <p:cNvSpPr/>
           <p:nvPr/>
         </p:nvSpPr>
@@ -24636,7 +24948,7 @@
       </p:sp>
       <p:sp>
         <p:nvSpPr>
-          <p:cNvPr id="73" name="Text 71"/>
+          <p:cNvPr id="74" name="Text 72"/>
           <p:cNvSpPr txBox="1"/>
           <p:nvPr/>
         </p:nvSpPr>
@@ -24675,7 +24987,7 @@
       </p:sp>
       <p:sp>
         <p:nvSpPr>
-          <p:cNvPr id="74" name="Text 72"/>
+          <p:cNvPr id="75" name="Text 73"/>
           <p:cNvSpPr txBox="1"/>
           <p:nvPr/>
         </p:nvSpPr>
@@ -24714,7 +25026,7 @@
       </p:sp>
       <p:sp>
         <p:nvSpPr>
-          <p:cNvPr id="75" name="Shape 73"/>
+          <p:cNvPr id="76" name="Shape 74"/>
           <p:cNvSpPr/>
           <p:nvPr/>
         </p:nvSpPr>
@@ -24748,7 +25060,7 @@
       </p:sp>
       <p:sp>
         <p:nvSpPr>
-          <p:cNvPr id="76" name="Text 74"/>
+          <p:cNvPr id="77" name="Text 75"/>
           <p:cNvSpPr txBox="1"/>
           <p:nvPr/>
         </p:nvSpPr>
@@ -24787,7 +25099,7 @@
       </p:sp>
       <p:sp>
         <p:nvSpPr>
-          <p:cNvPr id="77" name="Text 75"/>
+          <p:cNvPr id="78" name="Text 76"/>
           <p:cNvSpPr txBox="1"/>
           <p:nvPr/>
         </p:nvSpPr>
@@ -24829,7 +25141,7 @@
       </p:sp>
       <p:sp>
         <p:nvSpPr>
-          <p:cNvPr id="78" name="Text 76"/>
+          <p:cNvPr id="79" name="Text 77"/>
           <p:cNvSpPr txBox="1"/>
           <p:nvPr/>
         </p:nvSpPr>
@@ -24871,7 +25183,7 @@
       </p:sp>
       <p:sp>
         <p:nvSpPr>
-          <p:cNvPr id="79" name="Shape 77"/>
+          <p:cNvPr id="80" name="Shape 78"/>
           <p:cNvSpPr/>
           <p:nvPr/>
         </p:nvSpPr>
@@ -24894,7 +25206,7 @@
       </p:sp>
       <p:sp>
         <p:nvSpPr>
-          <p:cNvPr id="80" name="Text 78"/>
+          <p:cNvPr id="81" name="Text 79"/>
           <p:cNvSpPr txBox="1"/>
           <p:nvPr/>
         </p:nvSpPr>
@@ -24933,7 +25245,7 @@
       </p:sp>
       <p:sp>
         <p:nvSpPr>
-          <p:cNvPr id="81" name="Text 79"/>
+          <p:cNvPr id="82" name="Text 80"/>
           <p:cNvSpPr txBox="1"/>
           <p:nvPr/>
         </p:nvSpPr>
@@ -24972,7 +25284,7 @@
       </p:sp>
       <p:sp>
         <p:nvSpPr>
-          <p:cNvPr id="82" name="Shape 80"/>
+          <p:cNvPr id="83" name="Shape 81"/>
           <p:cNvSpPr/>
           <p:nvPr/>
         </p:nvSpPr>
@@ -25006,7 +25318,7 @@
       </p:sp>
       <p:sp>
         <p:nvSpPr>
-          <p:cNvPr id="83" name="Text 81"/>
+          <p:cNvPr id="84" name="Text 82"/>
           <p:cNvSpPr txBox="1"/>
           <p:nvPr/>
         </p:nvSpPr>
@@ -25045,7 +25357,7 @@
       </p:sp>
       <p:sp>
         <p:nvSpPr>
-          <p:cNvPr id="84" name="Shape 82"/>
+          <p:cNvPr id="85" name="Shape 83"/>
           <p:cNvSpPr/>
           <p:nvPr/>
         </p:nvSpPr>
@@ -25072,7 +25384,7 @@
       </p:sp>
       <p:sp>
         <p:nvSpPr>
-          <p:cNvPr id="85" name="Text 83"/>
+          <p:cNvPr id="86" name="Text 84"/>
           <p:cNvSpPr txBox="1"/>
           <p:nvPr/>
         </p:nvSpPr>
@@ -25111,7 +25423,7 @@
       </p:sp>
       <p:sp>
         <p:nvSpPr>
-          <p:cNvPr id="86" name="Text 84"/>
+          <p:cNvPr id="87" name="Text 85"/>
           <p:cNvSpPr txBox="1"/>
           <p:nvPr/>
         </p:nvSpPr>
@@ -25153,7 +25465,7 @@
       </p:sp>
       <p:sp>
         <p:nvSpPr>
-          <p:cNvPr id="87" name="Text 85"/>
+          <p:cNvPr id="88" name="Text 86"/>
           <p:cNvSpPr txBox="1"/>
           <p:nvPr/>
         </p:nvSpPr>
@@ -25195,7 +25507,7 @@
       </p:sp>
       <p:sp>
         <p:nvSpPr>
-          <p:cNvPr id="88" name="Shape 86"/>
+          <p:cNvPr id="89" name="Shape 87"/>
           <p:cNvSpPr/>
           <p:nvPr/>
         </p:nvSpPr>
@@ -25218,7 +25530,7 @@
       </p:sp>
       <p:sp>
         <p:nvSpPr>
-          <p:cNvPr id="89" name="Text 87"/>
+          <p:cNvPr id="90" name="Text 88"/>
           <p:cNvSpPr txBox="1"/>
           <p:nvPr/>
         </p:nvSpPr>
@@ -25257,7 +25569,7 @@
       </p:sp>
       <p:sp>
         <p:nvSpPr>
-          <p:cNvPr id="90" name="Text 88"/>
+          <p:cNvPr id="91" name="Text 89"/>
           <p:cNvSpPr txBox="1"/>
           <p:nvPr/>
         </p:nvSpPr>
